--- a/docs/submission/05_final_submission/Akayza_Pitch_TeamPR.pptx
+++ b/docs/submission/05_final_submission/Akayza_Pitch_TeamPR.pptx
@@ -2874,8 +2874,8 @@
           <a:p>
             <a:r>
               <a:rPr lang="en-US" dirty="0"/>
-              <a:t>SAY (20 s): 'The whole township economy is R900 billion. Spaza shops alone spend about R150 billion in cash a year with their suppliers: one segment, already buying every week. Our goal is 20,000 businesses and 200 paying suppliers by year three, about R13 million a year.'
-R150 bn is specifically spaza shops (that's what the evidence measures), so we name them here. Everywhere else: informal and small businesses.</a:t>
+              <a:t>SAY (20 s): 'The whole township economy is R900 billion. Spaza shops alone move about R180 billion a year: one segment, already buying every week. Our goal is 20,000 businesses and 200 paying suppliers by year three, about R13 million a year.'
+R180 bn is specifically spaza shops (that's what the evidence measures), so we name them here. Everywhere else: informal and small businesses.</a:t>
             </a:r>
             <a:endParaRPr lang="en-US" dirty="0"/>
           </a:p>
@@ -19145,7 +19145,7 @@
                 <a:ea typeface="Georgia" pitchFamily="34" charset="-122"/>
                 <a:cs typeface="Georgia" pitchFamily="34" charset="-120"/>
               </a:rPr>
-              <a:t>R150 bn</a:t>
+              <a:t>R180 bn</a:t>
             </a:r>
             <a:endParaRPr lang="en-US" sz="2000" dirty="0"/>
           </a:p>
@@ -19301,7 +19301,7 @@
                 <a:ea typeface="Georgia" pitchFamily="34" charset="-122"/>
                 <a:cs typeface="Georgia" pitchFamily="34" charset="-120"/>
               </a:rPr>
-              <a:t>R150 bn</a:t>
+              <a:t>R180 bn</a:t>
             </a:r>
             <a:endParaRPr lang="en-US" sz="2800" dirty="0"/>
           </a:p>
@@ -19340,7 +19340,7 @@
                 <a:ea typeface="Calibri" pitchFamily="34" charset="-122"/>
                 <a:cs typeface="Calibri" pitchFamily="34" charset="-120"/>
               </a:rPr>
-              <a:t>Spent in cash at about 150,000 spaza shops alone: one segment, already buying from suppliers every week.</a:t>
+              <a:t>Moves through spaza shops alone every year: one segment, already buying from suppliers every week.</a:t>
             </a:r>
             <a:endParaRPr lang="en-US" sz="1600" dirty="0"/>
           </a:p>
@@ -19520,7 +19520,7 @@
                 <a:ea typeface="Calibri" pitchFamily="34" charset="-122"/>
                 <a:cs typeface="Calibri" pitchFamily="34" charset="-120"/>
               </a:rPr>
-              <a:t>Standard Bank 2025 (economy size; ~R150 bn cash spend at spaza shops, reported with the report's launch). Year-3 figures are our estimates.</a:t>
+              <a:t>Standard Bank 2025 (economy size; spaza segment ~R180 bn a year). Year-3 figures are our estimates.</a:t>
             </a:r>
             <a:endParaRPr lang="en-US" sz="950" dirty="0"/>
           </a:p>

--- a/docs/submission/05_final_submission/Akayza_Pitch_TeamPR.pptx
+++ b/docs/submission/05_final_submission/Akayza_Pitch_TeamPR.pptx
@@ -2341,7 +2341,7 @@
           <a:p>
             <a:r>
               <a:rPr lang="en-US" dirty="0"/>
-              <a:t>Post-quantum outline (bonus points for outlining it): 'Records and invoices are meant to prove things for years. Quantum computers will break today's signatures, so we'll sign with ML-DSA, the NIST post-quantum standard.' Say clearly it's planned, not built.</a:t>
+              <a:t>Post-quantum (built): 'Records are meant to prove things for years, and quantum computers will break today's signatures. So the owner can seal their whole record with two signatures: ML-DSA-65, the NIST post-quantum standard, and Ed25519. A check shows exactly which records changed or were deleted, even straight in the database. We keep no copy of the seal, and our public keys are published so anyone can check without us.' Built and tested; invoices and receipts are next.</a:t>
             </a:r>
             <a:endParaRPr lang="en-US" dirty="0"/>
           </a:p>
@@ -14208,7 +14208,7 @@
                 <a:ea typeface="Georgia" pitchFamily="34" charset="-122"/>
                 <a:cs typeface="Georgia" pitchFamily="34" charset="-120"/>
               </a:rPr>
-              <a:t>Post-quantum</a:t>
+              <a:t>Quantum-safe</a:t>
             </a:r>
             <a:endParaRPr lang="en-US" sz="2200" dirty="0"/>
           </a:p>
@@ -14251,7 +14251,7 @@
                 <a:ea typeface="Calibri" pitchFamily="34" charset="-122"/>
                 <a:cs typeface="Calibri" pitchFamily="34" charset="-120"/>
               </a:rPr>
-              <a:t>Sign records and invoices with ML-DSA (NIST FIPS 204)</a:t>
+              <a:t>Built: the owner seals their record with ML-DSA-65 (NIST FIPS 204) plus Ed25519</a:t>
             </a:r>
             <a:endParaRPr lang="en-US" sz="1550" dirty="0"/>
           </a:p>
@@ -14272,7 +14272,7 @@
                 <a:ea typeface="Calibri" pitchFamily="34" charset="-122"/>
                 <a:cs typeface="Calibri" pitchFamily="34" charset="-120"/>
               </a:rPr>
-              <a:t>So a record signed today still proves itself in 20 years</a:t>
+              <a:t>A check shows any record changed or deleted</a:t>
             </a:r>
             <a:endParaRPr lang="en-US" sz="1550" dirty="0"/>
           </a:p>
@@ -14293,7 +14293,7 @@
                 <a:ea typeface="Calibri" pitchFamily="34" charset="-122"/>
                 <a:cs typeface="Calibri" pitchFamily="34" charset="-120"/>
               </a:rPr>
-              <a:t>Planned, not built yet</a:t>
+              <a:t>Next: invoices and receipts too</a:t>
             </a:r>
             <a:endParaRPr lang="en-US" sz="1550" dirty="0"/>
           </a:p>

--- a/docs/submission/05_final_submission/Akayza_Pitch_TeamPR.pptx
+++ b/docs/submission/05_final_submission/Akayza_Pitch_TeamPR.pptx
@@ -25,9 +25,10 @@
     <p:sldId id="273" r:id="rId19"/>
     <p:sldId id="274" r:id="rId20"/>
     <p:sldId id="275" r:id="rId21"/>
+    <p:sldId id="276" r:id="rId22"/>
   </p:sldIdLst>
   <p:notesMasterIdLst>
-    <p:notesMasterId r:id="rId22"/>
+    <p:notesMasterId r:id="rId23"/>
   </p:notesMasterIdLst>
   <p:sldSz cx="12192000" cy="6858000"/>
   <p:notesSz cx="6858000" cy="12192000"/>
@@ -883,6 +884,365 @@
 </c:chartSpace>
 </file>
 
+<file path=ppt/charts/chart3.xml><?xml version="1.0" encoding="utf-8"?>
+<c:chartSpace xmlns:c="http://schemas.openxmlformats.org/drawingml/2006/chart" xmlns:a="http://schemas.openxmlformats.org/drawingml/2006/main" xmlns:r="http://schemas.openxmlformats.org/officeDocument/2006/relationships">
+  <c:date1904 val="0"/>
+  <c:roundedCorners val="1"/>
+  <c:chart>
+    <c:title>
+      <c:tx>
+        <c:rich>
+          <a:bodyPr/>
+          <a:lstStyle/>
+          <a:p>
+            <a:pPr>
+              <a:defRPr sz="1300" b="0" i="0" u="none" strike="noStrike">
+                <a:solidFill>
+                  <a:srgbClr val="F8FAFC"/>
+                </a:solidFill>
+                <a:latin typeface="Calibri"/>
+              </a:defRPr>
+            </a:pPr>
+            <a:r>
+              <a:rPr sz="1300" b="0" i="0" u="none" strike="noStrike">
+                <a:solidFill>
+                  <a:srgbClr val="F8FAFC"/>
+                </a:solidFill>
+                <a:latin typeface="Calibri"/>
+              </a:rPr>
+              <a:t>A month at year end (R thousand, estimate)</a:t>
+            </a:r>
+          </a:p>
+        </c:rich>
+      </c:tx>
+      <c:layout/>
+      <c:overlay val="0"/>
+    </c:title>
+    <c:autoTitleDeleted val="0"/>
+    <c:plotArea>
+      <c:layout/>
+      <c:barChart>
+        <c:barDir val="col"/>
+        <c:grouping val="clustered"/>
+        <c:varyColors val="0"/>
+        <c:ser>
+          <c:idx val="0"/>
+          <c:order val="0"/>
+          <c:tx>
+            <c:strRef>
+              <c:f>Sheet1!$B$1</c:f>
+              <c:strCache>
+                <c:ptCount val="1"/>
+                <c:pt idx="0">
+                  <c:v>Running costs</c:v>
+                </c:pt>
+              </c:strCache>
+            </c:strRef>
+          </c:tx>
+          <c:spPr>
+            <a:solidFill>
+              <a:srgbClr val="F87171"/>
+            </a:solidFill>
+            <a:effectLst/>
+          </c:spPr>
+          <c:invertIfNegative val="0"/>
+          <c:dLbls>
+            <c:numFmt formatCode="#,##0" sourceLinked="0"/>
+            <c:txPr>
+              <a:bodyPr/>
+              <a:lstStyle/>
+              <a:p>
+                <a:pPr>
+                  <a:defRPr b="1" i="0" strike="noStrike" sz="1200" u="none">
+                    <a:solidFill>
+                      <a:srgbClr val="F8FAFC"/>
+                    </a:solidFill>
+                    <a:latin typeface="Arial"/>
+                  </a:defRPr>
+                </a:pPr>
+              </a:p>
+            </c:txPr>
+            <c:showLegendKey val="0"/>
+            <c:showVal val="1"/>
+            <c:showCatName val="0"/>
+            <c:showSerName val="0"/>
+            <c:showPercent val="0"/>
+            <c:showBubbleSize val="0"/>
+            <c:showLeaderLines val="0"/>
+          </c:dLbls>
+          <c:cat>
+            <c:multiLvlStrRef>
+              <c:f>Sheet1!$A$2:$A$4</c:f>
+              <c:multiLvlStrCache>
+                <c:ptCount val="3"/>
+                <c:lvl>
+                  <c:pt idx="0">
+                    <c:v>Year 1</c:v>
+                  </c:pt>
+                  <c:pt idx="1">
+                    <c:v>Year 2</c:v>
+                  </c:pt>
+                  <c:pt idx="2">
+                    <c:v>Year 3</c:v>
+                  </c:pt>
+                </c:lvl>
+              </c:multiLvlStrCache>
+            </c:multiLvlStrRef>
+          </c:cat>
+          <c:val>
+            <c:numRef>
+              <c:f>Sheet1!$B$2:$B$4</c:f>
+              <c:numCache>
+                <c:formatCode>General</c:formatCode>
+                <c:ptCount val="3"/>
+                <c:pt idx="0">
+                  <c:v>75</c:v>
+                </c:pt>
+                <c:pt idx="1">
+                  <c:v>270</c:v>
+                </c:pt>
+                <c:pt idx="2">
+                  <c:v>650</c:v>
+                </c:pt>
+              </c:numCache>
+            </c:numRef>
+          </c:val>
+        </c:ser>
+        <c:ser>
+          <c:idx val="1"/>
+          <c:order val="1"/>
+          <c:tx>
+            <c:strRef>
+              <c:f>Sheet1!$C$1</c:f>
+              <c:strCache>
+                <c:ptCount val="1"/>
+                <c:pt idx="0">
+                  <c:v>Revenue</c:v>
+                </c:pt>
+              </c:strCache>
+            </c:strRef>
+          </c:tx>
+          <c:spPr>
+            <a:solidFill>
+              <a:srgbClr val="10B981"/>
+            </a:solidFill>
+            <a:effectLst/>
+          </c:spPr>
+          <c:invertIfNegative val="0"/>
+          <c:dLbls>
+            <c:numFmt formatCode="#,##0" sourceLinked="0"/>
+            <c:txPr>
+              <a:bodyPr/>
+              <a:lstStyle/>
+              <a:p>
+                <a:pPr>
+                  <a:defRPr b="1" i="0" strike="noStrike" sz="1200" u="none">
+                    <a:solidFill>
+                      <a:srgbClr val="F8FAFC"/>
+                    </a:solidFill>
+                    <a:latin typeface="Arial"/>
+                  </a:defRPr>
+                </a:pPr>
+              </a:p>
+            </c:txPr>
+            <c:showLegendKey val="0"/>
+            <c:showVal val="1"/>
+            <c:showCatName val="0"/>
+            <c:showSerName val="0"/>
+            <c:showPercent val="0"/>
+            <c:showBubbleSize val="0"/>
+            <c:showLeaderLines val="0"/>
+          </c:dLbls>
+          <c:cat>
+            <c:multiLvlStrRef>
+              <c:f>Sheet1!$A$2:$A$4</c:f>
+              <c:multiLvlStrCache>
+                <c:ptCount val="3"/>
+                <c:lvl>
+                  <c:pt idx="0">
+                    <c:v>Year 1</c:v>
+                  </c:pt>
+                  <c:pt idx="1">
+                    <c:v>Year 2</c:v>
+                  </c:pt>
+                  <c:pt idx="2">
+                    <c:v>Year 3</c:v>
+                  </c:pt>
+                </c:lvl>
+              </c:multiLvlStrCache>
+            </c:multiLvlStrRef>
+          </c:cat>
+          <c:val>
+            <c:numRef>
+              <c:f>Sheet1!$C$2:$C$4</c:f>
+              <c:numCache>
+                <c:formatCode>General</c:formatCode>
+                <c:ptCount val="3"/>
+                <c:pt idx="0">
+                  <c:v>56</c:v>
+                </c:pt>
+                <c:pt idx="1">
+                  <c:v>283</c:v>
+                </c:pt>
+                <c:pt idx="2">
+                  <c:v>1100</c:v>
+                </c:pt>
+              </c:numCache>
+            </c:numRef>
+          </c:val>
+        </c:ser>
+        <c:dLbls>
+          <c:numFmt formatCode="#,##0" sourceLinked="0"/>
+          <c:txPr>
+            <a:bodyPr/>
+            <a:lstStyle/>
+            <a:p>
+              <a:pPr>
+                <a:defRPr b="1" i="0" strike="noStrike" sz="1200" u="none">
+                  <a:solidFill>
+                    <a:srgbClr val="F8FAFC"/>
+                  </a:solidFill>
+                  <a:latin typeface="Arial"/>
+                </a:defRPr>
+              </a:pPr>
+            </a:p>
+          </c:txPr>
+          <c:showLegendKey val="0"/>
+          <c:showVal val="1"/>
+          <c:showCatName val="0"/>
+          <c:showSerName val="0"/>
+          <c:showPercent val="0"/>
+          <c:showBubbleSize val="0"/>
+          <c:showLeaderLines val="0"/>
+        </c:dLbls>
+        <c:gapWidth val="60"/>
+        <c:overlap val="0"/>
+        <c:axId val="2094734554"/>
+        <c:axId val="2094734552"/>
+        <c:axId val="2094734556"/>
+      </c:barChart>
+      <c:catAx>
+        <c:axId val="2094734554"/>
+        <c:scaling>
+          <c:orientation val="minMax"/>
+        </c:scaling>
+        <c:delete val="0"/>
+        <c:axPos val="b"/>
+        <c:numFmt formatCode="General" sourceLinked="1"/>
+        <c:majorTickMark val="out"/>
+        <c:minorTickMark val="none"/>
+        <c:tickLblPos val="low"/>
+        <c:spPr>
+          <a:ln w="12700" cap="flat">
+            <a:solidFill>
+              <a:srgbClr val="888888"/>
+            </a:solidFill>
+            <a:prstDash val="solid"/>
+            <a:round/>
+          </a:ln>
+        </c:spPr>
+        <c:txPr>
+          <a:bodyPr/>
+          <a:lstStyle/>
+          <a:p>
+            <a:pPr>
+              <a:defRPr sz="1300" b="0" i="0" u="none" strike="noStrike">
+                <a:solidFill>
+                  <a:srgbClr val="F8FAFC"/>
+                </a:solidFill>
+                <a:latin typeface="Arial"/>
+              </a:defRPr>
+            </a:pPr>
+            <a:endParaRPr lang="en-US"/>
+          </a:p>
+        </c:txPr>
+        <c:crossAx val="2094734552"/>
+        <c:crosses val="autoZero"/>
+        <c:auto val="1"/>
+        <c:lblAlgn val="ctr"/>
+        <c:noMultiLvlLbl val="1"/>
+      </c:catAx>
+      <c:valAx>
+        <c:axId val="2094734552"/>
+        <c:scaling>
+          <c:orientation val="minMax"/>
+        </c:scaling>
+        <c:delete val="1"/>
+        <c:axPos val="l"/>
+        <c:numFmt formatCode="General" sourceLinked="0"/>
+        <c:majorTickMark val="out"/>
+        <c:minorTickMark val="none"/>
+        <c:tickLblPos val="nextTo"/>
+        <c:spPr>
+          <a:ln w="12700" cap="flat">
+            <a:solidFill>
+              <a:srgbClr val="888888"/>
+            </a:solidFill>
+            <a:prstDash val="solid"/>
+            <a:round/>
+          </a:ln>
+        </c:spPr>
+        <c:txPr>
+          <a:bodyPr/>
+          <a:lstStyle/>
+          <a:p>
+            <a:pPr>
+              <a:defRPr sz="1200" b="0" i="0" u="none" strike="noStrike">
+                <a:solidFill>
+                  <a:srgbClr val="000000"/>
+                </a:solidFill>
+                <a:latin typeface="Arial"/>
+              </a:defRPr>
+            </a:pPr>
+            <a:endParaRPr lang="en-US"/>
+          </a:p>
+        </c:txPr>
+        <c:crossAx val="2094734554"/>
+        <c:crosses val="autoZero"/>
+        <c:crossBetween val="between"/>
+      </c:valAx>
+      <c:spPr>
+        <a:noFill/>
+        <a:ln>
+          <a:noFill/>
+        </a:ln>
+        <a:effectLst/>
+      </c:spPr>
+    </c:plotArea>
+    <c:legend>
+      <c:legendPos val="b"/>
+      <c:overlay val="0"/>
+      <c:txPr>
+        <a:bodyPr/>
+        <a:lstStyle/>
+        <a:p>
+          <a:pPr>
+            <a:defRPr sz="1200">
+              <a:solidFill>
+                <a:srgbClr val="F8FAFC"/>
+              </a:solidFill>
+            </a:defRPr>
+          </a:pPr>
+          <a:endParaRPr lang="en-US"/>
+        </a:p>
+      </c:txPr>
+    </c:legend>
+    <c:plotVisOnly val="1"/>
+    <c:dispBlanksAs val="span"/>
+  </c:chart>
+  <c:spPr>
+    <a:noFill/>
+    <a:ln>
+      <a:noFill/>
+    </a:ln>
+    <a:effectLst/>
+  </c:spPr>
+  <c:externalData r:id="rId1">
+    <c:autoUpdate val="0"/>
+  </c:externalData>
+</c:chartSpace>
+</file>
+
 <file path=ppt/notesMasters/notesMaster1.xml><?xml version="1.0" encoding="utf-8"?>
 <p:notesMaster xmlns:a="http://schemas.openxmlformats.org/drawingml/2006/main" xmlns:r="http://schemas.openxmlformats.org/officeDocument/2006/relationships" xmlns:p="http://schemas.openxmlformats.org/presentationml/2006/main">
   <p:cSld>
@@ -1900,7 +2260,10 @@
           <a:p>
             <a:r>
               <a:rPr lang="en-US" dirty="0"/>
-              <a:t>TEAM (10 s): who we are in one line each. Edit the roles to how you want to be introduced; add the DataQuest 2026 win here if you want it.</a:t>
+              <a:t>SAY (20 s): 'To start, R300,000 for the pilot. After the pilot we raise about R1.5 million to hire ahead of revenue. Costs grow with us, but suppliers' fees grow faster: we break even in year two, and by year three we make about R1.1 million a month against R650,000 in costs.'
+IF ASKED for the breakdown (a month at year end, R thousand, estimates): team 40 / 150 / 350 (2, 5, 10 people); field agents 16 / 50 / 120 (2, 6, 15); sales and marketing 10 / 40 / 100; hosting, SMS, email, maps 5 / 15 / 40; security, POPIA, audits 4 / 15 / 40. Totals 75 / 270 / 650.
+Why R1.5m: year 1 runs at a loss of about R20-40k a month while suppliers sign up, plus hiring the year-2 team before their revenue arrives, plus six months of safety.
+Running costs stay low because we don't hold stock, cash or delivery vans: suppliers deliver, the payment provider holds the money.</a:t>
             </a:r>
             <a:endParaRPr lang="en-US" dirty="0"/>
           </a:p>
@@ -1988,7 +2351,7 @@
           <a:p>
             <a:r>
               <a:rPr lang="en-US" dirty="0"/>
-              <a:t>CLOSE (10 s), look at the panel, not the screen: 'R900 billion is moving, and nobody can see it. Akayza makes it visible, and suppliers pay for it. It's built, it works, and R300,000 puts it in real businesses. Are you buying?' Then stop talking.</a:t>
+              <a:t>TEAM (10 s): who we are in one line each. Edit the roles to how you want to be introduced; add the DataQuest 2026 win here if you want it.</a:t>
             </a:r>
             <a:endParaRPr lang="en-US" dirty="0"/>
           </a:p>
@@ -2076,7 +2439,7 @@
           <a:p>
             <a:r>
               <a:rPr lang="en-US" dirty="0"/>
-              <a:t>Only if asked. App -&gt; API -&gt; database; payments, photos, maps and email behind the API. Each feature is its own module, and an automated test stops one reaching into another's data.</a:t>
+              <a:t>CLOSE (10 s), look at the panel, not the screen: 'R900 billion is moving, and nobody can see it. Akayza makes it visible, and suppliers pay for it. It's built, it works, and R300,000 puts it in real businesses. Are you buying?' Then stop talking.</a:t>
             </a:r>
             <a:endParaRPr lang="en-US" dirty="0"/>
           </a:p>
@@ -2164,7 +2527,7 @@
           <a:p>
             <a:r>
               <a:rPr lang="en-US" dirty="0"/>
-              <a:t>Answer to 'won't security make it hard to use?': 'Security is invisible to the owner: email, password, and a code only on a new phone. Everything else happens on our server.'</a:t>
+              <a:t>Only if asked. App -&gt; API -&gt; database; payments, photos, maps and email behind the API. Each feature is its own module, and an automated test stops one reaching into another's data.</a:t>
             </a:r>
             <a:endParaRPr lang="en-US" dirty="0"/>
           </a:p>
@@ -2341,7 +2704,7 @@
           <a:p>
             <a:r>
               <a:rPr lang="en-US" dirty="0"/>
-              <a:t>Post-quantum (built): 'Records are meant to prove things for years, and quantum computers will break today's signatures. So the owner can seal their whole record with two signatures: ML-DSA-65, the NIST post-quantum standard, and Ed25519. A check shows exactly which records changed or were deleted, even straight in the database. We keep no copy of the seal, and our public keys are published so anyone can check without us.' Built and tested; invoices and receipts are next.</a:t>
+              <a:t>Answer to 'won't security make it hard to use?': 'Security is invisible to the owner: email, password, and a code only on a new phone. Everything else happens on our server.'</a:t>
             </a:r>
             <a:endParaRPr lang="en-US" dirty="0"/>
           </a:p>
@@ -2365,6 +2728,94 @@
             <a:fld id="{F7021451-1387-4CA6-816F-3879F97B5CBC}" type="slidenum">
               <a:rPr lang="en-US"/>
               <a:t>20</a:t>
+            </a:fld>
+            <a:endParaRPr lang="en-US"/>
+          </a:p>
+        </p:txBody>
+      </p:sp>
+    </p:spTree>
+    <p:extLst>
+      <p:ext uri="{BB962C8B-B14F-4D97-AF65-F5344CB8AC3E}">
+        <p14:creationId xmlns:p14="http://schemas.microsoft.com/office/powerpoint/2010/main" val="1024086991"/>
+      </p:ext>
+    </p:extLst>
+  </p:cSld>
+  <p:clrMapOvr>
+    <a:masterClrMapping/>
+  </p:clrMapOvr>
+</p:notes>
+</file>
+
+<file path=ppt/notesSlides/notesSlide21.xml><?xml version="1.0" encoding="utf-8"?>
+<p:notes xmlns:a="http://schemas.openxmlformats.org/drawingml/2006/main" xmlns:r="http://schemas.openxmlformats.org/officeDocument/2006/relationships" xmlns:p="http://schemas.openxmlformats.org/presentationml/2006/main">
+  <p:cSld>
+    <p:spTree>
+      <p:nvGrpSpPr>
+        <p:cNvPr id="1" name=""/>
+        <p:cNvGrpSpPr/>
+        <p:nvPr/>
+      </p:nvGrpSpPr>
+      <p:grpSpPr>
+        <a:xfrm>
+          <a:off x="0" y="0"/>
+          <a:ext cx="0" cy="0"/>
+          <a:chOff x="0" y="0"/>
+          <a:chExt cx="0" cy="0"/>
+        </a:xfrm>
+      </p:grpSpPr>
+      <p:sp>
+        <p:nvSpPr>
+          <p:cNvPr id="2" name="Slide Image Placeholder 1"/>
+          <p:cNvSpPr>
+            <a:spLocks noGrp="1" noRot="1" noChangeAspect="1"/>
+          </p:cNvSpPr>
+          <p:nvPr>
+            <p:ph type="sldImg"/>
+          </p:nvPr>
+        </p:nvSpPr>
+        <p:spPr/>
+      </p:sp>
+      <p:sp>
+        <p:nvSpPr>
+          <p:cNvPr id="3" name="Notes Placeholder 2"/>
+          <p:cNvSpPr>
+            <a:spLocks noGrp="1"/>
+          </p:cNvSpPr>
+          <p:nvPr>
+            <p:ph type="body" idx="1"/>
+          </p:nvPr>
+        </p:nvSpPr>
+        <p:spPr/>
+        <p:txBody>
+          <a:bodyPr/>
+          <a:lstStyle/>
+          <a:p>
+            <a:r>
+              <a:rPr lang="en-US" dirty="0"/>
+              <a:t>Post-quantum (built): 'Records are meant to prove things for years, and quantum computers will break today's signatures. So the owner can seal their whole record with two signatures: ML-DSA-65, the NIST post-quantum standard, and Ed25519. A check shows exactly which records changed or were deleted, even straight in the database. We keep no copy of the seal, and our public keys are published so anyone can check without us.' Built and tested; invoices and receipts are next.</a:t>
+            </a:r>
+            <a:endParaRPr lang="en-US" dirty="0"/>
+          </a:p>
+        </p:txBody>
+      </p:sp>
+      <p:sp>
+        <p:nvSpPr>
+          <p:cNvPr id="4" name="Slide Number Placeholder 3"/>
+          <p:cNvSpPr>
+            <a:spLocks noGrp="1"/>
+          </p:cNvSpPr>
+          <p:nvPr>
+            <p:ph type="sldNum" sz="quarter" idx="10"/>
+          </p:nvPr>
+        </p:nvSpPr>
+        <p:spPr/>
+        <p:txBody>
+          <a:bodyPr/>
+          <a:lstStyle/>
+          <a:p>
+            <a:fld id="{F7021451-1387-4CA6-816F-3879F97B5CBC}" type="slidenum">
+              <a:rPr lang="en-US"/>
+              <a:t>21</a:t>
             </a:fld>
             <a:endParaRPr lang="en-US"/>
           </a:p>
@@ -9861,7 +10312,7 @@
                 <a:ea typeface="Calibri" pitchFamily="34" charset="-122"/>
                 <a:cs typeface="Calibri" pitchFamily="34" charset="-120"/>
               </a:rPr>
-              <a:t>TEAM PR</a:t>
+              <a:t>WHAT IT COSTS</a:t>
             </a:r>
             <a:endParaRPr lang="en-US" sz="1300" dirty="0"/>
           </a:p>
@@ -9900,7 +10351,7 @@
                 <a:ea typeface="Georgia" pitchFamily="34" charset="-122"/>
                 <a:cs typeface="Georgia" pitchFamily="34" charset="-120"/>
               </a:rPr>
-              <a:t>Builders who know the kasi</a:t>
+              <a:t>Small to start. Profitable by year 3.</a:t>
             </a:r>
             <a:endParaRPr lang="en-US" sz="3400" dirty="0"/>
           </a:p>
@@ -9914,12 +10365,12 @@
         </p:nvSpPr>
         <p:spPr>
           <a:xfrm>
-            <a:off x="548640" y="1783080"/>
-            <a:ext cx="5349240" cy="2926080"/>
+            <a:off x="548640" y="1828800"/>
+            <a:ext cx="4846320" cy="1188720"/>
           </a:xfrm>
           <a:prstGeom prst="roundRect">
             <a:avLst>
-              <a:gd name="adj" fmla="val 3750"/>
+              <a:gd name="adj" fmla="val 9231"/>
             </a:avLst>
           </a:prstGeom>
           <a:solidFill>
@@ -9935,63 +10386,14 @@
       </p:sp>
       <p:sp>
         <p:nvSpPr>
-          <p:cNvPr id="5" name="Shape 3"/>
-          <p:cNvSpPr/>
-          <p:nvPr/>
-        </p:nvSpPr>
-        <p:spPr>
-          <a:xfrm>
-            <a:off x="914400" y="2103120"/>
-            <a:ext cx="1234440" cy="1234440"/>
-          </a:xfrm>
-          <a:prstGeom prst="ellipse">
-            <a:avLst/>
-          </a:prstGeom>
-          <a:solidFill>
-            <a:srgbClr val="1E2B45"/>
-          </a:solidFill>
-          <a:ln w="19050">
-            <a:solidFill>
-              <a:srgbClr val="10B981"/>
-            </a:solidFill>
-            <a:prstDash val="solid"/>
-          </a:ln>
-        </p:spPr>
-      </p:sp>
-      <p:pic>
-        <p:nvPicPr>
-          <p:cNvPr id="6" name="Image 0" descr="preencoded.png">    </p:cNvPr>
-          <p:cNvPicPr>
-            <a:picLocks noChangeAspect="1"/>
-          </p:cNvPicPr>
-          <p:nvPr/>
-        </p:nvPicPr>
-        <p:blipFill>
-          <a:blip r:embed="rId1"/>
-          <a:stretch>
-            <a:fillRect/>
-          </a:stretch>
-        </p:blipFill>
-        <p:spPr>
-          <a:xfrm>
-            <a:off x="1210666" y="2399386"/>
-            <a:ext cx="641909" cy="641909"/>
-          </a:xfrm>
-          <a:prstGeom prst="rect">
-            <a:avLst/>
-          </a:prstGeom>
-        </p:spPr>
-      </p:pic>
-      <p:sp>
-        <p:nvSpPr>
-          <p:cNvPr id="7" name="Text 4"/>
-          <p:cNvSpPr txBox="1"/>
-          <p:nvPr/>
-        </p:nvSpPr>
-        <p:spPr>
-          <a:xfrm>
-            <a:off x="2423160" y="2148840"/>
-            <a:ext cx="3291840" cy="640080"/>
+          <p:cNvPr id="5" name="Text 3"/>
+          <p:cNvSpPr txBox="1"/>
+          <p:nvPr/>
+        </p:nvSpPr>
+        <p:spPr>
+          <a:xfrm>
+            <a:off x="777240" y="1938528"/>
+            <a:ext cx="2011680" cy="320040"/>
           </a:xfrm>
           <a:prstGeom prst="rect">
             <a:avLst/>
@@ -10007,46 +10409,85 @@
               <a:buNone/>
             </a:pPr>
             <a:r>
-              <a:rPr lang="en-US" sz="3200" b="1" dirty="0">
-                <a:solidFill>
-                  <a:srgbClr val="10B981"/>
+              <a:rPr lang="en-US" sz="1200" b="1" spc="200" kern="0" dirty="0">
+                <a:solidFill>
+                  <a:srgbClr val="A3B3C9"/>
+                </a:solidFill>
+                <a:latin typeface="Calibri" pitchFamily="34" charset="0"/>
+                <a:ea typeface="Calibri" pitchFamily="34" charset="-122"/>
+                <a:cs typeface="Calibri" pitchFamily="34" charset="-120"/>
+              </a:rPr>
+              <a:t>START</a:t>
+            </a:r>
+            <a:endParaRPr lang="en-US" sz="1200" dirty="0"/>
+          </a:p>
+        </p:txBody>
+      </p:sp>
+      <p:sp>
+        <p:nvSpPr>
+          <p:cNvPr id="6" name="Text 4"/>
+          <p:cNvSpPr txBox="1"/>
+          <p:nvPr/>
+        </p:nvSpPr>
+        <p:spPr>
+          <a:xfrm>
+            <a:off x="777240" y="2240280"/>
+            <a:ext cx="2011680" cy="594360"/>
+          </a:xfrm>
+          <a:prstGeom prst="rect">
+            <a:avLst/>
+          </a:prstGeom>
+          <a:noFill/>
+          <a:ln/>
+        </p:spPr>
+        <p:txBody>
+          <a:bodyPr wrap="square" lIns="0" tIns="0" rIns="0" bIns="0" rtlCol="0" anchor="t"/>
+          <a:lstStyle/>
+          <a:p>
+            <a:pPr indent="0" marL="0">
+              <a:buNone/>
+            </a:pPr>
+            <a:r>
+              <a:rPr lang="en-US" sz="3000" b="1" dirty="0">
+                <a:solidFill>
+                  <a:srgbClr val="FBBF24"/>
                 </a:solidFill>
                 <a:latin typeface="Georgia" pitchFamily="34" charset="0"/>
                 <a:ea typeface="Georgia" pitchFamily="34" charset="-122"/>
                 <a:cs typeface="Georgia" pitchFamily="34" charset="-120"/>
               </a:rPr>
-              <a:t>Mandla</a:t>
-            </a:r>
-            <a:endParaRPr lang="en-US" sz="3200" dirty="0"/>
-          </a:p>
-        </p:txBody>
-      </p:sp>
-      <p:sp>
-        <p:nvSpPr>
-          <p:cNvPr id="8" name="Text 5"/>
-          <p:cNvSpPr txBox="1"/>
-          <p:nvPr/>
-        </p:nvSpPr>
-        <p:spPr>
-          <a:xfrm>
-            <a:off x="2423160" y="2788920"/>
-            <a:ext cx="3291840" cy="365760"/>
-          </a:xfrm>
-          <a:prstGeom prst="rect">
-            <a:avLst/>
-          </a:prstGeom>
-          <a:noFill/>
-          <a:ln/>
-        </p:spPr>
-        <p:txBody>
-          <a:bodyPr wrap="square" lIns="0" tIns="0" rIns="0" bIns="0" rtlCol="0" anchor="t"/>
+              <a:t>R300k</a:t>
+            </a:r>
+            <a:endParaRPr lang="en-US" sz="3000" dirty="0"/>
+          </a:p>
+        </p:txBody>
+      </p:sp>
+      <p:sp>
+        <p:nvSpPr>
+          <p:cNvPr id="7" name="Text 5"/>
+          <p:cNvSpPr txBox="1"/>
+          <p:nvPr/>
+        </p:nvSpPr>
+        <p:spPr>
+          <a:xfrm>
+            <a:off x="2743200" y="2011680"/>
+            <a:ext cx="2514600" cy="868680"/>
+          </a:xfrm>
+          <a:prstGeom prst="rect">
+            <a:avLst/>
+          </a:prstGeom>
+          <a:noFill/>
+          <a:ln/>
+        </p:spPr>
+        <p:txBody>
+          <a:bodyPr wrap="square" lIns="0" tIns="0" rIns="0" bIns="0" rtlCol="0" anchor="ctr"/>
           <a:lstStyle/>
           <a:p>
             <a:pPr indent="0" marL="0">
               <a:buNone/>
             </a:pPr>
             <a:r>
-              <a:rPr lang="en-US" sz="1600" b="1" dirty="0">
+              <a:rPr lang="en-US" sz="1350" dirty="0">
                 <a:solidFill>
                   <a:srgbClr val="F8FAFC"/>
                 </a:solidFill>
@@ -10054,65 +10495,26 @@
                 <a:ea typeface="Calibri" pitchFamily="34" charset="-122"/>
                 <a:cs typeface="Calibri" pitchFamily="34" charset="-120"/>
               </a:rPr>
-              <a:t>Team lead</a:t>
-            </a:r>
-            <a:endParaRPr lang="en-US" sz="1600" dirty="0"/>
-          </a:p>
-        </p:txBody>
-      </p:sp>
-      <p:sp>
-        <p:nvSpPr>
-          <p:cNvPr id="9" name="Text 6"/>
-          <p:cNvSpPr txBox="1"/>
-          <p:nvPr/>
-        </p:nvSpPr>
-        <p:spPr>
-          <a:xfrm>
-            <a:off x="2423160" y="3200400"/>
-            <a:ext cx="3291840" cy="1280160"/>
-          </a:xfrm>
-          <a:prstGeom prst="rect">
-            <a:avLst/>
-          </a:prstGeom>
-          <a:noFill/>
-          <a:ln/>
-        </p:spPr>
-        <p:txBody>
-          <a:bodyPr wrap="square" lIns="0" tIns="0" rIns="0" bIns="0" rtlCol="0" anchor="t"/>
-          <a:lstStyle/>
-          <a:p>
-            <a:pPr indent="0" marL="0">
-              <a:buNone/>
-            </a:pPr>
-            <a:r>
-              <a:rPr lang="en-US" sz="1500" dirty="0">
-                <a:solidFill>
-                  <a:srgbClr val="A3B3C9"/>
-                </a:solidFill>
-                <a:latin typeface="Calibri" pitchFamily="34" charset="0"/>
-                <a:ea typeface="Calibri" pitchFamily="34" charset="-122"/>
-                <a:cs typeface="Calibri" pitchFamily="34" charset="-120"/>
-              </a:rPr>
-              <a:t>Product, backend, payments and the supplier engine</a:t>
-            </a:r>
-            <a:endParaRPr lang="en-US" sz="1500" dirty="0"/>
-          </a:p>
-        </p:txBody>
-      </p:sp>
-      <p:sp>
-        <p:nvSpPr>
-          <p:cNvPr id="10" name="Shape 7"/>
+              <a:t>One-off: the 6-month pilot (the ask)</a:t>
+            </a:r>
+            <a:endParaRPr lang="en-US" sz="1350" dirty="0"/>
+          </a:p>
+        </p:txBody>
+      </p:sp>
+      <p:sp>
+        <p:nvSpPr>
+          <p:cNvPr id="8" name="Shape 6"/>
           <p:cNvSpPr/>
           <p:nvPr/>
         </p:nvSpPr>
         <p:spPr>
           <a:xfrm>
-            <a:off x="6172200" y="1783080"/>
-            <a:ext cx="5349240" cy="2926080"/>
+            <a:off x="548640" y="3200400"/>
+            <a:ext cx="4846320" cy="1188720"/>
           </a:xfrm>
           <a:prstGeom prst="roundRect">
             <a:avLst>
-              <a:gd name="adj" fmla="val 3750"/>
+              <a:gd name="adj" fmla="val 9231"/>
             </a:avLst>
           </a:prstGeom>
           <a:solidFill>
@@ -10128,32 +10530,350 @@
       </p:sp>
       <p:sp>
         <p:nvSpPr>
-          <p:cNvPr id="11" name="Shape 8"/>
+          <p:cNvPr id="9" name="Text 7"/>
+          <p:cNvSpPr txBox="1"/>
+          <p:nvPr/>
+        </p:nvSpPr>
+        <p:spPr>
+          <a:xfrm>
+            <a:off x="777240" y="3310128"/>
+            <a:ext cx="2011680" cy="320040"/>
+          </a:xfrm>
+          <a:prstGeom prst="rect">
+            <a:avLst/>
+          </a:prstGeom>
+          <a:noFill/>
+          <a:ln/>
+        </p:spPr>
+        <p:txBody>
+          <a:bodyPr wrap="square" lIns="0" tIns="0" rIns="0" bIns="0" rtlCol="0" anchor="t"/>
+          <a:lstStyle/>
+          <a:p>
+            <a:pPr indent="0" marL="0">
+              <a:buNone/>
+            </a:pPr>
+            <a:r>
+              <a:rPr lang="en-US" sz="1200" b="1" spc="200" kern="0" dirty="0">
+                <a:solidFill>
+                  <a:srgbClr val="A3B3C9"/>
+                </a:solidFill>
+                <a:latin typeface="Calibri" pitchFamily="34" charset="0"/>
+                <a:ea typeface="Calibri" pitchFamily="34" charset="-122"/>
+                <a:cs typeface="Calibri" pitchFamily="34" charset="-120"/>
+              </a:rPr>
+              <a:t>GROW</a:t>
+            </a:r>
+            <a:endParaRPr lang="en-US" sz="1200" dirty="0"/>
+          </a:p>
+        </p:txBody>
+      </p:sp>
+      <p:sp>
+        <p:nvSpPr>
+          <p:cNvPr id="10" name="Text 8"/>
+          <p:cNvSpPr txBox="1"/>
+          <p:nvPr/>
+        </p:nvSpPr>
+        <p:spPr>
+          <a:xfrm>
+            <a:off x="777240" y="3611880"/>
+            <a:ext cx="2011680" cy="594360"/>
+          </a:xfrm>
+          <a:prstGeom prst="rect">
+            <a:avLst/>
+          </a:prstGeom>
+          <a:noFill/>
+          <a:ln/>
+        </p:spPr>
+        <p:txBody>
+          <a:bodyPr wrap="square" lIns="0" tIns="0" rIns="0" bIns="0" rtlCol="0" anchor="t"/>
+          <a:lstStyle/>
+          <a:p>
+            <a:pPr indent="0" marL="0">
+              <a:buNone/>
+            </a:pPr>
+            <a:r>
+              <a:rPr lang="en-US" sz="3000" b="1" dirty="0">
+                <a:solidFill>
+                  <a:srgbClr val="34D399"/>
+                </a:solidFill>
+                <a:latin typeface="Georgia" pitchFamily="34" charset="0"/>
+                <a:ea typeface="Georgia" pitchFamily="34" charset="-122"/>
+                <a:cs typeface="Georgia" pitchFamily="34" charset="-120"/>
+              </a:rPr>
+              <a:t>~R1.5m</a:t>
+            </a:r>
+            <a:endParaRPr lang="en-US" sz="3000" dirty="0"/>
+          </a:p>
+        </p:txBody>
+      </p:sp>
+      <p:sp>
+        <p:nvSpPr>
+          <p:cNvPr id="11" name="Text 9"/>
+          <p:cNvSpPr txBox="1"/>
+          <p:nvPr/>
+        </p:nvSpPr>
+        <p:spPr>
+          <a:xfrm>
+            <a:off x="2743200" y="3383280"/>
+            <a:ext cx="2514600" cy="868680"/>
+          </a:xfrm>
+          <a:prstGeom prst="rect">
+            <a:avLst/>
+          </a:prstGeom>
+          <a:noFill/>
+          <a:ln/>
+        </p:spPr>
+        <p:txBody>
+          <a:bodyPr wrap="square" lIns="0" tIns="0" rIns="0" bIns="0" rtlCol="0" anchor="ctr"/>
+          <a:lstStyle/>
+          <a:p>
+            <a:pPr indent="0" marL="0">
+              <a:buNone/>
+            </a:pPr>
+            <a:r>
+              <a:rPr lang="en-US" sz="1350" dirty="0">
+                <a:solidFill>
+                  <a:srgbClr val="F8FAFC"/>
+                </a:solidFill>
+                <a:latin typeface="Calibri" pitchFamily="34" charset="0"/>
+                <a:ea typeface="Calibri" pitchFamily="34" charset="-122"/>
+                <a:cs typeface="Calibri" pitchFamily="34" charset="-120"/>
+              </a:rPr>
+              <a:t>Raised after the pilot, to hire ahead of revenue</a:t>
+            </a:r>
+            <a:endParaRPr lang="en-US" sz="1350" dirty="0"/>
+          </a:p>
+        </p:txBody>
+      </p:sp>
+      <p:sp>
+        <p:nvSpPr>
+          <p:cNvPr id="12" name="Shape 10"/>
           <p:cNvSpPr/>
           <p:nvPr/>
         </p:nvSpPr>
         <p:spPr>
           <a:xfrm>
-            <a:off x="6537960" y="2103120"/>
-            <a:ext cx="1234440" cy="1234440"/>
-          </a:xfrm>
-          <a:prstGeom prst="ellipse">
-            <a:avLst/>
+            <a:off x="548640" y="4572000"/>
+            <a:ext cx="4846320" cy="1188720"/>
+          </a:xfrm>
+          <a:prstGeom prst="roundRect">
+            <a:avLst>
+              <a:gd name="adj" fmla="val 9231"/>
+            </a:avLst>
           </a:prstGeom>
           <a:solidFill>
-            <a:srgbClr val="1E2B45"/>
+            <a:srgbClr val="17223A"/>
           </a:solidFill>
-          <a:ln w="19050">
+          <a:ln w="12700">
             <a:solidFill>
-              <a:srgbClr val="FBBF24"/>
+              <a:srgbClr val="17223A"/>
             </a:solidFill>
             <a:prstDash val="solid"/>
           </a:ln>
         </p:spPr>
       </p:sp>
+      <p:sp>
+        <p:nvSpPr>
+          <p:cNvPr id="13" name="Text 11"/>
+          <p:cNvSpPr txBox="1"/>
+          <p:nvPr/>
+        </p:nvSpPr>
+        <p:spPr>
+          <a:xfrm>
+            <a:off x="777240" y="4681728"/>
+            <a:ext cx="2011680" cy="320040"/>
+          </a:xfrm>
+          <a:prstGeom prst="rect">
+            <a:avLst/>
+          </a:prstGeom>
+          <a:noFill/>
+          <a:ln/>
+        </p:spPr>
+        <p:txBody>
+          <a:bodyPr wrap="square" lIns="0" tIns="0" rIns="0" bIns="0" rtlCol="0" anchor="t"/>
+          <a:lstStyle/>
+          <a:p>
+            <a:pPr indent="0" marL="0">
+              <a:buNone/>
+            </a:pPr>
+            <a:r>
+              <a:rPr lang="en-US" sz="1200" b="1" spc="200" kern="0" dirty="0">
+                <a:solidFill>
+                  <a:srgbClr val="A3B3C9"/>
+                </a:solidFill>
+                <a:latin typeface="Calibri" pitchFamily="34" charset="0"/>
+                <a:ea typeface="Calibri" pitchFamily="34" charset="-122"/>
+                <a:cs typeface="Calibri" pitchFamily="34" charset="-120"/>
+              </a:rPr>
+              <a:t>BREAK EVEN</a:t>
+            </a:r>
+            <a:endParaRPr lang="en-US" sz="1200" dirty="0"/>
+          </a:p>
+        </p:txBody>
+      </p:sp>
+      <p:sp>
+        <p:nvSpPr>
+          <p:cNvPr id="14" name="Text 12"/>
+          <p:cNvSpPr txBox="1"/>
+          <p:nvPr/>
+        </p:nvSpPr>
+        <p:spPr>
+          <a:xfrm>
+            <a:off x="777240" y="4983480"/>
+            <a:ext cx="2011680" cy="594360"/>
+          </a:xfrm>
+          <a:prstGeom prst="rect">
+            <a:avLst/>
+          </a:prstGeom>
+          <a:noFill/>
+          <a:ln/>
+        </p:spPr>
+        <p:txBody>
+          <a:bodyPr wrap="square" lIns="0" tIns="0" rIns="0" bIns="0" rtlCol="0" anchor="t"/>
+          <a:lstStyle/>
+          <a:p>
+            <a:pPr indent="0" marL="0">
+              <a:buNone/>
+            </a:pPr>
+            <a:r>
+              <a:rPr lang="en-US" sz="3000" b="1" dirty="0">
+                <a:solidFill>
+                  <a:srgbClr val="10B981"/>
+                </a:solidFill>
+                <a:latin typeface="Georgia" pitchFamily="34" charset="0"/>
+                <a:ea typeface="Georgia" pitchFamily="34" charset="-122"/>
+                <a:cs typeface="Georgia" pitchFamily="34" charset="-120"/>
+              </a:rPr>
+              <a:t>Year 2</a:t>
+            </a:r>
+            <a:endParaRPr lang="en-US" sz="3000" dirty="0"/>
+          </a:p>
+        </p:txBody>
+      </p:sp>
+      <p:sp>
+        <p:nvSpPr>
+          <p:cNvPr id="15" name="Text 13"/>
+          <p:cNvSpPr txBox="1"/>
+          <p:nvPr/>
+        </p:nvSpPr>
+        <p:spPr>
+          <a:xfrm>
+            <a:off x="2743200" y="4754880"/>
+            <a:ext cx="2514600" cy="868680"/>
+          </a:xfrm>
+          <a:prstGeom prst="rect">
+            <a:avLst/>
+          </a:prstGeom>
+          <a:noFill/>
+          <a:ln/>
+        </p:spPr>
+        <p:txBody>
+          <a:bodyPr wrap="square" lIns="0" tIns="0" rIns="0" bIns="0" rtlCol="0" anchor="ctr"/>
+          <a:lstStyle/>
+          <a:p>
+            <a:pPr indent="0" marL="0">
+              <a:buNone/>
+            </a:pPr>
+            <a:r>
+              <a:rPr lang="en-US" sz="1350" dirty="0">
+                <a:solidFill>
+                  <a:srgbClr val="F8FAFC"/>
+                </a:solidFill>
+                <a:latin typeface="Calibri" pitchFamily="34" charset="0"/>
+                <a:ea typeface="Calibri" pitchFamily="34" charset="-122"/>
+                <a:cs typeface="Calibri" pitchFamily="34" charset="-120"/>
+              </a:rPr>
+              <a:t>Suppliers' fees cover all costs</a:t>
+            </a:r>
+            <a:endParaRPr lang="en-US" sz="1350" dirty="0"/>
+          </a:p>
+        </p:txBody>
+      </p:sp>
+      <p:sp>
+        <p:nvSpPr>
+          <p:cNvPr id="16" name="Shape 14"/>
+          <p:cNvSpPr/>
+          <p:nvPr/>
+        </p:nvSpPr>
+        <p:spPr>
+          <a:xfrm>
+            <a:off x="5760720" y="1737360"/>
+            <a:ext cx="5852160" cy="4023360"/>
+          </a:xfrm>
+          <a:prstGeom prst="roundRect">
+            <a:avLst>
+              <a:gd name="adj" fmla="val 2727"/>
+            </a:avLst>
+          </a:prstGeom>
+          <a:solidFill>
+            <a:srgbClr val="17223A"/>
+          </a:solidFill>
+          <a:ln w="12700">
+            <a:solidFill>
+              <a:srgbClr val="17223A"/>
+            </a:solidFill>
+            <a:prstDash val="solid"/>
+          </a:ln>
+        </p:spPr>
+      </p:sp>
+      <p:graphicFrame>
+        <p:nvGraphicFramePr>
+          <p:cNvPr id="17" name="Chart 0" descr=""/>
+          <p:cNvGraphicFramePr/>
+          <p:nvPr/>
+        </p:nvGraphicFramePr>
+        <p:xfrm>
+          <a:off x="5852160" y="1828800"/>
+          <a:ext cx="5669280" cy="3840480"/>
+        </p:xfrm>
+        <a:graphic xmlns:a="http://schemas.openxmlformats.org/drawingml/2006/main">
+          <a:graphicData uri="http://schemas.openxmlformats.org/drawingml/2006/chart">
+            <c:chart xmlns:c="http://schemas.openxmlformats.org/drawingml/2006/chart" r:id="rId1"/>
+          </a:graphicData>
+        </a:graphic>
+      </p:graphicFrame>
+      <p:sp>
+        <p:nvSpPr>
+          <p:cNvPr id="18" name="Text 15"/>
+          <p:cNvSpPr txBox="1"/>
+          <p:nvPr/>
+        </p:nvSpPr>
+        <p:spPr>
+          <a:xfrm>
+            <a:off x="5760720" y="5852160"/>
+            <a:ext cx="5852160" cy="365760"/>
+          </a:xfrm>
+          <a:prstGeom prst="rect">
+            <a:avLst/>
+          </a:prstGeom>
+          <a:noFill/>
+          <a:ln/>
+        </p:spPr>
+        <p:txBody>
+          <a:bodyPr wrap="square" lIns="0" tIns="0" rIns="0" bIns="0" rtlCol="0" anchor="t"/>
+          <a:lstStyle/>
+          <a:p>
+            <a:pPr indent="0" marL="0">
+              <a:buNone/>
+            </a:pPr>
+            <a:r>
+              <a:rPr lang="en-US" sz="1250" i="1" dirty="0">
+                <a:solidFill>
+                  <a:srgbClr val="FBBF24"/>
+                </a:solidFill>
+                <a:latin typeface="Calibri" pitchFamily="34" charset="0"/>
+                <a:ea typeface="Calibri" pitchFamily="34" charset="-122"/>
+                <a:cs typeface="Calibri" pitchFamily="34" charset="-120"/>
+              </a:rPr>
+              <a:t>Most of the cost is people: the team and field agents.</a:t>
+            </a:r>
+            <a:endParaRPr lang="en-US" sz="1250" dirty="0"/>
+          </a:p>
+        </p:txBody>
+      </p:sp>
       <p:pic>
         <p:nvPicPr>
-          <p:cNvPr id="12" name="Image 1" descr="preencoded.png">    </p:cNvPr>
+          <p:cNvPr id="19" name="Image 0" descr="preencoded.png">    </p:cNvPr>
           <p:cNvPicPr>
             <a:picLocks noChangeAspect="1"/>
           </p:cNvPicPr>
@@ -10167,8 +10887,8 @@
         </p:blipFill>
         <p:spPr>
           <a:xfrm>
-            <a:off x="6834226" y="2399386"/>
-            <a:ext cx="641909" cy="641909"/>
+            <a:off x="11231575" y="6291072"/>
+            <a:ext cx="384048" cy="384048"/>
           </a:xfrm>
           <a:prstGeom prst="rect">
             <a:avLst/>
@@ -10177,92 +10897,53 @@
       </p:pic>
       <p:sp>
         <p:nvSpPr>
-          <p:cNvPr id="13" name="Text 9"/>
-          <p:cNvSpPr txBox="1"/>
-          <p:nvPr/>
-        </p:nvSpPr>
-        <p:spPr>
-          <a:xfrm>
-            <a:off x="8046720" y="2148840"/>
-            <a:ext cx="3291840" cy="640080"/>
-          </a:xfrm>
-          <a:prstGeom prst="rect">
-            <a:avLst/>
-          </a:prstGeom>
-          <a:noFill/>
-          <a:ln/>
-        </p:spPr>
-        <p:txBody>
-          <a:bodyPr wrap="square" lIns="0" tIns="0" rIns="0" bIns="0" rtlCol="0" anchor="t"/>
-          <a:lstStyle/>
-          <a:p>
-            <a:pPr indent="0" marL="0">
-              <a:buNone/>
-            </a:pPr>
-            <a:r>
-              <a:rPr lang="en-US" sz="3200" b="1" dirty="0">
-                <a:solidFill>
-                  <a:srgbClr val="FBBF24"/>
-                </a:solidFill>
-                <a:latin typeface="Georgia" pitchFamily="34" charset="0"/>
-                <a:ea typeface="Georgia" pitchFamily="34" charset="-122"/>
-                <a:cs typeface="Georgia" pitchFamily="34" charset="-120"/>
-              </a:rPr>
-              <a:t>Risuna</a:t>
-            </a:r>
-            <a:endParaRPr lang="en-US" sz="3200" dirty="0"/>
-          </a:p>
-        </p:txBody>
-      </p:sp>
-      <p:sp>
-        <p:nvSpPr>
-          <p:cNvPr id="14" name="Text 10"/>
-          <p:cNvSpPr txBox="1"/>
-          <p:nvPr/>
-        </p:nvSpPr>
-        <p:spPr>
-          <a:xfrm>
-            <a:off x="8046720" y="2788920"/>
-            <a:ext cx="3291840" cy="365760"/>
-          </a:xfrm>
-          <a:prstGeom prst="rect">
-            <a:avLst/>
-          </a:prstGeom>
-          <a:noFill/>
-          <a:ln/>
-        </p:spPr>
-        <p:txBody>
-          <a:bodyPr wrap="square" lIns="0" tIns="0" rIns="0" bIns="0" rtlCol="0" anchor="t"/>
-          <a:lstStyle/>
-          <a:p>
-            <a:pPr indent="0" marL="0">
-              <a:buNone/>
-            </a:pPr>
-            <a:r>
-              <a:rPr lang="en-US" sz="1600" b="1" dirty="0">
-                <a:solidFill>
-                  <a:srgbClr val="F8FAFC"/>
+          <p:cNvPr id="20" name="Text 16"/>
+          <p:cNvSpPr txBox="1"/>
+          <p:nvPr/>
+        </p:nvSpPr>
+        <p:spPr>
+          <a:xfrm>
+            <a:off x="10682935" y="6355080"/>
+            <a:ext cx="457200" cy="274320"/>
+          </a:xfrm>
+          <a:prstGeom prst="rect">
+            <a:avLst/>
+          </a:prstGeom>
+          <a:noFill/>
+          <a:ln/>
+        </p:spPr>
+        <p:txBody>
+          <a:bodyPr wrap="square" lIns="0" tIns="0" rIns="0" bIns="0" rtlCol="0" anchor="t"/>
+          <a:lstStyle/>
+          <a:p>
+            <a:pPr algn="r" indent="0" marL="0">
+              <a:buNone/>
+            </a:pPr>
+            <a:r>
+              <a:rPr lang="en-US" sz="1000" dirty="0">
+                <a:solidFill>
+                  <a:srgbClr val="64748B"/>
                 </a:solidFill>
                 <a:latin typeface="Calibri" pitchFamily="34" charset="0"/>
                 <a:ea typeface="Calibri" pitchFamily="34" charset="-122"/>
                 <a:cs typeface="Calibri" pitchFamily="34" charset="-120"/>
               </a:rPr>
-              <a:t>Business tools</a:t>
-            </a:r>
-            <a:endParaRPr lang="en-US" sz="1600" dirty="0"/>
-          </a:p>
-        </p:txBody>
-      </p:sp>
-      <p:sp>
-        <p:nvSpPr>
-          <p:cNvPr id="15" name="Text 11"/>
-          <p:cNvSpPr txBox="1"/>
-          <p:nvPr/>
-        </p:nvSpPr>
-        <p:spPr>
-          <a:xfrm>
-            <a:off x="8046720" y="3200400"/>
-            <a:ext cx="3291840" cy="1280160"/>
+              <a:t>16</a:t>
+            </a:r>
+            <a:endParaRPr lang="en-US" sz="1000" dirty="0"/>
+          </a:p>
+        </p:txBody>
+      </p:sp>
+      <p:sp>
+        <p:nvSpPr>
+          <p:cNvPr id="21" name="Text 17"/>
+          <p:cNvSpPr txBox="1"/>
+          <p:nvPr/>
+        </p:nvSpPr>
+        <p:spPr>
+          <a:xfrm>
+            <a:off x="548640" y="6336792"/>
+            <a:ext cx="9875520" cy="365760"/>
           </a:xfrm>
           <a:prstGeom prst="rect">
             <a:avLst/>
@@ -10278,146 +10959,17 @@
               <a:buNone/>
             </a:pPr>
             <a:r>
-              <a:rPr lang="en-US" sz="1500" dirty="0">
-                <a:solidFill>
-                  <a:srgbClr val="A3B3C9"/>
+              <a:rPr lang="en-US" sz="950" dirty="0">
+                <a:solidFill>
+                  <a:srgbClr val="64748B"/>
                 </a:solidFill>
                 <a:latin typeface="Calibri" pitchFamily="34" charset="0"/>
                 <a:ea typeface="Calibri" pitchFamily="34" charset="-122"/>
                 <a:cs typeface="Calibri" pitchFamily="34" charset="-120"/>
               </a:rPr>
-              <a:t>Credit book, order book, jobs, builder network, notifications</a:t>
-            </a:r>
-            <a:endParaRPr lang="en-US" sz="1500" dirty="0"/>
-          </a:p>
-        </p:txBody>
-      </p:sp>
-      <p:sp>
-        <p:nvSpPr>
-          <p:cNvPr id="16" name="Shape 12"/>
-          <p:cNvSpPr/>
-          <p:nvPr/>
-        </p:nvSpPr>
-        <p:spPr>
-          <a:xfrm>
-            <a:off x="548640" y="4983480"/>
-            <a:ext cx="11064240" cy="1005840"/>
-          </a:xfrm>
-          <a:prstGeom prst="roundRect">
-            <a:avLst>
-              <a:gd name="adj" fmla="val 10909"/>
-            </a:avLst>
-          </a:prstGeom>
-          <a:solidFill>
-            <a:srgbClr val="1E2B45"/>
-          </a:solidFill>
-          <a:ln w="12700">
-            <a:solidFill>
-              <a:srgbClr val="1E2B45"/>
-            </a:solidFill>
-            <a:prstDash val="solid"/>
-          </a:ln>
-        </p:spPr>
-      </p:sp>
-      <p:sp>
-        <p:nvSpPr>
-          <p:cNvPr id="17" name="Text 13"/>
-          <p:cNvSpPr txBox="1"/>
-          <p:nvPr/>
-        </p:nvSpPr>
-        <p:spPr>
-          <a:xfrm>
-            <a:off x="868680" y="5230368"/>
-            <a:ext cx="10424160" cy="548640"/>
-          </a:xfrm>
-          <a:prstGeom prst="rect">
-            <a:avLst/>
-          </a:prstGeom>
-          <a:noFill/>
-          <a:ln/>
-        </p:spPr>
-        <p:txBody>
-          <a:bodyPr wrap="square" lIns="0" tIns="0" rIns="0" bIns="0" rtlCol="0" anchor="ctr"/>
-          <a:lstStyle/>
-          <a:p>
-            <a:pPr indent="0" marL="0">
-              <a:buNone/>
-            </a:pPr>
-            <a:r>
-              <a:rPr lang="en-US" sz="1600" dirty="0">
-                <a:solidFill>
-                  <a:srgbClr val="F8FAFC"/>
-                </a:solidFill>
-                <a:latin typeface="Calibri" pitchFamily="34" charset="0"/>
-                <a:ea typeface="Calibri" pitchFamily="34" charset="-122"/>
-                <a:cs typeface="Calibri" pitchFamily="34" charset="-120"/>
-              </a:rPr>
-              <a:t>Built this weekend, end to end: the app, the system behind it and real payments, with over 1,400 automated tests.</a:t>
-            </a:r>
-            <a:endParaRPr lang="en-US" sz="1600" dirty="0"/>
-          </a:p>
-        </p:txBody>
-      </p:sp>
-      <p:pic>
-        <p:nvPicPr>
-          <p:cNvPr id="18" name="Image 2" descr="preencoded.png">    </p:cNvPr>
-          <p:cNvPicPr>
-            <a:picLocks noChangeAspect="1"/>
-          </p:cNvPicPr>
-          <p:nvPr/>
-        </p:nvPicPr>
-        <p:blipFill>
-          <a:blip r:embed="rId3"/>
-          <a:stretch>
-            <a:fillRect/>
-          </a:stretch>
-        </p:blipFill>
-        <p:spPr>
-          <a:xfrm>
-            <a:off x="11231575" y="6291072"/>
-            <a:ext cx="384048" cy="384048"/>
-          </a:xfrm>
-          <a:prstGeom prst="rect">
-            <a:avLst/>
-          </a:prstGeom>
-        </p:spPr>
-      </p:pic>
-      <p:sp>
-        <p:nvSpPr>
-          <p:cNvPr id="19" name="Text 14"/>
-          <p:cNvSpPr txBox="1"/>
-          <p:nvPr/>
-        </p:nvSpPr>
-        <p:spPr>
-          <a:xfrm>
-            <a:off x="10682935" y="6355080"/>
-            <a:ext cx="457200" cy="274320"/>
-          </a:xfrm>
-          <a:prstGeom prst="rect">
-            <a:avLst/>
-          </a:prstGeom>
-          <a:noFill/>
-          <a:ln/>
-        </p:spPr>
-        <p:txBody>
-          <a:bodyPr wrap="square" lIns="0" tIns="0" rIns="0" bIns="0" rtlCol="0" anchor="t"/>
-          <a:lstStyle/>
-          <a:p>
-            <a:pPr algn="r" indent="0" marL="0">
-              <a:buNone/>
-            </a:pPr>
-            <a:r>
-              <a:rPr lang="en-US" sz="1000" dirty="0">
-                <a:solidFill>
-                  <a:srgbClr val="64748B"/>
-                </a:solidFill>
-                <a:latin typeface="Calibri" pitchFamily="34" charset="0"/>
-                <a:ea typeface="Calibri" pitchFamily="34" charset="-122"/>
-                <a:cs typeface="Calibri" pitchFamily="34" charset="-120"/>
-              </a:rPr>
-              <a:t>16</a:t>
-            </a:r>
-            <a:endParaRPr lang="en-US" sz="1000" dirty="0"/>
+              <a:t>Estimates. Costs: team, field agents, sales, hosting and messaging, security and POPIA.</a:t>
+            </a:r>
+            <a:endParaRPr lang="en-US" sz="950" dirty="0"/>
           </a:p>
         </p:txBody>
       </p:sp>
@@ -10453,9 +11005,139 @@
           <a:chExt cx="0" cy="0"/>
         </a:xfrm>
       </p:grpSpPr>
+      <p:sp>
+        <p:nvSpPr>
+          <p:cNvPr id="2" name="Text 0"/>
+          <p:cNvSpPr txBox="1"/>
+          <p:nvPr/>
+        </p:nvSpPr>
+        <p:spPr>
+          <a:xfrm>
+            <a:off x="548640" y="384048"/>
+            <a:ext cx="8229600" cy="320040"/>
+          </a:xfrm>
+          <a:prstGeom prst="rect">
+            <a:avLst/>
+          </a:prstGeom>
+          <a:noFill/>
+          <a:ln/>
+        </p:spPr>
+        <p:txBody>
+          <a:bodyPr wrap="square" lIns="0" tIns="0" rIns="0" bIns="0" rtlCol="0" anchor="t"/>
+          <a:lstStyle/>
+          <a:p>
+            <a:pPr indent="0" marL="0">
+              <a:buNone/>
+            </a:pPr>
+            <a:r>
+              <a:rPr lang="en-US" sz="1300" b="1" spc="300" kern="0" dirty="0">
+                <a:solidFill>
+                  <a:srgbClr val="10B981"/>
+                </a:solidFill>
+                <a:latin typeface="Calibri" pitchFamily="34" charset="0"/>
+                <a:ea typeface="Calibri" pitchFamily="34" charset="-122"/>
+                <a:cs typeface="Calibri" pitchFamily="34" charset="-120"/>
+              </a:rPr>
+              <a:t>TEAM PR</a:t>
+            </a:r>
+            <a:endParaRPr lang="en-US" sz="1300" dirty="0"/>
+          </a:p>
+        </p:txBody>
+      </p:sp>
+      <p:sp>
+        <p:nvSpPr>
+          <p:cNvPr id="3" name="Text 1"/>
+          <p:cNvSpPr txBox="1"/>
+          <p:nvPr/>
+        </p:nvSpPr>
+        <p:spPr>
+          <a:xfrm>
+            <a:off x="548640" y="731520"/>
+            <a:ext cx="11094415" cy="868680"/>
+          </a:xfrm>
+          <a:prstGeom prst="rect">
+            <a:avLst/>
+          </a:prstGeom>
+          <a:noFill/>
+          <a:ln/>
+        </p:spPr>
+        <p:txBody>
+          <a:bodyPr wrap="square" lIns="0" tIns="0" rIns="0" bIns="0" rtlCol="0" anchor="t"/>
+          <a:lstStyle/>
+          <a:p>
+            <a:pPr indent="0" marL="0">
+              <a:buNone/>
+            </a:pPr>
+            <a:r>
+              <a:rPr lang="en-US" sz="3400" b="1" dirty="0">
+                <a:solidFill>
+                  <a:srgbClr val="F8FAFC"/>
+                </a:solidFill>
+                <a:latin typeface="Georgia" pitchFamily="34" charset="0"/>
+                <a:ea typeface="Georgia" pitchFamily="34" charset="-122"/>
+                <a:cs typeface="Georgia" pitchFamily="34" charset="-120"/>
+              </a:rPr>
+              <a:t>Builders who know the kasi</a:t>
+            </a:r>
+            <a:endParaRPr lang="en-US" sz="3400" dirty="0"/>
+          </a:p>
+        </p:txBody>
+      </p:sp>
+      <p:sp>
+        <p:nvSpPr>
+          <p:cNvPr id="4" name="Shape 2"/>
+          <p:cNvSpPr/>
+          <p:nvPr/>
+        </p:nvSpPr>
+        <p:spPr>
+          <a:xfrm>
+            <a:off x="548640" y="1783080"/>
+            <a:ext cx="5349240" cy="2926080"/>
+          </a:xfrm>
+          <a:prstGeom prst="roundRect">
+            <a:avLst>
+              <a:gd name="adj" fmla="val 3750"/>
+            </a:avLst>
+          </a:prstGeom>
+          <a:solidFill>
+            <a:srgbClr val="17223A"/>
+          </a:solidFill>
+          <a:ln w="12700">
+            <a:solidFill>
+              <a:srgbClr val="17223A"/>
+            </a:solidFill>
+            <a:prstDash val="solid"/>
+          </a:ln>
+        </p:spPr>
+      </p:sp>
+      <p:sp>
+        <p:nvSpPr>
+          <p:cNvPr id="5" name="Shape 3"/>
+          <p:cNvSpPr/>
+          <p:nvPr/>
+        </p:nvSpPr>
+        <p:spPr>
+          <a:xfrm>
+            <a:off x="914400" y="2103120"/>
+            <a:ext cx="1234440" cy="1234440"/>
+          </a:xfrm>
+          <a:prstGeom prst="ellipse">
+            <a:avLst/>
+          </a:prstGeom>
+          <a:solidFill>
+            <a:srgbClr val="1E2B45"/>
+          </a:solidFill>
+          <a:ln w="19050">
+            <a:solidFill>
+              <a:srgbClr val="10B981"/>
+            </a:solidFill>
+            <a:prstDash val="solid"/>
+          </a:ln>
+        </p:spPr>
+      </p:sp>
       <p:pic>
         <p:nvPicPr>
-          <p:cNvPr id="2" name="Image 0" descr="preencoded.png">    </p:cNvPr>
+          <p:cNvPr id="6" name="Image 0" descr="preencoded.png">    </p:cNvPr>
           <p:cNvPicPr>
             <a:picLocks noChangeAspect="1"/>
           </p:cNvPicPr>
@@ -10469,8 +11151,8 @@
         </p:blipFill>
         <p:spPr>
           <a:xfrm>
-            <a:off x="685800" y="960120"/>
-            <a:ext cx="1280160" cy="1280160"/>
+            <a:off x="1210666" y="2399386"/>
+            <a:ext cx="641909" cy="641909"/>
           </a:xfrm>
           <a:prstGeom prst="rect">
             <a:avLst/>
@@ -10479,14 +11161,14 @@
       </p:pic>
       <p:sp>
         <p:nvSpPr>
-          <p:cNvPr id="3" name="Text 0"/>
-          <p:cNvSpPr txBox="1"/>
-          <p:nvPr/>
-        </p:nvSpPr>
-        <p:spPr>
-          <a:xfrm>
-            <a:off x="685800" y="2423160"/>
-            <a:ext cx="10058400" cy="1188720"/>
+          <p:cNvPr id="7" name="Text 4"/>
+          <p:cNvSpPr txBox="1"/>
+          <p:nvPr/>
+        </p:nvSpPr>
+        <p:spPr>
+          <a:xfrm>
+            <a:off x="2423160" y="2148840"/>
+            <a:ext cx="3291840" cy="640080"/>
           </a:xfrm>
           <a:prstGeom prst="rect">
             <a:avLst/>
@@ -10502,30 +11184,30 @@
               <a:buNone/>
             </a:pPr>
             <a:r>
-              <a:rPr lang="en-US" sz="6600" b="1" dirty="0">
-                <a:solidFill>
-                  <a:srgbClr val="F8FAFC"/>
+              <a:rPr lang="en-US" sz="3200" b="1" dirty="0">
+                <a:solidFill>
+                  <a:srgbClr val="10B981"/>
                 </a:solidFill>
                 <a:latin typeface="Georgia" pitchFamily="34" charset="0"/>
                 <a:ea typeface="Georgia" pitchFamily="34" charset="-122"/>
                 <a:cs typeface="Georgia" pitchFamily="34" charset="-120"/>
               </a:rPr>
-              <a:t>Thank you</a:t>
-            </a:r>
-            <a:endParaRPr lang="en-US" sz="6600" dirty="0"/>
-          </a:p>
-        </p:txBody>
-      </p:sp>
-      <p:sp>
-        <p:nvSpPr>
-          <p:cNvPr id="4" name="Text 1"/>
-          <p:cNvSpPr txBox="1"/>
-          <p:nvPr/>
-        </p:nvSpPr>
-        <p:spPr>
-          <a:xfrm>
-            <a:off x="731520" y="3611880"/>
-            <a:ext cx="10058400" cy="640080"/>
+              <a:t>Mandla</a:t>
+            </a:r>
+            <a:endParaRPr lang="en-US" sz="3200" dirty="0"/>
+          </a:p>
+        </p:txBody>
+      </p:sp>
+      <p:sp>
+        <p:nvSpPr>
+          <p:cNvPr id="8" name="Text 5"/>
+          <p:cNvSpPr txBox="1"/>
+          <p:nvPr/>
+        </p:nvSpPr>
+        <p:spPr>
+          <a:xfrm>
+            <a:off x="2423160" y="2788920"/>
+            <a:ext cx="3291840" cy="365760"/>
           </a:xfrm>
           <a:prstGeom prst="rect">
             <a:avLst/>
@@ -10541,7 +11223,161 @@
               <a:buNone/>
             </a:pPr>
             <a:r>
-              <a:rPr lang="en-US" sz="2800" i="1" dirty="0">
+              <a:rPr lang="en-US" sz="1600" b="1" dirty="0">
+                <a:solidFill>
+                  <a:srgbClr val="F8FAFC"/>
+                </a:solidFill>
+                <a:latin typeface="Calibri" pitchFamily="34" charset="0"/>
+                <a:ea typeface="Calibri" pitchFamily="34" charset="-122"/>
+                <a:cs typeface="Calibri" pitchFamily="34" charset="-120"/>
+              </a:rPr>
+              <a:t>Team lead</a:t>
+            </a:r>
+            <a:endParaRPr lang="en-US" sz="1600" dirty="0"/>
+          </a:p>
+        </p:txBody>
+      </p:sp>
+      <p:sp>
+        <p:nvSpPr>
+          <p:cNvPr id="9" name="Text 6"/>
+          <p:cNvSpPr txBox="1"/>
+          <p:nvPr/>
+        </p:nvSpPr>
+        <p:spPr>
+          <a:xfrm>
+            <a:off x="2423160" y="3200400"/>
+            <a:ext cx="3291840" cy="1280160"/>
+          </a:xfrm>
+          <a:prstGeom prst="rect">
+            <a:avLst/>
+          </a:prstGeom>
+          <a:noFill/>
+          <a:ln/>
+        </p:spPr>
+        <p:txBody>
+          <a:bodyPr wrap="square" lIns="0" tIns="0" rIns="0" bIns="0" rtlCol="0" anchor="t"/>
+          <a:lstStyle/>
+          <a:p>
+            <a:pPr indent="0" marL="0">
+              <a:buNone/>
+            </a:pPr>
+            <a:r>
+              <a:rPr lang="en-US" sz="1500" dirty="0">
+                <a:solidFill>
+                  <a:srgbClr val="A3B3C9"/>
+                </a:solidFill>
+                <a:latin typeface="Calibri" pitchFamily="34" charset="0"/>
+                <a:ea typeface="Calibri" pitchFamily="34" charset="-122"/>
+                <a:cs typeface="Calibri" pitchFamily="34" charset="-120"/>
+              </a:rPr>
+              <a:t>Product, backend, payments and the supplier engine</a:t>
+            </a:r>
+            <a:endParaRPr lang="en-US" sz="1500" dirty="0"/>
+          </a:p>
+        </p:txBody>
+      </p:sp>
+      <p:sp>
+        <p:nvSpPr>
+          <p:cNvPr id="10" name="Shape 7"/>
+          <p:cNvSpPr/>
+          <p:nvPr/>
+        </p:nvSpPr>
+        <p:spPr>
+          <a:xfrm>
+            <a:off x="6172200" y="1783080"/>
+            <a:ext cx="5349240" cy="2926080"/>
+          </a:xfrm>
+          <a:prstGeom prst="roundRect">
+            <a:avLst>
+              <a:gd name="adj" fmla="val 3750"/>
+            </a:avLst>
+          </a:prstGeom>
+          <a:solidFill>
+            <a:srgbClr val="17223A"/>
+          </a:solidFill>
+          <a:ln w="12700">
+            <a:solidFill>
+              <a:srgbClr val="17223A"/>
+            </a:solidFill>
+            <a:prstDash val="solid"/>
+          </a:ln>
+        </p:spPr>
+      </p:sp>
+      <p:sp>
+        <p:nvSpPr>
+          <p:cNvPr id="11" name="Shape 8"/>
+          <p:cNvSpPr/>
+          <p:nvPr/>
+        </p:nvSpPr>
+        <p:spPr>
+          <a:xfrm>
+            <a:off x="6537960" y="2103120"/>
+            <a:ext cx="1234440" cy="1234440"/>
+          </a:xfrm>
+          <a:prstGeom prst="ellipse">
+            <a:avLst/>
+          </a:prstGeom>
+          <a:solidFill>
+            <a:srgbClr val="1E2B45"/>
+          </a:solidFill>
+          <a:ln w="19050">
+            <a:solidFill>
+              <a:srgbClr val="FBBF24"/>
+            </a:solidFill>
+            <a:prstDash val="solid"/>
+          </a:ln>
+        </p:spPr>
+      </p:sp>
+      <p:pic>
+        <p:nvPicPr>
+          <p:cNvPr id="12" name="Image 1" descr="preencoded.png">    </p:cNvPr>
+          <p:cNvPicPr>
+            <a:picLocks noChangeAspect="1"/>
+          </p:cNvPicPr>
+          <p:nvPr/>
+        </p:nvPicPr>
+        <p:blipFill>
+          <a:blip r:embed="rId2"/>
+          <a:stretch>
+            <a:fillRect/>
+          </a:stretch>
+        </p:blipFill>
+        <p:spPr>
+          <a:xfrm>
+            <a:off x="6834226" y="2399386"/>
+            <a:ext cx="641909" cy="641909"/>
+          </a:xfrm>
+          <a:prstGeom prst="rect">
+            <a:avLst/>
+          </a:prstGeom>
+        </p:spPr>
+      </p:pic>
+      <p:sp>
+        <p:nvSpPr>
+          <p:cNvPr id="13" name="Text 9"/>
+          <p:cNvSpPr txBox="1"/>
+          <p:nvPr/>
+        </p:nvSpPr>
+        <p:spPr>
+          <a:xfrm>
+            <a:off x="8046720" y="2148840"/>
+            <a:ext cx="3291840" cy="640080"/>
+          </a:xfrm>
+          <a:prstGeom prst="rect">
+            <a:avLst/>
+          </a:prstGeom>
+          <a:noFill/>
+          <a:ln/>
+        </p:spPr>
+        <p:txBody>
+          <a:bodyPr wrap="square" lIns="0" tIns="0" rIns="0" bIns="0" rtlCol="0" anchor="t"/>
+          <a:lstStyle/>
+          <a:p>
+            <a:pPr indent="0" marL="0">
+              <a:buNone/>
+            </a:pPr>
+            <a:r>
+              <a:rPr lang="en-US" sz="3200" b="1" dirty="0">
                 <a:solidFill>
                   <a:srgbClr val="FBBF24"/>
                 </a:solidFill>
@@ -10549,22 +11385,22 @@
                 <a:ea typeface="Georgia" pitchFamily="34" charset="-122"/>
                 <a:cs typeface="Georgia" pitchFamily="34" charset="-120"/>
               </a:rPr>
-              <a:t>Keep it in the kasi.</a:t>
-            </a:r>
-            <a:endParaRPr lang="en-US" sz="2800" dirty="0"/>
-          </a:p>
-        </p:txBody>
-      </p:sp>
-      <p:sp>
-        <p:nvSpPr>
-          <p:cNvPr id="5" name="Text 2"/>
-          <p:cNvSpPr txBox="1"/>
-          <p:nvPr/>
-        </p:nvSpPr>
-        <p:spPr>
-          <a:xfrm>
-            <a:off x="731520" y="4526280"/>
-            <a:ext cx="10515600" cy="457200"/>
+              <a:t>Risuna</a:t>
+            </a:r>
+            <a:endParaRPr lang="en-US" sz="3200" dirty="0"/>
+          </a:p>
+        </p:txBody>
+      </p:sp>
+      <p:sp>
+        <p:nvSpPr>
+          <p:cNvPr id="14" name="Text 10"/>
+          <p:cNvSpPr txBox="1"/>
+          <p:nvPr/>
+        </p:nvSpPr>
+        <p:spPr>
+          <a:xfrm>
+            <a:off x="8046720" y="2788920"/>
+            <a:ext cx="3291840" cy="365760"/>
           </a:xfrm>
           <a:prstGeom prst="rect">
             <a:avLst/>
@@ -10580,30 +11416,30 @@
               <a:buNone/>
             </a:pPr>
             <a:r>
-              <a:rPr lang="en-US" sz="2000" b="1" dirty="0">
-                <a:solidFill>
-                  <a:srgbClr val="34D399"/>
+              <a:rPr lang="en-US" sz="1600" b="1" dirty="0">
+                <a:solidFill>
+                  <a:srgbClr val="F8FAFC"/>
                 </a:solidFill>
                 <a:latin typeface="Calibri" pitchFamily="34" charset="0"/>
                 <a:ea typeface="Calibri" pitchFamily="34" charset="-122"/>
                 <a:cs typeface="Calibri" pitchFamily="34" charset="-120"/>
               </a:rPr>
-              <a:t>R300,000  ·  6-month pilot  ·  making informal businesses visible</a:t>
-            </a:r>
-            <a:endParaRPr lang="en-US" sz="2000" dirty="0"/>
-          </a:p>
-        </p:txBody>
-      </p:sp>
-      <p:sp>
-        <p:nvSpPr>
-          <p:cNvPr id="6" name="Text 3"/>
-          <p:cNvSpPr txBox="1"/>
-          <p:nvPr/>
-        </p:nvSpPr>
-        <p:spPr>
-          <a:xfrm>
-            <a:off x="731520" y="5669280"/>
-            <a:ext cx="10058400" cy="365760"/>
+              <a:t>Business tools</a:t>
+            </a:r>
+            <a:endParaRPr lang="en-US" sz="1600" dirty="0"/>
+          </a:p>
+        </p:txBody>
+      </p:sp>
+      <p:sp>
+        <p:nvSpPr>
+          <p:cNvPr id="15" name="Text 11"/>
+          <p:cNvSpPr txBox="1"/>
+          <p:nvPr/>
+        </p:nvSpPr>
+        <p:spPr>
+          <a:xfrm>
+            <a:off x="8046720" y="3200400"/>
+            <a:ext cx="3291840" cy="1280160"/>
           </a:xfrm>
           <a:prstGeom prst="rect">
             <a:avLst/>
@@ -10619,17 +11455,146 @@
               <a:buNone/>
             </a:pPr>
             <a:r>
-              <a:rPr lang="en-US" sz="1300" dirty="0">
-                <a:solidFill>
-                  <a:srgbClr val="64748B"/>
+              <a:rPr lang="en-US" sz="1500" dirty="0">
+                <a:solidFill>
+                  <a:srgbClr val="A3B3C9"/>
                 </a:solidFill>
                 <a:latin typeface="Calibri" pitchFamily="34" charset="0"/>
                 <a:ea typeface="Calibri" pitchFamily="34" charset="-122"/>
                 <a:cs typeface="Calibri" pitchFamily="34" charset="-120"/>
               </a:rPr>
-              <a:t>Akayza  ·  prepared by Team PR  ·  GKHack26</a:t>
-            </a:r>
-            <a:endParaRPr lang="en-US" sz="1300" dirty="0"/>
+              <a:t>Credit book, order book, jobs, builder network, notifications</a:t>
+            </a:r>
+            <a:endParaRPr lang="en-US" sz="1500" dirty="0"/>
+          </a:p>
+        </p:txBody>
+      </p:sp>
+      <p:sp>
+        <p:nvSpPr>
+          <p:cNvPr id="16" name="Shape 12"/>
+          <p:cNvSpPr/>
+          <p:nvPr/>
+        </p:nvSpPr>
+        <p:spPr>
+          <a:xfrm>
+            <a:off x="548640" y="4983480"/>
+            <a:ext cx="11064240" cy="1005840"/>
+          </a:xfrm>
+          <a:prstGeom prst="roundRect">
+            <a:avLst>
+              <a:gd name="adj" fmla="val 10909"/>
+            </a:avLst>
+          </a:prstGeom>
+          <a:solidFill>
+            <a:srgbClr val="1E2B45"/>
+          </a:solidFill>
+          <a:ln w="12700">
+            <a:solidFill>
+              <a:srgbClr val="1E2B45"/>
+            </a:solidFill>
+            <a:prstDash val="solid"/>
+          </a:ln>
+        </p:spPr>
+      </p:sp>
+      <p:sp>
+        <p:nvSpPr>
+          <p:cNvPr id="17" name="Text 13"/>
+          <p:cNvSpPr txBox="1"/>
+          <p:nvPr/>
+        </p:nvSpPr>
+        <p:spPr>
+          <a:xfrm>
+            <a:off x="868680" y="5230368"/>
+            <a:ext cx="10424160" cy="548640"/>
+          </a:xfrm>
+          <a:prstGeom prst="rect">
+            <a:avLst/>
+          </a:prstGeom>
+          <a:noFill/>
+          <a:ln/>
+        </p:spPr>
+        <p:txBody>
+          <a:bodyPr wrap="square" lIns="0" tIns="0" rIns="0" bIns="0" rtlCol="0" anchor="ctr"/>
+          <a:lstStyle/>
+          <a:p>
+            <a:pPr indent="0" marL="0">
+              <a:buNone/>
+            </a:pPr>
+            <a:r>
+              <a:rPr lang="en-US" sz="1600" dirty="0">
+                <a:solidFill>
+                  <a:srgbClr val="F8FAFC"/>
+                </a:solidFill>
+                <a:latin typeface="Calibri" pitchFamily="34" charset="0"/>
+                <a:ea typeface="Calibri" pitchFamily="34" charset="-122"/>
+                <a:cs typeface="Calibri" pitchFamily="34" charset="-120"/>
+              </a:rPr>
+              <a:t>Built this weekend, end to end: the app, the system behind it and real payments, with over 1,400 automated tests.</a:t>
+            </a:r>
+            <a:endParaRPr lang="en-US" sz="1600" dirty="0"/>
+          </a:p>
+        </p:txBody>
+      </p:sp>
+      <p:pic>
+        <p:nvPicPr>
+          <p:cNvPr id="18" name="Image 2" descr="preencoded.png">    </p:cNvPr>
+          <p:cNvPicPr>
+            <a:picLocks noChangeAspect="1"/>
+          </p:cNvPicPr>
+          <p:nvPr/>
+        </p:nvPicPr>
+        <p:blipFill>
+          <a:blip r:embed="rId3"/>
+          <a:stretch>
+            <a:fillRect/>
+          </a:stretch>
+        </p:blipFill>
+        <p:spPr>
+          <a:xfrm>
+            <a:off x="11231575" y="6291072"/>
+            <a:ext cx="384048" cy="384048"/>
+          </a:xfrm>
+          <a:prstGeom prst="rect">
+            <a:avLst/>
+          </a:prstGeom>
+        </p:spPr>
+      </p:pic>
+      <p:sp>
+        <p:nvSpPr>
+          <p:cNvPr id="19" name="Text 14"/>
+          <p:cNvSpPr txBox="1"/>
+          <p:nvPr/>
+        </p:nvSpPr>
+        <p:spPr>
+          <a:xfrm>
+            <a:off x="10682935" y="6355080"/>
+            <a:ext cx="457200" cy="274320"/>
+          </a:xfrm>
+          <a:prstGeom prst="rect">
+            <a:avLst/>
+          </a:prstGeom>
+          <a:noFill/>
+          <a:ln/>
+        </p:spPr>
+        <p:txBody>
+          <a:bodyPr wrap="square" lIns="0" tIns="0" rIns="0" bIns="0" rtlCol="0" anchor="t"/>
+          <a:lstStyle/>
+          <a:p>
+            <a:pPr algn="r" indent="0" marL="0">
+              <a:buNone/>
+            </a:pPr>
+            <a:r>
+              <a:rPr lang="en-US" sz="1000" dirty="0">
+                <a:solidFill>
+                  <a:srgbClr val="64748B"/>
+                </a:solidFill>
+                <a:latin typeface="Calibri" pitchFamily="34" charset="0"/>
+                <a:ea typeface="Calibri" pitchFamily="34" charset="-122"/>
+                <a:cs typeface="Calibri" pitchFamily="34" charset="-120"/>
+              </a:rPr>
+              <a:t>17</a:t>
+            </a:r>
+            <a:endParaRPr lang="en-US" sz="1000" dirty="0"/>
           </a:p>
         </p:txBody>
       </p:sp>
@@ -10665,87 +11630,9 @@
           <a:chExt cx="0" cy="0"/>
         </a:xfrm>
       </p:grpSpPr>
-      <p:sp>
-        <p:nvSpPr>
-          <p:cNvPr id="2" name="Text 0"/>
-          <p:cNvSpPr txBox="1"/>
-          <p:nvPr/>
-        </p:nvSpPr>
-        <p:spPr>
-          <a:xfrm>
-            <a:off x="548640" y="384048"/>
-            <a:ext cx="8229600" cy="320040"/>
-          </a:xfrm>
-          <a:prstGeom prst="rect">
-            <a:avLst/>
-          </a:prstGeom>
-          <a:noFill/>
-          <a:ln/>
-        </p:spPr>
-        <p:txBody>
-          <a:bodyPr wrap="square" lIns="0" tIns="0" rIns="0" bIns="0" rtlCol="0" anchor="t"/>
-          <a:lstStyle/>
-          <a:p>
-            <a:pPr indent="0" marL="0">
-              <a:buNone/>
-            </a:pPr>
-            <a:r>
-              <a:rPr lang="en-US" sz="1300" b="1" spc="300" kern="0" dirty="0">
-                <a:solidFill>
-                  <a:srgbClr val="10B981"/>
-                </a:solidFill>
-                <a:latin typeface="Calibri" pitchFamily="34" charset="0"/>
-                <a:ea typeface="Calibri" pitchFamily="34" charset="-122"/>
-                <a:cs typeface="Calibri" pitchFamily="34" charset="-120"/>
-              </a:rPr>
-              <a:t>APPENDIX</a:t>
-            </a:r>
-            <a:endParaRPr lang="en-US" sz="1300" dirty="0"/>
-          </a:p>
-        </p:txBody>
-      </p:sp>
-      <p:sp>
-        <p:nvSpPr>
-          <p:cNvPr id="3" name="Text 1"/>
-          <p:cNvSpPr txBox="1"/>
-          <p:nvPr/>
-        </p:nvSpPr>
-        <p:spPr>
-          <a:xfrm>
-            <a:off x="548640" y="731520"/>
-            <a:ext cx="11094415" cy="868680"/>
-          </a:xfrm>
-          <a:prstGeom prst="rect">
-            <a:avLst/>
-          </a:prstGeom>
-          <a:noFill/>
-          <a:ln/>
-        </p:spPr>
-        <p:txBody>
-          <a:bodyPr wrap="square" lIns="0" tIns="0" rIns="0" bIns="0" rtlCol="0" anchor="t"/>
-          <a:lstStyle/>
-          <a:p>
-            <a:pPr indent="0" marL="0">
-              <a:buNone/>
-            </a:pPr>
-            <a:r>
-              <a:rPr lang="en-US" sz="3400" b="1" dirty="0">
-                <a:solidFill>
-                  <a:srgbClr val="F8FAFC"/>
-                </a:solidFill>
-                <a:latin typeface="Georgia" pitchFamily="34" charset="0"/>
-                <a:ea typeface="Georgia" pitchFamily="34" charset="-122"/>
-                <a:cs typeface="Georgia" pitchFamily="34" charset="-120"/>
-              </a:rPr>
-              <a:t>How it's built</a:t>
-            </a:r>
-            <a:endParaRPr lang="en-US" sz="3400" dirty="0"/>
-          </a:p>
-        </p:txBody>
-      </p:sp>
       <p:pic>
         <p:nvPicPr>
-          <p:cNvPr id="4" name="Image 0" descr="preencoded.png">    </p:cNvPr>
+          <p:cNvPr id="2" name="Image 0" descr="preencoded.png">    </p:cNvPr>
           <p:cNvPicPr>
             <a:picLocks noChangeAspect="1"/>
           </p:cNvPicPr>
@@ -10759,8 +11646,8 @@
         </p:blipFill>
         <p:spPr>
           <a:xfrm>
-            <a:off x="11231575" y="6291072"/>
-            <a:ext cx="384048" cy="384048"/>
+            <a:off x="685800" y="960120"/>
+            <a:ext cx="1280160" cy="1280160"/>
           </a:xfrm>
           <a:prstGeom prst="rect">
             <a:avLst/>
@@ -10769,129 +11656,131 @@
       </p:pic>
       <p:sp>
         <p:nvSpPr>
+          <p:cNvPr id="3" name="Text 0"/>
+          <p:cNvSpPr txBox="1"/>
+          <p:nvPr/>
+        </p:nvSpPr>
+        <p:spPr>
+          <a:xfrm>
+            <a:off x="685800" y="2423160"/>
+            <a:ext cx="10058400" cy="1188720"/>
+          </a:xfrm>
+          <a:prstGeom prst="rect">
+            <a:avLst/>
+          </a:prstGeom>
+          <a:noFill/>
+          <a:ln/>
+        </p:spPr>
+        <p:txBody>
+          <a:bodyPr wrap="square" lIns="0" tIns="0" rIns="0" bIns="0" rtlCol="0" anchor="t"/>
+          <a:lstStyle/>
+          <a:p>
+            <a:pPr indent="0" marL="0">
+              <a:buNone/>
+            </a:pPr>
+            <a:r>
+              <a:rPr lang="en-US" sz="6600" b="1" dirty="0">
+                <a:solidFill>
+                  <a:srgbClr val="F8FAFC"/>
+                </a:solidFill>
+                <a:latin typeface="Georgia" pitchFamily="34" charset="0"/>
+                <a:ea typeface="Georgia" pitchFamily="34" charset="-122"/>
+                <a:cs typeface="Georgia" pitchFamily="34" charset="-120"/>
+              </a:rPr>
+              <a:t>Thank you</a:t>
+            </a:r>
+            <a:endParaRPr lang="en-US" sz="6600" dirty="0"/>
+          </a:p>
+        </p:txBody>
+      </p:sp>
+      <p:sp>
+        <p:nvSpPr>
+          <p:cNvPr id="4" name="Text 1"/>
+          <p:cNvSpPr txBox="1"/>
+          <p:nvPr/>
+        </p:nvSpPr>
+        <p:spPr>
+          <a:xfrm>
+            <a:off x="731520" y="3611880"/>
+            <a:ext cx="10058400" cy="640080"/>
+          </a:xfrm>
+          <a:prstGeom prst="rect">
+            <a:avLst/>
+          </a:prstGeom>
+          <a:noFill/>
+          <a:ln/>
+        </p:spPr>
+        <p:txBody>
+          <a:bodyPr wrap="square" lIns="0" tIns="0" rIns="0" bIns="0" rtlCol="0" anchor="t"/>
+          <a:lstStyle/>
+          <a:p>
+            <a:pPr indent="0" marL="0">
+              <a:buNone/>
+            </a:pPr>
+            <a:r>
+              <a:rPr lang="en-US" sz="2800" i="1" dirty="0">
+                <a:solidFill>
+                  <a:srgbClr val="FBBF24"/>
+                </a:solidFill>
+                <a:latin typeface="Georgia" pitchFamily="34" charset="0"/>
+                <a:ea typeface="Georgia" pitchFamily="34" charset="-122"/>
+                <a:cs typeface="Georgia" pitchFamily="34" charset="-120"/>
+              </a:rPr>
+              <a:t>Keep it in the kasi.</a:t>
+            </a:r>
+            <a:endParaRPr lang="en-US" sz="2800" dirty="0"/>
+          </a:p>
+        </p:txBody>
+      </p:sp>
+      <p:sp>
+        <p:nvSpPr>
           <p:cNvPr id="5" name="Text 2"/>
           <p:cNvSpPr txBox="1"/>
           <p:nvPr/>
         </p:nvSpPr>
         <p:spPr>
           <a:xfrm>
-            <a:off x="10682935" y="6355080"/>
-            <a:ext cx="457200" cy="274320"/>
-          </a:xfrm>
-          <a:prstGeom prst="rect">
-            <a:avLst/>
-          </a:prstGeom>
-          <a:noFill/>
-          <a:ln/>
-        </p:spPr>
-        <p:txBody>
-          <a:bodyPr wrap="square" lIns="0" tIns="0" rIns="0" bIns="0" rtlCol="0" anchor="t"/>
-          <a:lstStyle/>
-          <a:p>
-            <a:pPr algn="r" indent="0" marL="0">
-              <a:buNone/>
-            </a:pPr>
-            <a:r>
-              <a:rPr lang="en-US" sz="1000" dirty="0">
-                <a:solidFill>
-                  <a:srgbClr val="64748B"/>
+            <a:off x="731520" y="4526280"/>
+            <a:ext cx="10515600" cy="457200"/>
+          </a:xfrm>
+          <a:prstGeom prst="rect">
+            <a:avLst/>
+          </a:prstGeom>
+          <a:noFill/>
+          <a:ln/>
+        </p:spPr>
+        <p:txBody>
+          <a:bodyPr wrap="square" lIns="0" tIns="0" rIns="0" bIns="0" rtlCol="0" anchor="t"/>
+          <a:lstStyle/>
+          <a:p>
+            <a:pPr indent="0" marL="0">
+              <a:buNone/>
+            </a:pPr>
+            <a:r>
+              <a:rPr lang="en-US" sz="2000" b="1" dirty="0">
+                <a:solidFill>
+                  <a:srgbClr val="34D399"/>
                 </a:solidFill>
                 <a:latin typeface="Calibri" pitchFamily="34" charset="0"/>
                 <a:ea typeface="Calibri" pitchFamily="34" charset="-122"/>
                 <a:cs typeface="Calibri" pitchFamily="34" charset="-120"/>
               </a:rPr>
-              <a:t>18</a:t>
-            </a:r>
-            <a:endParaRPr lang="en-US" sz="1000" dirty="0"/>
-          </a:p>
-        </p:txBody>
-      </p:sp>
-      <p:sp>
-        <p:nvSpPr>
-          <p:cNvPr id="6" name="Shape 3"/>
-          <p:cNvSpPr/>
-          <p:nvPr/>
-        </p:nvSpPr>
-        <p:spPr>
-          <a:xfrm>
-            <a:off x="548640" y="1783080"/>
-            <a:ext cx="3291840" cy="1920240"/>
-          </a:xfrm>
-          <a:prstGeom prst="roundRect">
-            <a:avLst>
-              <a:gd name="adj" fmla="val 5714"/>
-            </a:avLst>
-          </a:prstGeom>
-          <a:solidFill>
-            <a:srgbClr val="17223A"/>
-          </a:solidFill>
-          <a:ln w="12700">
-            <a:solidFill>
-              <a:srgbClr val="17223A"/>
-            </a:solidFill>
-            <a:prstDash val="solid"/>
-          </a:ln>
-        </p:spPr>
-      </p:sp>
-      <p:sp>
-        <p:nvSpPr>
-          <p:cNvPr id="7" name="Shape 4"/>
-          <p:cNvSpPr/>
-          <p:nvPr/>
-        </p:nvSpPr>
-        <p:spPr>
-          <a:xfrm>
-            <a:off x="777240" y="2039112"/>
-            <a:ext cx="640080" cy="640080"/>
-          </a:xfrm>
-          <a:prstGeom prst="ellipse">
-            <a:avLst/>
-          </a:prstGeom>
-          <a:solidFill>
-            <a:srgbClr val="1E2B45"/>
-          </a:solidFill>
-          <a:ln w="19050">
-            <a:solidFill>
-              <a:srgbClr val="10B981"/>
-            </a:solidFill>
-            <a:prstDash val="solid"/>
-          </a:ln>
-        </p:spPr>
-      </p:sp>
-      <p:pic>
-        <p:nvPicPr>
-          <p:cNvPr id="8" name="Image 1" descr="preencoded.png">    </p:cNvPr>
-          <p:cNvPicPr>
-            <a:picLocks noChangeAspect="1"/>
-          </p:cNvPicPr>
-          <p:nvPr/>
-        </p:nvPicPr>
-        <p:blipFill>
-          <a:blip r:embed="rId2"/>
-          <a:stretch>
-            <a:fillRect/>
-          </a:stretch>
-        </p:blipFill>
-        <p:spPr>
-          <a:xfrm>
-            <a:off x="930859" y="2192731"/>
-            <a:ext cx="332842" cy="332842"/>
-          </a:xfrm>
-          <a:prstGeom prst="rect">
-            <a:avLst/>
-          </a:prstGeom>
-        </p:spPr>
-      </p:pic>
-      <p:sp>
-        <p:nvSpPr>
-          <p:cNvPr id="9" name="Text 5"/>
-          <p:cNvSpPr txBox="1"/>
-          <p:nvPr/>
-        </p:nvSpPr>
-        <p:spPr>
-          <a:xfrm>
-            <a:off x="1554480" y="2039112"/>
-            <a:ext cx="2103120" cy="365760"/>
+              <a:t>R300,000  ·  6-month pilot  ·  making informal businesses visible</a:t>
+            </a:r>
+            <a:endParaRPr lang="en-US" sz="2000" dirty="0"/>
+          </a:p>
+        </p:txBody>
+      </p:sp>
+      <p:sp>
+        <p:nvSpPr>
+          <p:cNvPr id="6" name="Text 3"/>
+          <p:cNvSpPr txBox="1"/>
+          <p:nvPr/>
+        </p:nvSpPr>
+        <p:spPr>
+          <a:xfrm>
+            <a:off x="731520" y="5669280"/>
+            <a:ext cx="10058400" cy="365760"/>
           </a:xfrm>
           <a:prstGeom prst="rect">
             <a:avLst/>
@@ -10907,1028 +11796,15 @@
               <a:buNone/>
             </a:pPr>
             <a:r>
-              <a:rPr lang="en-US" sz="1800" b="1" dirty="0">
-                <a:solidFill>
-                  <a:srgbClr val="10B981"/>
+              <a:rPr lang="en-US" sz="1300" dirty="0">
+                <a:solidFill>
+                  <a:srgbClr val="64748B"/>
                 </a:solidFill>
                 <a:latin typeface="Calibri" pitchFamily="34" charset="0"/>
                 <a:ea typeface="Calibri" pitchFamily="34" charset="-122"/>
                 <a:cs typeface="Calibri" pitchFamily="34" charset="-120"/>
               </a:rPr>
-              <a:t>Mobile app</a:t>
-            </a:r>
-            <a:endParaRPr lang="en-US" sz="1800" dirty="0"/>
-          </a:p>
-        </p:txBody>
-      </p:sp>
-      <p:sp>
-        <p:nvSpPr>
-          <p:cNvPr id="10" name="Text 6"/>
-          <p:cNvSpPr txBox="1"/>
-          <p:nvPr/>
-        </p:nvSpPr>
-        <p:spPr>
-          <a:xfrm>
-            <a:off x="1554480" y="2468880"/>
-            <a:ext cx="2103120" cy="1143000"/>
-          </a:xfrm>
-          <a:prstGeom prst="rect">
-            <a:avLst/>
-          </a:prstGeom>
-          <a:noFill/>
-          <a:ln/>
-        </p:spPr>
-        <p:txBody>
-          <a:bodyPr wrap="square" lIns="0" tIns="0" rIns="0" bIns="0" rtlCol="0" anchor="t"/>
-          <a:lstStyle/>
-          <a:p>
-            <a:pPr indent="0" marL="0">
-              <a:buNone/>
-            </a:pPr>
-            <a:r>
-              <a:rPr lang="en-US" sz="1350" dirty="0">
-                <a:solidFill>
-                  <a:srgbClr val="A3B3C9"/>
-                </a:solidFill>
-                <a:latin typeface="Calibri" pitchFamily="34" charset="0"/>
-                <a:ea typeface="Calibri" pitchFamily="34" charset="-122"/>
-                <a:cs typeface="Calibri" pitchFamily="34" charset="-120"/>
-              </a:rPr>
-              <a:t>React Native + Expo (TypeScript). Android first. Secure sign-in storage; works offline at the counter.</a:t>
-            </a:r>
-            <a:endParaRPr lang="en-US" sz="1350" dirty="0"/>
-          </a:p>
-        </p:txBody>
-      </p:sp>
-      <p:sp>
-        <p:nvSpPr>
-          <p:cNvPr id="11" name="Shape 7"/>
-          <p:cNvSpPr/>
-          <p:nvPr/>
-        </p:nvSpPr>
-        <p:spPr>
-          <a:xfrm>
-            <a:off x="4434840" y="1783080"/>
-            <a:ext cx="3291840" cy="1920240"/>
-          </a:xfrm>
-          <a:prstGeom prst="roundRect">
-            <a:avLst>
-              <a:gd name="adj" fmla="val 5714"/>
-            </a:avLst>
-          </a:prstGeom>
-          <a:solidFill>
-            <a:srgbClr val="17223A"/>
-          </a:solidFill>
-          <a:ln w="12700">
-            <a:solidFill>
-              <a:srgbClr val="17223A"/>
-            </a:solidFill>
-            <a:prstDash val="solid"/>
-          </a:ln>
-        </p:spPr>
-      </p:sp>
-      <p:sp>
-        <p:nvSpPr>
-          <p:cNvPr id="12" name="Shape 8"/>
-          <p:cNvSpPr/>
-          <p:nvPr/>
-        </p:nvSpPr>
-        <p:spPr>
-          <a:xfrm>
-            <a:off x="4663440" y="2039112"/>
-            <a:ext cx="640080" cy="640080"/>
-          </a:xfrm>
-          <a:prstGeom prst="ellipse">
-            <a:avLst/>
-          </a:prstGeom>
-          <a:solidFill>
-            <a:srgbClr val="1E2B45"/>
-          </a:solidFill>
-          <a:ln w="19050">
-            <a:solidFill>
-              <a:srgbClr val="FBBF24"/>
-            </a:solidFill>
-            <a:prstDash val="solid"/>
-          </a:ln>
-        </p:spPr>
-      </p:sp>
-      <p:pic>
-        <p:nvPicPr>
-          <p:cNvPr id="13" name="Image 2" descr="preencoded.png">    </p:cNvPr>
-          <p:cNvPicPr>
-            <a:picLocks noChangeAspect="1"/>
-          </p:cNvPicPr>
-          <p:nvPr/>
-        </p:nvPicPr>
-        <p:blipFill>
-          <a:blip r:embed="rId3"/>
-          <a:stretch>
-            <a:fillRect/>
-          </a:stretch>
-        </p:blipFill>
-        <p:spPr>
-          <a:xfrm>
-            <a:off x="4817059" y="2192731"/>
-            <a:ext cx="332842" cy="332842"/>
-          </a:xfrm>
-          <a:prstGeom prst="rect">
-            <a:avLst/>
-          </a:prstGeom>
-        </p:spPr>
-      </p:pic>
-      <p:sp>
-        <p:nvSpPr>
-          <p:cNvPr id="14" name="Text 9"/>
-          <p:cNvSpPr txBox="1"/>
-          <p:nvPr/>
-        </p:nvSpPr>
-        <p:spPr>
-          <a:xfrm>
-            <a:off x="5440680" y="2039112"/>
-            <a:ext cx="2103120" cy="365760"/>
-          </a:xfrm>
-          <a:prstGeom prst="rect">
-            <a:avLst/>
-          </a:prstGeom>
-          <a:noFill/>
-          <a:ln/>
-        </p:spPr>
-        <p:txBody>
-          <a:bodyPr wrap="square" lIns="0" tIns="0" rIns="0" bIns="0" rtlCol="0" anchor="t"/>
-          <a:lstStyle/>
-          <a:p>
-            <a:pPr indent="0" marL="0">
-              <a:buNone/>
-            </a:pPr>
-            <a:r>
-              <a:rPr lang="en-US" sz="1800" b="1" dirty="0">
-                <a:solidFill>
-                  <a:srgbClr val="FBBF24"/>
-                </a:solidFill>
-                <a:latin typeface="Calibri" pitchFamily="34" charset="0"/>
-                <a:ea typeface="Calibri" pitchFamily="34" charset="-122"/>
-                <a:cs typeface="Calibri" pitchFamily="34" charset="-120"/>
-              </a:rPr>
-              <a:t>API</a:t>
-            </a:r>
-            <a:endParaRPr lang="en-US" sz="1800" dirty="0"/>
-          </a:p>
-        </p:txBody>
-      </p:sp>
-      <p:sp>
-        <p:nvSpPr>
-          <p:cNvPr id="15" name="Text 10"/>
-          <p:cNvSpPr txBox="1"/>
-          <p:nvPr/>
-        </p:nvSpPr>
-        <p:spPr>
-          <a:xfrm>
-            <a:off x="5440680" y="2468880"/>
-            <a:ext cx="2103120" cy="1143000"/>
-          </a:xfrm>
-          <a:prstGeom prst="rect">
-            <a:avLst/>
-          </a:prstGeom>
-          <a:noFill/>
-          <a:ln/>
-        </p:spPr>
-        <p:txBody>
-          <a:bodyPr wrap="square" lIns="0" tIns="0" rIns="0" bIns="0" rtlCol="0" anchor="t"/>
-          <a:lstStyle/>
-          <a:p>
-            <a:pPr indent="0" marL="0">
-              <a:buNone/>
-            </a:pPr>
-            <a:r>
-              <a:rPr lang="en-US" sz="1350" dirty="0">
-                <a:solidFill>
-                  <a:srgbClr val="A3B3C9"/>
-                </a:solidFill>
-                <a:latin typeface="Calibri" pitchFamily="34" charset="0"/>
-                <a:ea typeface="Calibri" pitchFamily="34" charset="-122"/>
-                <a:cs typeface="Calibri" pitchFamily="34" charset="-120"/>
-              </a:rPr>
-              <a:t>Python + Flask. Strict input checks, rate limits, orders that can't double. Rule-based supplier engine.</a:t>
-            </a:r>
-            <a:endParaRPr lang="en-US" sz="1350" dirty="0"/>
-          </a:p>
-        </p:txBody>
-      </p:sp>
-      <p:sp>
-        <p:nvSpPr>
-          <p:cNvPr id="16" name="Shape 11"/>
-          <p:cNvSpPr/>
-          <p:nvPr/>
-        </p:nvSpPr>
-        <p:spPr>
-          <a:xfrm>
-            <a:off x="8321040" y="1783080"/>
-            <a:ext cx="3291840" cy="1920240"/>
-          </a:xfrm>
-          <a:prstGeom prst="roundRect">
-            <a:avLst>
-              <a:gd name="adj" fmla="val 5714"/>
-            </a:avLst>
-          </a:prstGeom>
-          <a:solidFill>
-            <a:srgbClr val="17223A"/>
-          </a:solidFill>
-          <a:ln w="12700">
-            <a:solidFill>
-              <a:srgbClr val="17223A"/>
-            </a:solidFill>
-            <a:prstDash val="solid"/>
-          </a:ln>
-        </p:spPr>
-      </p:sp>
-      <p:sp>
-        <p:nvSpPr>
-          <p:cNvPr id="17" name="Shape 12"/>
-          <p:cNvSpPr/>
-          <p:nvPr/>
-        </p:nvSpPr>
-        <p:spPr>
-          <a:xfrm>
-            <a:off x="8549640" y="2039112"/>
-            <a:ext cx="640080" cy="640080"/>
-          </a:xfrm>
-          <a:prstGeom prst="ellipse">
-            <a:avLst/>
-          </a:prstGeom>
-          <a:solidFill>
-            <a:srgbClr val="1E2B45"/>
-          </a:solidFill>
-          <a:ln w="19050">
-            <a:solidFill>
-              <a:srgbClr val="34D399"/>
-            </a:solidFill>
-            <a:prstDash val="solid"/>
-          </a:ln>
-        </p:spPr>
-      </p:sp>
-      <p:pic>
-        <p:nvPicPr>
-          <p:cNvPr id="18" name="Image 3" descr="preencoded.png">    </p:cNvPr>
-          <p:cNvPicPr>
-            <a:picLocks noChangeAspect="1"/>
-          </p:cNvPicPr>
-          <p:nvPr/>
-        </p:nvPicPr>
-        <p:blipFill>
-          <a:blip r:embed="rId4"/>
-          <a:stretch>
-            <a:fillRect/>
-          </a:stretch>
-        </p:blipFill>
-        <p:spPr>
-          <a:xfrm>
-            <a:off x="8703259" y="2192731"/>
-            <a:ext cx="332842" cy="332842"/>
-          </a:xfrm>
-          <a:prstGeom prst="rect">
-            <a:avLst/>
-          </a:prstGeom>
-        </p:spPr>
-      </p:pic>
-      <p:sp>
-        <p:nvSpPr>
-          <p:cNvPr id="19" name="Text 13"/>
-          <p:cNvSpPr txBox="1"/>
-          <p:nvPr/>
-        </p:nvSpPr>
-        <p:spPr>
-          <a:xfrm>
-            <a:off x="9326880" y="2039112"/>
-            <a:ext cx="2103120" cy="365760"/>
-          </a:xfrm>
-          <a:prstGeom prst="rect">
-            <a:avLst/>
-          </a:prstGeom>
-          <a:noFill/>
-          <a:ln/>
-        </p:spPr>
-        <p:txBody>
-          <a:bodyPr wrap="square" lIns="0" tIns="0" rIns="0" bIns="0" rtlCol="0" anchor="t"/>
-          <a:lstStyle/>
-          <a:p>
-            <a:pPr indent="0" marL="0">
-              <a:buNone/>
-            </a:pPr>
-            <a:r>
-              <a:rPr lang="en-US" sz="1800" b="1" dirty="0">
-                <a:solidFill>
-                  <a:srgbClr val="34D399"/>
-                </a:solidFill>
-                <a:latin typeface="Calibri" pitchFamily="34" charset="0"/>
-                <a:ea typeface="Calibri" pitchFamily="34" charset="-122"/>
-                <a:cs typeface="Calibri" pitchFamily="34" charset="-120"/>
-              </a:rPr>
-              <a:t>Database</a:t>
-            </a:r>
-            <a:endParaRPr lang="en-US" sz="1800" dirty="0"/>
-          </a:p>
-        </p:txBody>
-      </p:sp>
-      <p:sp>
-        <p:nvSpPr>
-          <p:cNvPr id="20" name="Text 14"/>
-          <p:cNvSpPr txBox="1"/>
-          <p:nvPr/>
-        </p:nvSpPr>
-        <p:spPr>
-          <a:xfrm>
-            <a:off x="9326880" y="2468880"/>
-            <a:ext cx="2103120" cy="1143000"/>
-          </a:xfrm>
-          <a:prstGeom prst="rect">
-            <a:avLst/>
-          </a:prstGeom>
-          <a:noFill/>
-          <a:ln/>
-        </p:spPr>
-        <p:txBody>
-          <a:bodyPr wrap="square" lIns="0" tIns="0" rIns="0" bIns="0" rtlCol="0" anchor="t"/>
-          <a:lstStyle/>
-          <a:p>
-            <a:pPr indent="0" marL="0">
-              <a:buNone/>
-            </a:pPr>
-            <a:r>
-              <a:rPr lang="en-US" sz="1350" dirty="0">
-                <a:solidFill>
-                  <a:srgbClr val="A3B3C9"/>
-                </a:solidFill>
-                <a:latin typeface="Calibri" pitchFamily="34" charset="0"/>
-                <a:ea typeface="Calibri" pitchFamily="34" charset="-122"/>
-                <a:cs typeface="Calibri" pitchFamily="34" charset="-120"/>
-              </a:rPr>
-              <a:t>PostgreSQL, one area per schema, versioned migrations, audit trail with no personal data.</a:t>
-            </a:r>
-            <a:endParaRPr lang="en-US" sz="1350" dirty="0"/>
-          </a:p>
-        </p:txBody>
-      </p:sp>
-      <p:sp>
-        <p:nvSpPr>
-          <p:cNvPr id="21" name="Shape 15"/>
-          <p:cNvSpPr/>
-          <p:nvPr/>
-        </p:nvSpPr>
-        <p:spPr>
-          <a:xfrm>
-            <a:off x="3886200" y="2743200"/>
-            <a:ext cx="502920" cy="0"/>
-          </a:xfrm>
-          <a:prstGeom prst="line">
-            <a:avLst/>
-          </a:prstGeom>
-          <a:noFill/>
-          <a:ln w="25400">
-            <a:solidFill>
-              <a:srgbClr val="10B981"/>
-            </a:solidFill>
-            <a:prstDash val="solid"/>
-            <a:headEnd type="triangle"/>
-            <a:tailEnd type="triangle"/>
-          </a:ln>
-        </p:spPr>
-      </p:sp>
-      <p:sp>
-        <p:nvSpPr>
-          <p:cNvPr id="22" name="Shape 16"/>
-          <p:cNvSpPr/>
-          <p:nvPr/>
-        </p:nvSpPr>
-        <p:spPr>
-          <a:xfrm>
-            <a:off x="7772400" y="2743200"/>
-            <a:ext cx="502920" cy="0"/>
-          </a:xfrm>
-          <a:prstGeom prst="line">
-            <a:avLst/>
-          </a:prstGeom>
-          <a:noFill/>
-          <a:ln w="25400">
-            <a:solidFill>
-              <a:srgbClr val="10B981"/>
-            </a:solidFill>
-            <a:prstDash val="solid"/>
-            <a:headEnd type="triangle"/>
-            <a:tailEnd type="triangle"/>
-          </a:ln>
-        </p:spPr>
-      </p:sp>
-      <p:sp>
-        <p:nvSpPr>
-          <p:cNvPr id="23" name="Shape 17"/>
-          <p:cNvSpPr/>
-          <p:nvPr/>
-        </p:nvSpPr>
-        <p:spPr>
-          <a:xfrm>
-            <a:off x="548640" y="4160520"/>
-            <a:ext cx="2606040" cy="1554480"/>
-          </a:xfrm>
-          <a:prstGeom prst="roundRect">
-            <a:avLst>
-              <a:gd name="adj" fmla="val 7059"/>
-            </a:avLst>
-          </a:prstGeom>
-          <a:solidFill>
-            <a:srgbClr val="1E2B45"/>
-          </a:solidFill>
-          <a:ln w="12700">
-            <a:solidFill>
-              <a:srgbClr val="1E2B45"/>
-            </a:solidFill>
-            <a:prstDash val="solid"/>
-          </a:ln>
-        </p:spPr>
-      </p:sp>
-      <p:sp>
-        <p:nvSpPr>
-          <p:cNvPr id="24" name="Shape 18"/>
-          <p:cNvSpPr/>
-          <p:nvPr/>
-        </p:nvSpPr>
-        <p:spPr>
-          <a:xfrm>
-            <a:off x="749808" y="4370832"/>
-            <a:ext cx="566928" cy="566928"/>
-          </a:xfrm>
-          <a:prstGeom prst="ellipse">
-            <a:avLst/>
-          </a:prstGeom>
-          <a:solidFill>
-            <a:srgbClr val="1E2B45"/>
-          </a:solidFill>
-          <a:ln w="19050">
-            <a:solidFill>
-              <a:srgbClr val="10B981"/>
-            </a:solidFill>
-            <a:prstDash val="solid"/>
-          </a:ln>
-        </p:spPr>
-      </p:sp>
-      <p:pic>
-        <p:nvPicPr>
-          <p:cNvPr id="25" name="Image 4" descr="preencoded.png">    </p:cNvPr>
-          <p:cNvPicPr>
-            <a:picLocks noChangeAspect="1"/>
-          </p:cNvPicPr>
-          <p:nvPr/>
-        </p:nvPicPr>
-        <p:blipFill>
-          <a:blip r:embed="rId5"/>
-          <a:stretch>
-            <a:fillRect/>
-          </a:stretch>
-        </p:blipFill>
-        <p:spPr>
-          <a:xfrm>
-            <a:off x="885871" y="4506895"/>
-            <a:ext cx="294803" cy="294803"/>
-          </a:xfrm>
-          <a:prstGeom prst="rect">
-            <a:avLst/>
-          </a:prstGeom>
-        </p:spPr>
-      </p:pic>
-      <p:sp>
-        <p:nvSpPr>
-          <p:cNvPr id="26" name="Text 19"/>
-          <p:cNvSpPr txBox="1"/>
-          <p:nvPr/>
-        </p:nvSpPr>
-        <p:spPr>
-          <a:xfrm>
-            <a:off x="1463040" y="4462272"/>
-            <a:ext cx="1645920" cy="365760"/>
-          </a:xfrm>
-          <a:prstGeom prst="rect">
-            <a:avLst/>
-          </a:prstGeom>
-          <a:noFill/>
-          <a:ln/>
-        </p:spPr>
-        <p:txBody>
-          <a:bodyPr wrap="square" lIns="0" tIns="0" rIns="0" bIns="0" rtlCol="0" anchor="t"/>
-          <a:lstStyle/>
-          <a:p>
-            <a:pPr indent="0" marL="0">
-              <a:buNone/>
-            </a:pPr>
-            <a:r>
-              <a:rPr lang="en-US" sz="1500" b="1" dirty="0">
-                <a:solidFill>
-                  <a:srgbClr val="F8FAFC"/>
-                </a:solidFill>
-                <a:latin typeface="Calibri" pitchFamily="34" charset="0"/>
-                <a:ea typeface="Calibri" pitchFamily="34" charset="-122"/>
-                <a:cs typeface="Calibri" pitchFamily="34" charset="-120"/>
-              </a:rPr>
-              <a:t>PayFast</a:t>
-            </a:r>
-            <a:endParaRPr lang="en-US" sz="1500" dirty="0"/>
-          </a:p>
-        </p:txBody>
-      </p:sp>
-      <p:sp>
-        <p:nvSpPr>
-          <p:cNvPr id="27" name="Text 20"/>
-          <p:cNvSpPr txBox="1"/>
-          <p:nvPr/>
-        </p:nvSpPr>
-        <p:spPr>
-          <a:xfrm>
-            <a:off x="749808" y="5074920"/>
-            <a:ext cx="2240280" cy="548640"/>
-          </a:xfrm>
-          <a:prstGeom prst="rect">
-            <a:avLst/>
-          </a:prstGeom>
-          <a:noFill/>
-          <a:ln/>
-        </p:spPr>
-        <p:txBody>
-          <a:bodyPr wrap="square" lIns="0" tIns="0" rIns="0" bIns="0" rtlCol="0" anchor="t"/>
-          <a:lstStyle/>
-          <a:p>
-            <a:pPr indent="0" marL="0">
-              <a:buNone/>
-            </a:pPr>
-            <a:r>
-              <a:rPr lang="en-US" sz="1300" dirty="0">
-                <a:solidFill>
-                  <a:srgbClr val="A3B3C9"/>
-                </a:solidFill>
-                <a:latin typeface="Calibri" pitchFamily="34" charset="0"/>
-                <a:ea typeface="Calibri" pitchFamily="34" charset="-122"/>
-                <a:cs typeface="Calibri" pitchFamily="34" charset="-120"/>
-              </a:rPr>
-              <a:t>payments, confirmed by 4 checks</a:t>
-            </a:r>
-            <a:endParaRPr lang="en-US" sz="1300" dirty="0"/>
-          </a:p>
-        </p:txBody>
-      </p:sp>
-      <p:sp>
-        <p:nvSpPr>
-          <p:cNvPr id="28" name="Shape 21"/>
-          <p:cNvSpPr/>
-          <p:nvPr/>
-        </p:nvSpPr>
-        <p:spPr>
-          <a:xfrm>
-            <a:off x="3364992" y="4160520"/>
-            <a:ext cx="2606040" cy="1554480"/>
-          </a:xfrm>
-          <a:prstGeom prst="roundRect">
-            <a:avLst>
-              <a:gd name="adj" fmla="val 7059"/>
-            </a:avLst>
-          </a:prstGeom>
-          <a:solidFill>
-            <a:srgbClr val="1E2B45"/>
-          </a:solidFill>
-          <a:ln w="12700">
-            <a:solidFill>
-              <a:srgbClr val="1E2B45"/>
-            </a:solidFill>
-            <a:prstDash val="solid"/>
-          </a:ln>
-        </p:spPr>
-      </p:sp>
-      <p:sp>
-        <p:nvSpPr>
-          <p:cNvPr id="29" name="Shape 22"/>
-          <p:cNvSpPr/>
-          <p:nvPr/>
-        </p:nvSpPr>
-        <p:spPr>
-          <a:xfrm>
-            <a:off x="3566160" y="4370832"/>
-            <a:ext cx="566928" cy="566928"/>
-          </a:xfrm>
-          <a:prstGeom prst="ellipse">
-            <a:avLst/>
-          </a:prstGeom>
-          <a:solidFill>
-            <a:srgbClr val="1E2B45"/>
-          </a:solidFill>
-          <a:ln w="19050">
-            <a:solidFill>
-              <a:srgbClr val="10B981"/>
-            </a:solidFill>
-            <a:prstDash val="solid"/>
-          </a:ln>
-        </p:spPr>
-      </p:sp>
-      <p:pic>
-        <p:nvPicPr>
-          <p:cNvPr id="30" name="Image 5" descr="preencoded.png">    </p:cNvPr>
-          <p:cNvPicPr>
-            <a:picLocks noChangeAspect="1"/>
-          </p:cNvPicPr>
-          <p:nvPr/>
-        </p:nvPicPr>
-        <p:blipFill>
-          <a:blip r:embed="rId6"/>
-          <a:stretch>
-            <a:fillRect/>
-          </a:stretch>
-        </p:blipFill>
-        <p:spPr>
-          <a:xfrm>
-            <a:off x="3702223" y="4506895"/>
-            <a:ext cx="294803" cy="294803"/>
-          </a:xfrm>
-          <a:prstGeom prst="rect">
-            <a:avLst/>
-          </a:prstGeom>
-        </p:spPr>
-      </p:pic>
-      <p:sp>
-        <p:nvSpPr>
-          <p:cNvPr id="31" name="Text 23"/>
-          <p:cNvSpPr txBox="1"/>
-          <p:nvPr/>
-        </p:nvSpPr>
-        <p:spPr>
-          <a:xfrm>
-            <a:off x="4279392" y="4462272"/>
-            <a:ext cx="1645920" cy="365760"/>
-          </a:xfrm>
-          <a:prstGeom prst="rect">
-            <a:avLst/>
-          </a:prstGeom>
-          <a:noFill/>
-          <a:ln/>
-        </p:spPr>
-        <p:txBody>
-          <a:bodyPr wrap="square" lIns="0" tIns="0" rIns="0" bIns="0" rtlCol="0" anchor="t"/>
-          <a:lstStyle/>
-          <a:p>
-            <a:pPr indent="0" marL="0">
-              <a:buNone/>
-            </a:pPr>
-            <a:r>
-              <a:rPr lang="en-US" sz="1500" b="1" dirty="0">
-                <a:solidFill>
-                  <a:srgbClr val="F8FAFC"/>
-                </a:solidFill>
-                <a:latin typeface="Calibri" pitchFamily="34" charset="0"/>
-                <a:ea typeface="Calibri" pitchFamily="34" charset="-122"/>
-                <a:cs typeface="Calibri" pitchFamily="34" charset="-120"/>
-              </a:rPr>
-              <a:t>Cloudinary</a:t>
-            </a:r>
-            <a:endParaRPr lang="en-US" sz="1500" dirty="0"/>
-          </a:p>
-        </p:txBody>
-      </p:sp>
-      <p:sp>
-        <p:nvSpPr>
-          <p:cNvPr id="32" name="Text 24"/>
-          <p:cNvSpPr txBox="1"/>
-          <p:nvPr/>
-        </p:nvSpPr>
-        <p:spPr>
-          <a:xfrm>
-            <a:off x="3566160" y="5074920"/>
-            <a:ext cx="2240280" cy="548640"/>
-          </a:xfrm>
-          <a:prstGeom prst="rect">
-            <a:avLst/>
-          </a:prstGeom>
-          <a:noFill/>
-          <a:ln/>
-        </p:spPr>
-        <p:txBody>
-          <a:bodyPr wrap="square" lIns="0" tIns="0" rIns="0" bIns="0" rtlCol="0" anchor="t"/>
-          <a:lstStyle/>
-          <a:p>
-            <a:pPr indent="0" marL="0">
-              <a:buNone/>
-            </a:pPr>
-            <a:r>
-              <a:rPr lang="en-US" sz="1300" dirty="0">
-                <a:solidFill>
-                  <a:srgbClr val="A3B3C9"/>
-                </a:solidFill>
-                <a:latin typeface="Calibri" pitchFamily="34" charset="0"/>
-                <a:ea typeface="Calibri" pitchFamily="34" charset="-122"/>
-                <a:cs typeface="Calibri" pitchFamily="34" charset="-120"/>
-              </a:rPr>
-              <a:t>signed photo uploads</a:t>
-            </a:r>
-            <a:endParaRPr lang="en-US" sz="1300" dirty="0"/>
-          </a:p>
-        </p:txBody>
-      </p:sp>
-      <p:sp>
-        <p:nvSpPr>
-          <p:cNvPr id="33" name="Shape 25"/>
-          <p:cNvSpPr/>
-          <p:nvPr/>
-        </p:nvSpPr>
-        <p:spPr>
-          <a:xfrm>
-            <a:off x="6181344" y="4160520"/>
-            <a:ext cx="2606040" cy="1554480"/>
-          </a:xfrm>
-          <a:prstGeom prst="roundRect">
-            <a:avLst>
-              <a:gd name="adj" fmla="val 7059"/>
-            </a:avLst>
-          </a:prstGeom>
-          <a:solidFill>
-            <a:srgbClr val="1E2B45"/>
-          </a:solidFill>
-          <a:ln w="12700">
-            <a:solidFill>
-              <a:srgbClr val="1E2B45"/>
-            </a:solidFill>
-            <a:prstDash val="solid"/>
-          </a:ln>
-        </p:spPr>
-      </p:sp>
-      <p:sp>
-        <p:nvSpPr>
-          <p:cNvPr id="34" name="Shape 26"/>
-          <p:cNvSpPr/>
-          <p:nvPr/>
-        </p:nvSpPr>
-        <p:spPr>
-          <a:xfrm>
-            <a:off x="6382512" y="4370832"/>
-            <a:ext cx="566928" cy="566928"/>
-          </a:xfrm>
-          <a:prstGeom prst="ellipse">
-            <a:avLst/>
-          </a:prstGeom>
-          <a:solidFill>
-            <a:srgbClr val="1E2B45"/>
-          </a:solidFill>
-          <a:ln w="19050">
-            <a:solidFill>
-              <a:srgbClr val="10B981"/>
-            </a:solidFill>
-            <a:prstDash val="solid"/>
-          </a:ln>
-        </p:spPr>
-      </p:sp>
-      <p:pic>
-        <p:nvPicPr>
-          <p:cNvPr id="35" name="Image 6" descr="preencoded.png">    </p:cNvPr>
-          <p:cNvPicPr>
-            <a:picLocks noChangeAspect="1"/>
-          </p:cNvPicPr>
-          <p:nvPr/>
-        </p:nvPicPr>
-        <p:blipFill>
-          <a:blip r:embed="rId7"/>
-          <a:stretch>
-            <a:fillRect/>
-          </a:stretch>
-        </p:blipFill>
-        <p:spPr>
-          <a:xfrm>
-            <a:off x="6518575" y="4506895"/>
-            <a:ext cx="294803" cy="294803"/>
-          </a:xfrm>
-          <a:prstGeom prst="rect">
-            <a:avLst/>
-          </a:prstGeom>
-        </p:spPr>
-      </p:pic>
-      <p:sp>
-        <p:nvSpPr>
-          <p:cNvPr id="36" name="Text 27"/>
-          <p:cNvSpPr txBox="1"/>
-          <p:nvPr/>
-        </p:nvSpPr>
-        <p:spPr>
-          <a:xfrm>
-            <a:off x="7095744" y="4462272"/>
-            <a:ext cx="1645920" cy="365760"/>
-          </a:xfrm>
-          <a:prstGeom prst="rect">
-            <a:avLst/>
-          </a:prstGeom>
-          <a:noFill/>
-          <a:ln/>
-        </p:spPr>
-        <p:txBody>
-          <a:bodyPr wrap="square" lIns="0" tIns="0" rIns="0" bIns="0" rtlCol="0" anchor="t"/>
-          <a:lstStyle/>
-          <a:p>
-            <a:pPr indent="0" marL="0">
-              <a:buNone/>
-            </a:pPr>
-            <a:r>
-              <a:rPr lang="en-US" sz="1500" b="1" dirty="0">
-                <a:solidFill>
-                  <a:srgbClr val="F8FAFC"/>
-                </a:solidFill>
-                <a:latin typeface="Calibri" pitchFamily="34" charset="0"/>
-                <a:ea typeface="Calibri" pitchFamily="34" charset="-122"/>
-                <a:cs typeface="Calibri" pitchFamily="34" charset="-120"/>
-              </a:rPr>
-              <a:t>Mapbox</a:t>
-            </a:r>
-            <a:endParaRPr lang="en-US" sz="1500" dirty="0"/>
-          </a:p>
-        </p:txBody>
-      </p:sp>
-      <p:sp>
-        <p:nvSpPr>
-          <p:cNvPr id="37" name="Text 28"/>
-          <p:cNvSpPr txBox="1"/>
-          <p:nvPr/>
-        </p:nvSpPr>
-        <p:spPr>
-          <a:xfrm>
-            <a:off x="6382512" y="5074920"/>
-            <a:ext cx="2240280" cy="548640"/>
-          </a:xfrm>
-          <a:prstGeom prst="rect">
-            <a:avLst/>
-          </a:prstGeom>
-          <a:noFill/>
-          <a:ln/>
-        </p:spPr>
-        <p:txBody>
-          <a:bodyPr wrap="square" lIns="0" tIns="0" rIns="0" bIns="0" rtlCol="0" anchor="t"/>
-          <a:lstStyle/>
-          <a:p>
-            <a:pPr indent="0" marL="0">
-              <a:buNone/>
-            </a:pPr>
-            <a:r>
-              <a:rPr lang="en-US" sz="1300" dirty="0">
-                <a:solidFill>
-                  <a:srgbClr val="A3B3C9"/>
-                </a:solidFill>
-                <a:latin typeface="Calibri" pitchFamily="34" charset="0"/>
-                <a:ea typeface="Calibri" pitchFamily="34" charset="-122"/>
-                <a:cs typeface="Calibri" pitchFamily="34" charset="-120"/>
-              </a:rPr>
-              <a:t>address search</a:t>
-            </a:r>
-            <a:endParaRPr lang="en-US" sz="1300" dirty="0"/>
-          </a:p>
-        </p:txBody>
-      </p:sp>
-      <p:sp>
-        <p:nvSpPr>
-          <p:cNvPr id="38" name="Shape 29"/>
-          <p:cNvSpPr/>
-          <p:nvPr/>
-        </p:nvSpPr>
-        <p:spPr>
-          <a:xfrm>
-            <a:off x="8997696" y="4160520"/>
-            <a:ext cx="2606040" cy="1554480"/>
-          </a:xfrm>
-          <a:prstGeom prst="roundRect">
-            <a:avLst>
-              <a:gd name="adj" fmla="val 7059"/>
-            </a:avLst>
-          </a:prstGeom>
-          <a:solidFill>
-            <a:srgbClr val="1E2B45"/>
-          </a:solidFill>
-          <a:ln w="12700">
-            <a:solidFill>
-              <a:srgbClr val="1E2B45"/>
-            </a:solidFill>
-            <a:prstDash val="solid"/>
-          </a:ln>
-        </p:spPr>
-      </p:sp>
-      <p:sp>
-        <p:nvSpPr>
-          <p:cNvPr id="39" name="Shape 30"/>
-          <p:cNvSpPr/>
-          <p:nvPr/>
-        </p:nvSpPr>
-        <p:spPr>
-          <a:xfrm>
-            <a:off x="9198864" y="4370832"/>
-            <a:ext cx="566928" cy="566928"/>
-          </a:xfrm>
-          <a:prstGeom prst="ellipse">
-            <a:avLst/>
-          </a:prstGeom>
-          <a:solidFill>
-            <a:srgbClr val="1E2B45"/>
-          </a:solidFill>
-          <a:ln w="19050">
-            <a:solidFill>
-              <a:srgbClr val="10B981"/>
-            </a:solidFill>
-            <a:prstDash val="solid"/>
-          </a:ln>
-        </p:spPr>
-      </p:sp>
-      <p:pic>
-        <p:nvPicPr>
-          <p:cNvPr id="40" name="Image 7" descr="preencoded.png">    </p:cNvPr>
-          <p:cNvPicPr>
-            <a:picLocks noChangeAspect="1"/>
-          </p:cNvPicPr>
-          <p:nvPr/>
-        </p:nvPicPr>
-        <p:blipFill>
-          <a:blip r:embed="rId8"/>
-          <a:stretch>
-            <a:fillRect/>
-          </a:stretch>
-        </p:blipFill>
-        <p:spPr>
-          <a:xfrm>
-            <a:off x="9334927" y="4506895"/>
-            <a:ext cx="294803" cy="294803"/>
-          </a:xfrm>
-          <a:prstGeom prst="rect">
-            <a:avLst/>
-          </a:prstGeom>
-        </p:spPr>
-      </p:pic>
-      <p:sp>
-        <p:nvSpPr>
-          <p:cNvPr id="41" name="Text 31"/>
-          <p:cNvSpPr txBox="1"/>
-          <p:nvPr/>
-        </p:nvSpPr>
-        <p:spPr>
-          <a:xfrm>
-            <a:off x="9912096" y="4462272"/>
-            <a:ext cx="1645920" cy="365760"/>
-          </a:xfrm>
-          <a:prstGeom prst="rect">
-            <a:avLst/>
-          </a:prstGeom>
-          <a:noFill/>
-          <a:ln/>
-        </p:spPr>
-        <p:txBody>
-          <a:bodyPr wrap="square" lIns="0" tIns="0" rIns="0" bIns="0" rtlCol="0" anchor="t"/>
-          <a:lstStyle/>
-          <a:p>
-            <a:pPr indent="0" marL="0">
-              <a:buNone/>
-            </a:pPr>
-            <a:r>
-              <a:rPr lang="en-US" sz="1500" b="1" dirty="0">
-                <a:solidFill>
-                  <a:srgbClr val="F8FAFC"/>
-                </a:solidFill>
-                <a:latin typeface="Calibri" pitchFamily="34" charset="0"/>
-                <a:ea typeface="Calibri" pitchFamily="34" charset="-122"/>
-                <a:cs typeface="Calibri" pitchFamily="34" charset="-120"/>
-              </a:rPr>
-              <a:t>Email</a:t>
-            </a:r>
-            <a:endParaRPr lang="en-US" sz="1500" dirty="0"/>
-          </a:p>
-        </p:txBody>
-      </p:sp>
-      <p:sp>
-        <p:nvSpPr>
-          <p:cNvPr id="42" name="Text 32"/>
-          <p:cNvSpPr txBox="1"/>
-          <p:nvPr/>
-        </p:nvSpPr>
-        <p:spPr>
-          <a:xfrm>
-            <a:off x="9198864" y="5074920"/>
-            <a:ext cx="2240280" cy="548640"/>
-          </a:xfrm>
-          <a:prstGeom prst="rect">
-            <a:avLst/>
-          </a:prstGeom>
-          <a:noFill/>
-          <a:ln/>
-        </p:spPr>
-        <p:txBody>
-          <a:bodyPr wrap="square" lIns="0" tIns="0" rIns="0" bIns="0" rtlCol="0" anchor="t"/>
-          <a:lstStyle/>
-          <a:p>
-            <a:pPr indent="0" marL="0">
-              <a:buNone/>
-            </a:pPr>
-            <a:r>
-              <a:rPr lang="en-US" sz="1300" dirty="0">
-                <a:solidFill>
-                  <a:srgbClr val="A3B3C9"/>
-                </a:solidFill>
-                <a:latin typeface="Calibri" pitchFamily="34" charset="0"/>
-                <a:ea typeface="Calibri" pitchFamily="34" charset="-122"/>
-                <a:cs typeface="Calibri" pitchFamily="34" charset="-120"/>
-              </a:rPr>
-              <a:t>codes, receipts, alerts</a:t>
+              <a:t>Akayza  ·  prepared by Team PR  ·  GKHack26</a:t>
             </a:r>
             <a:endParaRPr lang="en-US" sz="1300" dirty="0"/>
           </a:p>
@@ -12038,7 +11914,7 @@
                 <a:ea typeface="Georgia" pitchFamily="34" charset="-122"/>
                 <a:cs typeface="Georgia" pitchFamily="34" charset="-120"/>
               </a:rPr>
-              <a:t>Security and data privacy</a:t>
+              <a:t>How it's built</a:t>
             </a:r>
             <a:endParaRPr lang="en-US" sz="3400" dirty="0"/>
           </a:p>
@@ -12116,11 +11992,11 @@
         <p:spPr>
           <a:xfrm>
             <a:off x="548640" y="1783080"/>
-            <a:ext cx="3474720" cy="1965960"/>
+            <a:ext cx="3291840" cy="1920240"/>
           </a:xfrm>
           <a:prstGeom prst="roundRect">
             <a:avLst>
-              <a:gd name="adj" fmla="val 5581"/>
+              <a:gd name="adj" fmla="val 5714"/>
             </a:avLst>
           </a:prstGeom>
           <a:solidFill>
@@ -12142,7 +12018,7 @@
         </p:nvSpPr>
         <p:spPr>
           <a:xfrm>
-            <a:off x="822960" y="2057400"/>
+            <a:off x="777240" y="2039112"/>
             <a:ext cx="640080" cy="640080"/>
           </a:xfrm>
           <a:prstGeom prst="ellipse">
@@ -12175,7 +12051,7 @@
         </p:blipFill>
         <p:spPr>
           <a:xfrm>
-            <a:off x="976579" y="2211019"/>
+            <a:off x="930859" y="2192731"/>
             <a:ext cx="332842" cy="332842"/>
           </a:xfrm>
           <a:prstGeom prst="rect">
@@ -12191,8 +12067,8 @@
         </p:nvSpPr>
         <p:spPr>
           <a:xfrm>
-            <a:off x="1600200" y="2148840"/>
-            <a:ext cx="2286000" cy="457200"/>
+            <a:off x="1554480" y="2039112"/>
+            <a:ext cx="2103120" cy="365760"/>
           </a:xfrm>
           <a:prstGeom prst="rect">
             <a:avLst/>
@@ -12208,17 +12084,17 @@
               <a:buNone/>
             </a:pPr>
             <a:r>
-              <a:rPr lang="en-US" sz="1600" b="1" dirty="0">
-                <a:solidFill>
-                  <a:srgbClr val="F8FAFC"/>
+              <a:rPr lang="en-US" sz="1800" b="1" dirty="0">
+                <a:solidFill>
+                  <a:srgbClr val="10B981"/>
                 </a:solidFill>
                 <a:latin typeface="Calibri" pitchFamily="34" charset="0"/>
                 <a:ea typeface="Calibri" pitchFamily="34" charset="-122"/>
                 <a:cs typeface="Calibri" pitchFamily="34" charset="-120"/>
               </a:rPr>
-              <a:t>Your data is yours</a:t>
-            </a:r>
-            <a:endParaRPr lang="en-US" sz="1600" dirty="0"/>
+              <a:t>Mobile app</a:t>
+            </a:r>
+            <a:endParaRPr lang="en-US" sz="1800" dirty="0"/>
           </a:p>
         </p:txBody>
       </p:sp>
@@ -12230,8 +12106,8 @@
         </p:nvSpPr>
         <p:spPr>
           <a:xfrm>
-            <a:off x="822960" y="2788920"/>
-            <a:ext cx="2971800" cy="868680"/>
+            <a:off x="1554480" y="2468880"/>
+            <a:ext cx="2103120" cy="1143000"/>
           </a:xfrm>
           <a:prstGeom prst="rect">
             <a:avLst/>
@@ -12247,7 +12123,7 @@
               <a:buNone/>
             </a:pPr>
             <a:r>
-              <a:rPr lang="en-US" sz="1300" dirty="0">
+              <a:rPr lang="en-US" sz="1350" dirty="0">
                 <a:solidFill>
                   <a:srgbClr val="A3B3C9"/>
                 </a:solidFill>
@@ -12255,9 +12131,9 @@
                 <a:ea typeface="Calibri" pitchFamily="34" charset="-122"/>
                 <a:cs typeface="Calibri" pitchFamily="34" charset="-120"/>
               </a:rPr>
-              <a:t>Every request is limited to the owner. Anyone else's record answers 'not found'.</a:t>
-            </a:r>
-            <a:endParaRPr lang="en-US" sz="1300" dirty="0"/>
+              <a:t>React Native + Expo (TypeScript). Android first. Secure sign-in storage; works offline at the counter.</a:t>
+            </a:r>
+            <a:endParaRPr lang="en-US" sz="1350" dirty="0"/>
           </a:p>
         </p:txBody>
       </p:sp>
@@ -12269,12 +12145,12 @@
         </p:nvSpPr>
         <p:spPr>
           <a:xfrm>
-            <a:off x="4297680" y="1783080"/>
-            <a:ext cx="3474720" cy="1965960"/>
+            <a:off x="4434840" y="1783080"/>
+            <a:ext cx="3291840" cy="1920240"/>
           </a:xfrm>
           <a:prstGeom prst="roundRect">
             <a:avLst>
-              <a:gd name="adj" fmla="val 5581"/>
+              <a:gd name="adj" fmla="val 5714"/>
             </a:avLst>
           </a:prstGeom>
           <a:solidFill>
@@ -12296,8 +12172,366 @@
         </p:nvSpPr>
         <p:spPr>
           <a:xfrm>
-            <a:off x="4572000" y="2057400"/>
+            <a:off x="4663440" y="2039112"/>
             <a:ext cx="640080" cy="640080"/>
+          </a:xfrm>
+          <a:prstGeom prst="ellipse">
+            <a:avLst/>
+          </a:prstGeom>
+          <a:solidFill>
+            <a:srgbClr val="1E2B45"/>
+          </a:solidFill>
+          <a:ln w="19050">
+            <a:solidFill>
+              <a:srgbClr val="FBBF24"/>
+            </a:solidFill>
+            <a:prstDash val="solid"/>
+          </a:ln>
+        </p:spPr>
+      </p:sp>
+      <p:pic>
+        <p:nvPicPr>
+          <p:cNvPr id="13" name="Image 2" descr="preencoded.png">    </p:cNvPr>
+          <p:cNvPicPr>
+            <a:picLocks noChangeAspect="1"/>
+          </p:cNvPicPr>
+          <p:nvPr/>
+        </p:nvPicPr>
+        <p:blipFill>
+          <a:blip r:embed="rId3"/>
+          <a:stretch>
+            <a:fillRect/>
+          </a:stretch>
+        </p:blipFill>
+        <p:spPr>
+          <a:xfrm>
+            <a:off x="4817059" y="2192731"/>
+            <a:ext cx="332842" cy="332842"/>
+          </a:xfrm>
+          <a:prstGeom prst="rect">
+            <a:avLst/>
+          </a:prstGeom>
+        </p:spPr>
+      </p:pic>
+      <p:sp>
+        <p:nvSpPr>
+          <p:cNvPr id="14" name="Text 9"/>
+          <p:cNvSpPr txBox="1"/>
+          <p:nvPr/>
+        </p:nvSpPr>
+        <p:spPr>
+          <a:xfrm>
+            <a:off x="5440680" y="2039112"/>
+            <a:ext cx="2103120" cy="365760"/>
+          </a:xfrm>
+          <a:prstGeom prst="rect">
+            <a:avLst/>
+          </a:prstGeom>
+          <a:noFill/>
+          <a:ln/>
+        </p:spPr>
+        <p:txBody>
+          <a:bodyPr wrap="square" lIns="0" tIns="0" rIns="0" bIns="0" rtlCol="0" anchor="t"/>
+          <a:lstStyle/>
+          <a:p>
+            <a:pPr indent="0" marL="0">
+              <a:buNone/>
+            </a:pPr>
+            <a:r>
+              <a:rPr lang="en-US" sz="1800" b="1" dirty="0">
+                <a:solidFill>
+                  <a:srgbClr val="FBBF24"/>
+                </a:solidFill>
+                <a:latin typeface="Calibri" pitchFamily="34" charset="0"/>
+                <a:ea typeface="Calibri" pitchFamily="34" charset="-122"/>
+                <a:cs typeface="Calibri" pitchFamily="34" charset="-120"/>
+              </a:rPr>
+              <a:t>API</a:t>
+            </a:r>
+            <a:endParaRPr lang="en-US" sz="1800" dirty="0"/>
+          </a:p>
+        </p:txBody>
+      </p:sp>
+      <p:sp>
+        <p:nvSpPr>
+          <p:cNvPr id="15" name="Text 10"/>
+          <p:cNvSpPr txBox="1"/>
+          <p:nvPr/>
+        </p:nvSpPr>
+        <p:spPr>
+          <a:xfrm>
+            <a:off x="5440680" y="2468880"/>
+            <a:ext cx="2103120" cy="1143000"/>
+          </a:xfrm>
+          <a:prstGeom prst="rect">
+            <a:avLst/>
+          </a:prstGeom>
+          <a:noFill/>
+          <a:ln/>
+        </p:spPr>
+        <p:txBody>
+          <a:bodyPr wrap="square" lIns="0" tIns="0" rIns="0" bIns="0" rtlCol="0" anchor="t"/>
+          <a:lstStyle/>
+          <a:p>
+            <a:pPr indent="0" marL="0">
+              <a:buNone/>
+            </a:pPr>
+            <a:r>
+              <a:rPr lang="en-US" sz="1350" dirty="0">
+                <a:solidFill>
+                  <a:srgbClr val="A3B3C9"/>
+                </a:solidFill>
+                <a:latin typeface="Calibri" pitchFamily="34" charset="0"/>
+                <a:ea typeface="Calibri" pitchFamily="34" charset="-122"/>
+                <a:cs typeface="Calibri" pitchFamily="34" charset="-120"/>
+              </a:rPr>
+              <a:t>Python + Flask. Strict input checks, rate limits, orders that can't double. Rule-based supplier engine.</a:t>
+            </a:r>
+            <a:endParaRPr lang="en-US" sz="1350" dirty="0"/>
+          </a:p>
+        </p:txBody>
+      </p:sp>
+      <p:sp>
+        <p:nvSpPr>
+          <p:cNvPr id="16" name="Shape 11"/>
+          <p:cNvSpPr/>
+          <p:nvPr/>
+        </p:nvSpPr>
+        <p:spPr>
+          <a:xfrm>
+            <a:off x="8321040" y="1783080"/>
+            <a:ext cx="3291840" cy="1920240"/>
+          </a:xfrm>
+          <a:prstGeom prst="roundRect">
+            <a:avLst>
+              <a:gd name="adj" fmla="val 5714"/>
+            </a:avLst>
+          </a:prstGeom>
+          <a:solidFill>
+            <a:srgbClr val="17223A"/>
+          </a:solidFill>
+          <a:ln w="12700">
+            <a:solidFill>
+              <a:srgbClr val="17223A"/>
+            </a:solidFill>
+            <a:prstDash val="solid"/>
+          </a:ln>
+        </p:spPr>
+      </p:sp>
+      <p:sp>
+        <p:nvSpPr>
+          <p:cNvPr id="17" name="Shape 12"/>
+          <p:cNvSpPr/>
+          <p:nvPr/>
+        </p:nvSpPr>
+        <p:spPr>
+          <a:xfrm>
+            <a:off x="8549640" y="2039112"/>
+            <a:ext cx="640080" cy="640080"/>
+          </a:xfrm>
+          <a:prstGeom prst="ellipse">
+            <a:avLst/>
+          </a:prstGeom>
+          <a:solidFill>
+            <a:srgbClr val="1E2B45"/>
+          </a:solidFill>
+          <a:ln w="19050">
+            <a:solidFill>
+              <a:srgbClr val="34D399"/>
+            </a:solidFill>
+            <a:prstDash val="solid"/>
+          </a:ln>
+        </p:spPr>
+      </p:sp>
+      <p:pic>
+        <p:nvPicPr>
+          <p:cNvPr id="18" name="Image 3" descr="preencoded.png">    </p:cNvPr>
+          <p:cNvPicPr>
+            <a:picLocks noChangeAspect="1"/>
+          </p:cNvPicPr>
+          <p:nvPr/>
+        </p:nvPicPr>
+        <p:blipFill>
+          <a:blip r:embed="rId4"/>
+          <a:stretch>
+            <a:fillRect/>
+          </a:stretch>
+        </p:blipFill>
+        <p:spPr>
+          <a:xfrm>
+            <a:off x="8703259" y="2192731"/>
+            <a:ext cx="332842" cy="332842"/>
+          </a:xfrm>
+          <a:prstGeom prst="rect">
+            <a:avLst/>
+          </a:prstGeom>
+        </p:spPr>
+      </p:pic>
+      <p:sp>
+        <p:nvSpPr>
+          <p:cNvPr id="19" name="Text 13"/>
+          <p:cNvSpPr txBox="1"/>
+          <p:nvPr/>
+        </p:nvSpPr>
+        <p:spPr>
+          <a:xfrm>
+            <a:off x="9326880" y="2039112"/>
+            <a:ext cx="2103120" cy="365760"/>
+          </a:xfrm>
+          <a:prstGeom prst="rect">
+            <a:avLst/>
+          </a:prstGeom>
+          <a:noFill/>
+          <a:ln/>
+        </p:spPr>
+        <p:txBody>
+          <a:bodyPr wrap="square" lIns="0" tIns="0" rIns="0" bIns="0" rtlCol="0" anchor="t"/>
+          <a:lstStyle/>
+          <a:p>
+            <a:pPr indent="0" marL="0">
+              <a:buNone/>
+            </a:pPr>
+            <a:r>
+              <a:rPr lang="en-US" sz="1800" b="1" dirty="0">
+                <a:solidFill>
+                  <a:srgbClr val="34D399"/>
+                </a:solidFill>
+                <a:latin typeface="Calibri" pitchFamily="34" charset="0"/>
+                <a:ea typeface="Calibri" pitchFamily="34" charset="-122"/>
+                <a:cs typeface="Calibri" pitchFamily="34" charset="-120"/>
+              </a:rPr>
+              <a:t>Database</a:t>
+            </a:r>
+            <a:endParaRPr lang="en-US" sz="1800" dirty="0"/>
+          </a:p>
+        </p:txBody>
+      </p:sp>
+      <p:sp>
+        <p:nvSpPr>
+          <p:cNvPr id="20" name="Text 14"/>
+          <p:cNvSpPr txBox="1"/>
+          <p:nvPr/>
+        </p:nvSpPr>
+        <p:spPr>
+          <a:xfrm>
+            <a:off x="9326880" y="2468880"/>
+            <a:ext cx="2103120" cy="1143000"/>
+          </a:xfrm>
+          <a:prstGeom prst="rect">
+            <a:avLst/>
+          </a:prstGeom>
+          <a:noFill/>
+          <a:ln/>
+        </p:spPr>
+        <p:txBody>
+          <a:bodyPr wrap="square" lIns="0" tIns="0" rIns="0" bIns="0" rtlCol="0" anchor="t"/>
+          <a:lstStyle/>
+          <a:p>
+            <a:pPr indent="0" marL="0">
+              <a:buNone/>
+            </a:pPr>
+            <a:r>
+              <a:rPr lang="en-US" sz="1350" dirty="0">
+                <a:solidFill>
+                  <a:srgbClr val="A3B3C9"/>
+                </a:solidFill>
+                <a:latin typeface="Calibri" pitchFamily="34" charset="0"/>
+                <a:ea typeface="Calibri" pitchFamily="34" charset="-122"/>
+                <a:cs typeface="Calibri" pitchFamily="34" charset="-120"/>
+              </a:rPr>
+              <a:t>PostgreSQL, one area per schema, versioned migrations, audit trail with no personal data.</a:t>
+            </a:r>
+            <a:endParaRPr lang="en-US" sz="1350" dirty="0"/>
+          </a:p>
+        </p:txBody>
+      </p:sp>
+      <p:sp>
+        <p:nvSpPr>
+          <p:cNvPr id="21" name="Shape 15"/>
+          <p:cNvSpPr/>
+          <p:nvPr/>
+        </p:nvSpPr>
+        <p:spPr>
+          <a:xfrm>
+            <a:off x="3886200" y="2743200"/>
+            <a:ext cx="502920" cy="0"/>
+          </a:xfrm>
+          <a:prstGeom prst="line">
+            <a:avLst/>
+          </a:prstGeom>
+          <a:noFill/>
+          <a:ln w="25400">
+            <a:solidFill>
+              <a:srgbClr val="10B981"/>
+            </a:solidFill>
+            <a:prstDash val="solid"/>
+            <a:headEnd type="triangle"/>
+            <a:tailEnd type="triangle"/>
+          </a:ln>
+        </p:spPr>
+      </p:sp>
+      <p:sp>
+        <p:nvSpPr>
+          <p:cNvPr id="22" name="Shape 16"/>
+          <p:cNvSpPr/>
+          <p:nvPr/>
+        </p:nvSpPr>
+        <p:spPr>
+          <a:xfrm>
+            <a:off x="7772400" y="2743200"/>
+            <a:ext cx="502920" cy="0"/>
+          </a:xfrm>
+          <a:prstGeom prst="line">
+            <a:avLst/>
+          </a:prstGeom>
+          <a:noFill/>
+          <a:ln w="25400">
+            <a:solidFill>
+              <a:srgbClr val="10B981"/>
+            </a:solidFill>
+            <a:prstDash val="solid"/>
+            <a:headEnd type="triangle"/>
+            <a:tailEnd type="triangle"/>
+          </a:ln>
+        </p:spPr>
+      </p:sp>
+      <p:sp>
+        <p:nvSpPr>
+          <p:cNvPr id="23" name="Shape 17"/>
+          <p:cNvSpPr/>
+          <p:nvPr/>
+        </p:nvSpPr>
+        <p:spPr>
+          <a:xfrm>
+            <a:off x="548640" y="4160520"/>
+            <a:ext cx="2606040" cy="1554480"/>
+          </a:xfrm>
+          <a:prstGeom prst="roundRect">
+            <a:avLst>
+              <a:gd name="adj" fmla="val 7059"/>
+            </a:avLst>
+          </a:prstGeom>
+          <a:solidFill>
+            <a:srgbClr val="1E2B45"/>
+          </a:solidFill>
+          <a:ln w="12700">
+            <a:solidFill>
+              <a:srgbClr val="1E2B45"/>
+            </a:solidFill>
+            <a:prstDash val="solid"/>
+          </a:ln>
+        </p:spPr>
+      </p:sp>
+      <p:sp>
+        <p:nvSpPr>
+          <p:cNvPr id="24" name="Shape 18"/>
+          <p:cNvSpPr/>
+          <p:nvPr/>
+        </p:nvSpPr>
+        <p:spPr>
+          <a:xfrm>
+            <a:off x="749808" y="4370832"/>
+            <a:ext cx="566928" cy="566928"/>
           </a:xfrm>
           <a:prstGeom prst="ellipse">
             <a:avLst/>
@@ -12315,22 +12549,22 @@
       </p:sp>
       <p:pic>
         <p:nvPicPr>
-          <p:cNvPr id="13" name="Image 2" descr="preencoded.png">    </p:cNvPr>
+          <p:cNvPr id="25" name="Image 4" descr="preencoded.png">    </p:cNvPr>
           <p:cNvPicPr>
             <a:picLocks noChangeAspect="1"/>
           </p:cNvPicPr>
           <p:nvPr/>
         </p:nvPicPr>
         <p:blipFill>
-          <a:blip r:embed="rId3"/>
+          <a:blip r:embed="rId5"/>
           <a:stretch>
             <a:fillRect/>
           </a:stretch>
         </p:blipFill>
         <p:spPr>
           <a:xfrm>
-            <a:off x="4725619" y="2211019"/>
-            <a:ext cx="332842" cy="332842"/>
+            <a:off x="885871" y="4506895"/>
+            <a:ext cx="294803" cy="294803"/>
           </a:xfrm>
           <a:prstGeom prst="rect">
             <a:avLst/>
@@ -12339,14 +12573,14 @@
       </p:pic>
       <p:sp>
         <p:nvSpPr>
-          <p:cNvPr id="14" name="Text 9"/>
-          <p:cNvSpPr txBox="1"/>
-          <p:nvPr/>
-        </p:nvSpPr>
-        <p:spPr>
-          <a:xfrm>
-            <a:off x="5349240" y="2148840"/>
-            <a:ext cx="2286000" cy="457200"/>
+          <p:cNvPr id="26" name="Text 19"/>
+          <p:cNvSpPr txBox="1"/>
+          <p:nvPr/>
+        </p:nvSpPr>
+        <p:spPr>
+          <a:xfrm>
+            <a:off x="1463040" y="4462272"/>
+            <a:ext cx="1645920" cy="365760"/>
           </a:xfrm>
           <a:prstGeom prst="rect">
             <a:avLst/>
@@ -12362,7 +12596,7 @@
               <a:buNone/>
             </a:pPr>
             <a:r>
-              <a:rPr lang="en-US" sz="1600" b="1" dirty="0">
+              <a:rPr lang="en-US" sz="1500" b="1" dirty="0">
                 <a:solidFill>
                   <a:srgbClr val="F8FAFC"/>
                 </a:solidFill>
@@ -12370,22 +12604,22 @@
                 <a:ea typeface="Calibri" pitchFamily="34" charset="-122"/>
                 <a:cs typeface="Calibri" pitchFamily="34" charset="-120"/>
               </a:rPr>
-              <a:t>Simple, still safe</a:t>
-            </a:r>
-            <a:endParaRPr lang="en-US" sz="1600" dirty="0"/>
-          </a:p>
-        </p:txBody>
-      </p:sp>
-      <p:sp>
-        <p:nvSpPr>
-          <p:cNvPr id="15" name="Text 10"/>
-          <p:cNvSpPr txBox="1"/>
-          <p:nvPr/>
-        </p:nvSpPr>
-        <p:spPr>
-          <a:xfrm>
-            <a:off x="4572000" y="2788920"/>
-            <a:ext cx="2971800" cy="868680"/>
+              <a:t>PayFast</a:t>
+            </a:r>
+            <a:endParaRPr lang="en-US" sz="1500" dirty="0"/>
+          </a:p>
+        </p:txBody>
+      </p:sp>
+      <p:sp>
+        <p:nvSpPr>
+          <p:cNvPr id="27" name="Text 20"/>
+          <p:cNvSpPr txBox="1"/>
+          <p:nvPr/>
+        </p:nvSpPr>
+        <p:spPr>
+          <a:xfrm>
+            <a:off x="749808" y="5074920"/>
+            <a:ext cx="2240280" cy="548640"/>
           </a:xfrm>
           <a:prstGeom prst="rect">
             <a:avLst/>
@@ -12409,7 +12643,7 @@
                 <a:ea typeface="Calibri" pitchFamily="34" charset="-122"/>
                 <a:cs typeface="Calibri" pitchFamily="34" charset="-120"/>
               </a:rPr>
-              <a:t>Email and password; one code only on a new phone. The rest runs on our side.</a:t>
+              <a:t>payments, confirmed by 4 checks</a:t>
             </a:r>
             <a:endParaRPr lang="en-US" sz="1300" dirty="0"/>
           </a:p>
@@ -12417,26 +12651,26 @@
       </p:sp>
       <p:sp>
         <p:nvSpPr>
-          <p:cNvPr id="16" name="Shape 11"/>
+          <p:cNvPr id="28" name="Shape 21"/>
           <p:cNvSpPr/>
           <p:nvPr/>
         </p:nvSpPr>
         <p:spPr>
           <a:xfrm>
-            <a:off x="8046720" y="1783080"/>
-            <a:ext cx="3474720" cy="1965960"/>
+            <a:off x="3364992" y="4160520"/>
+            <a:ext cx="2606040" cy="1554480"/>
           </a:xfrm>
           <a:prstGeom prst="roundRect">
             <a:avLst>
-              <a:gd name="adj" fmla="val 5581"/>
+              <a:gd name="adj" fmla="val 7059"/>
             </a:avLst>
           </a:prstGeom>
           <a:solidFill>
-            <a:srgbClr val="17223A"/>
+            <a:srgbClr val="1E2B45"/>
           </a:solidFill>
           <a:ln w="12700">
             <a:solidFill>
-              <a:srgbClr val="17223A"/>
+              <a:srgbClr val="1E2B45"/>
             </a:solidFill>
             <a:prstDash val="solid"/>
           </a:ln>
@@ -12444,14 +12678,14 @@
       </p:sp>
       <p:sp>
         <p:nvSpPr>
-          <p:cNvPr id="17" name="Shape 12"/>
+          <p:cNvPr id="29" name="Shape 22"/>
           <p:cNvSpPr/>
           <p:nvPr/>
         </p:nvSpPr>
         <p:spPr>
           <a:xfrm>
-            <a:off x="8321040" y="2057400"/>
-            <a:ext cx="640080" cy="640080"/>
+            <a:off x="3566160" y="4370832"/>
+            <a:ext cx="566928" cy="566928"/>
           </a:xfrm>
           <a:prstGeom prst="ellipse">
             <a:avLst/>
@@ -12469,22 +12703,22 @@
       </p:sp>
       <p:pic>
         <p:nvPicPr>
-          <p:cNvPr id="18" name="Image 3" descr="preencoded.png">    </p:cNvPr>
+          <p:cNvPr id="30" name="Image 5" descr="preencoded.png">    </p:cNvPr>
           <p:cNvPicPr>
             <a:picLocks noChangeAspect="1"/>
           </p:cNvPicPr>
           <p:nvPr/>
         </p:nvPicPr>
         <p:blipFill>
-          <a:blip r:embed="rId4"/>
+          <a:blip r:embed="rId6"/>
           <a:stretch>
             <a:fillRect/>
           </a:stretch>
         </p:blipFill>
         <p:spPr>
           <a:xfrm>
-            <a:off x="8474659" y="2211019"/>
-            <a:ext cx="332842" cy="332842"/>
+            <a:off x="3702223" y="4506895"/>
+            <a:ext cx="294803" cy="294803"/>
           </a:xfrm>
           <a:prstGeom prst="rect">
             <a:avLst/>
@@ -12493,14 +12727,14 @@
       </p:pic>
       <p:sp>
         <p:nvSpPr>
-          <p:cNvPr id="19" name="Text 13"/>
-          <p:cNvSpPr txBox="1"/>
-          <p:nvPr/>
-        </p:nvSpPr>
-        <p:spPr>
-          <a:xfrm>
-            <a:off x="9098280" y="2148840"/>
-            <a:ext cx="2286000" cy="457200"/>
+          <p:cNvPr id="31" name="Text 23"/>
+          <p:cNvSpPr txBox="1"/>
+          <p:nvPr/>
+        </p:nvSpPr>
+        <p:spPr>
+          <a:xfrm>
+            <a:off x="4279392" y="4462272"/>
+            <a:ext cx="1645920" cy="365760"/>
           </a:xfrm>
           <a:prstGeom prst="rect">
             <a:avLst/>
@@ -12516,7 +12750,7 @@
               <a:buNone/>
             </a:pPr>
             <a:r>
-              <a:rPr lang="en-US" sz="1600" b="1" dirty="0">
+              <a:rPr lang="en-US" sz="1500" b="1" dirty="0">
                 <a:solidFill>
                   <a:srgbClr val="F8FAFC"/>
                 </a:solidFill>
@@ -12524,22 +12758,22 @@
                 <a:ea typeface="Calibri" pitchFamily="34" charset="-122"/>
                 <a:cs typeface="Calibri" pitchFamily="34" charset="-120"/>
               </a:rPr>
-              <a:t>No card data</a:t>
-            </a:r>
-            <a:endParaRPr lang="en-US" sz="1600" dirty="0"/>
-          </a:p>
-        </p:txBody>
-      </p:sp>
-      <p:sp>
-        <p:nvSpPr>
-          <p:cNvPr id="20" name="Text 14"/>
-          <p:cNvSpPr txBox="1"/>
-          <p:nvPr/>
-        </p:nvSpPr>
-        <p:spPr>
-          <a:xfrm>
-            <a:off x="8321040" y="2788920"/>
-            <a:ext cx="2971800" cy="868680"/>
+              <a:t>Cloudinary</a:t>
+            </a:r>
+            <a:endParaRPr lang="en-US" sz="1500" dirty="0"/>
+          </a:p>
+        </p:txBody>
+      </p:sp>
+      <p:sp>
+        <p:nvSpPr>
+          <p:cNvPr id="32" name="Text 24"/>
+          <p:cNvSpPr txBox="1"/>
+          <p:nvPr/>
+        </p:nvSpPr>
+        <p:spPr>
+          <a:xfrm>
+            <a:off x="3566160" y="5074920"/>
+            <a:ext cx="2240280" cy="548640"/>
           </a:xfrm>
           <a:prstGeom prst="rect">
             <a:avLst/>
@@ -12563,7 +12797,7 @@
                 <a:ea typeface="Calibri" pitchFamily="34" charset="-122"/>
                 <a:cs typeface="Calibri" pitchFamily="34" charset="-120"/>
               </a:rPr>
-              <a:t>The payment provider's own page. A payment counts only after 4 checks.</a:t>
+              <a:t>signed photo uploads</a:t>
             </a:r>
             <a:endParaRPr lang="en-US" sz="1300" dirty="0"/>
           </a:p>
@@ -12571,26 +12805,26 @@
       </p:sp>
       <p:sp>
         <p:nvSpPr>
-          <p:cNvPr id="21" name="Shape 15"/>
+          <p:cNvPr id="33" name="Shape 25"/>
           <p:cNvSpPr/>
           <p:nvPr/>
         </p:nvSpPr>
         <p:spPr>
           <a:xfrm>
-            <a:off x="548640" y="3931920"/>
-            <a:ext cx="3474720" cy="1965960"/>
+            <a:off x="6181344" y="4160520"/>
+            <a:ext cx="2606040" cy="1554480"/>
           </a:xfrm>
           <a:prstGeom prst="roundRect">
             <a:avLst>
-              <a:gd name="adj" fmla="val 5581"/>
+              <a:gd name="adj" fmla="val 7059"/>
             </a:avLst>
           </a:prstGeom>
           <a:solidFill>
-            <a:srgbClr val="17223A"/>
+            <a:srgbClr val="1E2B45"/>
           </a:solidFill>
           <a:ln w="12700">
             <a:solidFill>
-              <a:srgbClr val="17223A"/>
+              <a:srgbClr val="1E2B45"/>
             </a:solidFill>
             <a:prstDash val="solid"/>
           </a:ln>
@@ -12598,14 +12832,14 @@
       </p:sp>
       <p:sp>
         <p:nvSpPr>
-          <p:cNvPr id="22" name="Shape 16"/>
+          <p:cNvPr id="34" name="Shape 26"/>
           <p:cNvSpPr/>
           <p:nvPr/>
         </p:nvSpPr>
         <p:spPr>
           <a:xfrm>
-            <a:off x="822960" y="4206240"/>
-            <a:ext cx="640080" cy="640080"/>
+            <a:off x="6382512" y="4370832"/>
+            <a:ext cx="566928" cy="566928"/>
           </a:xfrm>
           <a:prstGeom prst="ellipse">
             <a:avLst/>
@@ -12623,22 +12857,22 @@
       </p:sp>
       <p:pic>
         <p:nvPicPr>
-          <p:cNvPr id="23" name="Image 4" descr="preencoded.png">    </p:cNvPr>
+          <p:cNvPr id="35" name="Image 6" descr="preencoded.png">    </p:cNvPr>
           <p:cNvPicPr>
             <a:picLocks noChangeAspect="1"/>
           </p:cNvPicPr>
           <p:nvPr/>
         </p:nvPicPr>
         <p:blipFill>
-          <a:blip r:embed="rId5"/>
+          <a:blip r:embed="rId7"/>
           <a:stretch>
             <a:fillRect/>
           </a:stretch>
         </p:blipFill>
         <p:spPr>
           <a:xfrm>
-            <a:off x="976579" y="4359859"/>
-            <a:ext cx="332842" cy="332842"/>
+            <a:off x="6518575" y="4506895"/>
+            <a:ext cx="294803" cy="294803"/>
           </a:xfrm>
           <a:prstGeom prst="rect">
             <a:avLst/>
@@ -12647,14 +12881,14 @@
       </p:pic>
       <p:sp>
         <p:nvSpPr>
-          <p:cNvPr id="24" name="Text 17"/>
-          <p:cNvSpPr txBox="1"/>
-          <p:nvPr/>
-        </p:nvSpPr>
-        <p:spPr>
-          <a:xfrm>
-            <a:off x="1600200" y="4297680"/>
-            <a:ext cx="2286000" cy="457200"/>
+          <p:cNvPr id="36" name="Text 27"/>
+          <p:cNvSpPr txBox="1"/>
+          <p:nvPr/>
+        </p:nvSpPr>
+        <p:spPr>
+          <a:xfrm>
+            <a:off x="7095744" y="4462272"/>
+            <a:ext cx="1645920" cy="365760"/>
           </a:xfrm>
           <a:prstGeom prst="rect">
             <a:avLst/>
@@ -12670,7 +12904,7 @@
               <a:buNone/>
             </a:pPr>
             <a:r>
-              <a:rPr lang="en-US" sz="1600" b="1" dirty="0">
+              <a:rPr lang="en-US" sz="1500" b="1" dirty="0">
                 <a:solidFill>
                   <a:srgbClr val="F8FAFC"/>
                 </a:solidFill>
@@ -12678,22 +12912,22 @@
                 <a:ea typeface="Calibri" pitchFamily="34" charset="-122"/>
                 <a:cs typeface="Calibri" pitchFamily="34" charset="-120"/>
               </a:rPr>
-              <a:t>POPIA by design</a:t>
-            </a:r>
-            <a:endParaRPr lang="en-US" sz="1600" dirty="0"/>
-          </a:p>
-        </p:txBody>
-      </p:sp>
-      <p:sp>
-        <p:nvSpPr>
-          <p:cNvPr id="25" name="Text 18"/>
-          <p:cNvSpPr txBox="1"/>
-          <p:nvPr/>
-        </p:nvSpPr>
-        <p:spPr>
-          <a:xfrm>
-            <a:off x="822960" y="4937760"/>
-            <a:ext cx="2971800" cy="868680"/>
+              <a:t>Mapbox</a:t>
+            </a:r>
+            <a:endParaRPr lang="en-US" sz="1500" dirty="0"/>
+          </a:p>
+        </p:txBody>
+      </p:sp>
+      <p:sp>
+        <p:nvSpPr>
+          <p:cNvPr id="37" name="Text 28"/>
+          <p:cNvSpPr txBox="1"/>
+          <p:nvPr/>
+        </p:nvSpPr>
+        <p:spPr>
+          <a:xfrm>
+            <a:off x="6382512" y="5074920"/>
+            <a:ext cx="2240280" cy="548640"/>
           </a:xfrm>
           <a:prstGeom prst="rect">
             <a:avLst/>
@@ -12717,7 +12951,7 @@
                 <a:ea typeface="Calibri" pitchFamily="34" charset="-122"/>
                 <a:cs typeface="Calibri" pitchFamily="34" charset="-120"/>
               </a:rPr>
-              <a:t>Aggregates only in the engine; no names or addresses in logs; data export and account closure.</a:t>
+              <a:t>address search</a:t>
             </a:r>
             <a:endParaRPr lang="en-US" sz="1300" dirty="0"/>
           </a:p>
@@ -12725,26 +12959,26 @@
       </p:sp>
       <p:sp>
         <p:nvSpPr>
-          <p:cNvPr id="26" name="Shape 19"/>
+          <p:cNvPr id="38" name="Shape 29"/>
           <p:cNvSpPr/>
           <p:nvPr/>
         </p:nvSpPr>
         <p:spPr>
           <a:xfrm>
-            <a:off x="4297680" y="3931920"/>
-            <a:ext cx="3474720" cy="1965960"/>
+            <a:off x="8997696" y="4160520"/>
+            <a:ext cx="2606040" cy="1554480"/>
           </a:xfrm>
           <a:prstGeom prst="roundRect">
             <a:avLst>
-              <a:gd name="adj" fmla="val 5581"/>
+              <a:gd name="adj" fmla="val 7059"/>
             </a:avLst>
           </a:prstGeom>
           <a:solidFill>
-            <a:srgbClr val="17223A"/>
+            <a:srgbClr val="1E2B45"/>
           </a:solidFill>
           <a:ln w="12700">
             <a:solidFill>
-              <a:srgbClr val="17223A"/>
+              <a:srgbClr val="1E2B45"/>
             </a:solidFill>
             <a:prstDash val="solid"/>
           </a:ln>
@@ -12752,168 +12986,14 @@
       </p:sp>
       <p:sp>
         <p:nvSpPr>
-          <p:cNvPr id="27" name="Shape 20"/>
+          <p:cNvPr id="39" name="Shape 30"/>
           <p:cNvSpPr/>
           <p:nvPr/>
         </p:nvSpPr>
         <p:spPr>
           <a:xfrm>
-            <a:off x="4572000" y="4206240"/>
-            <a:ext cx="640080" cy="640080"/>
-          </a:xfrm>
-          <a:prstGeom prst="ellipse">
-            <a:avLst/>
-          </a:prstGeom>
-          <a:solidFill>
-            <a:srgbClr val="1E2B45"/>
-          </a:solidFill>
-          <a:ln w="19050">
-            <a:solidFill>
-              <a:srgbClr val="FBBF24"/>
-            </a:solidFill>
-            <a:prstDash val="solid"/>
-          </a:ln>
-        </p:spPr>
-      </p:sp>
-      <p:pic>
-        <p:nvPicPr>
-          <p:cNvPr id="28" name="Image 5" descr="preencoded.png">    </p:cNvPr>
-          <p:cNvPicPr>
-            <a:picLocks noChangeAspect="1"/>
-          </p:cNvPicPr>
-          <p:nvPr/>
-        </p:nvPicPr>
-        <p:blipFill>
-          <a:blip r:embed="rId6"/>
-          <a:stretch>
-            <a:fillRect/>
-          </a:stretch>
-        </p:blipFill>
-        <p:spPr>
-          <a:xfrm>
-            <a:off x="4725619" y="4359859"/>
-            <a:ext cx="332842" cy="332842"/>
-          </a:xfrm>
-          <a:prstGeom prst="rect">
-            <a:avLst/>
-          </a:prstGeom>
-        </p:spPr>
-      </p:pic>
-      <p:sp>
-        <p:nvSpPr>
-          <p:cNvPr id="29" name="Text 21"/>
-          <p:cNvSpPr txBox="1"/>
-          <p:nvPr/>
-        </p:nvSpPr>
-        <p:spPr>
-          <a:xfrm>
-            <a:off x="5349240" y="4297680"/>
-            <a:ext cx="2286000" cy="457200"/>
-          </a:xfrm>
-          <a:prstGeom prst="rect">
-            <a:avLst/>
-          </a:prstGeom>
-          <a:noFill/>
-          <a:ln/>
-        </p:spPr>
-        <p:txBody>
-          <a:bodyPr wrap="square" lIns="0" tIns="0" rIns="0" bIns="0" rtlCol="0" anchor="t"/>
-          <a:lstStyle/>
-          <a:p>
-            <a:pPr indent="0" marL="0">
-              <a:buNone/>
-            </a:pPr>
-            <a:r>
-              <a:rPr lang="en-US" sz="1600" b="1" dirty="0">
-                <a:solidFill>
-                  <a:srgbClr val="F8FAFC"/>
-                </a:solidFill>
-                <a:latin typeface="Calibri" pitchFamily="34" charset="0"/>
-                <a:ea typeface="Calibri" pitchFamily="34" charset="-122"/>
-                <a:cs typeface="Calibri" pitchFamily="34" charset="-120"/>
-              </a:rPr>
-              <a:t>Honest proof</a:t>
-            </a:r>
-            <a:endParaRPr lang="en-US" sz="1600" dirty="0"/>
-          </a:p>
-        </p:txBody>
-      </p:sp>
-      <p:sp>
-        <p:nvSpPr>
-          <p:cNvPr id="30" name="Text 22"/>
-          <p:cNvSpPr txBox="1"/>
-          <p:nvPr/>
-        </p:nvSpPr>
-        <p:spPr>
-          <a:xfrm>
-            <a:off x="4572000" y="4937760"/>
-            <a:ext cx="2971800" cy="868680"/>
-          </a:xfrm>
-          <a:prstGeom prst="rect">
-            <a:avLst/>
-          </a:prstGeom>
-          <a:noFill/>
-          <a:ln/>
-        </p:spPr>
-        <p:txBody>
-          <a:bodyPr wrap="square" lIns="0" tIns="0" rIns="0" bIns="0" rtlCol="0" anchor="t"/>
-          <a:lstStyle/>
-          <a:p>
-            <a:pPr indent="0" marL="0">
-              <a:buNone/>
-            </a:pPr>
-            <a:r>
-              <a:rPr lang="en-US" sz="1300" dirty="0">
-                <a:solidFill>
-                  <a:srgbClr val="A3B3C9"/>
-                </a:solidFill>
-                <a:latin typeface="Calibri" pitchFamily="34" charset="0"/>
-                <a:ea typeface="Calibri" pitchFamily="34" charset="-122"/>
-                <a:cs typeface="Calibri" pitchFamily="34" charset="-120"/>
-              </a:rPr>
-              <a:t>Only provider-confirmed payments are proof. The rest is the owner's own record.</a:t>
-            </a:r>
-            <a:endParaRPr lang="en-US" sz="1300" dirty="0"/>
-          </a:p>
-        </p:txBody>
-      </p:sp>
-      <p:sp>
-        <p:nvSpPr>
-          <p:cNvPr id="31" name="Shape 23"/>
-          <p:cNvSpPr/>
-          <p:nvPr/>
-        </p:nvSpPr>
-        <p:spPr>
-          <a:xfrm>
-            <a:off x="8046720" y="3931920"/>
-            <a:ext cx="3474720" cy="1965960"/>
-          </a:xfrm>
-          <a:prstGeom prst="roundRect">
-            <a:avLst>
-              <a:gd name="adj" fmla="val 5581"/>
-            </a:avLst>
-          </a:prstGeom>
-          <a:solidFill>
-            <a:srgbClr val="17223A"/>
-          </a:solidFill>
-          <a:ln w="12700">
-            <a:solidFill>
-              <a:srgbClr val="17223A"/>
-            </a:solidFill>
-            <a:prstDash val="solid"/>
-          </a:ln>
-        </p:spPr>
-      </p:sp>
-      <p:sp>
-        <p:nvSpPr>
-          <p:cNvPr id="32" name="Shape 24"/>
-          <p:cNvSpPr/>
-          <p:nvPr/>
-        </p:nvSpPr>
-        <p:spPr>
-          <a:xfrm>
-            <a:off x="8321040" y="4206240"/>
-            <a:ext cx="640080" cy="640080"/>
+            <a:off x="9198864" y="4370832"/>
+            <a:ext cx="566928" cy="566928"/>
           </a:xfrm>
           <a:prstGeom prst="ellipse">
             <a:avLst/>
@@ -12931,22 +13011,22 @@
       </p:sp>
       <p:pic>
         <p:nvPicPr>
-          <p:cNvPr id="33" name="Image 6" descr="preencoded.png">    </p:cNvPr>
+          <p:cNvPr id="40" name="Image 7" descr="preencoded.png">    </p:cNvPr>
           <p:cNvPicPr>
             <a:picLocks noChangeAspect="1"/>
           </p:cNvPicPr>
           <p:nvPr/>
         </p:nvPicPr>
         <p:blipFill>
-          <a:blip r:embed="rId7"/>
+          <a:blip r:embed="rId8"/>
           <a:stretch>
             <a:fillRect/>
           </a:stretch>
         </p:blipFill>
         <p:spPr>
           <a:xfrm>
-            <a:off x="8474659" y="4359859"/>
-            <a:ext cx="332842" cy="332842"/>
+            <a:off x="9334927" y="4506895"/>
+            <a:ext cx="294803" cy="294803"/>
           </a:xfrm>
           <a:prstGeom prst="rect">
             <a:avLst/>
@@ -12955,14 +13035,14 @@
       </p:pic>
       <p:sp>
         <p:nvSpPr>
-          <p:cNvPr id="34" name="Text 25"/>
-          <p:cNvSpPr txBox="1"/>
-          <p:nvPr/>
-        </p:nvSpPr>
-        <p:spPr>
-          <a:xfrm>
-            <a:off x="9098280" y="4297680"/>
-            <a:ext cx="2286000" cy="457200"/>
+          <p:cNvPr id="41" name="Text 31"/>
+          <p:cNvSpPr txBox="1"/>
+          <p:nvPr/>
+        </p:nvSpPr>
+        <p:spPr>
+          <a:xfrm>
+            <a:off x="9912096" y="4462272"/>
+            <a:ext cx="1645920" cy="365760"/>
           </a:xfrm>
           <a:prstGeom prst="rect">
             <a:avLst/>
@@ -12978,7 +13058,7 @@
               <a:buNone/>
             </a:pPr>
             <a:r>
-              <a:rPr lang="en-US" sz="1600" b="1" dirty="0">
+              <a:rPr lang="en-US" sz="1500" b="1" dirty="0">
                 <a:solidFill>
                   <a:srgbClr val="F8FAFC"/>
                 </a:solidFill>
@@ -12986,22 +13066,22 @@
                 <a:ea typeface="Calibri" pitchFamily="34" charset="-122"/>
                 <a:cs typeface="Calibri" pitchFamily="34" charset="-120"/>
               </a:rPr>
-              <a:t>Tested like an attacker</a:t>
-            </a:r>
-            <a:endParaRPr lang="en-US" sz="1600" dirty="0"/>
-          </a:p>
-        </p:txBody>
-      </p:sp>
-      <p:sp>
-        <p:nvSpPr>
-          <p:cNvPr id="35" name="Text 26"/>
-          <p:cNvSpPr txBox="1"/>
-          <p:nvPr/>
-        </p:nvSpPr>
-        <p:spPr>
-          <a:xfrm>
-            <a:off x="8321040" y="4937760"/>
-            <a:ext cx="2971800" cy="868680"/>
+              <a:t>Email</a:t>
+            </a:r>
+            <a:endParaRPr lang="en-US" sz="1500" dirty="0"/>
+          </a:p>
+        </p:txBody>
+      </p:sp>
+      <p:sp>
+        <p:nvSpPr>
+          <p:cNvPr id="42" name="Text 32"/>
+          <p:cNvSpPr txBox="1"/>
+          <p:nvPr/>
+        </p:nvSpPr>
+        <p:spPr>
+          <a:xfrm>
+            <a:off x="9198864" y="5074920"/>
+            <a:ext cx="2240280" cy="548640"/>
           </a:xfrm>
           <a:prstGeom prst="rect">
             <a:avLst/>
@@ -13025,7 +13105,7 @@
                 <a:ea typeface="Calibri" pitchFamily="34" charset="-122"/>
                 <a:cs typeface="Calibri" pitchFamily="34" charset="-120"/>
               </a:rPr>
-              <a:t>Hostile-input tests on every endpoint, rate limits, OWASP API Top 10, incident plan.</a:t>
+              <a:t>codes, receipts, alerts</a:t>
             </a:r>
             <a:endParaRPr lang="en-US" sz="1300" dirty="0"/>
           </a:p>
@@ -13777,7 +13857,7 @@
                 <a:ea typeface="Georgia" pitchFamily="34" charset="-122"/>
                 <a:cs typeface="Georgia" pitchFamily="34" charset="-120"/>
               </a:rPr>
-              <a:t>What's next</a:t>
+              <a:t>Security and data privacy</a:t>
             </a:r>
             <a:endParaRPr lang="en-US" sz="3400" dirty="0"/>
           </a:p>
@@ -13841,6 +13921,1103 @@
                 <a:cs typeface="Calibri" pitchFamily="34" charset="-120"/>
               </a:rPr>
               <a:t>20</a:t>
+            </a:r>
+            <a:endParaRPr lang="en-US" sz="1000" dirty="0"/>
+          </a:p>
+        </p:txBody>
+      </p:sp>
+      <p:sp>
+        <p:nvSpPr>
+          <p:cNvPr id="6" name="Shape 3"/>
+          <p:cNvSpPr/>
+          <p:nvPr/>
+        </p:nvSpPr>
+        <p:spPr>
+          <a:xfrm>
+            <a:off x="548640" y="1783080"/>
+            <a:ext cx="3474720" cy="1965960"/>
+          </a:xfrm>
+          <a:prstGeom prst="roundRect">
+            <a:avLst>
+              <a:gd name="adj" fmla="val 5581"/>
+            </a:avLst>
+          </a:prstGeom>
+          <a:solidFill>
+            <a:srgbClr val="17223A"/>
+          </a:solidFill>
+          <a:ln w="12700">
+            <a:solidFill>
+              <a:srgbClr val="17223A"/>
+            </a:solidFill>
+            <a:prstDash val="solid"/>
+          </a:ln>
+        </p:spPr>
+      </p:sp>
+      <p:sp>
+        <p:nvSpPr>
+          <p:cNvPr id="7" name="Shape 4"/>
+          <p:cNvSpPr/>
+          <p:nvPr/>
+        </p:nvSpPr>
+        <p:spPr>
+          <a:xfrm>
+            <a:off x="822960" y="2057400"/>
+            <a:ext cx="640080" cy="640080"/>
+          </a:xfrm>
+          <a:prstGeom prst="ellipse">
+            <a:avLst/>
+          </a:prstGeom>
+          <a:solidFill>
+            <a:srgbClr val="1E2B45"/>
+          </a:solidFill>
+          <a:ln w="19050">
+            <a:solidFill>
+              <a:srgbClr val="10B981"/>
+            </a:solidFill>
+            <a:prstDash val="solid"/>
+          </a:ln>
+        </p:spPr>
+      </p:sp>
+      <p:pic>
+        <p:nvPicPr>
+          <p:cNvPr id="8" name="Image 1" descr="preencoded.png">    </p:cNvPr>
+          <p:cNvPicPr>
+            <a:picLocks noChangeAspect="1"/>
+          </p:cNvPicPr>
+          <p:nvPr/>
+        </p:nvPicPr>
+        <p:blipFill>
+          <a:blip r:embed="rId2"/>
+          <a:stretch>
+            <a:fillRect/>
+          </a:stretch>
+        </p:blipFill>
+        <p:spPr>
+          <a:xfrm>
+            <a:off x="976579" y="2211019"/>
+            <a:ext cx="332842" cy="332842"/>
+          </a:xfrm>
+          <a:prstGeom prst="rect">
+            <a:avLst/>
+          </a:prstGeom>
+        </p:spPr>
+      </p:pic>
+      <p:sp>
+        <p:nvSpPr>
+          <p:cNvPr id="9" name="Text 5"/>
+          <p:cNvSpPr txBox="1"/>
+          <p:nvPr/>
+        </p:nvSpPr>
+        <p:spPr>
+          <a:xfrm>
+            <a:off x="1600200" y="2148840"/>
+            <a:ext cx="2286000" cy="457200"/>
+          </a:xfrm>
+          <a:prstGeom prst="rect">
+            <a:avLst/>
+          </a:prstGeom>
+          <a:noFill/>
+          <a:ln/>
+        </p:spPr>
+        <p:txBody>
+          <a:bodyPr wrap="square" lIns="0" tIns="0" rIns="0" bIns="0" rtlCol="0" anchor="t"/>
+          <a:lstStyle/>
+          <a:p>
+            <a:pPr indent="0" marL="0">
+              <a:buNone/>
+            </a:pPr>
+            <a:r>
+              <a:rPr lang="en-US" sz="1600" b="1" dirty="0">
+                <a:solidFill>
+                  <a:srgbClr val="F8FAFC"/>
+                </a:solidFill>
+                <a:latin typeface="Calibri" pitchFamily="34" charset="0"/>
+                <a:ea typeface="Calibri" pitchFamily="34" charset="-122"/>
+                <a:cs typeface="Calibri" pitchFamily="34" charset="-120"/>
+              </a:rPr>
+              <a:t>Your data is yours</a:t>
+            </a:r>
+            <a:endParaRPr lang="en-US" sz="1600" dirty="0"/>
+          </a:p>
+        </p:txBody>
+      </p:sp>
+      <p:sp>
+        <p:nvSpPr>
+          <p:cNvPr id="10" name="Text 6"/>
+          <p:cNvSpPr txBox="1"/>
+          <p:nvPr/>
+        </p:nvSpPr>
+        <p:spPr>
+          <a:xfrm>
+            <a:off x="822960" y="2788920"/>
+            <a:ext cx="2971800" cy="868680"/>
+          </a:xfrm>
+          <a:prstGeom prst="rect">
+            <a:avLst/>
+          </a:prstGeom>
+          <a:noFill/>
+          <a:ln/>
+        </p:spPr>
+        <p:txBody>
+          <a:bodyPr wrap="square" lIns="0" tIns="0" rIns="0" bIns="0" rtlCol="0" anchor="t"/>
+          <a:lstStyle/>
+          <a:p>
+            <a:pPr indent="0" marL="0">
+              <a:buNone/>
+            </a:pPr>
+            <a:r>
+              <a:rPr lang="en-US" sz="1300" dirty="0">
+                <a:solidFill>
+                  <a:srgbClr val="A3B3C9"/>
+                </a:solidFill>
+                <a:latin typeface="Calibri" pitchFamily="34" charset="0"/>
+                <a:ea typeface="Calibri" pitchFamily="34" charset="-122"/>
+                <a:cs typeface="Calibri" pitchFamily="34" charset="-120"/>
+              </a:rPr>
+              <a:t>Every request is limited to the owner. Anyone else's record answers 'not found'.</a:t>
+            </a:r>
+            <a:endParaRPr lang="en-US" sz="1300" dirty="0"/>
+          </a:p>
+        </p:txBody>
+      </p:sp>
+      <p:sp>
+        <p:nvSpPr>
+          <p:cNvPr id="11" name="Shape 7"/>
+          <p:cNvSpPr/>
+          <p:nvPr/>
+        </p:nvSpPr>
+        <p:spPr>
+          <a:xfrm>
+            <a:off x="4297680" y="1783080"/>
+            <a:ext cx="3474720" cy="1965960"/>
+          </a:xfrm>
+          <a:prstGeom prst="roundRect">
+            <a:avLst>
+              <a:gd name="adj" fmla="val 5581"/>
+            </a:avLst>
+          </a:prstGeom>
+          <a:solidFill>
+            <a:srgbClr val="17223A"/>
+          </a:solidFill>
+          <a:ln w="12700">
+            <a:solidFill>
+              <a:srgbClr val="17223A"/>
+            </a:solidFill>
+            <a:prstDash val="solid"/>
+          </a:ln>
+        </p:spPr>
+      </p:sp>
+      <p:sp>
+        <p:nvSpPr>
+          <p:cNvPr id="12" name="Shape 8"/>
+          <p:cNvSpPr/>
+          <p:nvPr/>
+        </p:nvSpPr>
+        <p:spPr>
+          <a:xfrm>
+            <a:off x="4572000" y="2057400"/>
+            <a:ext cx="640080" cy="640080"/>
+          </a:xfrm>
+          <a:prstGeom prst="ellipse">
+            <a:avLst/>
+          </a:prstGeom>
+          <a:solidFill>
+            <a:srgbClr val="1E2B45"/>
+          </a:solidFill>
+          <a:ln w="19050">
+            <a:solidFill>
+              <a:srgbClr val="10B981"/>
+            </a:solidFill>
+            <a:prstDash val="solid"/>
+          </a:ln>
+        </p:spPr>
+      </p:sp>
+      <p:pic>
+        <p:nvPicPr>
+          <p:cNvPr id="13" name="Image 2" descr="preencoded.png">    </p:cNvPr>
+          <p:cNvPicPr>
+            <a:picLocks noChangeAspect="1"/>
+          </p:cNvPicPr>
+          <p:nvPr/>
+        </p:nvPicPr>
+        <p:blipFill>
+          <a:blip r:embed="rId3"/>
+          <a:stretch>
+            <a:fillRect/>
+          </a:stretch>
+        </p:blipFill>
+        <p:spPr>
+          <a:xfrm>
+            <a:off x="4725619" y="2211019"/>
+            <a:ext cx="332842" cy="332842"/>
+          </a:xfrm>
+          <a:prstGeom prst="rect">
+            <a:avLst/>
+          </a:prstGeom>
+        </p:spPr>
+      </p:pic>
+      <p:sp>
+        <p:nvSpPr>
+          <p:cNvPr id="14" name="Text 9"/>
+          <p:cNvSpPr txBox="1"/>
+          <p:nvPr/>
+        </p:nvSpPr>
+        <p:spPr>
+          <a:xfrm>
+            <a:off x="5349240" y="2148840"/>
+            <a:ext cx="2286000" cy="457200"/>
+          </a:xfrm>
+          <a:prstGeom prst="rect">
+            <a:avLst/>
+          </a:prstGeom>
+          <a:noFill/>
+          <a:ln/>
+        </p:spPr>
+        <p:txBody>
+          <a:bodyPr wrap="square" lIns="0" tIns="0" rIns="0" bIns="0" rtlCol="0" anchor="t"/>
+          <a:lstStyle/>
+          <a:p>
+            <a:pPr indent="0" marL="0">
+              <a:buNone/>
+            </a:pPr>
+            <a:r>
+              <a:rPr lang="en-US" sz="1600" b="1" dirty="0">
+                <a:solidFill>
+                  <a:srgbClr val="F8FAFC"/>
+                </a:solidFill>
+                <a:latin typeface="Calibri" pitchFamily="34" charset="0"/>
+                <a:ea typeface="Calibri" pitchFamily="34" charset="-122"/>
+                <a:cs typeface="Calibri" pitchFamily="34" charset="-120"/>
+              </a:rPr>
+              <a:t>Simple, still safe</a:t>
+            </a:r>
+            <a:endParaRPr lang="en-US" sz="1600" dirty="0"/>
+          </a:p>
+        </p:txBody>
+      </p:sp>
+      <p:sp>
+        <p:nvSpPr>
+          <p:cNvPr id="15" name="Text 10"/>
+          <p:cNvSpPr txBox="1"/>
+          <p:nvPr/>
+        </p:nvSpPr>
+        <p:spPr>
+          <a:xfrm>
+            <a:off x="4572000" y="2788920"/>
+            <a:ext cx="2971800" cy="868680"/>
+          </a:xfrm>
+          <a:prstGeom prst="rect">
+            <a:avLst/>
+          </a:prstGeom>
+          <a:noFill/>
+          <a:ln/>
+        </p:spPr>
+        <p:txBody>
+          <a:bodyPr wrap="square" lIns="0" tIns="0" rIns="0" bIns="0" rtlCol="0" anchor="t"/>
+          <a:lstStyle/>
+          <a:p>
+            <a:pPr indent="0" marL="0">
+              <a:buNone/>
+            </a:pPr>
+            <a:r>
+              <a:rPr lang="en-US" sz="1300" dirty="0">
+                <a:solidFill>
+                  <a:srgbClr val="A3B3C9"/>
+                </a:solidFill>
+                <a:latin typeface="Calibri" pitchFamily="34" charset="0"/>
+                <a:ea typeface="Calibri" pitchFamily="34" charset="-122"/>
+                <a:cs typeface="Calibri" pitchFamily="34" charset="-120"/>
+              </a:rPr>
+              <a:t>Email and password; one code only on a new phone. The rest runs on our side.</a:t>
+            </a:r>
+            <a:endParaRPr lang="en-US" sz="1300" dirty="0"/>
+          </a:p>
+        </p:txBody>
+      </p:sp>
+      <p:sp>
+        <p:nvSpPr>
+          <p:cNvPr id="16" name="Shape 11"/>
+          <p:cNvSpPr/>
+          <p:nvPr/>
+        </p:nvSpPr>
+        <p:spPr>
+          <a:xfrm>
+            <a:off x="8046720" y="1783080"/>
+            <a:ext cx="3474720" cy="1965960"/>
+          </a:xfrm>
+          <a:prstGeom prst="roundRect">
+            <a:avLst>
+              <a:gd name="adj" fmla="val 5581"/>
+            </a:avLst>
+          </a:prstGeom>
+          <a:solidFill>
+            <a:srgbClr val="17223A"/>
+          </a:solidFill>
+          <a:ln w="12700">
+            <a:solidFill>
+              <a:srgbClr val="17223A"/>
+            </a:solidFill>
+            <a:prstDash val="solid"/>
+          </a:ln>
+        </p:spPr>
+      </p:sp>
+      <p:sp>
+        <p:nvSpPr>
+          <p:cNvPr id="17" name="Shape 12"/>
+          <p:cNvSpPr/>
+          <p:nvPr/>
+        </p:nvSpPr>
+        <p:spPr>
+          <a:xfrm>
+            <a:off x="8321040" y="2057400"/>
+            <a:ext cx="640080" cy="640080"/>
+          </a:xfrm>
+          <a:prstGeom prst="ellipse">
+            <a:avLst/>
+          </a:prstGeom>
+          <a:solidFill>
+            <a:srgbClr val="1E2B45"/>
+          </a:solidFill>
+          <a:ln w="19050">
+            <a:solidFill>
+              <a:srgbClr val="10B981"/>
+            </a:solidFill>
+            <a:prstDash val="solid"/>
+          </a:ln>
+        </p:spPr>
+      </p:sp>
+      <p:pic>
+        <p:nvPicPr>
+          <p:cNvPr id="18" name="Image 3" descr="preencoded.png">    </p:cNvPr>
+          <p:cNvPicPr>
+            <a:picLocks noChangeAspect="1"/>
+          </p:cNvPicPr>
+          <p:nvPr/>
+        </p:nvPicPr>
+        <p:blipFill>
+          <a:blip r:embed="rId4"/>
+          <a:stretch>
+            <a:fillRect/>
+          </a:stretch>
+        </p:blipFill>
+        <p:spPr>
+          <a:xfrm>
+            <a:off x="8474659" y="2211019"/>
+            <a:ext cx="332842" cy="332842"/>
+          </a:xfrm>
+          <a:prstGeom prst="rect">
+            <a:avLst/>
+          </a:prstGeom>
+        </p:spPr>
+      </p:pic>
+      <p:sp>
+        <p:nvSpPr>
+          <p:cNvPr id="19" name="Text 13"/>
+          <p:cNvSpPr txBox="1"/>
+          <p:nvPr/>
+        </p:nvSpPr>
+        <p:spPr>
+          <a:xfrm>
+            <a:off x="9098280" y="2148840"/>
+            <a:ext cx="2286000" cy="457200"/>
+          </a:xfrm>
+          <a:prstGeom prst="rect">
+            <a:avLst/>
+          </a:prstGeom>
+          <a:noFill/>
+          <a:ln/>
+        </p:spPr>
+        <p:txBody>
+          <a:bodyPr wrap="square" lIns="0" tIns="0" rIns="0" bIns="0" rtlCol="0" anchor="t"/>
+          <a:lstStyle/>
+          <a:p>
+            <a:pPr indent="0" marL="0">
+              <a:buNone/>
+            </a:pPr>
+            <a:r>
+              <a:rPr lang="en-US" sz="1600" b="1" dirty="0">
+                <a:solidFill>
+                  <a:srgbClr val="F8FAFC"/>
+                </a:solidFill>
+                <a:latin typeface="Calibri" pitchFamily="34" charset="0"/>
+                <a:ea typeface="Calibri" pitchFamily="34" charset="-122"/>
+                <a:cs typeface="Calibri" pitchFamily="34" charset="-120"/>
+              </a:rPr>
+              <a:t>No card data</a:t>
+            </a:r>
+            <a:endParaRPr lang="en-US" sz="1600" dirty="0"/>
+          </a:p>
+        </p:txBody>
+      </p:sp>
+      <p:sp>
+        <p:nvSpPr>
+          <p:cNvPr id="20" name="Text 14"/>
+          <p:cNvSpPr txBox="1"/>
+          <p:nvPr/>
+        </p:nvSpPr>
+        <p:spPr>
+          <a:xfrm>
+            <a:off x="8321040" y="2788920"/>
+            <a:ext cx="2971800" cy="868680"/>
+          </a:xfrm>
+          <a:prstGeom prst="rect">
+            <a:avLst/>
+          </a:prstGeom>
+          <a:noFill/>
+          <a:ln/>
+        </p:spPr>
+        <p:txBody>
+          <a:bodyPr wrap="square" lIns="0" tIns="0" rIns="0" bIns="0" rtlCol="0" anchor="t"/>
+          <a:lstStyle/>
+          <a:p>
+            <a:pPr indent="0" marL="0">
+              <a:buNone/>
+            </a:pPr>
+            <a:r>
+              <a:rPr lang="en-US" sz="1300" dirty="0">
+                <a:solidFill>
+                  <a:srgbClr val="A3B3C9"/>
+                </a:solidFill>
+                <a:latin typeface="Calibri" pitchFamily="34" charset="0"/>
+                <a:ea typeface="Calibri" pitchFamily="34" charset="-122"/>
+                <a:cs typeface="Calibri" pitchFamily="34" charset="-120"/>
+              </a:rPr>
+              <a:t>The payment provider's own page. A payment counts only after 4 checks.</a:t>
+            </a:r>
+            <a:endParaRPr lang="en-US" sz="1300" dirty="0"/>
+          </a:p>
+        </p:txBody>
+      </p:sp>
+      <p:sp>
+        <p:nvSpPr>
+          <p:cNvPr id="21" name="Shape 15"/>
+          <p:cNvSpPr/>
+          <p:nvPr/>
+        </p:nvSpPr>
+        <p:spPr>
+          <a:xfrm>
+            <a:off x="548640" y="3931920"/>
+            <a:ext cx="3474720" cy="1965960"/>
+          </a:xfrm>
+          <a:prstGeom prst="roundRect">
+            <a:avLst>
+              <a:gd name="adj" fmla="val 5581"/>
+            </a:avLst>
+          </a:prstGeom>
+          <a:solidFill>
+            <a:srgbClr val="17223A"/>
+          </a:solidFill>
+          <a:ln w="12700">
+            <a:solidFill>
+              <a:srgbClr val="17223A"/>
+            </a:solidFill>
+            <a:prstDash val="solid"/>
+          </a:ln>
+        </p:spPr>
+      </p:sp>
+      <p:sp>
+        <p:nvSpPr>
+          <p:cNvPr id="22" name="Shape 16"/>
+          <p:cNvSpPr/>
+          <p:nvPr/>
+        </p:nvSpPr>
+        <p:spPr>
+          <a:xfrm>
+            <a:off x="822960" y="4206240"/>
+            <a:ext cx="640080" cy="640080"/>
+          </a:xfrm>
+          <a:prstGeom prst="ellipse">
+            <a:avLst/>
+          </a:prstGeom>
+          <a:solidFill>
+            <a:srgbClr val="1E2B45"/>
+          </a:solidFill>
+          <a:ln w="19050">
+            <a:solidFill>
+              <a:srgbClr val="10B981"/>
+            </a:solidFill>
+            <a:prstDash val="solid"/>
+          </a:ln>
+        </p:spPr>
+      </p:sp>
+      <p:pic>
+        <p:nvPicPr>
+          <p:cNvPr id="23" name="Image 4" descr="preencoded.png">    </p:cNvPr>
+          <p:cNvPicPr>
+            <a:picLocks noChangeAspect="1"/>
+          </p:cNvPicPr>
+          <p:nvPr/>
+        </p:nvPicPr>
+        <p:blipFill>
+          <a:blip r:embed="rId5"/>
+          <a:stretch>
+            <a:fillRect/>
+          </a:stretch>
+        </p:blipFill>
+        <p:spPr>
+          <a:xfrm>
+            <a:off x="976579" y="4359859"/>
+            <a:ext cx="332842" cy="332842"/>
+          </a:xfrm>
+          <a:prstGeom prst="rect">
+            <a:avLst/>
+          </a:prstGeom>
+        </p:spPr>
+      </p:pic>
+      <p:sp>
+        <p:nvSpPr>
+          <p:cNvPr id="24" name="Text 17"/>
+          <p:cNvSpPr txBox="1"/>
+          <p:nvPr/>
+        </p:nvSpPr>
+        <p:spPr>
+          <a:xfrm>
+            <a:off x="1600200" y="4297680"/>
+            <a:ext cx="2286000" cy="457200"/>
+          </a:xfrm>
+          <a:prstGeom prst="rect">
+            <a:avLst/>
+          </a:prstGeom>
+          <a:noFill/>
+          <a:ln/>
+        </p:spPr>
+        <p:txBody>
+          <a:bodyPr wrap="square" lIns="0" tIns="0" rIns="0" bIns="0" rtlCol="0" anchor="t"/>
+          <a:lstStyle/>
+          <a:p>
+            <a:pPr indent="0" marL="0">
+              <a:buNone/>
+            </a:pPr>
+            <a:r>
+              <a:rPr lang="en-US" sz="1600" b="1" dirty="0">
+                <a:solidFill>
+                  <a:srgbClr val="F8FAFC"/>
+                </a:solidFill>
+                <a:latin typeface="Calibri" pitchFamily="34" charset="0"/>
+                <a:ea typeface="Calibri" pitchFamily="34" charset="-122"/>
+                <a:cs typeface="Calibri" pitchFamily="34" charset="-120"/>
+              </a:rPr>
+              <a:t>POPIA by design</a:t>
+            </a:r>
+            <a:endParaRPr lang="en-US" sz="1600" dirty="0"/>
+          </a:p>
+        </p:txBody>
+      </p:sp>
+      <p:sp>
+        <p:nvSpPr>
+          <p:cNvPr id="25" name="Text 18"/>
+          <p:cNvSpPr txBox="1"/>
+          <p:nvPr/>
+        </p:nvSpPr>
+        <p:spPr>
+          <a:xfrm>
+            <a:off x="822960" y="4937760"/>
+            <a:ext cx="2971800" cy="868680"/>
+          </a:xfrm>
+          <a:prstGeom prst="rect">
+            <a:avLst/>
+          </a:prstGeom>
+          <a:noFill/>
+          <a:ln/>
+        </p:spPr>
+        <p:txBody>
+          <a:bodyPr wrap="square" lIns="0" tIns="0" rIns="0" bIns="0" rtlCol="0" anchor="t"/>
+          <a:lstStyle/>
+          <a:p>
+            <a:pPr indent="0" marL="0">
+              <a:buNone/>
+            </a:pPr>
+            <a:r>
+              <a:rPr lang="en-US" sz="1300" dirty="0">
+                <a:solidFill>
+                  <a:srgbClr val="A3B3C9"/>
+                </a:solidFill>
+                <a:latin typeface="Calibri" pitchFamily="34" charset="0"/>
+                <a:ea typeface="Calibri" pitchFamily="34" charset="-122"/>
+                <a:cs typeface="Calibri" pitchFamily="34" charset="-120"/>
+              </a:rPr>
+              <a:t>Aggregates only in the engine; no names or addresses in logs; data export and account closure.</a:t>
+            </a:r>
+            <a:endParaRPr lang="en-US" sz="1300" dirty="0"/>
+          </a:p>
+        </p:txBody>
+      </p:sp>
+      <p:sp>
+        <p:nvSpPr>
+          <p:cNvPr id="26" name="Shape 19"/>
+          <p:cNvSpPr/>
+          <p:nvPr/>
+        </p:nvSpPr>
+        <p:spPr>
+          <a:xfrm>
+            <a:off x="4297680" y="3931920"/>
+            <a:ext cx="3474720" cy="1965960"/>
+          </a:xfrm>
+          <a:prstGeom prst="roundRect">
+            <a:avLst>
+              <a:gd name="adj" fmla="val 5581"/>
+            </a:avLst>
+          </a:prstGeom>
+          <a:solidFill>
+            <a:srgbClr val="17223A"/>
+          </a:solidFill>
+          <a:ln w="12700">
+            <a:solidFill>
+              <a:srgbClr val="17223A"/>
+            </a:solidFill>
+            <a:prstDash val="solid"/>
+          </a:ln>
+        </p:spPr>
+      </p:sp>
+      <p:sp>
+        <p:nvSpPr>
+          <p:cNvPr id="27" name="Shape 20"/>
+          <p:cNvSpPr/>
+          <p:nvPr/>
+        </p:nvSpPr>
+        <p:spPr>
+          <a:xfrm>
+            <a:off x="4572000" y="4206240"/>
+            <a:ext cx="640080" cy="640080"/>
+          </a:xfrm>
+          <a:prstGeom prst="ellipse">
+            <a:avLst/>
+          </a:prstGeom>
+          <a:solidFill>
+            <a:srgbClr val="1E2B45"/>
+          </a:solidFill>
+          <a:ln w="19050">
+            <a:solidFill>
+              <a:srgbClr val="FBBF24"/>
+            </a:solidFill>
+            <a:prstDash val="solid"/>
+          </a:ln>
+        </p:spPr>
+      </p:sp>
+      <p:pic>
+        <p:nvPicPr>
+          <p:cNvPr id="28" name="Image 5" descr="preencoded.png">    </p:cNvPr>
+          <p:cNvPicPr>
+            <a:picLocks noChangeAspect="1"/>
+          </p:cNvPicPr>
+          <p:nvPr/>
+        </p:nvPicPr>
+        <p:blipFill>
+          <a:blip r:embed="rId6"/>
+          <a:stretch>
+            <a:fillRect/>
+          </a:stretch>
+        </p:blipFill>
+        <p:spPr>
+          <a:xfrm>
+            <a:off x="4725619" y="4359859"/>
+            <a:ext cx="332842" cy="332842"/>
+          </a:xfrm>
+          <a:prstGeom prst="rect">
+            <a:avLst/>
+          </a:prstGeom>
+        </p:spPr>
+      </p:pic>
+      <p:sp>
+        <p:nvSpPr>
+          <p:cNvPr id="29" name="Text 21"/>
+          <p:cNvSpPr txBox="1"/>
+          <p:nvPr/>
+        </p:nvSpPr>
+        <p:spPr>
+          <a:xfrm>
+            <a:off x="5349240" y="4297680"/>
+            <a:ext cx="2286000" cy="457200"/>
+          </a:xfrm>
+          <a:prstGeom prst="rect">
+            <a:avLst/>
+          </a:prstGeom>
+          <a:noFill/>
+          <a:ln/>
+        </p:spPr>
+        <p:txBody>
+          <a:bodyPr wrap="square" lIns="0" tIns="0" rIns="0" bIns="0" rtlCol="0" anchor="t"/>
+          <a:lstStyle/>
+          <a:p>
+            <a:pPr indent="0" marL="0">
+              <a:buNone/>
+            </a:pPr>
+            <a:r>
+              <a:rPr lang="en-US" sz="1600" b="1" dirty="0">
+                <a:solidFill>
+                  <a:srgbClr val="F8FAFC"/>
+                </a:solidFill>
+                <a:latin typeface="Calibri" pitchFamily="34" charset="0"/>
+                <a:ea typeface="Calibri" pitchFamily="34" charset="-122"/>
+                <a:cs typeface="Calibri" pitchFamily="34" charset="-120"/>
+              </a:rPr>
+              <a:t>Honest proof</a:t>
+            </a:r>
+            <a:endParaRPr lang="en-US" sz="1600" dirty="0"/>
+          </a:p>
+        </p:txBody>
+      </p:sp>
+      <p:sp>
+        <p:nvSpPr>
+          <p:cNvPr id="30" name="Text 22"/>
+          <p:cNvSpPr txBox="1"/>
+          <p:nvPr/>
+        </p:nvSpPr>
+        <p:spPr>
+          <a:xfrm>
+            <a:off x="4572000" y="4937760"/>
+            <a:ext cx="2971800" cy="868680"/>
+          </a:xfrm>
+          <a:prstGeom prst="rect">
+            <a:avLst/>
+          </a:prstGeom>
+          <a:noFill/>
+          <a:ln/>
+        </p:spPr>
+        <p:txBody>
+          <a:bodyPr wrap="square" lIns="0" tIns="0" rIns="0" bIns="0" rtlCol="0" anchor="t"/>
+          <a:lstStyle/>
+          <a:p>
+            <a:pPr indent="0" marL="0">
+              <a:buNone/>
+            </a:pPr>
+            <a:r>
+              <a:rPr lang="en-US" sz="1300" dirty="0">
+                <a:solidFill>
+                  <a:srgbClr val="A3B3C9"/>
+                </a:solidFill>
+                <a:latin typeface="Calibri" pitchFamily="34" charset="0"/>
+                <a:ea typeface="Calibri" pitchFamily="34" charset="-122"/>
+                <a:cs typeface="Calibri" pitchFamily="34" charset="-120"/>
+              </a:rPr>
+              <a:t>Only provider-confirmed payments are proof. The rest is the owner's own record.</a:t>
+            </a:r>
+            <a:endParaRPr lang="en-US" sz="1300" dirty="0"/>
+          </a:p>
+        </p:txBody>
+      </p:sp>
+      <p:sp>
+        <p:nvSpPr>
+          <p:cNvPr id="31" name="Shape 23"/>
+          <p:cNvSpPr/>
+          <p:nvPr/>
+        </p:nvSpPr>
+        <p:spPr>
+          <a:xfrm>
+            <a:off x="8046720" y="3931920"/>
+            <a:ext cx="3474720" cy="1965960"/>
+          </a:xfrm>
+          <a:prstGeom prst="roundRect">
+            <a:avLst>
+              <a:gd name="adj" fmla="val 5581"/>
+            </a:avLst>
+          </a:prstGeom>
+          <a:solidFill>
+            <a:srgbClr val="17223A"/>
+          </a:solidFill>
+          <a:ln w="12700">
+            <a:solidFill>
+              <a:srgbClr val="17223A"/>
+            </a:solidFill>
+            <a:prstDash val="solid"/>
+          </a:ln>
+        </p:spPr>
+      </p:sp>
+      <p:sp>
+        <p:nvSpPr>
+          <p:cNvPr id="32" name="Shape 24"/>
+          <p:cNvSpPr/>
+          <p:nvPr/>
+        </p:nvSpPr>
+        <p:spPr>
+          <a:xfrm>
+            <a:off x="8321040" y="4206240"/>
+            <a:ext cx="640080" cy="640080"/>
+          </a:xfrm>
+          <a:prstGeom prst="ellipse">
+            <a:avLst/>
+          </a:prstGeom>
+          <a:solidFill>
+            <a:srgbClr val="1E2B45"/>
+          </a:solidFill>
+          <a:ln w="19050">
+            <a:solidFill>
+              <a:srgbClr val="10B981"/>
+            </a:solidFill>
+            <a:prstDash val="solid"/>
+          </a:ln>
+        </p:spPr>
+      </p:sp>
+      <p:pic>
+        <p:nvPicPr>
+          <p:cNvPr id="33" name="Image 6" descr="preencoded.png">    </p:cNvPr>
+          <p:cNvPicPr>
+            <a:picLocks noChangeAspect="1"/>
+          </p:cNvPicPr>
+          <p:nvPr/>
+        </p:nvPicPr>
+        <p:blipFill>
+          <a:blip r:embed="rId7"/>
+          <a:stretch>
+            <a:fillRect/>
+          </a:stretch>
+        </p:blipFill>
+        <p:spPr>
+          <a:xfrm>
+            <a:off x="8474659" y="4359859"/>
+            <a:ext cx="332842" cy="332842"/>
+          </a:xfrm>
+          <a:prstGeom prst="rect">
+            <a:avLst/>
+          </a:prstGeom>
+        </p:spPr>
+      </p:pic>
+      <p:sp>
+        <p:nvSpPr>
+          <p:cNvPr id="34" name="Text 25"/>
+          <p:cNvSpPr txBox="1"/>
+          <p:nvPr/>
+        </p:nvSpPr>
+        <p:spPr>
+          <a:xfrm>
+            <a:off x="9098280" y="4297680"/>
+            <a:ext cx="2286000" cy="457200"/>
+          </a:xfrm>
+          <a:prstGeom prst="rect">
+            <a:avLst/>
+          </a:prstGeom>
+          <a:noFill/>
+          <a:ln/>
+        </p:spPr>
+        <p:txBody>
+          <a:bodyPr wrap="square" lIns="0" tIns="0" rIns="0" bIns="0" rtlCol="0" anchor="t"/>
+          <a:lstStyle/>
+          <a:p>
+            <a:pPr indent="0" marL="0">
+              <a:buNone/>
+            </a:pPr>
+            <a:r>
+              <a:rPr lang="en-US" sz="1600" b="1" dirty="0">
+                <a:solidFill>
+                  <a:srgbClr val="F8FAFC"/>
+                </a:solidFill>
+                <a:latin typeface="Calibri" pitchFamily="34" charset="0"/>
+                <a:ea typeface="Calibri" pitchFamily="34" charset="-122"/>
+                <a:cs typeface="Calibri" pitchFamily="34" charset="-120"/>
+              </a:rPr>
+              <a:t>Tested like an attacker</a:t>
+            </a:r>
+            <a:endParaRPr lang="en-US" sz="1600" dirty="0"/>
+          </a:p>
+        </p:txBody>
+      </p:sp>
+      <p:sp>
+        <p:nvSpPr>
+          <p:cNvPr id="35" name="Text 26"/>
+          <p:cNvSpPr txBox="1"/>
+          <p:nvPr/>
+        </p:nvSpPr>
+        <p:spPr>
+          <a:xfrm>
+            <a:off x="8321040" y="4937760"/>
+            <a:ext cx="2971800" cy="868680"/>
+          </a:xfrm>
+          <a:prstGeom prst="rect">
+            <a:avLst/>
+          </a:prstGeom>
+          <a:noFill/>
+          <a:ln/>
+        </p:spPr>
+        <p:txBody>
+          <a:bodyPr wrap="square" lIns="0" tIns="0" rIns="0" bIns="0" rtlCol="0" anchor="t"/>
+          <a:lstStyle/>
+          <a:p>
+            <a:pPr indent="0" marL="0">
+              <a:buNone/>
+            </a:pPr>
+            <a:r>
+              <a:rPr lang="en-US" sz="1300" dirty="0">
+                <a:solidFill>
+                  <a:srgbClr val="A3B3C9"/>
+                </a:solidFill>
+                <a:latin typeface="Calibri" pitchFamily="34" charset="0"/>
+                <a:ea typeface="Calibri" pitchFamily="34" charset="-122"/>
+                <a:cs typeface="Calibri" pitchFamily="34" charset="-120"/>
+              </a:rPr>
+              <a:t>Hostile-input tests on every endpoint, rate limits, OWASP API Top 10, incident plan.</a:t>
+            </a:r>
+            <a:endParaRPr lang="en-US" sz="1300" dirty="0"/>
+          </a:p>
+        </p:txBody>
+      </p:sp>
+    </p:spTree>
+  </p:cSld>
+  <p:clrMapOvr>
+    <a:masterClrMapping/>
+  </p:clrMapOvr>
+</p:sld>
+</file>
+
+<file path=ppt/slides/slide21.xml><?xml version="1.0" encoding="utf-8"?>
+<p:sld xmlns:a="http://schemas.openxmlformats.org/drawingml/2006/main" xmlns:r="http://schemas.openxmlformats.org/officeDocument/2006/relationships" xmlns:p="http://schemas.openxmlformats.org/presentationml/2006/main">
+  <p:cSld name="Slide 21">
+    <p:bg>
+      <p:bgPr>
+        <a:solidFill>
+          <a:srgbClr val="0F172A"/>
+        </a:solidFill>
+      </p:bgPr>
+    </p:bg>
+    <p:spTree>
+      <p:nvGrpSpPr>
+        <p:cNvPr id="1" name=""/>
+        <p:cNvGrpSpPr/>
+        <p:nvPr/>
+      </p:nvGrpSpPr>
+      <p:grpSpPr>
+        <a:xfrm>
+          <a:off x="0" y="0"/>
+          <a:ext cx="0" cy="0"/>
+          <a:chOff x="0" y="0"/>
+          <a:chExt cx="0" cy="0"/>
+        </a:xfrm>
+      </p:grpSpPr>
+      <p:sp>
+        <p:nvSpPr>
+          <p:cNvPr id="2" name="Text 0"/>
+          <p:cNvSpPr txBox="1"/>
+          <p:nvPr/>
+        </p:nvSpPr>
+        <p:spPr>
+          <a:xfrm>
+            <a:off x="548640" y="384048"/>
+            <a:ext cx="8229600" cy="320040"/>
+          </a:xfrm>
+          <a:prstGeom prst="rect">
+            <a:avLst/>
+          </a:prstGeom>
+          <a:noFill/>
+          <a:ln/>
+        </p:spPr>
+        <p:txBody>
+          <a:bodyPr wrap="square" lIns="0" tIns="0" rIns="0" bIns="0" rtlCol="0" anchor="t"/>
+          <a:lstStyle/>
+          <a:p>
+            <a:pPr indent="0" marL="0">
+              <a:buNone/>
+            </a:pPr>
+            <a:r>
+              <a:rPr lang="en-US" sz="1300" b="1" spc="300" kern="0" dirty="0">
+                <a:solidFill>
+                  <a:srgbClr val="10B981"/>
+                </a:solidFill>
+                <a:latin typeface="Calibri" pitchFamily="34" charset="0"/>
+                <a:ea typeface="Calibri" pitchFamily="34" charset="-122"/>
+                <a:cs typeface="Calibri" pitchFamily="34" charset="-120"/>
+              </a:rPr>
+              <a:t>APPENDIX</a:t>
+            </a:r>
+            <a:endParaRPr lang="en-US" sz="1300" dirty="0"/>
+          </a:p>
+        </p:txBody>
+      </p:sp>
+      <p:sp>
+        <p:nvSpPr>
+          <p:cNvPr id="3" name="Text 1"/>
+          <p:cNvSpPr txBox="1"/>
+          <p:nvPr/>
+        </p:nvSpPr>
+        <p:spPr>
+          <a:xfrm>
+            <a:off x="548640" y="731520"/>
+            <a:ext cx="11094415" cy="868680"/>
+          </a:xfrm>
+          <a:prstGeom prst="rect">
+            <a:avLst/>
+          </a:prstGeom>
+          <a:noFill/>
+          <a:ln/>
+        </p:spPr>
+        <p:txBody>
+          <a:bodyPr wrap="square" lIns="0" tIns="0" rIns="0" bIns="0" rtlCol="0" anchor="t"/>
+          <a:lstStyle/>
+          <a:p>
+            <a:pPr indent="0" marL="0">
+              <a:buNone/>
+            </a:pPr>
+            <a:r>
+              <a:rPr lang="en-US" sz="3400" b="1" dirty="0">
+                <a:solidFill>
+                  <a:srgbClr val="F8FAFC"/>
+                </a:solidFill>
+                <a:latin typeface="Georgia" pitchFamily="34" charset="0"/>
+                <a:ea typeface="Georgia" pitchFamily="34" charset="-122"/>
+                <a:cs typeface="Georgia" pitchFamily="34" charset="-120"/>
+              </a:rPr>
+              <a:t>What's next</a:t>
+            </a:r>
+            <a:endParaRPr lang="en-US" sz="3400" dirty="0"/>
+          </a:p>
+        </p:txBody>
+      </p:sp>
+      <p:pic>
+        <p:nvPicPr>
+          <p:cNvPr id="4" name="Image 0" descr="preencoded.png">    </p:cNvPr>
+          <p:cNvPicPr>
+            <a:picLocks noChangeAspect="1"/>
+          </p:cNvPicPr>
+          <p:nvPr/>
+        </p:nvPicPr>
+        <p:blipFill>
+          <a:blip r:embed="rId1"/>
+          <a:stretch>
+            <a:fillRect/>
+          </a:stretch>
+        </p:blipFill>
+        <p:spPr>
+          <a:xfrm>
+            <a:off x="11231575" y="6291072"/>
+            <a:ext cx="384048" cy="384048"/>
+          </a:xfrm>
+          <a:prstGeom prst="rect">
+            <a:avLst/>
+          </a:prstGeom>
+        </p:spPr>
+      </p:pic>
+      <p:sp>
+        <p:nvSpPr>
+          <p:cNvPr id="5" name="Text 2"/>
+          <p:cNvSpPr txBox="1"/>
+          <p:nvPr/>
+        </p:nvSpPr>
+        <p:spPr>
+          <a:xfrm>
+            <a:off x="10682935" y="6355080"/>
+            <a:ext cx="457200" cy="274320"/>
+          </a:xfrm>
+          <a:prstGeom prst="rect">
+            <a:avLst/>
+          </a:prstGeom>
+          <a:noFill/>
+          <a:ln/>
+        </p:spPr>
+        <p:txBody>
+          <a:bodyPr wrap="square" lIns="0" tIns="0" rIns="0" bIns="0" rtlCol="0" anchor="t"/>
+          <a:lstStyle/>
+          <a:p>
+            <a:pPr algn="r" indent="0" marL="0">
+              <a:buNone/>
+            </a:pPr>
+            <a:r>
+              <a:rPr lang="en-US" sz="1000" dirty="0">
+                <a:solidFill>
+                  <a:srgbClr val="64748B"/>
+                </a:solidFill>
+                <a:latin typeface="Calibri" pitchFamily="34" charset="0"/>
+                <a:ea typeface="Calibri" pitchFamily="34" charset="-122"/>
+                <a:cs typeface="Calibri" pitchFamily="34" charset="-120"/>
+              </a:rPr>
+              <a:t>21</a:t>
             </a:r>
             <a:endParaRPr lang="en-US" sz="1000" dirty="0"/>
           </a:p>

--- a/docs/submission/05_final_submission/Akayza_Pitch_TeamPR.pptx
+++ b/docs/submission/05_final_submission/Akayza_Pitch_TeamPR.pptx
@@ -8752,7 +8752,7 @@
                 <a:ea typeface="Georgia" pitchFamily="34" charset="-122"/>
                 <a:cs typeface="Georgia" pitchFamily="34" charset="-120"/>
               </a:rPr>
-              <a:t>1,239</a:t>
+              <a:t>1,281</a:t>
             </a:r>
             <a:endParaRPr lang="en-US" sz="4400" dirty="0"/>
           </a:p>
@@ -8857,7 +8857,7 @@
                 <a:ea typeface="Georgia" pitchFamily="34" charset="-122"/>
                 <a:cs typeface="Georgia" pitchFamily="34" charset="-120"/>
               </a:rPr>
-              <a:t>197</a:t>
+              <a:t>204</a:t>
             </a:r>
             <a:endParaRPr lang="en-US" sz="4400" dirty="0"/>
           </a:p>

--- a/docs/submission/05_final_submission/Akayza_Pitch_TeamPR.pptx
+++ b/docs/submission/05_final_submission/Akayza_Pitch_TeamPR.pptx
@@ -131,7 +131,7 @@
   <p:extLst>
     <p:ext uri="{521415D9-36F7-43E2-AB2F-B90AF26B5E84}">
       <p14:sectionLst xmlns:p14="http://schemas.microsoft.com/office/powerpoint/2010/main">
-        <p14:section name="3-minute pitch" id="{9441e1c6-99bb-85ee-3263-3bb51a61db0d}">
+        <p14:section name="3-minute pitch" id="{059eaa20-136e-e065-b9b7-608a53d44689}">
           <p14:sldIdLst>
             <p14:sldId id="256"/>
             <p14:sldId id="257"/>
@@ -145,7 +145,7 @@
             <p14:sldId id="265"/>
           </p14:sldIdLst>
         </p14:section>
-        <p14:section name="The detail" id="{a4386bf0-6f61-0667-b4cd-b5b0318fd033}">
+        <p14:section name="The detail" id="{1bea7bb1-c826-7236-5085-da8a54a53301}">
           <p14:sldIdLst>
             <p14:sldId id="266"/>
             <p14:sldId id="267"/>
@@ -3294,8 +3294,8 @@
           <a:p>
             <a:r>
               <a:rPr lang="en-US" dirty="0"/>
-              <a:t>SAY (0:00-0:15): 'Everyone wants a piece of the kasi economy. Big retailers are moving into townships. On some building sites, groups demand a cut of the work. Because it's worth about R900 billion a year.'
-R900 bn: Standard Bank's Township Informal Economy Report, October 2025 (research by Foshizi, 250+ businesses in 5 provinces). Say 'about R900 billion'. The retailer and building-site lines are lived evidence: no number, so don't add one.
+              <a:t>SAY (0:00-0:15): 'Everyone wants a piece of the kasi economy. Big retailers are moving into townships. Banks and payment apps are fighting for its customers. Because it's worth about R900 billion a year.'
+R900 bn: Standard Bank's Township Informal Economy Report, October 2025 (research by Foshizi, 250+ businesses in 5 provinces). Say 'about R900 billion'. The retailer and bank lines are lived evidence: no number, so don't add one.
 Photos: 'Nomonde Tuck Shop' by HelenOnline (CC BY-SA 4.0) and 'Aliwal North - Dukatole - Housebuilding Projekt' by Heinz-Josef Lücking (CC BY-SA 3.0 DE), Wikimedia Commons, resized, with our captions. Credits are also in REUSE.md.</a:t>
             </a:r>
             <a:endParaRPr lang="en-US" dirty="0"/>
@@ -17019,7 +17019,7 @@
                 <a:ea typeface="Calibri" pitchFamily="34" charset="-122"/>
                 <a:cs typeface="Calibri" pitchFamily="34" charset="-120"/>
               </a:rPr>
-              <a:t>On some building sites, groups demand a cut of the work</a:t>
+              <a:t>Banks and payment apps are fighting for its customers</a:t>
             </a:r>
             <a:endParaRPr lang="en-US" sz="1700" dirty="0"/>
           </a:p>

--- a/docs/submission/05_final_submission/Akayza_Pitch_TeamPR.pptx
+++ b/docs/submission/05_final_submission/Akayza_Pitch_TeamPR.pptx
@@ -4,6 +4,9 @@
   <p:sldMasterIdLst>
     <p:sldMasterId id="2147483648" r:id="rId1"/>
   </p:sldMasterIdLst>
+  <p:notesMasterIdLst>
+    <p:notesMasterId r:id="rId27"/>
+  </p:notesMasterIdLst>
   <p:sldIdLst>
     <p:sldId id="256" r:id="rId2"/>
     <p:sldId id="257" r:id="rId3"/>
@@ -31,9 +34,6 @@
     <p:sldId id="279" r:id="rId25"/>
     <p:sldId id="280" r:id="rId26"/>
   </p:sldIdLst>
-  <p:notesMasterIdLst>
-    <p:notesMasterId r:id="rId27"/>
-  </p:notesMasterIdLst>
   <p:sldSz cx="12192000" cy="6858000"/>
   <p:notesSz cx="6858000" cy="12192000"/>
   <p:defaultTextStyle>
@@ -131,7 +131,7 @@
   <p:extLst>
     <p:ext uri="{521415D9-36F7-43E2-AB2F-B90AF26B5E84}">
       <p14:sectionLst xmlns:p14="http://schemas.microsoft.com/office/powerpoint/2010/main">
-        <p14:section name="3-minute pitch" id="{059eaa20-136e-e065-b9b7-608a53d44689}">
+        <p14:section name="3-minute pitch" id="{436932F5-B28E-6517-8DDD-D11E6BB0A7B4}">
           <p14:sldIdLst>
             <p14:sldId id="256"/>
             <p14:sldId id="257"/>
@@ -145,7 +145,7 @@
             <p14:sldId id="265"/>
           </p14:sldIdLst>
         </p14:section>
-        <p14:section name="The detail" id="{1bea7bb1-c826-7236-5085-da8a54a53301}">
+        <p14:section name="The detail" id="{EEA1954D-23B6-A01F-AA01-DF2DAFACB14B}">
           <p14:sldIdLst>
             <p14:sldId id="266"/>
             <p14:sldId id="267"/>
@@ -174,9 +174,11 @@
 </file>
 
 <file path=ppt/charts/chart1.xml><?xml version="1.0" encoding="utf-8"?>
-<c:chartSpace xmlns:c="http://schemas.openxmlformats.org/drawingml/2006/chart" xmlns:a="http://schemas.openxmlformats.org/drawingml/2006/main" xmlns:r="http://schemas.openxmlformats.org/officeDocument/2006/relationships">
+<c:chartSpace xmlns:c="http://schemas.openxmlformats.org/drawingml/2006/chart" xmlns:a="http://schemas.openxmlformats.org/drawingml/2006/main" xmlns:r="http://schemas.openxmlformats.org/officeDocument/2006/relationships" xmlns:c16r2="http://schemas.microsoft.com/office/drawing/2015/06/chart">
   <c:date1904 val="0"/>
+  <c:lang val="en-GB"/>
   <c:roundedCorners val="1"/>
+  <c:style val="2"/>
   <c:chart>
     <c:autoTitleDeleted val="1"/>
     <c:plotArea>
@@ -206,45 +208,19 @@
             <a:effectLst/>
           </c:spPr>
           <c:invertIfNegative val="0"/>
-          <c:dLbls>
-            <c:numFmt formatCode="#,##0" sourceLinked="0"/>
-            <c:txPr>
-              <a:bodyPr/>
-              <a:lstStyle/>
-              <a:p>
-                <a:pPr>
-                  <a:defRPr b="0" i="0" strike="noStrike" sz="1200" u="none">
-                    <a:solidFill>
-                      <a:srgbClr val="000000"/>
-                    </a:solidFill>
-                    <a:latin typeface="Arial"/>
-                  </a:defRPr>
-                </a:pPr>
-              </a:p>
-            </c:txPr>
-            <c:showLegendKey val="0"/>
-            <c:showVal val="0"/>
-            <c:showCatName val="0"/>
-            <c:showSerName val="0"/>
-            <c:showPercent val="0"/>
-            <c:showBubbleSize val="0"/>
-            <c:showLeaderLines val="0"/>
-          </c:dLbls>
           <c:cat>
-            <c:multiLvlStrRef>
+            <c:strRef>
               <c:f>Sheet1!$A$2:$A$3</c:f>
-              <c:multiLvlStrCache>
+              <c:strCache>
                 <c:ptCount val="2"/>
-                <c:lvl>
-                  <c:pt idx="0">
-                    <c:v>Bank loan  &lt;9%</c:v>
-                  </c:pt>
-                  <c:pt idx="1">
-                    <c:v>Savings, family  57%</c:v>
-                  </c:pt>
-                </c:lvl>
-              </c:multiLvlStrCache>
-            </c:multiLvlStrRef>
+                <c:pt idx="0">
+                  <c:v>Bank loan  &lt;9%</c:v>
+                </c:pt>
+                <c:pt idx="1">
+                  <c:v>Savings, family  57%</c:v>
+                </c:pt>
+              </c:strCache>
+            </c:strRef>
           </c:cat>
           <c:val>
             <c:numRef>
@@ -261,36 +237,23 @@
               </c:numCache>
             </c:numRef>
           </c:val>
+          <c:extLst>
+            <c:ext xmlns:c16="http://schemas.microsoft.com/office/drawing/2014/chart" uri="{C3380CC4-5D6E-409C-BE32-E72D297353CC}">
+              <c16:uniqueId val="{00000000-539C-48C4-BAD1-59F7B1CAD862}"/>
+            </c:ext>
+          </c:extLst>
         </c:ser>
         <c:dLbls>
-          <c:numFmt formatCode="#,##0" sourceLinked="0"/>
-          <c:txPr>
-            <a:bodyPr/>
-            <a:lstStyle/>
-            <a:p>
-              <a:pPr>
-                <a:defRPr b="0" i="0" strike="noStrike" sz="1200" u="none">
-                  <a:solidFill>
-                    <a:srgbClr val="000000"/>
-                  </a:solidFill>
-                  <a:latin typeface="Arial"/>
-                </a:defRPr>
-              </a:pPr>
-            </a:p>
-          </c:txPr>
           <c:showLegendKey val="0"/>
           <c:showVal val="0"/>
           <c:showCatName val="0"/>
           <c:showSerName val="0"/>
           <c:showPercent val="0"/>
           <c:showBubbleSize val="0"/>
-          <c:showLeaderLines val="0"/>
         </c:dLbls>
         <c:gapWidth val="40"/>
-        <c:overlap val="0"/>
         <c:axId val="2094734554"/>
         <c:axId val="2094734552"/>
-        <c:axId val="2094734556"/>
       </c:barChart>
       <c:catAx>
         <c:axId val="2094734554"/>
@@ -329,6 +292,7 @@
         <c:crosses val="autoZero"/>
         <c:auto val="1"/>
         <c:lblAlgn val="ctr"/>
+        <c:lblOffset val="100"/>
         <c:noMultiLvlLbl val="1"/>
       </c:catAx>
       <c:valAx>
@@ -343,30 +307,6 @@
         <c:majorTickMark val="out"/>
         <c:minorTickMark val="none"/>
         <c:tickLblPos val="low"/>
-        <c:spPr>
-          <a:ln w="12700" cap="flat">
-            <a:solidFill>
-              <a:srgbClr val="888888"/>
-            </a:solidFill>
-            <a:prstDash val="solid"/>
-            <a:round/>
-          </a:ln>
-        </c:spPr>
-        <c:txPr>
-          <a:bodyPr/>
-          <a:lstStyle/>
-          <a:p>
-            <a:pPr>
-              <a:defRPr sz="1200" b="0" i="0" u="none" strike="noStrike">
-                <a:solidFill>
-                  <a:srgbClr val="000000"/>
-                </a:solidFill>
-                <a:latin typeface="Arial"/>
-              </a:defRPr>
-            </a:pPr>
-            <a:endParaRPr lang="en-US"/>
-          </a:p>
-        </c:txPr>
         <c:crossAx val="2094734554"/>
         <c:crosses val="autoZero"/>
         <c:crossBetween val="between"/>
@@ -381,6 +321,7 @@
     </c:plotArea>
     <c:plotVisOnly val="1"/>
     <c:dispBlanksAs val="span"/>
+    <c:showDLblsOverMax val="1"/>
   </c:chart>
   <c:spPr>
     <a:noFill/>
@@ -396,9 +337,11 @@
 </file>
 
 <file path=ppt/charts/chart2.xml><?xml version="1.0" encoding="utf-8"?>
-<c:chartSpace xmlns:c="http://schemas.openxmlformats.org/drawingml/2006/chart" xmlns:a="http://schemas.openxmlformats.org/drawingml/2006/main" xmlns:r="http://schemas.openxmlformats.org/officeDocument/2006/relationships">
+<c:chartSpace xmlns:c="http://schemas.openxmlformats.org/drawingml/2006/chart" xmlns:a="http://schemas.openxmlformats.org/drawingml/2006/main" xmlns:r="http://schemas.openxmlformats.org/officeDocument/2006/relationships" xmlns:c16r2="http://schemas.microsoft.com/office/drawing/2015/06/chart">
   <c:date1904 val="0"/>
+  <c:lang val="en-GB"/>
   <c:roundedCorners val="1"/>
+  <c:style val="2"/>
   <c:chart>
     <c:autoTitleDeleted val="1"/>
     <c:plotArea>
@@ -428,45 +371,19 @@
             <a:effectLst/>
           </c:spPr>
           <c:invertIfNegative val="0"/>
-          <c:dLbls>
-            <c:numFmt formatCode="#,##0" sourceLinked="0"/>
-            <c:txPr>
-              <a:bodyPr/>
-              <a:lstStyle/>
-              <a:p>
-                <a:pPr>
-                  <a:defRPr b="0" i="0" strike="noStrike" sz="1200" u="none">
-                    <a:solidFill>
-                      <a:srgbClr val="000000"/>
-                    </a:solidFill>
-                    <a:latin typeface="Arial"/>
-                  </a:defRPr>
-                </a:pPr>
-              </a:p>
-            </c:txPr>
-            <c:showLegendKey val="0"/>
-            <c:showVal val="0"/>
-            <c:showCatName val="0"/>
-            <c:showSerName val="0"/>
-            <c:showPercent val="0"/>
-            <c:showBubbleSize val="0"/>
-            <c:showLeaderLines val="0"/>
-          </c:dLbls>
           <c:cat>
-            <c:multiLvlStrRef>
+            <c:strRef>
               <c:f>Sheet1!$A$2:$A$3</c:f>
-              <c:multiLvlStrCache>
+              <c:strCache>
                 <c:ptCount val="2"/>
-                <c:lvl>
-                  <c:pt idx="0">
-                    <c:v>Reached shops  R179.6m</c:v>
-                  </c:pt>
-                  <c:pt idx="1">
-                    <c:v>Fund  R500m</c:v>
-                  </c:pt>
-                </c:lvl>
-              </c:multiLvlStrCache>
-            </c:multiLvlStrRef>
+                <c:pt idx="0">
+                  <c:v>Reached shops  R179.6m</c:v>
+                </c:pt>
+                <c:pt idx="1">
+                  <c:v>Fund  R500m</c:v>
+                </c:pt>
+              </c:strCache>
+            </c:strRef>
           </c:cat>
           <c:val>
             <c:numRef>
@@ -483,36 +400,23 @@
               </c:numCache>
             </c:numRef>
           </c:val>
+          <c:extLst>
+            <c:ext xmlns:c16="http://schemas.microsoft.com/office/drawing/2014/chart" uri="{C3380CC4-5D6E-409C-BE32-E72D297353CC}">
+              <c16:uniqueId val="{00000000-359C-4790-9366-4AC908349DDA}"/>
+            </c:ext>
+          </c:extLst>
         </c:ser>
         <c:dLbls>
-          <c:numFmt formatCode="#,##0" sourceLinked="0"/>
-          <c:txPr>
-            <a:bodyPr/>
-            <a:lstStyle/>
-            <a:p>
-              <a:pPr>
-                <a:defRPr b="0" i="0" strike="noStrike" sz="1200" u="none">
-                  <a:solidFill>
-                    <a:srgbClr val="000000"/>
-                  </a:solidFill>
-                  <a:latin typeface="Arial"/>
-                </a:defRPr>
-              </a:pPr>
-            </a:p>
-          </c:txPr>
           <c:showLegendKey val="0"/>
           <c:showVal val="0"/>
           <c:showCatName val="0"/>
           <c:showSerName val="0"/>
           <c:showPercent val="0"/>
           <c:showBubbleSize val="0"/>
-          <c:showLeaderLines val="0"/>
         </c:dLbls>
         <c:gapWidth val="40"/>
-        <c:overlap val="0"/>
         <c:axId val="2094734554"/>
         <c:axId val="2094734552"/>
-        <c:axId val="2094734556"/>
       </c:barChart>
       <c:catAx>
         <c:axId val="2094734554"/>
@@ -551,6 +455,7 @@
         <c:crosses val="autoZero"/>
         <c:auto val="1"/>
         <c:lblAlgn val="ctr"/>
+        <c:lblOffset val="100"/>
         <c:noMultiLvlLbl val="1"/>
       </c:catAx>
       <c:valAx>
@@ -565,30 +470,6 @@
         <c:majorTickMark val="out"/>
         <c:minorTickMark val="none"/>
         <c:tickLblPos val="low"/>
-        <c:spPr>
-          <a:ln w="12700" cap="flat">
-            <a:solidFill>
-              <a:srgbClr val="888888"/>
-            </a:solidFill>
-            <a:prstDash val="solid"/>
-            <a:round/>
-          </a:ln>
-        </c:spPr>
-        <c:txPr>
-          <a:bodyPr/>
-          <a:lstStyle/>
-          <a:p>
-            <a:pPr>
-              <a:defRPr sz="1200" b="0" i="0" u="none" strike="noStrike">
-                <a:solidFill>
-                  <a:srgbClr val="000000"/>
-                </a:solidFill>
-                <a:latin typeface="Arial"/>
-              </a:defRPr>
-            </a:pPr>
-            <a:endParaRPr lang="en-US"/>
-          </a:p>
-        </c:txPr>
         <c:crossAx val="2094734554"/>
         <c:crosses val="autoZero"/>
         <c:crossBetween val="between"/>
@@ -603,6 +484,7 @@
     </c:plotArea>
     <c:plotVisOnly val="1"/>
     <c:dispBlanksAs val="span"/>
+    <c:showDLblsOverMax val="1"/>
   </c:chart>
   <c:spPr>
     <a:noFill/>
@@ -618,9 +500,11 @@
 </file>
 
 <file path=ppt/charts/chart3.xml><?xml version="1.0" encoding="utf-8"?>
-<c:chartSpace xmlns:c="http://schemas.openxmlformats.org/drawingml/2006/chart" xmlns:a="http://schemas.openxmlformats.org/drawingml/2006/main" xmlns:r="http://schemas.openxmlformats.org/officeDocument/2006/relationships">
+<c:chartSpace xmlns:c="http://schemas.openxmlformats.org/drawingml/2006/chart" xmlns:a="http://schemas.openxmlformats.org/drawingml/2006/main" xmlns:r="http://schemas.openxmlformats.org/officeDocument/2006/relationships" xmlns:c16r2="http://schemas.microsoft.com/office/drawing/2015/06/chart">
   <c:date1904 val="0"/>
+  <c:lang val="en-GB"/>
   <c:roundedCorners val="1"/>
+  <c:style val="2"/>
   <c:chart>
     <c:autoTitleDeleted val="1"/>
     <c:plotArea>
@@ -663,6 +547,11 @@
               </a:solidFill>
               <a:effectLst/>
             </c:spPr>
+            <c:extLst>
+              <c:ext xmlns:c16="http://schemas.microsoft.com/office/drawing/2014/chart" uri="{C3380CC4-5D6E-409C-BE32-E72D297353CC}">
+                <c16:uniqueId val="{00000001-5BC2-4B8F-809A-B76B9C93191F}"/>
+              </c:ext>
+            </c:extLst>
           </c:dPt>
           <c:dPt>
             <c:idx val="1"/>
@@ -673,81 +562,12 @@
               </a:solidFill>
               <a:effectLst/>
             </c:spPr>
+            <c:extLst>
+              <c:ext xmlns:c16="http://schemas.microsoft.com/office/drawing/2014/chart" uri="{C3380CC4-5D6E-409C-BE32-E72D297353CC}">
+                <c16:uniqueId val="{00000003-5BC2-4B8F-809A-B76B9C93191F}"/>
+              </c:ext>
+            </c:extLst>
           </c:dPt>
-          <c:dLbls>
-            <c:dLbl>
-              <c:idx val="0"/>
-              <c:numFmt formatCode="General" sourceLinked="0"/>
-              <c:spPr/>
-              <c:txPr>
-                <a:bodyPr/>
-                <a:lstStyle/>
-                <a:p>
-                  <a:pPr>
-                    <a:defRPr sz="1200" b="0" i="0" u="none" strike="noStrike">
-                      <a:solidFill>
-                        <a:srgbClr val="000000"/>
-                      </a:solidFill>
-                      <a:latin typeface="Arial"/>
-                    </a:defRPr>
-                  </a:pPr>
-                </a:p>
-              </c:txPr>
-              <c:showLegendKey val="0"/>
-              <c:showVal val="0"/>
-              <c:showCatName val="0"/>
-              <c:showSerName val="0"/>
-              <c:showPercent val="0"/>
-              <c:showBubbleSize val="0"/>
-            </c:dLbl>
-            <c:dLbl>
-              <c:idx val="1"/>
-              <c:numFmt formatCode="General" sourceLinked="0"/>
-              <c:spPr/>
-              <c:txPr>
-                <a:bodyPr/>
-                <a:lstStyle/>
-                <a:p>
-                  <a:pPr>
-                    <a:defRPr sz="1200" b="0" i="0" u="none" strike="noStrike">
-                      <a:solidFill>
-                        <a:srgbClr val="000000"/>
-                      </a:solidFill>
-                      <a:latin typeface="Arial"/>
-                    </a:defRPr>
-                  </a:pPr>
-                </a:p>
-              </c:txPr>
-              <c:showLegendKey val="0"/>
-              <c:showVal val="0"/>
-              <c:showCatName val="0"/>
-              <c:showSerName val="0"/>
-              <c:showPercent val="0"/>
-              <c:showBubbleSize val="0"/>
-            </c:dLbl>
-            <c:numFmt formatCode="General" sourceLinked="0"/>
-            <c:txPr>
-              <a:bodyPr/>
-              <a:lstStyle/>
-              <a:p>
-                <a:pPr>
-                  <a:defRPr sz="1800" b="0" i="0" u="none" strike="noStrike">
-                    <a:solidFill>
-                      <a:srgbClr val="000000"/>
-                    </a:solidFill>
-                    <a:latin typeface="Arial"/>
-                  </a:defRPr>
-                </a:pPr>
-              </a:p>
-            </c:txPr>
-            <c:showLegendKey val="0"/>
-            <c:showVal val="0"/>
-            <c:showCatName val="1"/>
-            <c:showSerName val="0"/>
-            <c:showPercent val="1"/>
-            <c:showBubbleSize val="0"/>
-            <c:showLeaderLines val="0"/>
-          </c:dLbls>
           <c:cat>
             <c:strRef>
               <c:f>Sheet1!$A$2:$A$3</c:f>
@@ -766,6 +586,7 @@
             <c:numRef>
               <c:f>Sheet1!$B$2:$B$3</c:f>
               <c:numCache>
+                <c:formatCode>General</c:formatCode>
                 <c:ptCount val="2"/>
                 <c:pt idx="0">
                   <c:v>80</c:v>
@@ -776,7 +597,21 @@
               </c:numCache>
             </c:numRef>
           </c:val>
+          <c:extLst>
+            <c:ext xmlns:c16="http://schemas.microsoft.com/office/drawing/2014/chart" uri="{C3380CC4-5D6E-409C-BE32-E72D297353CC}">
+              <c16:uniqueId val="{00000004-5BC2-4B8F-809A-B76B9C93191F}"/>
+            </c:ext>
+          </c:extLst>
         </c:ser>
+        <c:dLbls>
+          <c:showLegendKey val="0"/>
+          <c:showVal val="0"/>
+          <c:showCatName val="0"/>
+          <c:showSerName val="0"/>
+          <c:showPercent val="0"/>
+          <c:showBubbleSize val="0"/>
+          <c:showLeaderLines val="0"/>
+        </c:dLbls>
         <c:firstSliceAng val="0"/>
         <c:holeSize val="68"/>
       </c:doughnutChart>
@@ -790,6 +625,7 @@
     </c:plotArea>
     <c:plotVisOnly val="1"/>
     <c:dispBlanksAs val="span"/>
+    <c:showDLblsOverMax val="1"/>
   </c:chart>
   <c:spPr>
     <a:noFill/>
@@ -805,9 +641,11 @@
 </file>
 
 <file path=ppt/charts/chart4.xml><?xml version="1.0" encoding="utf-8"?>
-<c:chartSpace xmlns:c="http://schemas.openxmlformats.org/drawingml/2006/chart" xmlns:a="http://schemas.openxmlformats.org/drawingml/2006/main" xmlns:r="http://schemas.openxmlformats.org/officeDocument/2006/relationships">
+<c:chartSpace xmlns:c="http://schemas.openxmlformats.org/drawingml/2006/chart" xmlns:a="http://schemas.openxmlformats.org/drawingml/2006/main" xmlns:r="http://schemas.openxmlformats.org/officeDocument/2006/relationships" xmlns:c16r2="http://schemas.microsoft.com/office/drawing/2015/06/chart">
   <c:date1904 val="0"/>
+  <c:lang val="en-GB"/>
   <c:roundedCorners val="1"/>
+  <c:style val="2"/>
   <c:chart>
     <c:title>
       <c:tx>
@@ -835,7 +673,6 @@
           </a:p>
         </c:rich>
       </c:tx>
-      <c:layout/>
       <c:overlay val="0"/>
     </c:title>
     <c:autoTitleDeleted val="0"/>
@@ -866,48 +703,22 @@
             <a:effectLst/>
           </c:spPr>
           <c:invertIfNegative val="0"/>
-          <c:dLbls>
-            <c:numFmt formatCode="#,##0" sourceLinked="0"/>
-            <c:txPr>
-              <a:bodyPr/>
-              <a:lstStyle/>
-              <a:p>
-                <a:pPr>
-                  <a:defRPr b="0" i="0" strike="noStrike" sz="1200" u="none">
-                    <a:solidFill>
-                      <a:srgbClr val="000000"/>
-                    </a:solidFill>
-                    <a:latin typeface="Arial"/>
-                  </a:defRPr>
-                </a:pPr>
-              </a:p>
-            </c:txPr>
-            <c:showLegendKey val="0"/>
-            <c:showVal val="0"/>
-            <c:showCatName val="0"/>
-            <c:showSerName val="0"/>
-            <c:showPercent val="0"/>
-            <c:showBubbleSize val="0"/>
-            <c:showLeaderLines val="0"/>
-          </c:dLbls>
           <c:cat>
-            <c:multiLvlStrRef>
+            <c:strRef>
               <c:f>Sheet1!$A$2:$A$4</c:f>
-              <c:multiLvlStrCache>
+              <c:strCache>
                 <c:ptCount val="3"/>
-                <c:lvl>
-                  <c:pt idx="0">
-                    <c:v>Year 1</c:v>
-                  </c:pt>
-                  <c:pt idx="1">
-                    <c:v>Year 2</c:v>
-                  </c:pt>
-                  <c:pt idx="2">
-                    <c:v>Year 3</c:v>
-                  </c:pt>
-                </c:lvl>
-              </c:multiLvlStrCache>
-            </c:multiLvlStrRef>
+                <c:pt idx="0">
+                  <c:v>Year 1</c:v>
+                </c:pt>
+                <c:pt idx="1">
+                  <c:v>Year 2</c:v>
+                </c:pt>
+                <c:pt idx="2">
+                  <c:v>Year 3</c:v>
+                </c:pt>
+              </c:strCache>
+            </c:strRef>
           </c:cat>
           <c:val>
             <c:numRef>
@@ -927,6 +738,11 @@
               </c:numCache>
             </c:numRef>
           </c:val>
+          <c:extLst>
+            <c:ext xmlns:c16="http://schemas.microsoft.com/office/drawing/2014/chart" uri="{C3380CC4-5D6E-409C-BE32-E72D297353CC}">
+              <c16:uniqueId val="{00000000-D158-404D-9DF7-EFBA73AECF01}"/>
+            </c:ext>
+          </c:extLst>
         </c:ser>
         <c:ser>
           <c:idx val="1"/>
@@ -949,48 +765,22 @@
             <a:effectLst/>
           </c:spPr>
           <c:invertIfNegative val="0"/>
-          <c:dLbls>
-            <c:numFmt formatCode="#,##0" sourceLinked="0"/>
-            <c:txPr>
-              <a:bodyPr/>
-              <a:lstStyle/>
-              <a:p>
-                <a:pPr>
-                  <a:defRPr b="0" i="0" strike="noStrike" sz="1200" u="none">
-                    <a:solidFill>
-                      <a:srgbClr val="000000"/>
-                    </a:solidFill>
-                    <a:latin typeface="Arial"/>
-                  </a:defRPr>
-                </a:pPr>
-              </a:p>
-            </c:txPr>
-            <c:showLegendKey val="0"/>
-            <c:showVal val="0"/>
-            <c:showCatName val="0"/>
-            <c:showSerName val="0"/>
-            <c:showPercent val="0"/>
-            <c:showBubbleSize val="0"/>
-            <c:showLeaderLines val="0"/>
-          </c:dLbls>
           <c:cat>
-            <c:multiLvlStrRef>
+            <c:strRef>
               <c:f>Sheet1!$A$2:$A$4</c:f>
-              <c:multiLvlStrCache>
+              <c:strCache>
                 <c:ptCount val="3"/>
-                <c:lvl>
-                  <c:pt idx="0">
-                    <c:v>Year 1</c:v>
-                  </c:pt>
-                  <c:pt idx="1">
-                    <c:v>Year 2</c:v>
-                  </c:pt>
-                  <c:pt idx="2">
-                    <c:v>Year 3</c:v>
-                  </c:pt>
-                </c:lvl>
-              </c:multiLvlStrCache>
-            </c:multiLvlStrRef>
+                <c:pt idx="0">
+                  <c:v>Year 1</c:v>
+                </c:pt>
+                <c:pt idx="1">
+                  <c:v>Year 2</c:v>
+                </c:pt>
+                <c:pt idx="2">
+                  <c:v>Year 3</c:v>
+                </c:pt>
+              </c:strCache>
+            </c:strRef>
           </c:cat>
           <c:val>
             <c:numRef>
@@ -1010,36 +800,24 @@
               </c:numCache>
             </c:numRef>
           </c:val>
+          <c:extLst>
+            <c:ext xmlns:c16="http://schemas.microsoft.com/office/drawing/2014/chart" uri="{C3380CC4-5D6E-409C-BE32-E72D297353CC}">
+              <c16:uniqueId val="{00000001-D158-404D-9DF7-EFBA73AECF01}"/>
+            </c:ext>
+          </c:extLst>
         </c:ser>
         <c:dLbls>
-          <c:numFmt formatCode="#,##0" sourceLinked="0"/>
-          <c:txPr>
-            <a:bodyPr/>
-            <a:lstStyle/>
-            <a:p>
-              <a:pPr>
-                <a:defRPr b="0" i="0" strike="noStrike" sz="1200" u="none">
-                  <a:solidFill>
-                    <a:srgbClr val="000000"/>
-                  </a:solidFill>
-                  <a:latin typeface="Arial"/>
-                </a:defRPr>
-              </a:pPr>
-            </a:p>
-          </c:txPr>
           <c:showLegendKey val="0"/>
           <c:showVal val="0"/>
           <c:showCatName val="0"/>
           <c:showSerName val="0"/>
           <c:showPercent val="0"/>
           <c:showBubbleSize val="0"/>
-          <c:showLeaderLines val="0"/>
         </c:dLbls>
         <c:gapWidth val="55"/>
         <c:overlap val="100"/>
         <c:axId val="2094734554"/>
         <c:axId val="2094734552"/>
-        <c:axId val="2094734556"/>
       </c:barChart>
       <c:catAx>
         <c:axId val="2094734554"/>
@@ -1080,6 +858,7 @@
         <c:crosses val="autoZero"/>
         <c:auto val="1"/>
         <c:lblAlgn val="ctr"/>
+        <c:lblOffset val="100"/>
         <c:noMultiLvlLbl val="1"/>
       </c:catAx>
       <c:valAx>
@@ -1093,30 +872,6 @@
         <c:majorTickMark val="out"/>
         <c:minorTickMark val="none"/>
         <c:tickLblPos val="nextTo"/>
-        <c:spPr>
-          <a:ln w="12700" cap="flat">
-            <a:solidFill>
-              <a:srgbClr val="888888"/>
-            </a:solidFill>
-            <a:prstDash val="solid"/>
-            <a:round/>
-          </a:ln>
-        </c:spPr>
-        <c:txPr>
-          <a:bodyPr/>
-          <a:lstStyle/>
-          <a:p>
-            <a:pPr>
-              <a:defRPr sz="1200" b="0" i="0" u="none" strike="noStrike">
-                <a:solidFill>
-                  <a:srgbClr val="000000"/>
-                </a:solidFill>
-                <a:latin typeface="Arial"/>
-              </a:defRPr>
-            </a:pPr>
-            <a:endParaRPr lang="en-US"/>
-          </a:p>
-        </c:txPr>
         <c:crossAx val="2094734554"/>
         <c:crosses val="autoZero"/>
         <c:crossBetween val="between"/>
@@ -1149,6 +904,7 @@
     </c:legend>
     <c:plotVisOnly val="1"/>
     <c:dispBlanksAs val="span"/>
+    <c:showDLblsOverMax val="1"/>
   </c:chart>
   <c:spPr>
     <a:noFill/>
@@ -1164,9 +920,11 @@
 </file>
 
 <file path=ppt/charts/chart5.xml><?xml version="1.0" encoding="utf-8"?>
-<c:chartSpace xmlns:c="http://schemas.openxmlformats.org/drawingml/2006/chart" xmlns:a="http://schemas.openxmlformats.org/drawingml/2006/main" xmlns:r="http://schemas.openxmlformats.org/officeDocument/2006/relationships">
+<c:chartSpace xmlns:c="http://schemas.openxmlformats.org/drawingml/2006/chart" xmlns:a="http://schemas.openxmlformats.org/drawingml/2006/main" xmlns:r="http://schemas.openxmlformats.org/officeDocument/2006/relationships" xmlns:c16r2="http://schemas.microsoft.com/office/drawing/2015/06/chart">
   <c:date1904 val="0"/>
+  <c:lang val="en-GB"/>
   <c:roundedCorners val="1"/>
+  <c:style val="2"/>
   <c:chart>
     <c:title>
       <c:tx>
@@ -1194,7 +952,6 @@
           </a:p>
         </c:rich>
       </c:tx>
-      <c:layout/>
       <c:overlay val="0"/>
     </c:title>
     <c:autoTitleDeleted val="0"/>
@@ -1238,6 +995,11 @@
               </a:solidFill>
               <a:effectLst/>
             </c:spPr>
+            <c:extLst>
+              <c:ext xmlns:c16="http://schemas.microsoft.com/office/drawing/2014/chart" uri="{C3380CC4-5D6E-409C-BE32-E72D297353CC}">
+                <c16:uniqueId val="{00000001-FC93-48DB-BEF5-3F506ADD4F42}"/>
+              </c:ext>
+            </c:extLst>
           </c:dPt>
           <c:dPt>
             <c:idx val="1"/>
@@ -1248,6 +1010,11 @@
               </a:solidFill>
               <a:effectLst/>
             </c:spPr>
+            <c:extLst>
+              <c:ext xmlns:c16="http://schemas.microsoft.com/office/drawing/2014/chart" uri="{C3380CC4-5D6E-409C-BE32-E72D297353CC}">
+                <c16:uniqueId val="{00000003-FC93-48DB-BEF5-3F506ADD4F42}"/>
+              </c:ext>
+            </c:extLst>
           </c:dPt>
           <c:dPt>
             <c:idx val="2"/>
@@ -1258,6 +1025,11 @@
               </a:solidFill>
               <a:effectLst/>
             </c:spPr>
+            <c:extLst>
+              <c:ext xmlns:c16="http://schemas.microsoft.com/office/drawing/2014/chart" uri="{C3380CC4-5D6E-409C-BE32-E72D297353CC}">
+                <c16:uniqueId val="{00000005-FC93-48DB-BEF5-3F506ADD4F42}"/>
+              </c:ext>
+            </c:extLst>
           </c:dPt>
           <c:dPt>
             <c:idx val="3"/>
@@ -1268,6 +1040,11 @@
               </a:solidFill>
               <a:effectLst/>
             </c:spPr>
+            <c:extLst>
+              <c:ext xmlns:c16="http://schemas.microsoft.com/office/drawing/2014/chart" uri="{C3380CC4-5D6E-409C-BE32-E72D297353CC}">
+                <c16:uniqueId val="{00000007-FC93-48DB-BEF5-3F506ADD4F42}"/>
+              </c:ext>
+            </c:extLst>
           </c:dPt>
           <c:dPt>
             <c:idx val="4"/>
@@ -1278,6 +1055,11 @@
               </a:solidFill>
               <a:effectLst/>
             </c:spPr>
+            <c:extLst>
+              <c:ext xmlns:c16="http://schemas.microsoft.com/office/drawing/2014/chart" uri="{C3380CC4-5D6E-409C-BE32-E72D297353CC}">
+                <c16:uniqueId val="{00000009-FC93-48DB-BEF5-3F506ADD4F42}"/>
+              </c:ext>
+            </c:extLst>
           </c:dPt>
           <c:dPt>
             <c:idx val="5"/>
@@ -1288,6 +1070,11 @@
               </a:solidFill>
               <a:effectLst/>
             </c:spPr>
+            <c:extLst>
+              <c:ext xmlns:c16="http://schemas.microsoft.com/office/drawing/2014/chart" uri="{C3380CC4-5D6E-409C-BE32-E72D297353CC}">
+                <c16:uniqueId val="{0000000B-FC93-48DB-BEF5-3F506ADD4F42}"/>
+              </c:ext>
+            </c:extLst>
           </c:dPt>
           <c:dLbls>
             <c:dLbl>
@@ -1306,6 +1093,7 @@
                       <a:latin typeface="Arial"/>
                     </a:defRPr>
                   </a:pPr>
+                  <a:endParaRPr lang="en-US"/>
                 </a:p>
               </c:txPr>
               <c:showLegendKey val="0"/>
@@ -1314,6 +1102,12 @@
               <c:showSerName val="0"/>
               <c:showPercent val="0"/>
               <c:showBubbleSize val="0"/>
+              <c:extLst>
+                <c:ext xmlns:c15="http://schemas.microsoft.com/office/drawing/2012/chart" uri="{CE6537A1-D6FC-4f65-9D91-7224C49458BB}"/>
+                <c:ext xmlns:c16="http://schemas.microsoft.com/office/drawing/2014/chart" uri="{C3380CC4-5D6E-409C-BE32-E72D297353CC}">
+                  <c16:uniqueId val="{00000001-FC93-48DB-BEF5-3F506ADD4F42}"/>
+                </c:ext>
+              </c:extLst>
             </c:dLbl>
             <c:dLbl>
               <c:idx val="1"/>
@@ -1331,6 +1125,7 @@
                       <a:latin typeface="Arial"/>
                     </a:defRPr>
                   </a:pPr>
+                  <a:endParaRPr lang="en-US"/>
                 </a:p>
               </c:txPr>
               <c:showLegendKey val="0"/>
@@ -1339,6 +1134,12 @@
               <c:showSerName val="0"/>
               <c:showPercent val="0"/>
               <c:showBubbleSize val="0"/>
+              <c:extLst>
+                <c:ext xmlns:c15="http://schemas.microsoft.com/office/drawing/2012/chart" uri="{CE6537A1-D6FC-4f65-9D91-7224C49458BB}"/>
+                <c:ext xmlns:c16="http://schemas.microsoft.com/office/drawing/2014/chart" uri="{C3380CC4-5D6E-409C-BE32-E72D297353CC}">
+                  <c16:uniqueId val="{00000003-FC93-48DB-BEF5-3F506ADD4F42}"/>
+                </c:ext>
+              </c:extLst>
             </c:dLbl>
             <c:dLbl>
               <c:idx val="2"/>
@@ -1356,6 +1157,7 @@
                       <a:latin typeface="Arial"/>
                     </a:defRPr>
                   </a:pPr>
+                  <a:endParaRPr lang="en-US"/>
                 </a:p>
               </c:txPr>
               <c:showLegendKey val="0"/>
@@ -1364,6 +1166,12 @@
               <c:showSerName val="0"/>
               <c:showPercent val="0"/>
               <c:showBubbleSize val="0"/>
+              <c:extLst>
+                <c:ext xmlns:c15="http://schemas.microsoft.com/office/drawing/2012/chart" uri="{CE6537A1-D6FC-4f65-9D91-7224C49458BB}"/>
+                <c:ext xmlns:c16="http://schemas.microsoft.com/office/drawing/2014/chart" uri="{C3380CC4-5D6E-409C-BE32-E72D297353CC}">
+                  <c16:uniqueId val="{00000005-FC93-48DB-BEF5-3F506ADD4F42}"/>
+                </c:ext>
+              </c:extLst>
             </c:dLbl>
             <c:dLbl>
               <c:idx val="3"/>
@@ -1381,6 +1189,7 @@
                       <a:latin typeface="Arial"/>
                     </a:defRPr>
                   </a:pPr>
+                  <a:endParaRPr lang="en-US"/>
                 </a:p>
               </c:txPr>
               <c:showLegendKey val="0"/>
@@ -1389,6 +1198,12 @@
               <c:showSerName val="0"/>
               <c:showPercent val="0"/>
               <c:showBubbleSize val="0"/>
+              <c:extLst>
+                <c:ext xmlns:c15="http://schemas.microsoft.com/office/drawing/2012/chart" uri="{CE6537A1-D6FC-4f65-9D91-7224C49458BB}"/>
+                <c:ext xmlns:c16="http://schemas.microsoft.com/office/drawing/2014/chart" uri="{C3380CC4-5D6E-409C-BE32-E72D297353CC}">
+                  <c16:uniqueId val="{00000007-FC93-48DB-BEF5-3F506ADD4F42}"/>
+                </c:ext>
+              </c:extLst>
             </c:dLbl>
             <c:dLbl>
               <c:idx val="4"/>
@@ -1406,6 +1221,7 @@
                       <a:latin typeface="Arial"/>
                     </a:defRPr>
                   </a:pPr>
+                  <a:endParaRPr lang="en-US"/>
                 </a:p>
               </c:txPr>
               <c:showLegendKey val="0"/>
@@ -1414,6 +1230,12 @@
               <c:showSerName val="0"/>
               <c:showPercent val="0"/>
               <c:showBubbleSize val="0"/>
+              <c:extLst>
+                <c:ext xmlns:c15="http://schemas.microsoft.com/office/drawing/2012/chart" uri="{CE6537A1-D6FC-4f65-9D91-7224C49458BB}"/>
+                <c:ext xmlns:c16="http://schemas.microsoft.com/office/drawing/2014/chart" uri="{C3380CC4-5D6E-409C-BE32-E72D297353CC}">
+                  <c16:uniqueId val="{00000009-FC93-48DB-BEF5-3F506ADD4F42}"/>
+                </c:ext>
+              </c:extLst>
             </c:dLbl>
             <c:dLbl>
               <c:idx val="5"/>
@@ -1431,6 +1253,7 @@
                       <a:latin typeface="Arial"/>
                     </a:defRPr>
                   </a:pPr>
+                  <a:endParaRPr lang="en-US"/>
                 </a:p>
               </c:txPr>
               <c:showLegendKey val="0"/>
@@ -1439,8 +1262,21 @@
               <c:showSerName val="0"/>
               <c:showPercent val="0"/>
               <c:showBubbleSize val="0"/>
+              <c:extLst>
+                <c:ext xmlns:c15="http://schemas.microsoft.com/office/drawing/2012/chart" uri="{CE6537A1-D6FC-4f65-9D91-7224C49458BB}"/>
+                <c:ext xmlns:c16="http://schemas.microsoft.com/office/drawing/2014/chart" uri="{C3380CC4-5D6E-409C-BE32-E72D297353CC}">
+                  <c16:uniqueId val="{0000000B-FC93-48DB-BEF5-3F506ADD4F42}"/>
+                </c:ext>
+              </c:extLst>
             </c:dLbl>
             <c:numFmt formatCode="General" sourceLinked="0"/>
+            <c:spPr>
+              <a:noFill/>
+              <a:ln>
+                <a:noFill/>
+              </a:ln>
+              <a:effectLst/>
+            </c:spPr>
             <c:txPr>
               <a:bodyPr/>
               <a:lstStyle/>
@@ -1453,6 +1289,7 @@
                     <a:latin typeface="Arial"/>
                   </a:defRPr>
                 </a:pPr>
+                <a:endParaRPr lang="en-US"/>
               </a:p>
             </c:txPr>
             <c:showLegendKey val="0"/>
@@ -1462,6 +1299,9 @@
             <c:showPercent val="1"/>
             <c:showBubbleSize val="0"/>
             <c:showLeaderLines val="0"/>
+            <c:extLst>
+              <c:ext xmlns:c15="http://schemas.microsoft.com/office/drawing/2012/chart" uri="{CE6537A1-D6FC-4f65-9D91-7224C49458BB}"/>
+            </c:extLst>
           </c:dLbls>
           <c:cat>
             <c:strRef>
@@ -1493,6 +1333,7 @@
             <c:numRef>
               <c:f>Sheet1!$B$2:$B$7</c:f>
               <c:numCache>
+                <c:formatCode>General</c:formatCode>
                 <c:ptCount val="6"/>
                 <c:pt idx="0">
                   <c:v>96</c:v>
@@ -1515,7 +1356,21 @@
               </c:numCache>
             </c:numRef>
           </c:val>
+          <c:extLst>
+            <c:ext xmlns:c16="http://schemas.microsoft.com/office/drawing/2014/chart" uri="{C3380CC4-5D6E-409C-BE32-E72D297353CC}">
+              <c16:uniqueId val="{0000000C-FC93-48DB-BEF5-3F506ADD4F42}"/>
+            </c:ext>
+          </c:extLst>
         </c:ser>
+        <c:dLbls>
+          <c:showLegendKey val="0"/>
+          <c:showVal val="0"/>
+          <c:showCatName val="0"/>
+          <c:showSerName val="0"/>
+          <c:showPercent val="0"/>
+          <c:showBubbleSize val="0"/>
+          <c:showLeaderLines val="0"/>
+        </c:dLbls>
         <c:firstSliceAng val="0"/>
         <c:holeSize val="55"/>
       </c:doughnutChart>
@@ -1547,6 +1402,7 @@
     </c:legend>
     <c:plotVisOnly val="1"/>
     <c:dispBlanksAs val="span"/>
+    <c:showDLblsOverMax val="1"/>
   </c:chart>
   <c:spPr>
     <a:noFill/>
@@ -1562,9 +1418,11 @@
 </file>
 
 <file path=ppt/charts/chart6.xml><?xml version="1.0" encoding="utf-8"?>
-<c:chartSpace xmlns:c="http://schemas.openxmlformats.org/drawingml/2006/chart" xmlns:a="http://schemas.openxmlformats.org/drawingml/2006/main" xmlns:r="http://schemas.openxmlformats.org/officeDocument/2006/relationships">
+<c:chartSpace xmlns:c="http://schemas.openxmlformats.org/drawingml/2006/chart" xmlns:a="http://schemas.openxmlformats.org/drawingml/2006/main" xmlns:r="http://schemas.openxmlformats.org/officeDocument/2006/relationships" xmlns:c16r2="http://schemas.microsoft.com/office/drawing/2015/06/chart">
   <c:date1904 val="0"/>
+  <c:lang val="en-GB"/>
   <c:roundedCorners val="1"/>
+  <c:style val="2"/>
   <c:chart>
     <c:title>
       <c:tx>
@@ -1592,7 +1450,6 @@
           </a:p>
         </c:rich>
       </c:tx>
-      <c:layout/>
       <c:overlay val="0"/>
     </c:title>
     <c:autoTitleDeleted val="0"/>
@@ -1625,18 +1482,26 @@
           <c:invertIfNegative val="0"/>
           <c:dLbls>
             <c:numFmt formatCode="#,##0" sourceLinked="0"/>
+            <c:spPr>
+              <a:noFill/>
+              <a:ln>
+                <a:noFill/>
+              </a:ln>
+              <a:effectLst/>
+            </c:spPr>
             <c:txPr>
               <a:bodyPr/>
               <a:lstStyle/>
               <a:p>
                 <a:pPr>
-                  <a:defRPr b="1" i="0" strike="noStrike" sz="1200" u="none">
+                  <a:defRPr sz="1200" b="1" i="0" u="none" strike="noStrike">
                     <a:solidFill>
                       <a:srgbClr val="F8FAFC"/>
                     </a:solidFill>
                     <a:latin typeface="Arial"/>
                   </a:defRPr>
                 </a:pPr>
+                <a:endParaRPr lang="en-US"/>
               </a:p>
             </c:txPr>
             <c:showLegendKey val="0"/>
@@ -1646,25 +1511,28 @@
             <c:showPercent val="0"/>
             <c:showBubbleSize val="0"/>
             <c:showLeaderLines val="0"/>
+            <c:extLst>
+              <c:ext xmlns:c15="http://schemas.microsoft.com/office/drawing/2012/chart" uri="{CE6537A1-D6FC-4f65-9D91-7224C49458BB}">
+                <c15:showLeaderLines val="0"/>
+              </c:ext>
+            </c:extLst>
           </c:dLbls>
           <c:cat>
-            <c:multiLvlStrRef>
+            <c:strRef>
               <c:f>Sheet1!$A$2:$A$4</c:f>
-              <c:multiLvlStrCache>
+              <c:strCache>
                 <c:ptCount val="3"/>
-                <c:lvl>
-                  <c:pt idx="0">
-                    <c:v>Year 1</c:v>
-                  </c:pt>
-                  <c:pt idx="1">
-                    <c:v>Year 2</c:v>
-                  </c:pt>
-                  <c:pt idx="2">
-                    <c:v>Year 3</c:v>
-                  </c:pt>
-                </c:lvl>
-              </c:multiLvlStrCache>
-            </c:multiLvlStrRef>
+                <c:pt idx="0">
+                  <c:v>Year 1</c:v>
+                </c:pt>
+                <c:pt idx="1">
+                  <c:v>Year 2</c:v>
+                </c:pt>
+                <c:pt idx="2">
+                  <c:v>Year 3</c:v>
+                </c:pt>
+              </c:strCache>
+            </c:strRef>
           </c:cat>
           <c:val>
             <c:numRef>
@@ -1684,6 +1552,11 @@
               </c:numCache>
             </c:numRef>
           </c:val>
+          <c:extLst>
+            <c:ext xmlns:c16="http://schemas.microsoft.com/office/drawing/2014/chart" uri="{C3380CC4-5D6E-409C-BE32-E72D297353CC}">
+              <c16:uniqueId val="{00000000-5E37-4D8D-881E-F697356C1820}"/>
+            </c:ext>
+          </c:extLst>
         </c:ser>
         <c:ser>
           <c:idx val="1"/>
@@ -1708,18 +1581,26 @@
           <c:invertIfNegative val="0"/>
           <c:dLbls>
             <c:numFmt formatCode="#,##0" sourceLinked="0"/>
+            <c:spPr>
+              <a:noFill/>
+              <a:ln>
+                <a:noFill/>
+              </a:ln>
+              <a:effectLst/>
+            </c:spPr>
             <c:txPr>
               <a:bodyPr/>
               <a:lstStyle/>
               <a:p>
                 <a:pPr>
-                  <a:defRPr b="1" i="0" strike="noStrike" sz="1200" u="none">
+                  <a:defRPr sz="1200" b="1" i="0" u="none" strike="noStrike">
                     <a:solidFill>
                       <a:srgbClr val="F8FAFC"/>
                     </a:solidFill>
                     <a:latin typeface="Arial"/>
                   </a:defRPr>
                 </a:pPr>
+                <a:endParaRPr lang="en-US"/>
               </a:p>
             </c:txPr>
             <c:showLegendKey val="0"/>
@@ -1729,25 +1610,28 @@
             <c:showPercent val="0"/>
             <c:showBubbleSize val="0"/>
             <c:showLeaderLines val="0"/>
+            <c:extLst>
+              <c:ext xmlns:c15="http://schemas.microsoft.com/office/drawing/2012/chart" uri="{CE6537A1-D6FC-4f65-9D91-7224C49458BB}">
+                <c15:showLeaderLines val="0"/>
+              </c:ext>
+            </c:extLst>
           </c:dLbls>
           <c:cat>
-            <c:multiLvlStrRef>
+            <c:strRef>
               <c:f>Sheet1!$A$2:$A$4</c:f>
-              <c:multiLvlStrCache>
+              <c:strCache>
                 <c:ptCount val="3"/>
-                <c:lvl>
-                  <c:pt idx="0">
-                    <c:v>Year 1</c:v>
-                  </c:pt>
-                  <c:pt idx="1">
-                    <c:v>Year 2</c:v>
-                  </c:pt>
-                  <c:pt idx="2">
-                    <c:v>Year 3</c:v>
-                  </c:pt>
-                </c:lvl>
-              </c:multiLvlStrCache>
-            </c:multiLvlStrRef>
+                <c:pt idx="0">
+                  <c:v>Year 1</c:v>
+                </c:pt>
+                <c:pt idx="1">
+                  <c:v>Year 2</c:v>
+                </c:pt>
+                <c:pt idx="2">
+                  <c:v>Year 3</c:v>
+                </c:pt>
+              </c:strCache>
+            </c:strRef>
           </c:cat>
           <c:val>
             <c:numRef>
@@ -1767,36 +1651,23 @@
               </c:numCache>
             </c:numRef>
           </c:val>
+          <c:extLst>
+            <c:ext xmlns:c16="http://schemas.microsoft.com/office/drawing/2014/chart" uri="{C3380CC4-5D6E-409C-BE32-E72D297353CC}">
+              <c16:uniqueId val="{00000001-5E37-4D8D-881E-F697356C1820}"/>
+            </c:ext>
+          </c:extLst>
         </c:ser>
         <c:dLbls>
-          <c:numFmt formatCode="#,##0" sourceLinked="0"/>
-          <c:txPr>
-            <a:bodyPr/>
-            <a:lstStyle/>
-            <a:p>
-              <a:pPr>
-                <a:defRPr b="1" i="0" strike="noStrike" sz="1200" u="none">
-                  <a:solidFill>
-                    <a:srgbClr val="F8FAFC"/>
-                  </a:solidFill>
-                  <a:latin typeface="Arial"/>
-                </a:defRPr>
-              </a:pPr>
-            </a:p>
-          </c:txPr>
           <c:showLegendKey val="0"/>
           <c:showVal val="1"/>
           <c:showCatName val="0"/>
           <c:showSerName val="0"/>
           <c:showPercent val="0"/>
           <c:showBubbleSize val="0"/>
-          <c:showLeaderLines val="0"/>
         </c:dLbls>
         <c:gapWidth val="60"/>
-        <c:overlap val="0"/>
         <c:axId val="2094734554"/>
         <c:axId val="2094734552"/>
-        <c:axId val="2094734556"/>
       </c:barChart>
       <c:catAx>
         <c:axId val="2094734554"/>
@@ -1837,6 +1708,7 @@
         <c:crosses val="autoZero"/>
         <c:auto val="1"/>
         <c:lblAlgn val="ctr"/>
+        <c:lblOffset val="100"/>
         <c:noMultiLvlLbl val="1"/>
       </c:catAx>
       <c:valAx>
@@ -1850,30 +1722,6 @@
         <c:majorTickMark val="out"/>
         <c:minorTickMark val="none"/>
         <c:tickLblPos val="nextTo"/>
-        <c:spPr>
-          <a:ln w="12700" cap="flat">
-            <a:solidFill>
-              <a:srgbClr val="888888"/>
-            </a:solidFill>
-            <a:prstDash val="solid"/>
-            <a:round/>
-          </a:ln>
-        </c:spPr>
-        <c:txPr>
-          <a:bodyPr/>
-          <a:lstStyle/>
-          <a:p>
-            <a:pPr>
-              <a:defRPr sz="1200" b="0" i="0" u="none" strike="noStrike">
-                <a:solidFill>
-                  <a:srgbClr val="000000"/>
-                </a:solidFill>
-                <a:latin typeface="Arial"/>
-              </a:defRPr>
-            </a:pPr>
-            <a:endParaRPr lang="en-US"/>
-          </a:p>
-        </c:txPr>
         <c:crossAx val="2094734554"/>
         <c:crosses val="autoZero"/>
         <c:crossBetween val="between"/>
@@ -1906,6 +1754,7 @@
     </c:legend>
     <c:plotVisOnly val="1"/>
     <c:dispBlanksAs val="span"/>
+    <c:showDLblsOverMax val="1"/>
   </c:chart>
   <c:spPr>
     <a:noFill/>
@@ -1942,234 +1791,10 @@
           <a:chExt cx="0" cy="0"/>
         </a:xfrm>
       </p:grpSpPr>
-      <p:sp>
-        <p:nvSpPr>
-          <p:cNvPr id="2" name="Header Placeholder 1"/>
-          <p:cNvSpPr>
-            <a:spLocks noGrp="1"/>
-          </p:cNvSpPr>
-          <p:nvPr>
-            <p:ph type="hdr" sz="quarter"/>
-          </p:nvPr>
-        </p:nvSpPr>
-        <p:spPr>
-          <a:xfrm>
-            <a:off x="0" y="0"/>
-            <a:ext cx="2971800" cy="458788"/>
-          </a:xfrm>
-          <a:prstGeom prst="rect">
-            <a:avLst/>
-          </a:prstGeom>
-        </p:spPr>
-        <p:txBody>
-          <a:bodyPr vert="horz" lIns="91440" tIns="45720" rIns="91440" bIns="45720" rtlCol="0"/>
-          <a:lstStyle>
-            <a:lvl1pPr algn="l">
-              <a:defRPr sz="1200"/>
-            </a:lvl1pPr>
-          </a:lstStyle>
-          <a:p>
-            <a:endParaRPr lang="en-US"/>
-          </a:p>
-        </p:txBody>
-      </p:sp>
-      <p:sp>
-        <p:nvSpPr>
-          <p:cNvPr id="3" name="Date Placeholder 2"/>
-          <p:cNvSpPr>
-            <a:spLocks noGrp="1"/>
-          </p:cNvSpPr>
-          <p:nvPr>
-            <p:ph type="dt" idx="1"/>
-          </p:nvPr>
-        </p:nvSpPr>
-        <p:spPr>
-          <a:xfrm>
-            <a:off x="3884613" y="0"/>
-            <a:ext cx="2971800" cy="458788"/>
-          </a:xfrm>
-          <a:prstGeom prst="rect">
-            <a:avLst/>
-          </a:prstGeom>
-        </p:spPr>
-        <p:txBody>
-          <a:bodyPr vert="horz" lIns="91440" tIns="45720" rIns="91440" bIns="45720" rtlCol="0"/>
-          <a:lstStyle>
-            <a:lvl1pPr algn="r">
-              <a:defRPr sz="1200"/>
-            </a:lvl1pPr>
-          </a:lstStyle>
-          <a:p>
-            <a:fld id="{5282F153-3F37-0F45-9E97-73ACFA13230C}" type="datetimeFigureOut">
-              <a:rPr lang="en-US"/>
-              <a:t>7/23/19</a:t>
-            </a:fld>
-            <a:endParaRPr lang="en-US"/>
-          </a:p>
-        </p:txBody>
-      </p:sp>
-      <p:sp>
-        <p:nvSpPr>
-          <p:cNvPr id="4" name="Slide Image Placeholder 3"/>
-          <p:cNvSpPr>
-            <a:spLocks noGrp="1" noRot="1" noChangeAspect="1"/>
-          </p:cNvSpPr>
-          <p:nvPr>
-            <p:ph type="sldImg" idx="2"/>
-          </p:nvPr>
-        </p:nvSpPr>
-        <p:spPr>
-          <a:xfrm>
-            <a:off x="685800" y="1143000"/>
-            <a:ext cx="5486400" cy="3086100"/>
-          </a:xfrm>
-          <a:prstGeom prst="rect">
-            <a:avLst/>
-          </a:prstGeom>
-          <a:noFill/>
-          <a:ln w="12700">
-            <a:solidFill>
-              <a:prstClr val="black"/>
-            </a:solidFill>
-          </a:ln>
-        </p:spPr>
-        <p:txBody>
-          <a:bodyPr vert="horz" lIns="91440" tIns="45720" rIns="91440" bIns="45720" rtlCol="0" anchor="ctr"/>
-          <a:lstStyle/>
-          <a:p>
-            <a:endParaRPr lang="en-US"/>
-          </a:p>
-        </p:txBody>
-      </p:sp>
-      <p:sp>
-        <p:nvSpPr>
-          <p:cNvPr id="5" name="Notes Placeholder 4"/>
-          <p:cNvSpPr>
-            <a:spLocks noGrp="1"/>
-          </p:cNvSpPr>
-          <p:nvPr>
-            <p:ph type="body" sz="quarter" idx="3"/>
-          </p:nvPr>
-        </p:nvSpPr>
-        <p:spPr>
-          <a:xfrm>
-            <a:off x="685800" y="4400550"/>
-            <a:ext cx="5486400" cy="3600450"/>
-          </a:xfrm>
-          <a:prstGeom prst="rect">
-            <a:avLst/>
-          </a:prstGeom>
-        </p:spPr>
-        <p:txBody>
-          <a:bodyPr vert="horz" lIns="91440" tIns="45720" rIns="91440" bIns="45720" rtlCol="0"/>
-          <a:lstStyle/>
-          <a:p>
-            <a:pPr lvl="0"/>
-            <a:r>
-              <a:rPr lang="en-US"/>
-              <a:t>Click to edit Master text styles</a:t>
-            </a:r>
-          </a:p>
-          <a:p>
-            <a:pPr lvl="1"/>
-            <a:r>
-              <a:rPr lang="en-US"/>
-              <a:t>Second level</a:t>
-            </a:r>
-          </a:p>
-          <a:p>
-            <a:pPr lvl="2"/>
-            <a:r>
-              <a:rPr lang="en-US"/>
-              <a:t>Third level</a:t>
-            </a:r>
-          </a:p>
-          <a:p>
-            <a:pPr lvl="3"/>
-            <a:r>
-              <a:rPr lang="en-US"/>
-              <a:t>Fourth level</a:t>
-            </a:r>
-          </a:p>
-          <a:p>
-            <a:pPr lvl="4"/>
-            <a:r>
-              <a:rPr lang="en-US"/>
-              <a:t>Fifth level</a:t>
-            </a:r>
-          </a:p>
-        </p:txBody>
-      </p:sp>
-      <p:sp>
-        <p:nvSpPr>
-          <p:cNvPr id="6" name="Footer Placeholder 5"/>
-          <p:cNvSpPr>
-            <a:spLocks noGrp="1"/>
-          </p:cNvSpPr>
-          <p:nvPr>
-            <p:ph type="ftr" sz="quarter" idx="4"/>
-          </p:nvPr>
-        </p:nvSpPr>
-        <p:spPr>
-          <a:xfrm>
-            <a:off x="0" y="8685213"/>
-            <a:ext cx="2971800" cy="458787"/>
-          </a:xfrm>
-          <a:prstGeom prst="rect">
-            <a:avLst/>
-          </a:prstGeom>
-        </p:spPr>
-        <p:txBody>
-          <a:bodyPr vert="horz" lIns="91440" tIns="45720" rIns="91440" bIns="45720" rtlCol="0" anchor="b"/>
-          <a:lstStyle>
-            <a:lvl1pPr algn="l">
-              <a:defRPr sz="1200"/>
-            </a:lvl1pPr>
-          </a:lstStyle>
-          <a:p>
-            <a:endParaRPr lang="en-US"/>
-          </a:p>
-        </p:txBody>
-      </p:sp>
-      <p:sp>
-        <p:nvSpPr>
-          <p:cNvPr id="7" name="Slide Number Placeholder 6"/>
-          <p:cNvSpPr>
-            <a:spLocks noGrp="1"/>
-          </p:cNvSpPr>
-          <p:nvPr>
-            <p:ph type="sldNum" sz="quarter" idx="5"/>
-          </p:nvPr>
-        </p:nvSpPr>
-        <p:spPr>
-          <a:xfrm>
-            <a:off x="3884613" y="8685213"/>
-            <a:ext cx="2971800" cy="458787"/>
-          </a:xfrm>
-          <a:prstGeom prst="rect">
-            <a:avLst/>
-          </a:prstGeom>
-        </p:spPr>
-        <p:txBody>
-          <a:bodyPr vert="horz" lIns="91440" tIns="45720" rIns="91440" bIns="45720" rtlCol="0" anchor="b"/>
-          <a:lstStyle>
-            <a:lvl1pPr algn="r">
-              <a:defRPr sz="1200"/>
-            </a:lvl1pPr>
-          </a:lstStyle>
-          <a:p>
-            <a:fld id="{CE5E9CC1-C706-0F49-92D6-E571CC5EEA8F}" type="slidenum">
-              <a:rPr lang="en-US"/>
-              <a:t>‹#›</a:t>
-            </a:fld>
-            <a:endParaRPr lang="en-US"/>
-          </a:p>
-        </p:txBody>
-      </p:sp>
     </p:spTree>
     <p:extLst>
       <p:ext uri="{BB962C8B-B14F-4D97-AF65-F5344CB8AC3E}">
-        <p14:creationId xmlns:p14="http://schemas.microsoft.com/office/powerpoint/2010/main" val="1024086991"/>
+        <p14:creationId xmlns:p14="http://schemas.microsoft.com/office/powerpoint/2010/main" val="1182798915"/>
       </p:ext>
     </p:extLst>
   </p:cSld>
@@ -2319,7 +1944,6 @@
 THE 3-MINUTE PITCH follows the speech, slides 2-10: 0:00 the problem (2-3) · 0:28 the solution (4-5) · 0:55 the demo video, 50 s (6) · 1:45 cost and ask (7-8) · 2:06 why we stand out (9) · 2:27 the close (10), done by 2:50.
 Slides 11 onwards are the detail for the assessors. Don't present them; open one only if a question calls for it.</a:t>
             </a:r>
-            <a:endParaRPr lang="en-US" dirty="0"/>
           </a:p>
         </p:txBody>
       </p:sp>
@@ -2408,7 +2032,6 @@
               <a:t>SAY (2:27-2:50), look at the panel, not the screen: 'Richard Maponya started in the 1950s with a milk round in Soweto, delivered by bicycle. His customers trusted him, and decades later he opened Maponya Mall. The next Maponya is out there right now: selling kotas, running a spaza, laying bricks. Everyone wants a piece of the kasi economy. Akayza makes sure the people who run it keep theirs. We don't hold the stock. We build the record. Keep it in the kasi.' Then stop talking.
 Maponya: Dube Hygienic Dairy, early 1950s, milk delivered by young men on bicycles to homes without fridges; Maponya Mall opened in 2007 (Daily Maverick, Wikipedia).</a:t>
             </a:r>
-            <a:endParaRPr lang="en-US" dirty="0"/>
           </a:p>
         </p:txBody>
       </p:sp>
@@ -2496,7 +2119,6 @@
               <a:rPr lang="en-US" dirty="0"/>
               <a:t>Not presented in the room. A map for the assessors: each item the organisers asked for, and the slides that answer it.</a:t>
             </a:r>
-            <a:endParaRPr lang="en-US" dirty="0"/>
           </a:p>
         </p:txBody>
       </p:sp>
@@ -2585,7 +2207,6 @@
               <a:t>Detail slide, not in the pitch. If asked how it works: 'The owner switches on the tools the business needs. Akayza shows the suppliers she already uses, and recommends ones that fit: suppliers, never products. She pays on PayFast's own page, and the provider confirms it. The credit book keeps who owes her. And a builder runs each job in stages, with the client signing off.'
 These are real screens from our app on a Samsung A56, recorded for the demo, with sample suppliers and made-up customers.</a:t>
             </a:r>
-            <a:endParaRPr lang="en-US" dirty="0"/>
           </a:p>
         </p:txBody>
       </p:sp>
@@ -2674,7 +2295,6 @@
               <a:t>SAY (20 s): 'Why hasn't anyone fixed this? Because the tools were built for formal businesses: they assume a registered company, a bookkeeper, card machines. Informal businesses run on cash, trust and a phone, busy all day, buying from the same few suppliers for years. Nothing fits how they work, so nothing gets captured.'
 WhatsApp is how they talk to each other; it isn't the problem. The problem is that nothing turns their everyday trading into a record.</a:t>
             </a:r>
-            <a:endParaRPr lang="en-US" dirty="0"/>
           </a:p>
         </p:txBody>
       </p:sp>
@@ -2763,7 +2383,6 @@
               <a:t>The user journey behind the demo. Sipho and Thabo are illustrations of the owners we built for, not real customers. If asked: 'they're the kind of owners we built for; the pilot puts real names to them.'
 Honest status: Sipho's payment in the app is confirmed by the payment provider; his order book and credit book are his own records. Thabo's stages are confirmed by both him and the client.</a:t>
             </a:r>
-            <a:endParaRPr lang="en-US" dirty="0"/>
           </a:p>
         </p:txBody>
       </p:sp>
@@ -2852,7 +2471,6 @@
               <a:t>SAY (20 s): 'Everyone in the chain gains. Businesses use it free. Suppliers pay us, because we bring them more orders from the shops and builders they already serve and end the cash lost between the driver and the depot. And next, banks, funds and government get businesses they can finally see, only with the owner's consent.'
 Partners are the roadmap, not revenue today. Our revenue is suppliers.</a:t>
             </a:r>
-            <a:endParaRPr lang="en-US" dirty="0"/>
           </a:p>
         </p:txBody>
       </p:sp>
@@ -2941,7 +2559,6 @@
               <a:t>SAY (20 s): 'The whole township economy is R900 billion. Spaza shops alone move about R180 billion a year: one segment, already buying every week. Our goal is 20,000 businesses and 200 paying suppliers by year three, about R13 million a year.'
 R180 bn is specifically spaza shops (that's what the evidence measures), so we name them here. Everywhere else: informal and small businesses.</a:t>
             </a:r>
-            <a:endParaRPr lang="en-US" dirty="0"/>
           </a:p>
         </p:txBody>
       </p:sp>
@@ -3029,7 +2646,6 @@
               <a:rPr lang="en-US" dirty="0"/>
               <a:t>SAY (20 s): 'Why South Africa first, not Africa? Because we know this market from the inside. It's big and dense, it's already moving to digital payments (56% prefer EFT), and the rules are clear. Win here, then take the same model across the continent.'</a:t>
             </a:r>
-            <a:endParaRPr lang="en-US" dirty="0"/>
           </a:p>
         </p:txBody>
       </p:sp>
@@ -3118,7 +2734,6 @@
               <a:t>SAY (only if asked, 20 s): 'The app talks to one API over HTTPS. Inside, each area is its own module: identity, business tools, suppliers, commerce, proof and platform. An automated architecture test fails the build if one area reads another's data, and identity is sealed behind one account service. PostgreSQL sits behind it, one schema per area. Payments happen on PayFast's own page and count only after four checks; photos go straight to Cloudinary with a signature from us.'
 Numbers: about 1,280 backend tests and 204 app tests run before every merge. Sealed records: the owner can seal the whole record with ML-DSA-65 (NIST FIPS 204, post-quantum) plus Ed25519, and a check shows anything changed or deleted since.</a:t>
             </a:r>
-            <a:endParaRPr lang="en-US" dirty="0"/>
           </a:p>
         </p:txBody>
       </p:sp>
@@ -3208,7 +2823,6 @@
 HONEST STATUS, don't claim more: data download is built on the server (GET /me/export), but the app has no button for it yet. 'Close my account' works in the app. 'Delete my account and data' says 'Coming soon'; when it comes, personal data is deleted or anonymised, and orders, invoices and payment records stay 5 years (tax law).
 The full policy is in the app (src/content/legal/privacyPolicy.ts). Customer names in the credit book stay private to the owner; the supplier engine uses aggregates only. PayFast, Cloudinary, Mapbox and the email provider may store data outside South Africa: POPIA section 72.</a:t>
             </a:r>
-            <a:endParaRPr lang="en-US" dirty="0"/>
           </a:p>
         </p:txBody>
       </p:sp>
@@ -3298,7 +2912,6 @@
 R900 bn: Standard Bank's Township Informal Economy Report, October 2025 (research by Foshizi, 250+ businesses in 5 provinces). Say 'about R900 billion'. The retailer and bank lines are lived evidence: no number, so don't add one.
 Photos: 'Nomonde Tuck Shop' by HelenOnline (CC BY-SA 4.0) and 'Aliwal North - Dukatole - Housebuilding Projekt' by Heinz-Josef Lücking (CC BY-SA 3.0 DE), Wikimedia Commons, resized, with our captions. Credits are also in REUSE.md.</a:t>
             </a:r>
-            <a:endParaRPr lang="en-US" dirty="0"/>
           </a:p>
         </p:txBody>
       </p:sp>
@@ -3386,7 +2999,6 @@
               <a:rPr lang="en-US" dirty="0"/>
               <a:t>Answer to 'won't security make it hard to use?': 'Security is invisible to the owner: email, password, and a code only on a new phone. Everything else happens on our server.'</a:t>
             </a:r>
-            <a:endParaRPr lang="en-US" dirty="0"/>
           </a:p>
         </p:txBody>
       </p:sp>
@@ -3474,7 +3086,6 @@
               <a:rPr lang="en-US" dirty="0"/>
               <a:t>SAY (20 s): 'We don't chase businesses one by one. We sign a supplier, and the supplier brings the businesses it already delivers to. Two suppliers in the pilot, fifteen in the first year, two hundred by year three.'</a:t>
             </a:r>
-            <a:endParaRPr lang="en-US" dirty="0"/>
           </a:p>
         </p:txBody>
       </p:sp>
@@ -3563,7 +3174,6 @@
               <a:t>SAY (15 s): 'This isn't a mock-up. It's built: over a thousand automated tests pass before every change, payments run end to end in the provider's sandbox, and card numbers never touch our servers. We're at TRL 4 today; the pilot takes us to 6.'
 If a mentor rated the TRL differently, change it to match.</a:t>
             </a:r>
-            <a:endParaRPr lang="en-US" dirty="0"/>
           </a:p>
         </p:txBody>
       </p:sp>
@@ -3654,7 +3264,6 @@
 Why R1.5m: year 1 runs at a loss of about R20-40k a month while suppliers sign up, plus hiring the year-2 team before their revenue arrives, plus six months of safety.
 Running costs stay low because we don't hold stock, cash or delivery vans: suppliers deliver, the payment provider holds the money.</a:t>
             </a:r>
-            <a:endParaRPr lang="en-US" dirty="0"/>
           </a:p>
         </p:txBody>
       </p:sp>
@@ -3742,7 +3351,6 @@
               <a:rPr lang="en-US" dirty="0"/>
               <a:t>TEAM (10 s): who we are in one line each. Edit the roles to how you want to be introduced; add the DataQuest 2026 win here if you want it.</a:t>
             </a:r>
-            <a:endParaRPr lang="en-US" dirty="0"/>
           </a:p>
         </p:txBody>
       </p:sp>
@@ -3830,7 +3438,6 @@
               <a:rPr lang="en-US" dirty="0"/>
               <a:t>Post-quantum (built): 'Records are meant to prove things for years, and quantum computers will break today's signatures. So the owner can seal their whole record with two signatures: ML-DSA-65, the NIST post-quantum standard, and Ed25519. A check shows exactly which records changed or were deleted, even straight in the database. We keep no copy of the seal, and our public keys are published so anyone can check without us.' Built and tested; invoices and receipts are next.</a:t>
             </a:r>
-            <a:endParaRPr lang="en-US" dirty="0"/>
           </a:p>
         </p:txBody>
       </p:sp>
@@ -3919,7 +3526,6 @@
               <a:t>SAY (0:15-0:28): 'But the people who run it can't prove any of it. It runs on cash and word of mouth. Fewer than one in ten can get a bank loan. A spaza owner can't get stock on credit, and a builder can't prove the houses he's built.'
 IF ASKED: fewer than 9% can get a bank loan and 57% run on savings and family; about 80% are unregistered (Standard Bank 2025). Of the R500m Spaza Shop Support Fund, R179.6m had reached spaza shops by the end of May 2026, and 354 applications failed verification (DSBD, 29 May 2026). That number is about spaza shops only.</a:t>
             </a:r>
-            <a:endParaRPr lang="en-US" dirty="0"/>
           </a:p>
         </p:txBody>
       </p:sp>
@@ -4008,7 +3614,6 @@
               <a:t>SAY (0:28-0:40): 'Akayza is one free app for the whole kasi economy. Spaza shops and food sellers are matched with suppliers who deliver. Builders log every job with photos, and clients sign off each stage.'
 Real screens from our app on a Samsung A56, with sample suppliers and made-up customers. Honest wording: a payment made in the app is confirmed by the payment provider; a job stage is confirmed by both sides. Never call the rest proof.</a:t>
             </a:r>
-            <a:endParaRPr lang="en-US" dirty="0"/>
           </a:p>
         </p:txBody>
       </p:sp>
@@ -4097,7 +3702,6 @@
               <a:t>SAY (0:40-0:55): 'You know airtime advance: your network lends you airtime because it's seen that you always pay. Akayza builds that kind of history for a business. Every paid order and signed-off job adds to a record the owner holds: the first step to credit, better suppliers and new clients.'
 IF ASKED 'do you lend?': 'No. We build the record, and the owner decides who sees it. Lenders are next, only with the owner's consent.'</a:t>
             </a:r>
-            <a:endParaRPr lang="en-US" dirty="0"/>
           </a:p>
         </p:txBody>
       </p:sp>
@@ -4191,9 +3795,9 @@
 [Order book] 'At the counter, every kota he sells goes in his order book.'
 [My record] 'It all adds up in his record, with the confirmed payments marked.'
 [Builder job] 'Now meet Thabo, a builder. Every job, stage by stage, is photographed, and the client signs off each stage from a link: confirmed by both. That's his track record.'
-Before going on: phone charged, backend and the tunnel running (backend/scripts/demo_tunnel.ps1), the health link green. For the link: rebuild with DEMO_URL=&lt;link&gt; node build.js, or replace '[paste here]' by hand (Insert &gt; Link).</a:t>
-            </a:r>
-            <a:endParaRPr lang="en-US" dirty="0"/>
+The 49-second video is in the deck and starts by itself when this slide opens. It's silent, so speak over it. If it doesn't start, click it (or press Alt+P). No Wi-Fi needed.
+The full 81-second version with music is on Google Drive (the link on the slide), for the assessors and Sonke.</a:t>
+            </a:r>
           </a:p>
         </p:txBody>
       </p:sp>
@@ -4282,7 +3886,6 @@
               <a:t>SAY (1:45-1:55): 'Businesses use Akayza for free. Suppliers pay: from R299 a month, plus about 1% on digital orders, never on cash. Next, lenders pay to see a business's record, only with the owner's consent.'
 IF ASKED how: subscriptions = supplier mix × price; commission = active businesses × ~R4,000 digital orders a month × 1%. Year 1: 5 Starter + 10 Pro suppliers, 1,000 businesses. They're estimates, and we say so. Lenders are next, not revenue today.</a:t>
             </a:r>
-            <a:endParaRPr lang="en-US" dirty="0"/>
           </a:p>
         </p:txBody>
       </p:sp>
@@ -4371,7 +3974,6 @@
               <a:t>SAY (1:55-2:06), slowly, it's the most important number: 'For a six-month pilot in Soshanguve, with 2 suppliers and 50 to 100 businesses, we need R300,000: field agents, stipends for pilot businesses, data, running costs and a POPIA review.'
 Use of funds: stipends R96k, field agent R60k, data R60k, running costs R24k, POPIA review + external security test R30k, devices + contingency R30k. After the pilot it costs about R460 a month to run, so two suppliers on Starter already cover it.</a:t>
             </a:r>
-            <a:endParaRPr lang="en-US" dirty="0"/>
           </a:p>
         </p:txBody>
       </p:sp>
@@ -4460,7 +4062,6 @@
               <a:t>SAY (2:06-2:27): 'Ordering apps give traders a place to buy. Payment apps take cards. Akayza gives the kasi economy something it's never had: a record people can trust. Payments are confirmed by the payment provider, and job stages by both sides, so it's more than a receipt. And the record belongs to the owner: nothing goes to a lender without their consent.'
 Our biggest competitor is the habit of WhatsApp and a notebook. Don't attack anyone; show the gap. We complement payment apps; we don't replace them.</a:t>
             </a:r>
-            <a:endParaRPr lang="en-US" dirty="0"/>
           </a:p>
         </p:txBody>
       </p:sp>
@@ -4533,6 +4134,11 @@
 <file path=ppt/slideMasters/slideMaster1.xml><?xml version="1.0" encoding="utf-8"?>
 <p:sldMaster xmlns:a="http://schemas.openxmlformats.org/drawingml/2006/main" xmlns:r="http://schemas.openxmlformats.org/officeDocument/2006/relationships" xmlns:p="http://schemas.openxmlformats.org/presentationml/2006/main">
   <p:cSld>
+    <p:bg>
+      <p:bgRef idx="1001">
+        <a:schemeClr val="bg1"/>
+      </p:bgRef>
+    </p:bg>
     <p:spTree>
       <p:nvGrpSpPr>
         <p:cNvPr id="1" name=""/>
@@ -4815,6 +4421,7 @@
         <a:solidFill>
           <a:srgbClr val="0F172A"/>
         </a:solidFill>
+        <a:effectLst/>
       </p:bgPr>
     </p:bg>
     <p:spTree>
@@ -4833,14 +4440,14 @@
       </p:grpSpPr>
       <p:pic>
         <p:nvPicPr>
-          <p:cNvPr id="2" name="Image 0" descr="preencoded.png">    </p:cNvPr>
+          <p:cNvPr id="2" name="Image 0" descr="preencoded.png"/>
           <p:cNvPicPr>
             <a:picLocks noChangeAspect="1"/>
           </p:cNvPicPr>
           <p:nvPr/>
         </p:nvPicPr>
         <p:blipFill>
-          <a:blip r:embed="rId1"/>
+          <a:blip r:embed="rId3"/>
           <a:stretch>
             <a:fillRect/>
           </a:stretch>
@@ -4876,7 +4483,7 @@
           <a:bodyPr wrap="square" lIns="0" tIns="0" rIns="0" bIns="0" rtlCol="0" anchor="t"/>
           <a:lstStyle/>
           <a:p>
-            <a:pPr indent="0" marL="0">
+            <a:pPr marL="0" indent="0">
               <a:buNone/>
             </a:pPr>
             <a:r>
@@ -4890,9 +4497,6 @@
               </a:rPr>
               <a:t>akay</a:t>
             </a:r>
-            <a:pPr indent="0" marL="0">
-              <a:buNone/>
-            </a:pPr>
             <a:r>
               <a:rPr lang="en-US" sz="7200" b="1" dirty="0">
                 <a:solidFill>
@@ -4929,7 +4533,7 @@
           <a:bodyPr wrap="square" lIns="0" tIns="0" rIns="0" bIns="0" rtlCol="0" anchor="t"/>
           <a:lstStyle/>
           <a:p>
-            <a:pPr indent="0" marL="0">
+            <a:pPr marL="0" indent="0">
               <a:buNone/>
             </a:pPr>
             <a:r>
@@ -4968,7 +4572,7 @@
           <a:bodyPr wrap="square" lIns="0" tIns="0" rIns="0" bIns="0" rtlCol="0" anchor="t"/>
           <a:lstStyle/>
           <a:p>
-            <a:pPr indent="0" marL="0">
+            <a:pPr marL="0" indent="0">
               <a:buNone/>
             </a:pPr>
             <a:r>
@@ -5007,7 +4611,7 @@
           <a:bodyPr wrap="square" lIns="0" tIns="0" rIns="0" bIns="0" rtlCol="0" anchor="t"/>
           <a:lstStyle/>
           <a:p>
-            <a:pPr indent="0" marL="0">
+            <a:pPr marL="0" indent="0">
               <a:buNone/>
             </a:pPr>
             <a:r>
@@ -5124,6 +4728,7 @@
         <a:solidFill>
           <a:srgbClr val="0F172A"/>
         </a:solidFill>
+        <a:effectLst/>
       </p:bgPr>
     </p:bg>
     <p:spTree>
@@ -5142,14 +4747,14 @@
       </p:grpSpPr>
       <p:pic>
         <p:nvPicPr>
-          <p:cNvPr id="2" name="Image 0" descr="preencoded.png">    </p:cNvPr>
+          <p:cNvPr id="2" name="Image 0" descr="preencoded.png"/>
           <p:cNvPicPr>
             <a:picLocks noChangeAspect="1"/>
           </p:cNvPicPr>
           <p:nvPr/>
         </p:nvPicPr>
         <p:blipFill>
-          <a:blip r:embed="rId1"/>
+          <a:blip r:embed="rId3"/>
           <a:stretch>
             <a:fillRect/>
           </a:stretch>
@@ -5185,7 +4790,7 @@
           <a:bodyPr wrap="square" lIns="0" tIns="0" rIns="0" bIns="0" rtlCol="0" anchor="t"/>
           <a:lstStyle/>
           <a:p>
-            <a:pPr indent="0" marL="0">
+            <a:pPr marL="0" indent="0">
               <a:buNone/>
             </a:pPr>
             <a:r>
@@ -5224,7 +4829,7 @@
           <a:bodyPr wrap="square" lIns="0" tIns="0" rIns="0" bIns="0" rtlCol="0" anchor="t"/>
           <a:lstStyle/>
           <a:p>
-            <a:pPr indent="0" marL="0">
+            <a:pPr marL="0" indent="0">
               <a:buNone/>
             </a:pPr>
             <a:r>
@@ -5263,7 +4868,7 @@
           <a:bodyPr wrap="square" lIns="0" tIns="0" rIns="0" bIns="0" rtlCol="0" anchor="t"/>
           <a:lstStyle/>
           <a:p>
-            <a:pPr indent="0" marL="0">
+            <a:pPr marL="0" indent="0">
               <a:buNone/>
             </a:pPr>
             <a:r>
@@ -5302,7 +4907,7 @@
           <a:bodyPr wrap="square" lIns="0" tIns="0" rIns="0" bIns="0" rtlCol="0" anchor="t"/>
           <a:lstStyle/>
           <a:p>
-            <a:pPr indent="0" marL="0">
+            <a:pPr marL="0" indent="0">
               <a:buNone/>
             </a:pPr>
             <a:r>
@@ -5341,7 +4946,7 @@
           <a:bodyPr wrap="square" lIns="0" tIns="0" rIns="0" bIns="0" rtlCol="0" anchor="t"/>
           <a:lstStyle/>
           <a:p>
-            <a:pPr indent="0" marL="0">
+            <a:pPr marL="0" indent="0">
               <a:buNone/>
             </a:pPr>
             <a:r>
@@ -5380,7 +4985,7 @@
           <a:bodyPr wrap="square" lIns="0" tIns="0" rIns="0" bIns="0" rtlCol="0" anchor="t"/>
           <a:lstStyle/>
           <a:p>
-            <a:pPr indent="0" marL="0">
+            <a:pPr marL="0" indent="0">
               <a:buNone/>
             </a:pPr>
             <a:r>
@@ -5414,6 +5019,7 @@
         <a:solidFill>
           <a:srgbClr val="0F172A"/>
         </a:solidFill>
+        <a:effectLst/>
       </p:bgPr>
     </p:bg>
     <p:spTree>
@@ -5451,11 +5057,11 @@
           <a:bodyPr wrap="square" lIns="0" tIns="0" rIns="0" bIns="0" rtlCol="0" anchor="t"/>
           <a:lstStyle/>
           <a:p>
-            <a:pPr indent="0" marL="0">
-              <a:buNone/>
-            </a:pPr>
-            <a:r>
-              <a:rPr lang="en-US" sz="1300" b="1" spc="300" kern="0" dirty="0">
+            <a:pPr marL="0" indent="0">
+              <a:buNone/>
+            </a:pPr>
+            <a:r>
+              <a:rPr lang="en-US" sz="1300" b="1" kern="0" spc="300" dirty="0">
                 <a:solidFill>
                   <a:srgbClr val="10B981"/>
                 </a:solidFill>
@@ -5490,7 +5096,7 @@
           <a:bodyPr wrap="square" lIns="0" tIns="0" rIns="0" bIns="0" rtlCol="0" anchor="t"/>
           <a:lstStyle/>
           <a:p>
-            <a:pPr indent="0" marL="0">
+            <a:pPr marL="0" indent="0">
               <a:buNone/>
             </a:pPr>
             <a:r>
@@ -5529,7 +5135,7 @@
           <a:bodyPr wrap="square" lIns="0" tIns="0" rIns="0" bIns="0" rtlCol="0" anchor="t"/>
           <a:lstStyle/>
           <a:p>
-            <a:pPr indent="0" marL="0">
+            <a:pPr marL="0" indent="0">
               <a:buNone/>
             </a:pPr>
             <a:r>
@@ -5601,14 +5207,14 @@
       </p:sp>
       <p:pic>
         <p:nvPicPr>
-          <p:cNvPr id="7" name="Image 0" descr="preencoded.png">    </p:cNvPr>
+          <p:cNvPr id="7" name="Image 0" descr="preencoded.png"/>
           <p:cNvPicPr>
             <a:picLocks noChangeAspect="1"/>
           </p:cNvPicPr>
           <p:nvPr/>
         </p:nvPicPr>
         <p:blipFill>
-          <a:blip r:embed="rId1"/>
+          <a:blip r:embed="rId3"/>
           <a:stretch>
             <a:fillRect/>
           </a:stretch>
@@ -5644,7 +5250,7 @@
           <a:bodyPr wrap="square" lIns="0" tIns="0" rIns="0" bIns="0" rtlCol="0" anchor="t"/>
           <a:lstStyle/>
           <a:p>
-            <a:pPr indent="0" marL="0">
+            <a:pPr marL="0" indent="0">
               <a:buNone/>
             </a:pPr>
             <a:r>
@@ -5683,7 +5289,7 @@
           <a:bodyPr wrap="square" lIns="0" tIns="0" rIns="0" bIns="0" rtlCol="0" anchor="t"/>
           <a:lstStyle/>
           <a:p>
-            <a:pPr indent="0" marL="0">
+            <a:pPr marL="0" indent="0">
               <a:buNone/>
             </a:pPr>
             <a:r>
@@ -5722,7 +5328,7 @@
           <a:bodyPr wrap="square" lIns="0" tIns="0" rIns="0" bIns="0" rtlCol="0" anchor="t"/>
           <a:lstStyle/>
           <a:p>
-            <a:pPr algn="r" indent="0" marL="0">
+            <a:pPr marL="0" indent="0" algn="r">
               <a:buNone/>
             </a:pPr>
             <a:r>
@@ -5794,14 +5400,14 @@
       </p:sp>
       <p:pic>
         <p:nvPicPr>
-          <p:cNvPr id="13" name="Image 1" descr="preencoded.png">    </p:cNvPr>
+          <p:cNvPr id="13" name="Image 1" descr="preencoded.png"/>
           <p:cNvPicPr>
             <a:picLocks noChangeAspect="1"/>
           </p:cNvPicPr>
           <p:nvPr/>
         </p:nvPicPr>
         <p:blipFill>
-          <a:blip r:embed="rId2"/>
+          <a:blip r:embed="rId4"/>
           <a:stretch>
             <a:fillRect/>
           </a:stretch>
@@ -5837,7 +5443,7 @@
           <a:bodyPr wrap="square" lIns="0" tIns="0" rIns="0" bIns="0" rtlCol="0" anchor="t"/>
           <a:lstStyle/>
           <a:p>
-            <a:pPr indent="0" marL="0">
+            <a:pPr marL="0" indent="0">
               <a:buNone/>
             </a:pPr>
             <a:r>
@@ -5876,7 +5482,7 @@
           <a:bodyPr wrap="square" lIns="0" tIns="0" rIns="0" bIns="0" rtlCol="0" anchor="t"/>
           <a:lstStyle/>
           <a:p>
-            <a:pPr indent="0" marL="0">
+            <a:pPr marL="0" indent="0">
               <a:buNone/>
             </a:pPr>
             <a:r>
@@ -5915,7 +5521,7 @@
           <a:bodyPr wrap="square" lIns="0" tIns="0" rIns="0" bIns="0" rtlCol="0" anchor="t"/>
           <a:lstStyle/>
           <a:p>
-            <a:pPr algn="r" indent="0" marL="0">
+            <a:pPr marL="0" indent="0" algn="r">
               <a:buNone/>
             </a:pPr>
             <a:r>
@@ -5987,14 +5593,14 @@
       </p:sp>
       <p:pic>
         <p:nvPicPr>
-          <p:cNvPr id="19" name="Image 2" descr="preencoded.png">    </p:cNvPr>
+          <p:cNvPr id="19" name="Image 2" descr="preencoded.png"/>
           <p:cNvPicPr>
             <a:picLocks noChangeAspect="1"/>
           </p:cNvPicPr>
           <p:nvPr/>
         </p:nvPicPr>
         <p:blipFill>
-          <a:blip r:embed="rId3"/>
+          <a:blip r:embed="rId5"/>
           <a:stretch>
             <a:fillRect/>
           </a:stretch>
@@ -6030,7 +5636,7 @@
           <a:bodyPr wrap="square" lIns="0" tIns="0" rIns="0" bIns="0" rtlCol="0" anchor="t"/>
           <a:lstStyle/>
           <a:p>
-            <a:pPr indent="0" marL="0">
+            <a:pPr marL="0" indent="0">
               <a:buNone/>
             </a:pPr>
             <a:r>
@@ -6069,7 +5675,7 @@
           <a:bodyPr wrap="square" lIns="0" tIns="0" rIns="0" bIns="0" rtlCol="0" anchor="t"/>
           <a:lstStyle/>
           <a:p>
-            <a:pPr indent="0" marL="0">
+            <a:pPr marL="0" indent="0">
               <a:buNone/>
             </a:pPr>
             <a:r>
@@ -6108,7 +5714,7 @@
           <a:bodyPr wrap="square" lIns="0" tIns="0" rIns="0" bIns="0" rtlCol="0" anchor="t"/>
           <a:lstStyle/>
           <a:p>
-            <a:pPr algn="r" indent="0" marL="0">
+            <a:pPr marL="0" indent="0" algn="r">
               <a:buNone/>
             </a:pPr>
             <a:r>
@@ -6180,14 +5786,14 @@
       </p:sp>
       <p:pic>
         <p:nvPicPr>
-          <p:cNvPr id="25" name="Image 3" descr="preencoded.png">    </p:cNvPr>
+          <p:cNvPr id="25" name="Image 3" descr="preencoded.png"/>
           <p:cNvPicPr>
             <a:picLocks noChangeAspect="1"/>
           </p:cNvPicPr>
           <p:nvPr/>
         </p:nvPicPr>
         <p:blipFill>
-          <a:blip r:embed="rId4"/>
+          <a:blip r:embed="rId6"/>
           <a:stretch>
             <a:fillRect/>
           </a:stretch>
@@ -6223,7 +5829,7 @@
           <a:bodyPr wrap="square" lIns="0" tIns="0" rIns="0" bIns="0" rtlCol="0" anchor="t"/>
           <a:lstStyle/>
           <a:p>
-            <a:pPr indent="0" marL="0">
+            <a:pPr marL="0" indent="0">
               <a:buNone/>
             </a:pPr>
             <a:r>
@@ -6262,7 +5868,7 @@
           <a:bodyPr wrap="square" lIns="0" tIns="0" rIns="0" bIns="0" rtlCol="0" anchor="t"/>
           <a:lstStyle/>
           <a:p>
-            <a:pPr indent="0" marL="0">
+            <a:pPr marL="0" indent="0">
               <a:buNone/>
             </a:pPr>
             <a:r>
@@ -6301,7 +5907,7 @@
           <a:bodyPr wrap="square" lIns="0" tIns="0" rIns="0" bIns="0" rtlCol="0" anchor="t"/>
           <a:lstStyle/>
           <a:p>
-            <a:pPr algn="r" indent="0" marL="0">
+            <a:pPr marL="0" indent="0" algn="r">
               <a:buNone/>
             </a:pPr>
             <a:r>
@@ -6373,14 +5979,14 @@
       </p:sp>
       <p:pic>
         <p:nvPicPr>
-          <p:cNvPr id="31" name="Image 4" descr="preencoded.png">    </p:cNvPr>
+          <p:cNvPr id="31" name="Image 4" descr="preencoded.png"/>
           <p:cNvPicPr>
             <a:picLocks noChangeAspect="1"/>
           </p:cNvPicPr>
           <p:nvPr/>
         </p:nvPicPr>
         <p:blipFill>
-          <a:blip r:embed="rId5"/>
+          <a:blip r:embed="rId7"/>
           <a:stretch>
             <a:fillRect/>
           </a:stretch>
@@ -6416,7 +6022,7 @@
           <a:bodyPr wrap="square" lIns="0" tIns="0" rIns="0" bIns="0" rtlCol="0" anchor="t"/>
           <a:lstStyle/>
           <a:p>
-            <a:pPr indent="0" marL="0">
+            <a:pPr marL="0" indent="0">
               <a:buNone/>
             </a:pPr>
             <a:r>
@@ -6455,7 +6061,7 @@
           <a:bodyPr wrap="square" lIns="0" tIns="0" rIns="0" bIns="0" rtlCol="0" anchor="t"/>
           <a:lstStyle/>
           <a:p>
-            <a:pPr indent="0" marL="0">
+            <a:pPr marL="0" indent="0">
               <a:buNone/>
             </a:pPr>
             <a:r>
@@ -6494,7 +6100,7 @@
           <a:bodyPr wrap="square" lIns="0" tIns="0" rIns="0" bIns="0" rtlCol="0" anchor="t"/>
           <a:lstStyle/>
           <a:p>
-            <a:pPr algn="r" indent="0" marL="0">
+            <a:pPr marL="0" indent="0" algn="r">
               <a:buNone/>
             </a:pPr>
             <a:r>
@@ -6566,14 +6172,14 @@
       </p:sp>
       <p:pic>
         <p:nvPicPr>
-          <p:cNvPr id="37" name="Image 5" descr="preencoded.png">    </p:cNvPr>
+          <p:cNvPr id="37" name="Image 5" descr="preencoded.png"/>
           <p:cNvPicPr>
             <a:picLocks noChangeAspect="1"/>
           </p:cNvPicPr>
           <p:nvPr/>
         </p:nvPicPr>
         <p:blipFill>
-          <a:blip r:embed="rId6"/>
+          <a:blip r:embed="rId8"/>
           <a:stretch>
             <a:fillRect/>
           </a:stretch>
@@ -6609,7 +6215,7 @@
           <a:bodyPr wrap="square" lIns="0" tIns="0" rIns="0" bIns="0" rtlCol="0" anchor="t"/>
           <a:lstStyle/>
           <a:p>
-            <a:pPr indent="0" marL="0">
+            <a:pPr marL="0" indent="0">
               <a:buNone/>
             </a:pPr>
             <a:r>
@@ -6648,7 +6254,7 @@
           <a:bodyPr wrap="square" lIns="0" tIns="0" rIns="0" bIns="0" rtlCol="0" anchor="t"/>
           <a:lstStyle/>
           <a:p>
-            <a:pPr indent="0" marL="0">
+            <a:pPr marL="0" indent="0">
               <a:buNone/>
             </a:pPr>
             <a:r>
@@ -6687,7 +6293,7 @@
           <a:bodyPr wrap="square" lIns="0" tIns="0" rIns="0" bIns="0" rtlCol="0" anchor="t"/>
           <a:lstStyle/>
           <a:p>
-            <a:pPr algn="r" indent="0" marL="0">
+            <a:pPr marL="0" indent="0" algn="r">
               <a:buNone/>
             </a:pPr>
             <a:r>
@@ -6759,14 +6365,14 @@
       </p:sp>
       <p:pic>
         <p:nvPicPr>
-          <p:cNvPr id="43" name="Image 6" descr="preencoded.png">    </p:cNvPr>
+          <p:cNvPr id="43" name="Image 6" descr="preencoded.png"/>
           <p:cNvPicPr>
             <a:picLocks noChangeAspect="1"/>
           </p:cNvPicPr>
           <p:nvPr/>
         </p:nvPicPr>
         <p:blipFill>
-          <a:blip r:embed="rId7"/>
+          <a:blip r:embed="rId9"/>
           <a:stretch>
             <a:fillRect/>
           </a:stretch>
@@ -6802,7 +6408,7 @@
           <a:bodyPr wrap="square" lIns="0" tIns="0" rIns="0" bIns="0" rtlCol="0" anchor="t"/>
           <a:lstStyle/>
           <a:p>
-            <a:pPr indent="0" marL="0">
+            <a:pPr marL="0" indent="0">
               <a:buNone/>
             </a:pPr>
             <a:r>
@@ -6841,7 +6447,7 @@
           <a:bodyPr wrap="square" lIns="0" tIns="0" rIns="0" bIns="0" rtlCol="0" anchor="t"/>
           <a:lstStyle/>
           <a:p>
-            <a:pPr indent="0" marL="0">
+            <a:pPr marL="0" indent="0">
               <a:buNone/>
             </a:pPr>
             <a:r>
@@ -6880,7 +6486,7 @@
           <a:bodyPr wrap="square" lIns="0" tIns="0" rIns="0" bIns="0" rtlCol="0" anchor="t"/>
           <a:lstStyle/>
           <a:p>
-            <a:pPr algn="r" indent="0" marL="0">
+            <a:pPr marL="0" indent="0" algn="r">
               <a:buNone/>
             </a:pPr>
             <a:r>
@@ -6952,14 +6558,14 @@
       </p:sp>
       <p:pic>
         <p:nvPicPr>
-          <p:cNvPr id="49" name="Image 7" descr="preencoded.png">    </p:cNvPr>
+          <p:cNvPr id="49" name="Image 7" descr="preencoded.png"/>
           <p:cNvPicPr>
             <a:picLocks noChangeAspect="1"/>
           </p:cNvPicPr>
           <p:nvPr/>
         </p:nvPicPr>
         <p:blipFill>
-          <a:blip r:embed="rId8"/>
+          <a:blip r:embed="rId10"/>
           <a:stretch>
             <a:fillRect/>
           </a:stretch>
@@ -6995,7 +6601,7 @@
           <a:bodyPr wrap="square" lIns="0" tIns="0" rIns="0" bIns="0" rtlCol="0" anchor="t"/>
           <a:lstStyle/>
           <a:p>
-            <a:pPr indent="0" marL="0">
+            <a:pPr marL="0" indent="0">
               <a:buNone/>
             </a:pPr>
             <a:r>
@@ -7034,7 +6640,7 @@
           <a:bodyPr wrap="square" lIns="0" tIns="0" rIns="0" bIns="0" rtlCol="0" anchor="t"/>
           <a:lstStyle/>
           <a:p>
-            <a:pPr indent="0" marL="0">
+            <a:pPr marL="0" indent="0">
               <a:buNone/>
             </a:pPr>
             <a:r>
@@ -7073,7 +6679,7 @@
           <a:bodyPr wrap="square" lIns="0" tIns="0" rIns="0" bIns="0" rtlCol="0" anchor="t"/>
           <a:lstStyle/>
           <a:p>
-            <a:pPr algn="r" indent="0" marL="0">
+            <a:pPr marL="0" indent="0" algn="r">
               <a:buNone/>
             </a:pPr>
             <a:r>
@@ -7093,14 +6699,14 @@
       </p:sp>
       <p:pic>
         <p:nvPicPr>
-          <p:cNvPr id="53" name="Image 8" descr="preencoded.png">    </p:cNvPr>
+          <p:cNvPr id="53" name="Image 8" descr="preencoded.png"/>
           <p:cNvPicPr>
             <a:picLocks noChangeAspect="1"/>
           </p:cNvPicPr>
           <p:nvPr/>
         </p:nvPicPr>
         <p:blipFill>
-          <a:blip r:embed="rId9"/>
+          <a:blip r:embed="rId11"/>
           <a:stretch>
             <a:fillRect/>
           </a:stretch>
@@ -7136,7 +6742,7 @@
           <a:bodyPr wrap="square" lIns="0" tIns="0" rIns="0" bIns="0" rtlCol="0" anchor="t"/>
           <a:lstStyle/>
           <a:p>
-            <a:pPr algn="r" indent="0" marL="0">
+            <a:pPr marL="0" indent="0" algn="r">
               <a:buNone/>
             </a:pPr>
             <a:r>
@@ -7170,6 +6776,7 @@
         <a:solidFill>
           <a:srgbClr val="0F172A"/>
         </a:solidFill>
+        <a:effectLst/>
       </p:bgPr>
     </p:bg>
     <p:spTree>
@@ -7207,11 +6814,11 @@
           <a:bodyPr wrap="square" lIns="0" tIns="0" rIns="0" bIns="0" rtlCol="0" anchor="t"/>
           <a:lstStyle/>
           <a:p>
-            <a:pPr indent="0" marL="0">
-              <a:buNone/>
-            </a:pPr>
-            <a:r>
-              <a:rPr lang="en-US" sz="1300" b="1" spc="300" kern="0" dirty="0">
+            <a:pPr marL="0" indent="0">
+              <a:buNone/>
+            </a:pPr>
+            <a:r>
+              <a:rPr lang="en-US" sz="1300" b="1" kern="0" spc="300" dirty="0">
                 <a:solidFill>
                   <a:srgbClr val="10B981"/>
                 </a:solidFill>
@@ -7246,7 +6853,7 @@
           <a:bodyPr wrap="square" lIns="0" tIns="0" rIns="0" bIns="0" rtlCol="0" anchor="t"/>
           <a:lstStyle/>
           <a:p>
-            <a:pPr indent="0" marL="0">
+            <a:pPr marL="0" indent="0">
               <a:buNone/>
             </a:pPr>
             <a:r>
@@ -7293,14 +6900,14 @@
       </p:sp>
       <p:pic>
         <p:nvPicPr>
-          <p:cNvPr id="5" name="Image 0" descr="preencoded.png">    </p:cNvPr>
+          <p:cNvPr id="5" name="Image 0" descr="preencoded.png"/>
           <p:cNvPicPr>
             <a:picLocks noChangeAspect="1"/>
           </p:cNvPicPr>
           <p:nvPr/>
         </p:nvPicPr>
         <p:blipFill>
-          <a:blip r:embed="rId1"/>
+          <a:blip r:embed="rId3"/>
           <a:stretch>
             <a:fillRect/>
           </a:stretch>
@@ -7361,7 +6968,7 @@
           <a:bodyPr wrap="square" lIns="0" tIns="0" rIns="0" bIns="0" rtlCol="0" anchor="ctr"/>
           <a:lstStyle/>
           <a:p>
-            <a:pPr algn="ctr" indent="0" marL="0">
+            <a:pPr marL="0" indent="0" algn="ctr">
               <a:buNone/>
             </a:pPr>
             <a:r>
@@ -7400,7 +7007,7 @@
           <a:bodyPr wrap="square" lIns="0" tIns="0" rIns="0" bIns="0" rtlCol="0" anchor="t"/>
           <a:lstStyle/>
           <a:p>
-            <a:pPr algn="ctr" indent="0" marL="0">
+            <a:pPr marL="0" indent="0" algn="ctr">
               <a:buNone/>
             </a:pPr>
             <a:r>
@@ -7447,14 +7054,14 @@
       </p:sp>
       <p:pic>
         <p:nvPicPr>
-          <p:cNvPr id="10" name="Image 1" descr="preencoded.png">    </p:cNvPr>
+          <p:cNvPr id="10" name="Image 1" descr="preencoded.png"/>
           <p:cNvPicPr>
             <a:picLocks noChangeAspect="1"/>
           </p:cNvPicPr>
           <p:nvPr/>
         </p:nvPicPr>
         <p:blipFill>
-          <a:blip r:embed="rId2"/>
+          <a:blip r:embed="rId4"/>
           <a:stretch>
             <a:fillRect/>
           </a:stretch>
@@ -7515,7 +7122,7 @@
           <a:bodyPr wrap="square" lIns="0" tIns="0" rIns="0" bIns="0" rtlCol="0" anchor="ctr"/>
           <a:lstStyle/>
           <a:p>
-            <a:pPr algn="ctr" indent="0" marL="0">
+            <a:pPr marL="0" indent="0" algn="ctr">
               <a:buNone/>
             </a:pPr>
             <a:r>
@@ -7554,7 +7161,7 @@
           <a:bodyPr wrap="square" lIns="0" tIns="0" rIns="0" bIns="0" rtlCol="0" anchor="t"/>
           <a:lstStyle/>
           <a:p>
-            <a:pPr algn="ctr" indent="0" marL="0">
+            <a:pPr marL="0" indent="0" algn="ctr">
               <a:buNone/>
             </a:pPr>
             <a:r>
@@ -7601,14 +7208,14 @@
       </p:sp>
       <p:pic>
         <p:nvPicPr>
-          <p:cNvPr id="15" name="Image 2" descr="preencoded.png">    </p:cNvPr>
+          <p:cNvPr id="15" name="Image 2" descr="preencoded.png"/>
           <p:cNvPicPr>
             <a:picLocks noChangeAspect="1"/>
           </p:cNvPicPr>
           <p:nvPr/>
         </p:nvPicPr>
         <p:blipFill>
-          <a:blip r:embed="rId3"/>
+          <a:blip r:embed="rId5"/>
           <a:stretch>
             <a:fillRect/>
           </a:stretch>
@@ -7669,7 +7276,7 @@
           <a:bodyPr wrap="square" lIns="0" tIns="0" rIns="0" bIns="0" rtlCol="0" anchor="ctr"/>
           <a:lstStyle/>
           <a:p>
-            <a:pPr algn="ctr" indent="0" marL="0">
+            <a:pPr marL="0" indent="0" algn="ctr">
               <a:buNone/>
             </a:pPr>
             <a:r>
@@ -7708,7 +7315,7 @@
           <a:bodyPr wrap="square" lIns="0" tIns="0" rIns="0" bIns="0" rtlCol="0" anchor="t"/>
           <a:lstStyle/>
           <a:p>
-            <a:pPr algn="ctr" indent="0" marL="0">
+            <a:pPr marL="0" indent="0" algn="ctr">
               <a:buNone/>
             </a:pPr>
             <a:r>
@@ -7755,14 +7362,14 @@
       </p:sp>
       <p:pic>
         <p:nvPicPr>
-          <p:cNvPr id="20" name="Image 3" descr="preencoded.png">    </p:cNvPr>
+          <p:cNvPr id="20" name="Image 3" descr="preencoded.png"/>
           <p:cNvPicPr>
             <a:picLocks noChangeAspect="1"/>
           </p:cNvPicPr>
           <p:nvPr/>
         </p:nvPicPr>
         <p:blipFill>
-          <a:blip r:embed="rId4"/>
+          <a:blip r:embed="rId6"/>
           <a:stretch>
             <a:fillRect/>
           </a:stretch>
@@ -7823,7 +7430,7 @@
           <a:bodyPr wrap="square" lIns="0" tIns="0" rIns="0" bIns="0" rtlCol="0" anchor="ctr"/>
           <a:lstStyle/>
           <a:p>
-            <a:pPr algn="ctr" indent="0" marL="0">
+            <a:pPr marL="0" indent="0" algn="ctr">
               <a:buNone/>
             </a:pPr>
             <a:r>
@@ -7862,7 +7469,7 @@
           <a:bodyPr wrap="square" lIns="0" tIns="0" rIns="0" bIns="0" rtlCol="0" anchor="t"/>
           <a:lstStyle/>
           <a:p>
-            <a:pPr algn="ctr" indent="0" marL="0">
+            <a:pPr marL="0" indent="0" algn="ctr">
               <a:buNone/>
             </a:pPr>
             <a:r>
@@ -7909,14 +7516,14 @@
       </p:sp>
       <p:pic>
         <p:nvPicPr>
-          <p:cNvPr id="25" name="Image 4" descr="preencoded.png">    </p:cNvPr>
+          <p:cNvPr id="25" name="Image 4" descr="preencoded.png"/>
           <p:cNvPicPr>
             <a:picLocks noChangeAspect="1"/>
           </p:cNvPicPr>
           <p:nvPr/>
         </p:nvPicPr>
         <p:blipFill>
-          <a:blip r:embed="rId5"/>
+          <a:blip r:embed="rId7"/>
           <a:stretch>
             <a:fillRect/>
           </a:stretch>
@@ -7977,7 +7584,7 @@
           <a:bodyPr wrap="square" lIns="0" tIns="0" rIns="0" bIns="0" rtlCol="0" anchor="ctr"/>
           <a:lstStyle/>
           <a:p>
-            <a:pPr algn="ctr" indent="0" marL="0">
+            <a:pPr marL="0" indent="0" algn="ctr">
               <a:buNone/>
             </a:pPr>
             <a:r>
@@ -8016,7 +7623,7 @@
           <a:bodyPr wrap="square" lIns="0" tIns="0" rIns="0" bIns="0" rtlCol="0" anchor="t"/>
           <a:lstStyle/>
           <a:p>
-            <a:pPr algn="ctr" indent="0" marL="0">
+            <a:pPr marL="0" indent="0" algn="ctr">
               <a:buNone/>
             </a:pPr>
             <a:r>
@@ -8036,14 +7643,14 @@
       </p:sp>
       <p:pic>
         <p:nvPicPr>
-          <p:cNvPr id="29" name="Image 5" descr="preencoded.png">    </p:cNvPr>
+          <p:cNvPr id="29" name="Image 5" descr="preencoded.png"/>
           <p:cNvPicPr>
             <a:picLocks noChangeAspect="1"/>
           </p:cNvPicPr>
           <p:nvPr/>
         </p:nvPicPr>
         <p:blipFill>
-          <a:blip r:embed="rId6"/>
+          <a:blip r:embed="rId8"/>
           <a:stretch>
             <a:fillRect/>
           </a:stretch>
@@ -8079,7 +7686,7 @@
           <a:bodyPr wrap="square" lIns="0" tIns="0" rIns="0" bIns="0" rtlCol="0" anchor="t"/>
           <a:lstStyle/>
           <a:p>
-            <a:pPr algn="r" indent="0" marL="0">
+            <a:pPr marL="0" indent="0" algn="r">
               <a:buNone/>
             </a:pPr>
             <a:r>
@@ -8113,6 +7720,7 @@
         <a:solidFill>
           <a:srgbClr val="0F172A"/>
         </a:solidFill>
+        <a:effectLst/>
       </p:bgPr>
     </p:bg>
     <p:spTree>
@@ -8150,11 +7758,11 @@
           <a:bodyPr wrap="square" lIns="0" tIns="0" rIns="0" bIns="0" rtlCol="0" anchor="t"/>
           <a:lstStyle/>
           <a:p>
-            <a:pPr indent="0" marL="0">
-              <a:buNone/>
-            </a:pPr>
-            <a:r>
-              <a:rPr lang="en-US" sz="1300" b="1" spc="300" kern="0" dirty="0">
+            <a:pPr marL="0" indent="0">
+              <a:buNone/>
+            </a:pPr>
+            <a:r>
+              <a:rPr lang="en-US" sz="1300" b="1" kern="0" spc="300" dirty="0">
                 <a:solidFill>
                   <a:srgbClr val="10B981"/>
                 </a:solidFill>
@@ -8189,7 +7797,7 @@
           <a:bodyPr wrap="square" lIns="0" tIns="0" rIns="0" bIns="0" rtlCol="0" anchor="t"/>
           <a:lstStyle/>
           <a:p>
-            <a:pPr indent="0" marL="0">
+            <a:pPr marL="0" indent="0">
               <a:buNone/>
             </a:pPr>
             <a:r>
@@ -8255,7 +7863,7 @@
           <a:bodyPr wrap="square" lIns="0" tIns="0" rIns="0" bIns="0" rtlCol="0" anchor="t"/>
           <a:lstStyle/>
           <a:p>
-            <a:pPr indent="0" marL="0">
+            <a:pPr marL="0" indent="0">
               <a:buNone/>
             </a:pPr>
             <a:r>
@@ -8300,14 +7908,14 @@
       </p:sp>
       <p:pic>
         <p:nvPicPr>
-          <p:cNvPr id="7" name="Image 0" descr="preencoded.png">    </p:cNvPr>
+          <p:cNvPr id="7" name="Image 0" descr="preencoded.png"/>
           <p:cNvPicPr>
             <a:picLocks noChangeAspect="1"/>
           </p:cNvPicPr>
           <p:nvPr/>
         </p:nvPicPr>
         <p:blipFill>
-          <a:blip r:embed="rId1"/>
+          <a:blip r:embed="rId3"/>
           <a:stretch>
             <a:fillRect/>
           </a:stretch>
@@ -8343,7 +7951,7 @@
           <a:bodyPr wrap="square" lIns="0" tIns="0" rIns="0" bIns="0" rtlCol="0" anchor="t"/>
           <a:lstStyle/>
           <a:p>
-            <a:pPr indent="0" marL="0">
+            <a:pPr marL="0" indent="0">
               <a:buNone/>
             </a:pPr>
             <a:r>
@@ -8388,14 +7996,14 @@
       </p:sp>
       <p:pic>
         <p:nvPicPr>
-          <p:cNvPr id="10" name="Image 1" descr="preencoded.png">    </p:cNvPr>
+          <p:cNvPr id="10" name="Image 1" descr="preencoded.png"/>
           <p:cNvPicPr>
             <a:picLocks noChangeAspect="1"/>
           </p:cNvPicPr>
           <p:nvPr/>
         </p:nvPicPr>
         <p:blipFill>
-          <a:blip r:embed="rId2"/>
+          <a:blip r:embed="rId3"/>
           <a:stretch>
             <a:fillRect/>
           </a:stretch>
@@ -8431,7 +8039,7 @@
           <a:bodyPr wrap="square" lIns="0" tIns="0" rIns="0" bIns="0" rtlCol="0" anchor="t"/>
           <a:lstStyle/>
           <a:p>
-            <a:pPr indent="0" marL="0">
+            <a:pPr marL="0" indent="0">
               <a:buNone/>
             </a:pPr>
             <a:r>
@@ -8476,7 +8084,7 @@
       </p:sp>
       <p:pic>
         <p:nvPicPr>
-          <p:cNvPr id="13" name="Image 2" descr="preencoded.png">    </p:cNvPr>
+          <p:cNvPr id="13" name="Image 2" descr="preencoded.png"/>
           <p:cNvPicPr>
             <a:picLocks noChangeAspect="1"/>
           </p:cNvPicPr>
@@ -8519,7 +8127,7 @@
           <a:bodyPr wrap="square" lIns="0" tIns="0" rIns="0" bIns="0" rtlCol="0" anchor="t"/>
           <a:lstStyle/>
           <a:p>
-            <a:pPr indent="0" marL="0">
+            <a:pPr marL="0" indent="0">
               <a:buNone/>
             </a:pPr>
             <a:r>
@@ -8564,14 +8172,14 @@
       </p:sp>
       <p:pic>
         <p:nvPicPr>
-          <p:cNvPr id="16" name="Image 3" descr="preencoded.png">    </p:cNvPr>
+          <p:cNvPr id="16" name="Image 3" descr="preencoded.png"/>
           <p:cNvPicPr>
             <a:picLocks noChangeAspect="1"/>
           </p:cNvPicPr>
           <p:nvPr/>
         </p:nvPicPr>
         <p:blipFill>
-          <a:blip r:embed="rId4"/>
+          <a:blip r:embed="rId3"/>
           <a:stretch>
             <a:fillRect/>
           </a:stretch>
@@ -8607,7 +8215,7 @@
           <a:bodyPr wrap="square" lIns="0" tIns="0" rIns="0" bIns="0" rtlCol="0" anchor="t"/>
           <a:lstStyle/>
           <a:p>
-            <a:pPr indent="0" marL="0">
+            <a:pPr marL="0" indent="0">
               <a:buNone/>
             </a:pPr>
             <a:r>
@@ -8673,7 +8281,7 @@
           <a:bodyPr wrap="square" lIns="0" tIns="0" rIns="0" bIns="0" rtlCol="0" anchor="t"/>
           <a:lstStyle/>
           <a:p>
-            <a:pPr indent="0" marL="0">
+            <a:pPr marL="0" indent="0">
               <a:buNone/>
             </a:pPr>
             <a:r>
@@ -8718,14 +8326,14 @@
       </p:sp>
       <p:pic>
         <p:nvPicPr>
-          <p:cNvPr id="21" name="Image 4" descr="preencoded.png">    </p:cNvPr>
+          <p:cNvPr id="21" name="Image 4" descr="preencoded.png"/>
           <p:cNvPicPr>
             <a:picLocks noChangeAspect="1"/>
           </p:cNvPicPr>
           <p:nvPr/>
         </p:nvPicPr>
         <p:blipFill>
-          <a:blip r:embed="rId5"/>
+          <a:blip r:embed="rId4"/>
           <a:stretch>
             <a:fillRect/>
           </a:stretch>
@@ -8761,7 +8369,7 @@
           <a:bodyPr wrap="square" lIns="0" tIns="0" rIns="0" bIns="0" rtlCol="0" anchor="t"/>
           <a:lstStyle/>
           <a:p>
-            <a:pPr indent="0" marL="0">
+            <a:pPr marL="0" indent="0">
               <a:buNone/>
             </a:pPr>
             <a:r>
@@ -8806,14 +8414,14 @@
       </p:sp>
       <p:pic>
         <p:nvPicPr>
-          <p:cNvPr id="24" name="Image 5" descr="preencoded.png">    </p:cNvPr>
+          <p:cNvPr id="24" name="Image 5" descr="preencoded.png"/>
           <p:cNvPicPr>
             <a:picLocks noChangeAspect="1"/>
           </p:cNvPicPr>
           <p:nvPr/>
         </p:nvPicPr>
         <p:blipFill>
-          <a:blip r:embed="rId6"/>
+          <a:blip r:embed="rId4"/>
           <a:stretch>
             <a:fillRect/>
           </a:stretch>
@@ -8849,7 +8457,7 @@
           <a:bodyPr wrap="square" lIns="0" tIns="0" rIns="0" bIns="0" rtlCol="0" anchor="t"/>
           <a:lstStyle/>
           <a:p>
-            <a:pPr indent="0" marL="0">
+            <a:pPr marL="0" indent="0">
               <a:buNone/>
             </a:pPr>
             <a:r>
@@ -8894,14 +8502,14 @@
       </p:sp>
       <p:pic>
         <p:nvPicPr>
-          <p:cNvPr id="27" name="Image 6" descr="preencoded.png">    </p:cNvPr>
+          <p:cNvPr id="27" name="Image 6" descr="preencoded.png"/>
           <p:cNvPicPr>
             <a:picLocks noChangeAspect="1"/>
           </p:cNvPicPr>
           <p:nvPr/>
         </p:nvPicPr>
         <p:blipFill>
-          <a:blip r:embed="rId7"/>
+          <a:blip r:embed="rId4"/>
           <a:stretch>
             <a:fillRect/>
           </a:stretch>
@@ -8937,7 +8545,7 @@
           <a:bodyPr wrap="square" lIns="0" tIns="0" rIns="0" bIns="0" rtlCol="0" anchor="t"/>
           <a:lstStyle/>
           <a:p>
-            <a:pPr indent="0" marL="0">
+            <a:pPr marL="0" indent="0">
               <a:buNone/>
             </a:pPr>
             <a:r>
@@ -8982,14 +8590,14 @@
       </p:sp>
       <p:pic>
         <p:nvPicPr>
-          <p:cNvPr id="30" name="Image 7" descr="preencoded.png">    </p:cNvPr>
+          <p:cNvPr id="30" name="Image 7" descr="preencoded.png"/>
           <p:cNvPicPr>
             <a:picLocks noChangeAspect="1"/>
           </p:cNvPicPr>
           <p:nvPr/>
         </p:nvPicPr>
         <p:blipFill>
-          <a:blip r:embed="rId8"/>
+          <a:blip r:embed="rId4"/>
           <a:stretch>
             <a:fillRect/>
           </a:stretch>
@@ -9025,7 +8633,7 @@
           <a:bodyPr wrap="square" lIns="0" tIns="0" rIns="0" bIns="0" rtlCol="0" anchor="t"/>
           <a:lstStyle/>
           <a:p>
-            <a:pPr indent="0" marL="0">
+            <a:pPr marL="0" indent="0">
               <a:buNone/>
             </a:pPr>
             <a:r>
@@ -9045,14 +8653,14 @@
       </p:sp>
       <p:pic>
         <p:nvPicPr>
-          <p:cNvPr id="32" name="Image 8" descr="preencoded.png">    </p:cNvPr>
+          <p:cNvPr id="32" name="Image 8" descr="preencoded.png"/>
           <p:cNvPicPr>
             <a:picLocks noChangeAspect="1"/>
           </p:cNvPicPr>
           <p:nvPr/>
         </p:nvPicPr>
         <p:blipFill>
-          <a:blip r:embed="rId9"/>
+          <a:blip r:embed="rId5"/>
           <a:stretch>
             <a:fillRect/>
           </a:stretch>
@@ -9088,7 +8696,7 @@
           <a:bodyPr wrap="square" lIns="0" tIns="0" rIns="0" bIns="0" rtlCol="0" anchor="t"/>
           <a:lstStyle/>
           <a:p>
-            <a:pPr algn="r" indent="0" marL="0">
+            <a:pPr marL="0" indent="0" algn="r">
               <a:buNone/>
             </a:pPr>
             <a:r>
@@ -9122,6 +8730,7 @@
         <a:solidFill>
           <a:srgbClr val="0F172A"/>
         </a:solidFill>
+        <a:effectLst/>
       </p:bgPr>
     </p:bg>
     <p:spTree>
@@ -9159,11 +8768,11 @@
           <a:bodyPr wrap="square" lIns="0" tIns="0" rIns="0" bIns="0" rtlCol="0" anchor="t"/>
           <a:lstStyle/>
           <a:p>
-            <a:pPr indent="0" marL="0">
-              <a:buNone/>
-            </a:pPr>
-            <a:r>
-              <a:rPr lang="en-US" sz="1300" b="1" spc="300" kern="0" dirty="0">
+            <a:pPr marL="0" indent="0">
+              <a:buNone/>
+            </a:pPr>
+            <a:r>
+              <a:rPr lang="en-US" sz="1300" b="1" kern="0" spc="300" dirty="0">
                 <a:solidFill>
                   <a:srgbClr val="10B981"/>
                 </a:solidFill>
@@ -9198,7 +8807,7 @@
           <a:bodyPr wrap="square" lIns="0" tIns="0" rIns="0" bIns="0" rtlCol="0" anchor="t"/>
           <a:lstStyle/>
           <a:p>
-            <a:pPr indent="0" marL="0">
+            <a:pPr marL="0" indent="0">
               <a:buNone/>
             </a:pPr>
             <a:r>
@@ -9264,7 +8873,7 @@
           <a:bodyPr wrap="square" lIns="0" tIns="0" rIns="0" bIns="0" rtlCol="0" anchor="t"/>
           <a:lstStyle/>
           <a:p>
-            <a:pPr indent="0" marL="0">
+            <a:pPr marL="0" indent="0">
               <a:buNone/>
             </a:pPr>
             <a:r>
@@ -9303,7 +8912,7 @@
           <a:bodyPr wrap="square" lIns="0" tIns="0" rIns="0" bIns="0" rtlCol="0" anchor="t"/>
           <a:lstStyle/>
           <a:p>
-            <a:pPr indent="0" marL="0">
+            <a:pPr marL="0" indent="0">
               <a:buNone/>
             </a:pPr>
             <a:r>
@@ -9375,14 +8984,14 @@
       </p:sp>
       <p:pic>
         <p:nvPicPr>
-          <p:cNvPr id="9" name="Image 0" descr="preencoded.png">    </p:cNvPr>
+          <p:cNvPr id="9" name="Image 0" descr="preencoded.png"/>
           <p:cNvPicPr>
             <a:picLocks noChangeAspect="1"/>
           </p:cNvPicPr>
           <p:nvPr/>
         </p:nvPicPr>
         <p:blipFill>
-          <a:blip r:embed="rId1"/>
+          <a:blip r:embed="rId3"/>
           <a:stretch>
             <a:fillRect/>
           </a:stretch>
@@ -9418,7 +9027,7 @@
           <a:bodyPr wrap="square" lIns="0" tIns="0" rIns="0" bIns="0" rtlCol="0" anchor="ctr"/>
           <a:lstStyle/>
           <a:p>
-            <a:pPr indent="0" marL="0">
+            <a:pPr marL="0" indent="0">
               <a:buNone/>
             </a:pPr>
             <a:r>
@@ -9457,7 +9066,7 @@
           <a:bodyPr wrap="square" lIns="0" tIns="0" rIns="0" bIns="0" rtlCol="0" anchor="t"/>
           <a:lstStyle/>
           <a:p>
-            <a:pPr indent="0" marL="0">
+            <a:pPr marL="0" indent="0">
               <a:buNone/>
             </a:pPr>
             <a:r>
@@ -9553,14 +9162,14 @@
       </p:sp>
       <p:pic>
         <p:nvPicPr>
-          <p:cNvPr id="15" name="Image 1" descr="preencoded.png">    </p:cNvPr>
+          <p:cNvPr id="15" name="Image 1" descr="preencoded.png"/>
           <p:cNvPicPr>
             <a:picLocks noChangeAspect="1"/>
           </p:cNvPicPr>
           <p:nvPr/>
         </p:nvPicPr>
         <p:blipFill>
-          <a:blip r:embed="rId2"/>
+          <a:blip r:embed="rId4"/>
           <a:stretch>
             <a:fillRect/>
           </a:stretch>
@@ -9596,7 +9205,7 @@
           <a:bodyPr wrap="square" lIns="0" tIns="0" rIns="0" bIns="0" rtlCol="0" anchor="ctr"/>
           <a:lstStyle/>
           <a:p>
-            <a:pPr indent="0" marL="0">
+            <a:pPr marL="0" indent="0">
               <a:buNone/>
             </a:pPr>
             <a:r>
@@ -9635,7 +9244,7 @@
           <a:bodyPr wrap="square" lIns="0" tIns="0" rIns="0" bIns="0" rtlCol="0" anchor="t"/>
           <a:lstStyle/>
           <a:p>
-            <a:pPr indent="0" marL="0">
+            <a:pPr marL="0" indent="0">
               <a:buNone/>
             </a:pPr>
             <a:r>
@@ -9731,14 +9340,14 @@
       </p:sp>
       <p:pic>
         <p:nvPicPr>
-          <p:cNvPr id="21" name="Image 2" descr="preencoded.png">    </p:cNvPr>
+          <p:cNvPr id="21" name="Image 2" descr="preencoded.png"/>
           <p:cNvPicPr>
             <a:picLocks noChangeAspect="1"/>
           </p:cNvPicPr>
           <p:nvPr/>
         </p:nvPicPr>
         <p:blipFill>
-          <a:blip r:embed="rId3"/>
+          <a:blip r:embed="rId5"/>
           <a:stretch>
             <a:fillRect/>
           </a:stretch>
@@ -9774,7 +9383,7 @@
           <a:bodyPr wrap="square" lIns="0" tIns="0" rIns="0" bIns="0" rtlCol="0" anchor="ctr"/>
           <a:lstStyle/>
           <a:p>
-            <a:pPr indent="0" marL="0">
+            <a:pPr marL="0" indent="0">
               <a:buNone/>
             </a:pPr>
             <a:r>
@@ -9813,7 +9422,7 @@
           <a:bodyPr wrap="square" lIns="0" tIns="0" rIns="0" bIns="0" rtlCol="0" anchor="t"/>
           <a:lstStyle/>
           <a:p>
-            <a:pPr indent="0" marL="0">
+            <a:pPr marL="0" indent="0">
               <a:buNone/>
             </a:pPr>
             <a:r>
@@ -9909,14 +9518,14 @@
       </p:sp>
       <p:pic>
         <p:nvPicPr>
-          <p:cNvPr id="27" name="Image 3" descr="preencoded.png">    </p:cNvPr>
+          <p:cNvPr id="27" name="Image 3" descr="preencoded.png"/>
           <p:cNvPicPr>
             <a:picLocks noChangeAspect="1"/>
           </p:cNvPicPr>
           <p:nvPr/>
         </p:nvPicPr>
         <p:blipFill>
-          <a:blip r:embed="rId4"/>
+          <a:blip r:embed="rId6"/>
           <a:stretch>
             <a:fillRect/>
           </a:stretch>
@@ -9952,7 +9561,7 @@
           <a:bodyPr wrap="square" lIns="0" tIns="0" rIns="0" bIns="0" rtlCol="0" anchor="ctr"/>
           <a:lstStyle/>
           <a:p>
-            <a:pPr indent="0" marL="0">
+            <a:pPr marL="0" indent="0">
               <a:buNone/>
             </a:pPr>
             <a:r>
@@ -9991,7 +9600,7 @@
           <a:bodyPr wrap="square" lIns="0" tIns="0" rIns="0" bIns="0" rtlCol="0" anchor="t"/>
           <a:lstStyle/>
           <a:p>
-            <a:pPr indent="0" marL="0">
+            <a:pPr marL="0" indent="0">
               <a:buNone/>
             </a:pPr>
             <a:r>
@@ -10057,7 +9666,7 @@
           <a:bodyPr wrap="square" lIns="0" tIns="0" rIns="0" bIns="0" rtlCol="0" anchor="t"/>
           <a:lstStyle/>
           <a:p>
-            <a:pPr indent="0" marL="0">
+            <a:pPr marL="0" indent="0">
               <a:buNone/>
             </a:pPr>
             <a:r>
@@ -10096,7 +9705,7 @@
           <a:bodyPr wrap="square" lIns="0" tIns="0" rIns="0" bIns="0" rtlCol="0" anchor="t"/>
           <a:lstStyle/>
           <a:p>
-            <a:pPr indent="0" marL="0">
+            <a:pPr marL="0" indent="0">
               <a:buNone/>
             </a:pPr>
             <a:r>
@@ -10168,14 +9777,14 @@
       </p:sp>
       <p:pic>
         <p:nvPicPr>
-          <p:cNvPr id="35" name="Image 4" descr="preencoded.png">    </p:cNvPr>
+          <p:cNvPr id="35" name="Image 4" descr="preencoded.png"/>
           <p:cNvPicPr>
             <a:picLocks noChangeAspect="1"/>
           </p:cNvPicPr>
           <p:nvPr/>
         </p:nvPicPr>
         <p:blipFill>
-          <a:blip r:embed="rId5"/>
+          <a:blip r:embed="rId7"/>
           <a:stretch>
             <a:fillRect/>
           </a:stretch>
@@ -10211,7 +9820,7 @@
           <a:bodyPr wrap="square" lIns="0" tIns="0" rIns="0" bIns="0" rtlCol="0" anchor="ctr"/>
           <a:lstStyle/>
           <a:p>
-            <a:pPr indent="0" marL="0">
+            <a:pPr marL="0" indent="0">
               <a:buNone/>
             </a:pPr>
             <a:r>
@@ -10250,7 +9859,7 @@
           <a:bodyPr wrap="square" lIns="0" tIns="0" rIns="0" bIns="0" rtlCol="0" anchor="t"/>
           <a:lstStyle/>
           <a:p>
-            <a:pPr indent="0" marL="0">
+            <a:pPr marL="0" indent="0">
               <a:buNone/>
             </a:pPr>
             <a:r>
@@ -10346,14 +9955,14 @@
       </p:sp>
       <p:pic>
         <p:nvPicPr>
-          <p:cNvPr id="41" name="Image 5" descr="preencoded.png">    </p:cNvPr>
+          <p:cNvPr id="41" name="Image 5" descr="preencoded.png"/>
           <p:cNvPicPr>
             <a:picLocks noChangeAspect="1"/>
           </p:cNvPicPr>
           <p:nvPr/>
         </p:nvPicPr>
         <p:blipFill>
-          <a:blip r:embed="rId6"/>
+          <a:blip r:embed="rId8"/>
           <a:stretch>
             <a:fillRect/>
           </a:stretch>
@@ -10389,7 +9998,7 @@
           <a:bodyPr wrap="square" lIns="0" tIns="0" rIns="0" bIns="0" rtlCol="0" anchor="ctr"/>
           <a:lstStyle/>
           <a:p>
-            <a:pPr indent="0" marL="0">
+            <a:pPr marL="0" indent="0">
               <a:buNone/>
             </a:pPr>
             <a:r>
@@ -10428,7 +10037,7 @@
           <a:bodyPr wrap="square" lIns="0" tIns="0" rIns="0" bIns="0" rtlCol="0" anchor="t"/>
           <a:lstStyle/>
           <a:p>
-            <a:pPr indent="0" marL="0">
+            <a:pPr marL="0" indent="0">
               <a:buNone/>
             </a:pPr>
             <a:r>
@@ -10524,14 +10133,14 @@
       </p:sp>
       <p:pic>
         <p:nvPicPr>
-          <p:cNvPr id="47" name="Image 6" descr="preencoded.png">    </p:cNvPr>
+          <p:cNvPr id="47" name="Image 6" descr="preencoded.png"/>
           <p:cNvPicPr>
             <a:picLocks noChangeAspect="1"/>
           </p:cNvPicPr>
           <p:nvPr/>
         </p:nvPicPr>
         <p:blipFill>
-          <a:blip r:embed="rId7"/>
+          <a:blip r:embed="rId9"/>
           <a:stretch>
             <a:fillRect/>
           </a:stretch>
@@ -10567,7 +10176,7 @@
           <a:bodyPr wrap="square" lIns="0" tIns="0" rIns="0" bIns="0" rtlCol="0" anchor="ctr"/>
           <a:lstStyle/>
           <a:p>
-            <a:pPr indent="0" marL="0">
+            <a:pPr marL="0" indent="0">
               <a:buNone/>
             </a:pPr>
             <a:r>
@@ -10606,7 +10215,7 @@
           <a:bodyPr wrap="square" lIns="0" tIns="0" rIns="0" bIns="0" rtlCol="0" anchor="t"/>
           <a:lstStyle/>
           <a:p>
-            <a:pPr indent="0" marL="0">
+            <a:pPr marL="0" indent="0">
               <a:buNone/>
             </a:pPr>
             <a:r>
@@ -10702,14 +10311,14 @@
       </p:sp>
       <p:pic>
         <p:nvPicPr>
-          <p:cNvPr id="53" name="Image 7" descr="preencoded.png">    </p:cNvPr>
+          <p:cNvPr id="53" name="Image 7" descr="preencoded.png"/>
           <p:cNvPicPr>
             <a:picLocks noChangeAspect="1"/>
           </p:cNvPicPr>
           <p:nvPr/>
         </p:nvPicPr>
         <p:blipFill>
-          <a:blip r:embed="rId8"/>
+          <a:blip r:embed="rId10"/>
           <a:stretch>
             <a:fillRect/>
           </a:stretch>
@@ -10745,7 +10354,7 @@
           <a:bodyPr wrap="square" lIns="0" tIns="0" rIns="0" bIns="0" rtlCol="0" anchor="ctr"/>
           <a:lstStyle/>
           <a:p>
-            <a:pPr indent="0" marL="0">
+            <a:pPr marL="0" indent="0">
               <a:buNone/>
             </a:pPr>
             <a:r>
@@ -10784,7 +10393,7 @@
           <a:bodyPr wrap="square" lIns="0" tIns="0" rIns="0" bIns="0" rtlCol="0" anchor="t"/>
           <a:lstStyle/>
           <a:p>
-            <a:pPr indent="0" marL="0">
+            <a:pPr marL="0" indent="0">
               <a:buNone/>
             </a:pPr>
             <a:r>
@@ -10823,7 +10432,7 @@
           <a:bodyPr wrap="square" lIns="0" tIns="0" rIns="0" bIns="0" rtlCol="0" anchor="t"/>
           <a:lstStyle/>
           <a:p>
-            <a:pPr indent="0" marL="0">
+            <a:pPr marL="0" indent="0">
               <a:buNone/>
             </a:pPr>
             <a:r>
@@ -10843,14 +10452,14 @@
       </p:sp>
       <p:pic>
         <p:nvPicPr>
-          <p:cNvPr id="57" name="Image 8" descr="preencoded.png">    </p:cNvPr>
+          <p:cNvPr id="57" name="Image 8" descr="preencoded.png"/>
           <p:cNvPicPr>
             <a:picLocks noChangeAspect="1"/>
           </p:cNvPicPr>
           <p:nvPr/>
         </p:nvPicPr>
         <p:blipFill>
-          <a:blip r:embed="rId9"/>
+          <a:blip r:embed="rId11"/>
           <a:stretch>
             <a:fillRect/>
           </a:stretch>
@@ -10886,7 +10495,7 @@
           <a:bodyPr wrap="square" lIns="0" tIns="0" rIns="0" bIns="0" rtlCol="0" anchor="t"/>
           <a:lstStyle/>
           <a:p>
-            <a:pPr algn="r" indent="0" marL="0">
+            <a:pPr marL="0" indent="0" algn="r">
               <a:buNone/>
             </a:pPr>
             <a:r>
@@ -10920,6 +10529,7 @@
         <a:solidFill>
           <a:srgbClr val="0F172A"/>
         </a:solidFill>
+        <a:effectLst/>
       </p:bgPr>
     </p:bg>
     <p:spTree>
@@ -10957,11 +10567,11 @@
           <a:bodyPr wrap="square" lIns="0" tIns="0" rIns="0" bIns="0" rtlCol="0" anchor="t"/>
           <a:lstStyle/>
           <a:p>
-            <a:pPr indent="0" marL="0">
-              <a:buNone/>
-            </a:pPr>
-            <a:r>
-              <a:rPr lang="en-US" sz="1300" b="1" spc="300" kern="0" dirty="0">
+            <a:pPr marL="0" indent="0">
+              <a:buNone/>
+            </a:pPr>
+            <a:r>
+              <a:rPr lang="en-US" sz="1300" b="1" kern="0" spc="300" dirty="0">
                 <a:solidFill>
                   <a:srgbClr val="10B981"/>
                 </a:solidFill>
@@ -10996,7 +10606,7 @@
           <a:bodyPr wrap="square" lIns="0" tIns="0" rIns="0" bIns="0" rtlCol="0" anchor="t"/>
           <a:lstStyle/>
           <a:p>
-            <a:pPr indent="0" marL="0">
+            <a:pPr marL="0" indent="0">
               <a:buNone/>
             </a:pPr>
             <a:r>
@@ -11068,14 +10678,14 @@
       </p:sp>
       <p:pic>
         <p:nvPicPr>
-          <p:cNvPr id="6" name="Image 0" descr="preencoded.png">    </p:cNvPr>
+          <p:cNvPr id="6" name="Image 0" descr="preencoded.png"/>
           <p:cNvPicPr>
             <a:picLocks noChangeAspect="1"/>
           </p:cNvPicPr>
           <p:nvPr/>
         </p:nvPicPr>
         <p:blipFill>
-          <a:blip r:embed="rId1"/>
+          <a:blip r:embed="rId3"/>
           <a:stretch>
             <a:fillRect/>
           </a:stretch>
@@ -11111,7 +10721,7 @@
           <a:bodyPr wrap="square" lIns="0" tIns="0" rIns="0" bIns="0" rtlCol="0" anchor="t"/>
           <a:lstStyle/>
           <a:p>
-            <a:pPr indent="0" marL="0">
+            <a:pPr marL="0" indent="0">
               <a:buNone/>
             </a:pPr>
             <a:r>
@@ -11150,7 +10760,7 @@
           <a:bodyPr wrap="square" lIns="0" tIns="0" rIns="0" bIns="0" rtlCol="0" anchor="t"/>
           <a:lstStyle/>
           <a:p>
-            <a:pPr indent="0" marL="0">
+            <a:pPr marL="0" indent="0">
               <a:buNone/>
             </a:pPr>
             <a:r>
@@ -11307,14 +10917,14 @@
       </p:sp>
       <p:pic>
         <p:nvPicPr>
-          <p:cNvPr id="12" name="Image 1" descr="preencoded.png">    </p:cNvPr>
+          <p:cNvPr id="12" name="Image 1" descr="preencoded.png"/>
           <p:cNvPicPr>
             <a:picLocks noChangeAspect="1"/>
           </p:cNvPicPr>
           <p:nvPr/>
         </p:nvPicPr>
         <p:blipFill>
-          <a:blip r:embed="rId2"/>
+          <a:blip r:embed="rId4"/>
           <a:stretch>
             <a:fillRect/>
           </a:stretch>
@@ -11350,7 +10960,7 @@
           <a:bodyPr wrap="square" lIns="0" tIns="0" rIns="0" bIns="0" rtlCol="0" anchor="t"/>
           <a:lstStyle/>
           <a:p>
-            <a:pPr indent="0" marL="0">
+            <a:pPr marL="0" indent="0">
               <a:buNone/>
             </a:pPr>
             <a:r>
@@ -11389,7 +10999,7 @@
           <a:bodyPr wrap="square" lIns="0" tIns="0" rIns="0" bIns="0" rtlCol="0" anchor="t"/>
           <a:lstStyle/>
           <a:p>
-            <a:pPr indent="0" marL="0">
+            <a:pPr marL="0" indent="0">
               <a:buNone/>
             </a:pPr>
             <a:r>
@@ -11546,14 +11156,14 @@
       </p:sp>
       <p:pic>
         <p:nvPicPr>
-          <p:cNvPr id="18" name="Image 2" descr="preencoded.png">    </p:cNvPr>
+          <p:cNvPr id="18" name="Image 2" descr="preencoded.png"/>
           <p:cNvPicPr>
             <a:picLocks noChangeAspect="1"/>
           </p:cNvPicPr>
           <p:nvPr/>
         </p:nvPicPr>
         <p:blipFill>
-          <a:blip r:embed="rId3"/>
+          <a:blip r:embed="rId5"/>
           <a:stretch>
             <a:fillRect/>
           </a:stretch>
@@ -11589,7 +11199,7 @@
           <a:bodyPr wrap="square" lIns="0" tIns="0" rIns="0" bIns="0" rtlCol="0" anchor="t"/>
           <a:lstStyle/>
           <a:p>
-            <a:pPr indent="0" marL="0">
+            <a:pPr marL="0" indent="0">
               <a:buNone/>
             </a:pPr>
             <a:r>
@@ -11628,7 +11238,7 @@
           <a:bodyPr wrap="square" lIns="0" tIns="0" rIns="0" bIns="0" rtlCol="0" anchor="t"/>
           <a:lstStyle/>
           <a:p>
-            <a:pPr indent="0" marL="0">
+            <a:pPr marL="0" indent="0">
               <a:buNone/>
             </a:pPr>
             <a:r>
@@ -11733,14 +11343,14 @@
       </p:sp>
       <p:pic>
         <p:nvPicPr>
-          <p:cNvPr id="22" name="Image 3" descr="preencoded.png">    </p:cNvPr>
+          <p:cNvPr id="22" name="Image 3" descr="preencoded.png"/>
           <p:cNvPicPr>
             <a:picLocks noChangeAspect="1"/>
           </p:cNvPicPr>
           <p:nvPr/>
         </p:nvPicPr>
         <p:blipFill>
-          <a:blip r:embed="rId4"/>
+          <a:blip r:embed="rId6"/>
           <a:stretch>
             <a:fillRect/>
           </a:stretch>
@@ -11776,7 +11386,7 @@
           <a:bodyPr wrap="square" lIns="0" tIns="0" rIns="0" bIns="0" rtlCol="0" anchor="t"/>
           <a:lstStyle/>
           <a:p>
-            <a:pPr algn="r" indent="0" marL="0">
+            <a:pPr marL="0" indent="0" algn="r">
               <a:buNone/>
             </a:pPr>
             <a:r>
@@ -11810,6 +11420,7 @@
         <a:solidFill>
           <a:srgbClr val="0F172A"/>
         </a:solidFill>
+        <a:effectLst/>
       </p:bgPr>
     </p:bg>
     <p:spTree>
@@ -11847,11 +11458,11 @@
           <a:bodyPr wrap="square" lIns="0" tIns="0" rIns="0" bIns="0" rtlCol="0" anchor="t"/>
           <a:lstStyle/>
           <a:p>
-            <a:pPr indent="0" marL="0">
-              <a:buNone/>
-            </a:pPr>
-            <a:r>
-              <a:rPr lang="en-US" sz="1300" b="1" spc="300" kern="0" dirty="0">
+            <a:pPr marL="0" indent="0">
+              <a:buNone/>
+            </a:pPr>
+            <a:r>
+              <a:rPr lang="en-US" sz="1300" b="1" kern="0" spc="300" dirty="0">
                 <a:solidFill>
                   <a:srgbClr val="10B981"/>
                 </a:solidFill>
@@ -11886,7 +11497,7 @@
           <a:bodyPr wrap="square" lIns="0" tIns="0" rIns="0" bIns="0" rtlCol="0" anchor="t"/>
           <a:lstStyle/>
           <a:p>
-            <a:pPr indent="0" marL="0">
+            <a:pPr marL="0" indent="0">
               <a:buNone/>
             </a:pPr>
             <a:r>
@@ -12000,7 +11611,7 @@
           <a:bodyPr wrap="square" lIns="0" tIns="0" rIns="0" bIns="0" rtlCol="0" anchor="t"/>
           <a:lstStyle/>
           <a:p>
-            <a:pPr algn="ctr" indent="0" marL="0">
+            <a:pPr marL="0" indent="0" algn="ctr">
               <a:buNone/>
             </a:pPr>
             <a:r>
@@ -12039,7 +11650,7 @@
           <a:bodyPr wrap="square" lIns="0" tIns="0" rIns="0" bIns="0" rtlCol="0" anchor="t"/>
           <a:lstStyle/>
           <a:p>
-            <a:pPr algn="ctr" indent="0" marL="0">
+            <a:pPr marL="0" indent="0" algn="ctr">
               <a:buNone/>
             </a:pPr>
             <a:r>
@@ -12078,7 +11689,7 @@
           <a:bodyPr wrap="square" lIns="0" tIns="0" rIns="0" bIns="0" rtlCol="0" anchor="t"/>
           <a:lstStyle/>
           <a:p>
-            <a:pPr algn="ctr" indent="0" marL="0">
+            <a:pPr marL="0" indent="0" algn="ctr">
               <a:buNone/>
             </a:pPr>
             <a:r>
@@ -12117,7 +11728,7 @@
           <a:bodyPr wrap="square" lIns="0" tIns="0" rIns="0" bIns="0" rtlCol="0" anchor="t"/>
           <a:lstStyle/>
           <a:p>
-            <a:pPr indent="0" marL="0">
+            <a:pPr marL="0" indent="0">
               <a:buNone/>
             </a:pPr>
             <a:r>
@@ -12156,7 +11767,7 @@
           <a:bodyPr wrap="square" lIns="0" tIns="0" rIns="0" bIns="0" rtlCol="0" anchor="t"/>
           <a:lstStyle/>
           <a:p>
-            <a:pPr indent="0" marL="0">
+            <a:pPr marL="0" indent="0">
               <a:buNone/>
             </a:pPr>
             <a:r>
@@ -12195,7 +11806,7 @@
           <a:bodyPr wrap="square" lIns="0" tIns="0" rIns="0" bIns="0" rtlCol="0" anchor="t"/>
           <a:lstStyle/>
           <a:p>
-            <a:pPr indent="0" marL="0">
+            <a:pPr marL="0" indent="0">
               <a:buNone/>
             </a:pPr>
             <a:r>
@@ -12234,7 +11845,7 @@
           <a:bodyPr wrap="square" lIns="0" tIns="0" rIns="0" bIns="0" rtlCol="0" anchor="t"/>
           <a:lstStyle/>
           <a:p>
-            <a:pPr indent="0" marL="0">
+            <a:pPr marL="0" indent="0">
               <a:buNone/>
             </a:pPr>
             <a:r>
@@ -12273,7 +11884,7 @@
           <a:bodyPr wrap="square" lIns="0" tIns="0" rIns="0" bIns="0" rtlCol="0" anchor="t"/>
           <a:lstStyle/>
           <a:p>
-            <a:pPr indent="0" marL="0">
+            <a:pPr marL="0" indent="0">
               <a:buNone/>
             </a:pPr>
             <a:r>
@@ -12312,7 +11923,7 @@
           <a:bodyPr wrap="square" lIns="0" tIns="0" rIns="0" bIns="0" rtlCol="0" anchor="t"/>
           <a:lstStyle/>
           <a:p>
-            <a:pPr indent="0" marL="0">
+            <a:pPr marL="0" indent="0">
               <a:buNone/>
             </a:pPr>
             <a:r>
@@ -12332,14 +11943,14 @@
       </p:sp>
       <p:pic>
         <p:nvPicPr>
-          <p:cNvPr id="16" name="Image 0" descr="preencoded.png">    </p:cNvPr>
+          <p:cNvPr id="16" name="Image 0" descr="preencoded.png"/>
           <p:cNvPicPr>
             <a:picLocks noChangeAspect="1"/>
           </p:cNvPicPr>
           <p:nvPr/>
         </p:nvPicPr>
         <p:blipFill>
-          <a:blip r:embed="rId1"/>
+          <a:blip r:embed="rId3"/>
           <a:stretch>
             <a:fillRect/>
           </a:stretch>
@@ -12375,7 +11986,7 @@
           <a:bodyPr wrap="square" lIns="0" tIns="0" rIns="0" bIns="0" rtlCol="0" anchor="t"/>
           <a:lstStyle/>
           <a:p>
-            <a:pPr algn="r" indent="0" marL="0">
+            <a:pPr marL="0" indent="0" algn="r">
               <a:buNone/>
             </a:pPr>
             <a:r>
@@ -12414,7 +12025,7 @@
           <a:bodyPr wrap="square" lIns="0" tIns="0" rIns="0" bIns="0" rtlCol="0" anchor="t"/>
           <a:lstStyle/>
           <a:p>
-            <a:pPr indent="0" marL="0">
+            <a:pPr marL="0" indent="0">
               <a:buNone/>
             </a:pPr>
             <a:r>
@@ -12448,6 +12059,7 @@
         <a:solidFill>
           <a:srgbClr val="0F172A"/>
         </a:solidFill>
+        <a:effectLst/>
       </p:bgPr>
     </p:bg>
     <p:spTree>
@@ -12485,11 +12097,11 @@
           <a:bodyPr wrap="square" lIns="0" tIns="0" rIns="0" bIns="0" rtlCol="0" anchor="t"/>
           <a:lstStyle/>
           <a:p>
-            <a:pPr indent="0" marL="0">
-              <a:buNone/>
-            </a:pPr>
-            <a:r>
-              <a:rPr lang="en-US" sz="1300" b="1" spc="300" kern="0" dirty="0">
+            <a:pPr marL="0" indent="0">
+              <a:buNone/>
+            </a:pPr>
+            <a:r>
+              <a:rPr lang="en-US" sz="1300" b="1" kern="0" spc="300" dirty="0">
                 <a:solidFill>
                   <a:srgbClr val="10B981"/>
                 </a:solidFill>
@@ -12524,7 +12136,7 @@
           <a:bodyPr wrap="square" lIns="0" tIns="0" rIns="0" bIns="0" rtlCol="0" anchor="t"/>
           <a:lstStyle/>
           <a:p>
-            <a:pPr indent="0" marL="0">
+            <a:pPr marL="0" indent="0">
               <a:buNone/>
             </a:pPr>
             <a:r>
@@ -12596,14 +12208,14 @@
       </p:sp>
       <p:pic>
         <p:nvPicPr>
-          <p:cNvPr id="6" name="Image 0" descr="preencoded.png">    </p:cNvPr>
+          <p:cNvPr id="6" name="Image 0" descr="preencoded.png"/>
           <p:cNvPicPr>
             <a:picLocks noChangeAspect="1"/>
           </p:cNvPicPr>
           <p:nvPr/>
         </p:nvPicPr>
         <p:blipFill>
-          <a:blip r:embed="rId1"/>
+          <a:blip r:embed="rId3"/>
           <a:stretch>
             <a:fillRect/>
           </a:stretch>
@@ -12639,7 +12251,7 @@
           <a:bodyPr wrap="square" lIns="0" tIns="0" rIns="0" bIns="0" rtlCol="0" anchor="t"/>
           <a:lstStyle/>
           <a:p>
-            <a:pPr indent="0" marL="0">
+            <a:pPr marL="0" indent="0">
               <a:buNone/>
             </a:pPr>
             <a:r>
@@ -12678,7 +12290,7 @@
           <a:bodyPr wrap="square" lIns="0" tIns="0" rIns="0" bIns="0" rtlCol="0" anchor="t"/>
           <a:lstStyle/>
           <a:p>
-            <a:pPr indent="0" marL="0">
+            <a:pPr marL="0" indent="0">
               <a:buNone/>
             </a:pPr>
             <a:r>
@@ -12750,14 +12362,14 @@
       </p:sp>
       <p:pic>
         <p:nvPicPr>
-          <p:cNvPr id="11" name="Image 1" descr="preencoded.png">    </p:cNvPr>
+          <p:cNvPr id="11" name="Image 1" descr="preencoded.png"/>
           <p:cNvPicPr>
             <a:picLocks noChangeAspect="1"/>
           </p:cNvPicPr>
           <p:nvPr/>
         </p:nvPicPr>
         <p:blipFill>
-          <a:blip r:embed="rId2"/>
+          <a:blip r:embed="rId4"/>
           <a:stretch>
             <a:fillRect/>
           </a:stretch>
@@ -12793,7 +12405,7 @@
           <a:bodyPr wrap="square" lIns="0" tIns="0" rIns="0" bIns="0" rtlCol="0" anchor="t"/>
           <a:lstStyle/>
           <a:p>
-            <a:pPr indent="0" marL="0">
+            <a:pPr marL="0" indent="0">
               <a:buNone/>
             </a:pPr>
             <a:r>
@@ -12832,7 +12444,7 @@
           <a:bodyPr wrap="square" lIns="0" tIns="0" rIns="0" bIns="0" rtlCol="0" anchor="t"/>
           <a:lstStyle/>
           <a:p>
-            <a:pPr indent="0" marL="0">
+            <a:pPr marL="0" indent="0">
               <a:buNone/>
             </a:pPr>
             <a:r>
@@ -12904,14 +12516,14 @@
       </p:sp>
       <p:pic>
         <p:nvPicPr>
-          <p:cNvPr id="16" name="Image 2" descr="preencoded.png">    </p:cNvPr>
+          <p:cNvPr id="16" name="Image 2" descr="preencoded.png"/>
           <p:cNvPicPr>
             <a:picLocks noChangeAspect="1"/>
           </p:cNvPicPr>
           <p:nvPr/>
         </p:nvPicPr>
         <p:blipFill>
-          <a:blip r:embed="rId3"/>
+          <a:blip r:embed="rId5"/>
           <a:stretch>
             <a:fillRect/>
           </a:stretch>
@@ -12947,7 +12559,7 @@
           <a:bodyPr wrap="square" lIns="0" tIns="0" rIns="0" bIns="0" rtlCol="0" anchor="t"/>
           <a:lstStyle/>
           <a:p>
-            <a:pPr indent="0" marL="0">
+            <a:pPr marL="0" indent="0">
               <a:buNone/>
             </a:pPr>
             <a:r>
@@ -12986,7 +12598,7 @@
           <a:bodyPr wrap="square" lIns="0" tIns="0" rIns="0" bIns="0" rtlCol="0" anchor="t"/>
           <a:lstStyle/>
           <a:p>
-            <a:pPr indent="0" marL="0">
+            <a:pPr marL="0" indent="0">
               <a:buNone/>
             </a:pPr>
             <a:r>
@@ -13058,14 +12670,14 @@
       </p:sp>
       <p:pic>
         <p:nvPicPr>
-          <p:cNvPr id="21" name="Image 3" descr="preencoded.png">    </p:cNvPr>
+          <p:cNvPr id="21" name="Image 3" descr="preencoded.png"/>
           <p:cNvPicPr>
             <a:picLocks noChangeAspect="1"/>
           </p:cNvPicPr>
           <p:nvPr/>
         </p:nvPicPr>
         <p:blipFill>
-          <a:blip r:embed="rId4"/>
+          <a:blip r:embed="rId6"/>
           <a:stretch>
             <a:fillRect/>
           </a:stretch>
@@ -13101,7 +12713,7 @@
           <a:bodyPr wrap="square" lIns="0" tIns="0" rIns="0" bIns="0" rtlCol="0" anchor="t"/>
           <a:lstStyle/>
           <a:p>
-            <a:pPr indent="0" marL="0">
+            <a:pPr marL="0" indent="0">
               <a:buNone/>
             </a:pPr>
             <a:r>
@@ -13140,7 +12752,7 @@
           <a:bodyPr wrap="square" lIns="0" tIns="0" rIns="0" bIns="0" rtlCol="0" anchor="t"/>
           <a:lstStyle/>
           <a:p>
-            <a:pPr indent="0" marL="0">
+            <a:pPr marL="0" indent="0">
               <a:buNone/>
             </a:pPr>
             <a:r>
@@ -13160,14 +12772,14 @@
       </p:sp>
       <p:pic>
         <p:nvPicPr>
-          <p:cNvPr id="24" name="Image 4" descr="preencoded.png">    </p:cNvPr>
+          <p:cNvPr id="24" name="Image 4" descr="preencoded.png"/>
           <p:cNvPicPr>
             <a:picLocks noChangeAspect="1"/>
           </p:cNvPicPr>
           <p:nvPr/>
         </p:nvPicPr>
         <p:blipFill>
-          <a:blip r:embed="rId5"/>
+          <a:blip r:embed="rId7"/>
           <a:stretch>
             <a:fillRect/>
           </a:stretch>
@@ -13203,7 +12815,7 @@
           <a:bodyPr wrap="square" lIns="0" tIns="0" rIns="0" bIns="0" rtlCol="0" anchor="t"/>
           <a:lstStyle/>
           <a:p>
-            <a:pPr algn="r" indent="0" marL="0">
+            <a:pPr marL="0" indent="0" algn="r">
               <a:buNone/>
             </a:pPr>
             <a:r>
@@ -13242,7 +12854,7 @@
           <a:bodyPr wrap="square" lIns="0" tIns="0" rIns="0" bIns="0" rtlCol="0" anchor="t"/>
           <a:lstStyle/>
           <a:p>
-            <a:pPr indent="0" marL="0">
+            <a:pPr marL="0" indent="0">
               <a:buNone/>
             </a:pPr>
             <a:r>
@@ -13276,6 +12888,7 @@
         <a:solidFill>
           <a:srgbClr val="0F172A"/>
         </a:solidFill>
+        <a:effectLst/>
       </p:bgPr>
     </p:bg>
     <p:spTree>
@@ -13313,11 +12926,11 @@
           <a:bodyPr wrap="square" lIns="0" tIns="0" rIns="0" bIns="0" rtlCol="0" anchor="t"/>
           <a:lstStyle/>
           <a:p>
-            <a:pPr indent="0" marL="0">
-              <a:buNone/>
-            </a:pPr>
-            <a:r>
-              <a:rPr lang="en-US" sz="1300" b="1" spc="300" kern="0" dirty="0">
+            <a:pPr marL="0" indent="0">
+              <a:buNone/>
+            </a:pPr>
+            <a:r>
+              <a:rPr lang="en-US" sz="1300" b="1" kern="0" spc="300" dirty="0">
                 <a:solidFill>
                   <a:srgbClr val="10B981"/>
                 </a:solidFill>
@@ -13352,7 +12965,7 @@
           <a:bodyPr wrap="square" lIns="0" tIns="0" rIns="0" bIns="0" rtlCol="0" anchor="t"/>
           <a:lstStyle/>
           <a:p>
-            <a:pPr indent="0" marL="0">
+            <a:pPr marL="0" indent="0">
               <a:buNone/>
             </a:pPr>
             <a:r>
@@ -13424,14 +13037,14 @@
       </p:sp>
       <p:pic>
         <p:nvPicPr>
-          <p:cNvPr id="6" name="Image 0" descr="preencoded.png">    </p:cNvPr>
+          <p:cNvPr id="6" name="Image 0" descr="preencoded.png"/>
           <p:cNvPicPr>
             <a:picLocks noChangeAspect="1"/>
           </p:cNvPicPr>
           <p:nvPr/>
         </p:nvPicPr>
         <p:blipFill>
-          <a:blip r:embed="rId1"/>
+          <a:blip r:embed="rId3"/>
           <a:stretch>
             <a:fillRect/>
           </a:stretch>
@@ -13467,7 +13080,7 @@
           <a:bodyPr wrap="square" lIns="0" tIns="0" rIns="0" bIns="0" rtlCol="0" anchor="t"/>
           <a:lstStyle/>
           <a:p>
-            <a:pPr indent="0" marL="0">
+            <a:pPr marL="0" indent="0">
               <a:buNone/>
             </a:pPr>
             <a:r>
@@ -13645,14 +13258,14 @@
       </p:sp>
       <p:pic>
         <p:nvPicPr>
-          <p:cNvPr id="11" name="Image 1" descr="preencoded.png">    </p:cNvPr>
+          <p:cNvPr id="11" name="Image 1" descr="preencoded.png"/>
           <p:cNvPicPr>
             <a:picLocks noChangeAspect="1"/>
           </p:cNvPicPr>
           <p:nvPr/>
         </p:nvPicPr>
         <p:blipFill>
-          <a:blip r:embed="rId2"/>
+          <a:blip r:embed="rId4"/>
           <a:stretch>
             <a:fillRect/>
           </a:stretch>
@@ -13688,7 +13301,7 @@
           <a:bodyPr wrap="square" lIns="0" tIns="0" rIns="0" bIns="0" rtlCol="0" anchor="t"/>
           <a:lstStyle/>
           <a:p>
-            <a:pPr indent="0" marL="0">
+            <a:pPr marL="0" indent="0">
               <a:buNone/>
             </a:pPr>
             <a:r>
@@ -13754,7 +13367,7 @@
           <a:bodyPr wrap="square" lIns="0" tIns="0" rIns="0" bIns="0" rtlCol="0" anchor="ctr"/>
           <a:lstStyle/>
           <a:p>
-            <a:pPr indent="0" marL="0">
+            <a:pPr marL="0" indent="0">
               <a:buNone/>
             </a:pPr>
             <a:r>
@@ -13771,7 +13384,7 @@
             <a:endParaRPr lang="en-US" sz="1200" dirty="0"/>
           </a:p>
           <a:p>
-            <a:pPr indent="0" marL="0">
+            <a:pPr marL="0" indent="0">
               <a:buNone/>
             </a:pPr>
             <a:r>
@@ -13837,7 +13450,7 @@
           <a:bodyPr wrap="square" lIns="0" tIns="0" rIns="0" bIns="0" rtlCol="0" anchor="ctr"/>
           <a:lstStyle/>
           <a:p>
-            <a:pPr indent="0" marL="0">
+            <a:pPr marL="0" indent="0">
               <a:buNone/>
             </a:pPr>
             <a:r>
@@ -13854,7 +13467,7 @@
             <a:endParaRPr lang="en-US" sz="1200" dirty="0"/>
           </a:p>
           <a:p>
-            <a:pPr indent="0" marL="0">
+            <a:pPr marL="0" indent="0">
               <a:buNone/>
             </a:pPr>
             <a:r>
@@ -13920,7 +13533,7 @@
           <a:bodyPr wrap="square" lIns="0" tIns="0" rIns="0" bIns="0" rtlCol="0" anchor="ctr"/>
           <a:lstStyle/>
           <a:p>
-            <a:pPr indent="0" marL="0">
+            <a:pPr marL="0" indent="0">
               <a:buNone/>
             </a:pPr>
             <a:r>
@@ -13937,7 +13550,7 @@
             <a:endParaRPr lang="en-US" sz="1200" dirty="0"/>
           </a:p>
           <a:p>
-            <a:pPr indent="0" marL="0">
+            <a:pPr marL="0" indent="0">
               <a:buNone/>
             </a:pPr>
             <a:r>
@@ -14003,7 +13616,7 @@
           <a:bodyPr wrap="square" lIns="0" tIns="0" rIns="0" bIns="0" rtlCol="0" anchor="ctr"/>
           <a:lstStyle/>
           <a:p>
-            <a:pPr indent="0" marL="0">
+            <a:pPr marL="0" indent="0">
               <a:buNone/>
             </a:pPr>
             <a:r>
@@ -14020,7 +13633,7 @@
             <a:endParaRPr lang="en-US" sz="1200" dirty="0"/>
           </a:p>
           <a:p>
-            <a:pPr indent="0" marL="0">
+            <a:pPr marL="0" indent="0">
               <a:buNone/>
             </a:pPr>
             <a:r>
@@ -14086,7 +13699,7 @@
           <a:bodyPr wrap="square" lIns="0" tIns="0" rIns="0" bIns="0" rtlCol="0" anchor="ctr"/>
           <a:lstStyle/>
           <a:p>
-            <a:pPr indent="0" marL="0">
+            <a:pPr marL="0" indent="0">
               <a:buNone/>
             </a:pPr>
             <a:r>
@@ -14103,7 +13716,7 @@
             <a:endParaRPr lang="en-US" sz="1200" dirty="0"/>
           </a:p>
           <a:p>
-            <a:pPr indent="0" marL="0">
+            <a:pPr marL="0" indent="0">
               <a:buNone/>
             </a:pPr>
             <a:r>
@@ -14169,7 +13782,7 @@
           <a:bodyPr wrap="square" lIns="0" tIns="0" rIns="0" bIns="0" rtlCol="0" anchor="ctr"/>
           <a:lstStyle/>
           <a:p>
-            <a:pPr indent="0" marL="0">
+            <a:pPr marL="0" indent="0">
               <a:buNone/>
             </a:pPr>
             <a:r>
@@ -14186,7 +13799,7 @@
             <a:endParaRPr lang="en-US" sz="1200" dirty="0"/>
           </a:p>
           <a:p>
-            <a:pPr indent="0" marL="0">
+            <a:pPr marL="0" indent="0">
               <a:buNone/>
             </a:pPr>
             <a:r>
@@ -14258,14 +13871,14 @@
       </p:sp>
       <p:pic>
         <p:nvPicPr>
-          <p:cNvPr id="27" name="Image 2" descr="preencoded.png">    </p:cNvPr>
+          <p:cNvPr id="27" name="Image 2" descr="preencoded.png"/>
           <p:cNvPicPr>
             <a:picLocks noChangeAspect="1"/>
           </p:cNvPicPr>
           <p:nvPr/>
         </p:nvPicPr>
         <p:blipFill>
-          <a:blip r:embed="rId3"/>
+          <a:blip r:embed="rId5"/>
           <a:stretch>
             <a:fillRect/>
           </a:stretch>
@@ -14301,7 +13914,7 @@
           <a:bodyPr wrap="square" lIns="0" tIns="0" rIns="0" bIns="0" rtlCol="0" anchor="t"/>
           <a:lstStyle/>
           <a:p>
-            <a:pPr indent="0" marL="0">
+            <a:pPr marL="0" indent="0">
               <a:buNone/>
             </a:pPr>
             <a:r>
@@ -14475,11 +14088,11 @@
           <a:bodyPr wrap="square" lIns="0" tIns="0" rIns="0" bIns="0" rtlCol="0" anchor="t"/>
           <a:lstStyle/>
           <a:p>
-            <a:pPr indent="0" marL="0">
-              <a:buNone/>
-            </a:pPr>
-            <a:r>
-              <a:rPr lang="en-US" sz="1100" b="1" spc="200" kern="0" dirty="0">
+            <a:pPr marL="0" indent="0">
+              <a:buNone/>
+            </a:pPr>
+            <a:r>
+              <a:rPr lang="en-US" sz="1100" b="1" kern="0" spc="200" dirty="0">
                 <a:solidFill>
                   <a:srgbClr val="64748B"/>
                 </a:solidFill>
@@ -14547,14 +14160,14 @@
       </p:sp>
       <p:pic>
         <p:nvPicPr>
-          <p:cNvPr id="35" name="Image 3" descr="preencoded.png">    </p:cNvPr>
+          <p:cNvPr id="35" name="Image 3" descr="preencoded.png"/>
           <p:cNvPicPr>
             <a:picLocks noChangeAspect="1"/>
           </p:cNvPicPr>
           <p:nvPr/>
         </p:nvPicPr>
         <p:blipFill>
-          <a:blip r:embed="rId4"/>
+          <a:blip r:embed="rId6"/>
           <a:stretch>
             <a:fillRect/>
           </a:stretch>
@@ -14590,7 +14203,7 @@
           <a:bodyPr wrap="square" lIns="0" tIns="0" rIns="0" bIns="0" rtlCol="0" anchor="ctr"/>
           <a:lstStyle/>
           <a:p>
-            <a:pPr indent="0" marL="0">
+            <a:pPr marL="0" indent="0">
               <a:buNone/>
             </a:pPr>
             <a:r>
@@ -14607,7 +14220,7 @@
             <a:endParaRPr lang="en-US" sz="1250" dirty="0"/>
           </a:p>
           <a:p>
-            <a:pPr indent="0" marL="0">
+            <a:pPr marL="0" indent="0">
               <a:buNone/>
             </a:pPr>
             <a:r>
@@ -14679,14 +14292,14 @@
       </p:sp>
       <p:pic>
         <p:nvPicPr>
-          <p:cNvPr id="39" name="Image 4" descr="preencoded.png">    </p:cNvPr>
+          <p:cNvPr id="39" name="Image 4" descr="preencoded.png"/>
           <p:cNvPicPr>
             <a:picLocks noChangeAspect="1"/>
           </p:cNvPicPr>
           <p:nvPr/>
         </p:nvPicPr>
         <p:blipFill>
-          <a:blip r:embed="rId5"/>
+          <a:blip r:embed="rId7"/>
           <a:stretch>
             <a:fillRect/>
           </a:stretch>
@@ -14722,7 +14335,7 @@
           <a:bodyPr wrap="square" lIns="0" tIns="0" rIns="0" bIns="0" rtlCol="0" anchor="ctr"/>
           <a:lstStyle/>
           <a:p>
-            <a:pPr indent="0" marL="0">
+            <a:pPr marL="0" indent="0">
               <a:buNone/>
             </a:pPr>
             <a:r>
@@ -14739,7 +14352,7 @@
             <a:endParaRPr lang="en-US" sz="1250" dirty="0"/>
           </a:p>
           <a:p>
-            <a:pPr indent="0" marL="0">
+            <a:pPr marL="0" indent="0">
               <a:buNone/>
             </a:pPr>
             <a:r>
@@ -14811,14 +14424,14 @@
       </p:sp>
       <p:pic>
         <p:nvPicPr>
-          <p:cNvPr id="43" name="Image 5" descr="preencoded.png">    </p:cNvPr>
+          <p:cNvPr id="43" name="Image 5" descr="preencoded.png"/>
           <p:cNvPicPr>
             <a:picLocks noChangeAspect="1"/>
           </p:cNvPicPr>
           <p:nvPr/>
         </p:nvPicPr>
         <p:blipFill>
-          <a:blip r:embed="rId6"/>
+          <a:blip r:embed="rId8"/>
           <a:stretch>
             <a:fillRect/>
           </a:stretch>
@@ -14854,7 +14467,7 @@
           <a:bodyPr wrap="square" lIns="0" tIns="0" rIns="0" bIns="0" rtlCol="0" anchor="ctr"/>
           <a:lstStyle/>
           <a:p>
-            <a:pPr indent="0" marL="0">
+            <a:pPr marL="0" indent="0">
               <a:buNone/>
             </a:pPr>
             <a:r>
@@ -14871,7 +14484,7 @@
             <a:endParaRPr lang="en-US" sz="1250" dirty="0"/>
           </a:p>
           <a:p>
-            <a:pPr indent="0" marL="0">
+            <a:pPr marL="0" indent="0">
               <a:buNone/>
             </a:pPr>
             <a:r>
@@ -14943,14 +14556,14 @@
       </p:sp>
       <p:pic>
         <p:nvPicPr>
-          <p:cNvPr id="47" name="Image 6" descr="preencoded.png">    </p:cNvPr>
+          <p:cNvPr id="47" name="Image 6" descr="preencoded.png"/>
           <p:cNvPicPr>
             <a:picLocks noChangeAspect="1"/>
           </p:cNvPicPr>
           <p:nvPr/>
         </p:nvPicPr>
         <p:blipFill>
-          <a:blip r:embed="rId7"/>
+          <a:blip r:embed="rId9"/>
           <a:stretch>
             <a:fillRect/>
           </a:stretch>
@@ -14986,7 +14599,7 @@
           <a:bodyPr wrap="square" lIns="0" tIns="0" rIns="0" bIns="0" rtlCol="0" anchor="ctr"/>
           <a:lstStyle/>
           <a:p>
-            <a:pPr indent="0" marL="0">
+            <a:pPr marL="0" indent="0">
               <a:buNone/>
             </a:pPr>
             <a:r>
@@ -15003,7 +14616,7 @@
             <a:endParaRPr lang="en-US" sz="1250" dirty="0"/>
           </a:p>
           <a:p>
-            <a:pPr indent="0" marL="0">
+            <a:pPr marL="0" indent="0">
               <a:buNone/>
             </a:pPr>
             <a:r>
@@ -15069,7 +14682,7 @@
           <a:bodyPr wrap="square" lIns="0" tIns="0" rIns="0" bIns="0" rtlCol="0" anchor="ctr"/>
           <a:lstStyle/>
           <a:p>
-            <a:pPr indent="0" marL="0">
+            <a:pPr marL="0" indent="0">
               <a:buNone/>
             </a:pPr>
             <a:r>
@@ -15089,14 +14702,14 @@
       </p:sp>
       <p:pic>
         <p:nvPicPr>
-          <p:cNvPr id="51" name="Image 7" descr="preencoded.png">    </p:cNvPr>
+          <p:cNvPr id="51" name="Image 7" descr="preencoded.png"/>
           <p:cNvPicPr>
             <a:picLocks noChangeAspect="1"/>
           </p:cNvPicPr>
           <p:nvPr/>
         </p:nvPicPr>
         <p:blipFill>
-          <a:blip r:embed="rId8"/>
+          <a:blip r:embed="rId10"/>
           <a:stretch>
             <a:fillRect/>
           </a:stretch>
@@ -15132,7 +14745,7 @@
           <a:bodyPr wrap="square" lIns="0" tIns="0" rIns="0" bIns="0" rtlCol="0" anchor="t"/>
           <a:lstStyle/>
           <a:p>
-            <a:pPr algn="r" indent="0" marL="0">
+            <a:pPr marL="0" indent="0" algn="r">
               <a:buNone/>
             </a:pPr>
             <a:r>
@@ -15166,6 +14779,7 @@
         <a:solidFill>
           <a:srgbClr val="0F172A"/>
         </a:solidFill>
+        <a:effectLst/>
       </p:bgPr>
     </p:bg>
     <p:spTree>
@@ -15203,11 +14817,11 @@
           <a:bodyPr wrap="square" lIns="0" tIns="0" rIns="0" bIns="0" rtlCol="0" anchor="t"/>
           <a:lstStyle/>
           <a:p>
-            <a:pPr indent="0" marL="0">
-              <a:buNone/>
-            </a:pPr>
-            <a:r>
-              <a:rPr lang="en-US" sz="1300" b="1" spc="300" kern="0" dirty="0">
+            <a:pPr marL="0" indent="0">
+              <a:buNone/>
+            </a:pPr>
+            <a:r>
+              <a:rPr lang="en-US" sz="1300" b="1" kern="0" spc="300" dirty="0">
                 <a:solidFill>
                   <a:srgbClr val="10B981"/>
                 </a:solidFill>
@@ -15242,7 +14856,7 @@
           <a:bodyPr wrap="square" lIns="0" tIns="0" rIns="0" bIns="0" rtlCol="0" anchor="t"/>
           <a:lstStyle/>
           <a:p>
-            <a:pPr indent="0" marL="0">
+            <a:pPr marL="0" indent="0">
               <a:buNone/>
             </a:pPr>
             <a:r>
@@ -15308,7 +14922,7 @@
           <a:bodyPr wrap="square" lIns="0" tIns="0" rIns="0" bIns="0" rtlCol="0" anchor="t"/>
           <a:lstStyle/>
           <a:p>
-            <a:pPr indent="0" marL="0">
+            <a:pPr marL="0" indent="0">
               <a:buNone/>
             </a:pPr>
             <a:r>
@@ -15372,7 +14986,7 @@
           <a:bodyPr wrap="square" lIns="0" tIns="0" rIns="0" bIns="0" rtlCol="0" anchor="ctr"/>
           <a:lstStyle/>
           <a:p>
-            <a:pPr indent="0" marL="0">
+            <a:pPr marL="0" indent="0">
               <a:buNone/>
             </a:pPr>
             <a:r>
@@ -15411,7 +15025,7 @@
           <a:bodyPr wrap="square" lIns="0" tIns="0" rIns="0" bIns="0" rtlCol="0" anchor="ctr"/>
           <a:lstStyle/>
           <a:p>
-            <a:pPr indent="0" marL="0">
+            <a:pPr marL="0" indent="0">
               <a:buNone/>
             </a:pPr>
             <a:r>
@@ -15475,7 +15089,7 @@
           <a:bodyPr wrap="square" lIns="0" tIns="0" rIns="0" bIns="0" rtlCol="0" anchor="ctr"/>
           <a:lstStyle/>
           <a:p>
-            <a:pPr indent="0" marL="0">
+            <a:pPr marL="0" indent="0">
               <a:buNone/>
             </a:pPr>
             <a:r>
@@ -15514,7 +15128,7 @@
           <a:bodyPr wrap="square" lIns="0" tIns="0" rIns="0" bIns="0" rtlCol="0" anchor="ctr"/>
           <a:lstStyle/>
           <a:p>
-            <a:pPr indent="0" marL="0">
+            <a:pPr marL="0" indent="0">
               <a:buNone/>
             </a:pPr>
             <a:r>
@@ -15578,7 +15192,7 @@
           <a:bodyPr wrap="square" lIns="0" tIns="0" rIns="0" bIns="0" rtlCol="0" anchor="ctr"/>
           <a:lstStyle/>
           <a:p>
-            <a:pPr indent="0" marL="0">
+            <a:pPr marL="0" indent="0">
               <a:buNone/>
             </a:pPr>
             <a:r>
@@ -15617,7 +15231,7 @@
           <a:bodyPr wrap="square" lIns="0" tIns="0" rIns="0" bIns="0" rtlCol="0" anchor="ctr"/>
           <a:lstStyle/>
           <a:p>
-            <a:pPr indent="0" marL="0">
+            <a:pPr marL="0" indent="0">
               <a:buNone/>
             </a:pPr>
             <a:r>
@@ -15681,7 +15295,7 @@
           <a:bodyPr wrap="square" lIns="0" tIns="0" rIns="0" bIns="0" rtlCol="0" anchor="ctr"/>
           <a:lstStyle/>
           <a:p>
-            <a:pPr indent="0" marL="0">
+            <a:pPr marL="0" indent="0">
               <a:buNone/>
             </a:pPr>
             <a:r>
@@ -15720,7 +15334,7 @@
           <a:bodyPr wrap="square" lIns="0" tIns="0" rIns="0" bIns="0" rtlCol="0" anchor="ctr"/>
           <a:lstStyle/>
           <a:p>
-            <a:pPr indent="0" marL="0">
+            <a:pPr marL="0" indent="0">
               <a:buNone/>
             </a:pPr>
             <a:r>
@@ -15784,7 +15398,7 @@
           <a:bodyPr wrap="square" lIns="0" tIns="0" rIns="0" bIns="0" rtlCol="0" anchor="ctr"/>
           <a:lstStyle/>
           <a:p>
-            <a:pPr indent="0" marL="0">
+            <a:pPr marL="0" indent="0">
               <a:buNone/>
             </a:pPr>
             <a:r>
@@ -15823,7 +15437,7 @@
           <a:bodyPr wrap="square" lIns="0" tIns="0" rIns="0" bIns="0" rtlCol="0" anchor="ctr"/>
           <a:lstStyle/>
           <a:p>
-            <a:pPr indent="0" marL="0">
+            <a:pPr marL="0" indent="0">
               <a:buNone/>
             </a:pPr>
             <a:r>
@@ -15889,7 +15503,7 @@
           <a:bodyPr wrap="square" lIns="0" tIns="0" rIns="0" bIns="0" rtlCol="0" anchor="t"/>
           <a:lstStyle/>
           <a:p>
-            <a:pPr indent="0" marL="0">
+            <a:pPr marL="0" indent="0">
               <a:buNone/>
             </a:pPr>
             <a:r>
@@ -15934,14 +15548,14 @@
       </p:sp>
       <p:pic>
         <p:nvPicPr>
-          <p:cNvPr id="24" name="Image 0" descr="preencoded.png">    </p:cNvPr>
+          <p:cNvPr id="24" name="Image 0" descr="preencoded.png"/>
           <p:cNvPicPr>
             <a:picLocks noChangeAspect="1"/>
           </p:cNvPicPr>
           <p:nvPr/>
         </p:nvPicPr>
         <p:blipFill>
-          <a:blip r:embed="rId1"/>
+          <a:blip r:embed="rId3"/>
           <a:stretch>
             <a:fillRect/>
           </a:stretch>
@@ -15977,7 +15591,7 @@
           <a:bodyPr wrap="square" lIns="0" tIns="0" rIns="0" bIns="0" rtlCol="0" anchor="ctr"/>
           <a:lstStyle/>
           <a:p>
-            <a:pPr indent="0" marL="0">
+            <a:pPr marL="0" indent="0">
               <a:buNone/>
             </a:pPr>
             <a:r>
@@ -16022,14 +15636,14 @@
       </p:sp>
       <p:pic>
         <p:nvPicPr>
-          <p:cNvPr id="27" name="Image 1" descr="preencoded.png">    </p:cNvPr>
+          <p:cNvPr id="27" name="Image 1" descr="preencoded.png"/>
           <p:cNvPicPr>
             <a:picLocks noChangeAspect="1"/>
           </p:cNvPicPr>
           <p:nvPr/>
         </p:nvPicPr>
         <p:blipFill>
-          <a:blip r:embed="rId2"/>
+          <a:blip r:embed="rId3"/>
           <a:stretch>
             <a:fillRect/>
           </a:stretch>
@@ -16065,7 +15679,7 @@
           <a:bodyPr wrap="square" lIns="0" tIns="0" rIns="0" bIns="0" rtlCol="0" anchor="ctr"/>
           <a:lstStyle/>
           <a:p>
-            <a:pPr indent="0" marL="0">
+            <a:pPr marL="0" indent="0">
               <a:buNone/>
             </a:pPr>
             <a:r>
@@ -16110,7 +15724,7 @@
       </p:sp>
       <p:pic>
         <p:nvPicPr>
-          <p:cNvPr id="30" name="Image 2" descr="preencoded.png">    </p:cNvPr>
+          <p:cNvPr id="30" name="Image 2" descr="preencoded.png"/>
           <p:cNvPicPr>
             <a:picLocks noChangeAspect="1"/>
           </p:cNvPicPr>
@@ -16153,7 +15767,7 @@
           <a:bodyPr wrap="square" lIns="0" tIns="0" rIns="0" bIns="0" rtlCol="0" anchor="ctr"/>
           <a:lstStyle/>
           <a:p>
-            <a:pPr indent="0" marL="0">
+            <a:pPr marL="0" indent="0">
               <a:buNone/>
             </a:pPr>
             <a:r>
@@ -16198,14 +15812,14 @@
       </p:sp>
       <p:pic>
         <p:nvPicPr>
-          <p:cNvPr id="33" name="Image 3" descr="preencoded.png">    </p:cNvPr>
+          <p:cNvPr id="33" name="Image 3" descr="preencoded.png"/>
           <p:cNvPicPr>
             <a:picLocks noChangeAspect="1"/>
           </p:cNvPicPr>
           <p:nvPr/>
         </p:nvPicPr>
         <p:blipFill>
-          <a:blip r:embed="rId4"/>
+          <a:blip r:embed="rId3"/>
           <a:stretch>
             <a:fillRect/>
           </a:stretch>
@@ -16241,7 +15855,7 @@
           <a:bodyPr wrap="square" lIns="0" tIns="0" rIns="0" bIns="0" rtlCol="0" anchor="ctr"/>
           <a:lstStyle/>
           <a:p>
-            <a:pPr indent="0" marL="0">
+            <a:pPr marL="0" indent="0">
               <a:buNone/>
             </a:pPr>
             <a:r>
@@ -16307,11 +15921,11 @@
           <a:bodyPr wrap="square" lIns="0" tIns="0" rIns="0" bIns="0" rtlCol="0" anchor="t"/>
           <a:lstStyle/>
           <a:p>
-            <a:pPr indent="0" marL="0">
-              <a:buNone/>
-            </a:pPr>
-            <a:r>
-              <a:rPr lang="en-US" sz="1150" b="1" spc="200" kern="0" dirty="0">
+            <a:pPr marL="0" indent="0">
+              <a:buNone/>
+            </a:pPr>
+            <a:r>
+              <a:rPr lang="en-US" sz="1150" b="1" kern="0" spc="200" dirty="0">
                 <a:solidFill>
                   <a:srgbClr val="10B981"/>
                 </a:solidFill>
@@ -16346,7 +15960,7 @@
           <a:bodyPr wrap="square" lIns="0" tIns="0" rIns="0" bIns="0" rtlCol="0" anchor="t"/>
           <a:lstStyle/>
           <a:p>
-            <a:pPr indent="0" marL="0">
+            <a:pPr marL="0" indent="0">
               <a:buNone/>
             </a:pPr>
             <a:r>
@@ -16385,7 +15999,7 @@
           <a:bodyPr wrap="square" lIns="0" tIns="0" rIns="0" bIns="0" rtlCol="0" anchor="t"/>
           <a:lstStyle/>
           <a:p>
-            <a:pPr indent="0" marL="0">
+            <a:pPr marL="0" indent="0">
               <a:buNone/>
             </a:pPr>
             <a:r>
@@ -16424,7 +16038,7 @@
           <a:bodyPr wrap="square" lIns="0" tIns="0" rIns="0" bIns="0" rtlCol="0" anchor="t"/>
           <a:lstStyle/>
           <a:p>
-            <a:pPr indent="0" marL="0">
+            <a:pPr marL="0" indent="0">
               <a:buNone/>
             </a:pPr>
             <a:r>
@@ -16463,7 +16077,7 @@
           <a:bodyPr wrap="square" lIns="0" tIns="0" rIns="0" bIns="0" rtlCol="0" anchor="t"/>
           <a:lstStyle/>
           <a:p>
-            <a:pPr indent="0" marL="0">
+            <a:pPr marL="0" indent="0">
               <a:buNone/>
             </a:pPr>
             <a:r>
@@ -16502,7 +16116,7 @@
           <a:bodyPr wrap="square" lIns="0" tIns="0" rIns="0" bIns="0" rtlCol="0" anchor="t"/>
           <a:lstStyle/>
           <a:p>
-            <a:pPr indent="0" marL="0">
+            <a:pPr marL="0" indent="0">
               <a:buNone/>
             </a:pPr>
             <a:r>
@@ -16541,7 +16155,7 @@
           <a:bodyPr wrap="square" lIns="0" tIns="0" rIns="0" bIns="0" rtlCol="0" anchor="t"/>
           <a:lstStyle/>
           <a:p>
-            <a:pPr indent="0" marL="0">
+            <a:pPr marL="0" indent="0">
               <a:buNone/>
             </a:pPr>
             <a:r>
@@ -16580,7 +16194,7 @@
           <a:bodyPr wrap="square" lIns="0" tIns="0" rIns="0" bIns="0" rtlCol="0" anchor="t"/>
           <a:lstStyle/>
           <a:p>
-            <a:pPr indent="0" marL="0">
+            <a:pPr marL="0" indent="0">
               <a:buNone/>
             </a:pPr>
             <a:r>
@@ -16619,7 +16233,7 @@
           <a:bodyPr wrap="square" lIns="0" tIns="0" rIns="0" bIns="0" rtlCol="0" anchor="t"/>
           <a:lstStyle/>
           <a:p>
-            <a:pPr indent="0" marL="0">
+            <a:pPr marL="0" indent="0">
               <a:buNone/>
             </a:pPr>
             <a:r>
@@ -16639,14 +16253,14 @@
       </p:sp>
       <p:pic>
         <p:nvPicPr>
-          <p:cNvPr id="45" name="Image 4" descr="preencoded.png">    </p:cNvPr>
+          <p:cNvPr id="45" name="Image 4" descr="preencoded.png"/>
           <p:cNvPicPr>
             <a:picLocks noChangeAspect="1"/>
           </p:cNvPicPr>
           <p:nvPr/>
         </p:nvPicPr>
         <p:blipFill>
-          <a:blip r:embed="rId5"/>
+          <a:blip r:embed="rId4"/>
           <a:stretch>
             <a:fillRect/>
           </a:stretch>
@@ -16682,7 +16296,7 @@
           <a:bodyPr wrap="square" lIns="0" tIns="0" rIns="0" bIns="0" rtlCol="0" anchor="t"/>
           <a:lstStyle/>
           <a:p>
-            <a:pPr algn="r" indent="0" marL="0">
+            <a:pPr marL="0" indent="0" algn="r">
               <a:buNone/>
             </a:pPr>
             <a:r>
@@ -16721,7 +16335,7 @@
           <a:bodyPr wrap="square" lIns="0" tIns="0" rIns="0" bIns="0" rtlCol="0" anchor="t"/>
           <a:lstStyle/>
           <a:p>
-            <a:pPr indent="0" marL="0">
+            <a:pPr marL="0" indent="0">
               <a:buNone/>
             </a:pPr>
             <a:r>
@@ -16755,6 +16369,7 @@
         <a:solidFill>
           <a:srgbClr val="0F172A"/>
         </a:solidFill>
+        <a:effectLst/>
       </p:bgPr>
     </p:bg>
     <p:spTree>
@@ -16792,11 +16407,11 @@
           <a:bodyPr wrap="square" lIns="0" tIns="0" rIns="0" bIns="0" rtlCol="0" anchor="t"/>
           <a:lstStyle/>
           <a:p>
-            <a:pPr indent="0" marL="0">
-              <a:buNone/>
-            </a:pPr>
-            <a:r>
-              <a:rPr lang="en-US" sz="1300" b="1" spc="300" kern="0" dirty="0">
+            <a:pPr marL="0" indent="0">
+              <a:buNone/>
+            </a:pPr>
+            <a:r>
+              <a:rPr lang="en-US" sz="1300" b="1" kern="0" spc="300" dirty="0">
                 <a:solidFill>
                   <a:srgbClr val="10B981"/>
                 </a:solidFill>
@@ -16831,7 +16446,7 @@
           <a:bodyPr wrap="square" lIns="0" tIns="0" rIns="0" bIns="0" rtlCol="0" anchor="t"/>
           <a:lstStyle/>
           <a:p>
-            <a:pPr indent="0" marL="0">
+            <a:pPr marL="0" indent="0">
               <a:buNone/>
             </a:pPr>
             <a:r>
@@ -16876,14 +16491,14 @@
       </p:sp>
       <p:pic>
         <p:nvPicPr>
-          <p:cNvPr id="5" name="Image 0" descr="preencoded.png">    </p:cNvPr>
+          <p:cNvPr id="5" name="Image 0" descr="preencoded.png"/>
           <p:cNvPicPr>
             <a:picLocks noChangeAspect="1"/>
           </p:cNvPicPr>
           <p:nvPr/>
         </p:nvPicPr>
         <p:blipFill>
-          <a:blip r:embed="rId1"/>
+          <a:blip r:embed="rId3"/>
           <a:stretch>
             <a:fillRect/>
           </a:stretch>
@@ -16919,7 +16534,7 @@
           <a:bodyPr wrap="square" lIns="0" tIns="0" rIns="0" bIns="0" rtlCol="0" anchor="ctr"/>
           <a:lstStyle/>
           <a:p>
-            <a:pPr indent="0" marL="0">
+            <a:pPr marL="0" indent="0">
               <a:buNone/>
             </a:pPr>
             <a:r>
@@ -16964,14 +16579,14 @@
       </p:sp>
       <p:pic>
         <p:nvPicPr>
-          <p:cNvPr id="8" name="Image 1" descr="preencoded.png">    </p:cNvPr>
+          <p:cNvPr id="8" name="Image 1" descr="preencoded.png"/>
           <p:cNvPicPr>
             <a:picLocks noChangeAspect="1"/>
           </p:cNvPicPr>
           <p:nvPr/>
         </p:nvPicPr>
         <p:blipFill>
-          <a:blip r:embed="rId2"/>
+          <a:blip r:embed="rId4"/>
           <a:stretch>
             <a:fillRect/>
           </a:stretch>
@@ -17007,7 +16622,7 @@
           <a:bodyPr wrap="square" lIns="0" tIns="0" rIns="0" bIns="0" rtlCol="0" anchor="ctr"/>
           <a:lstStyle/>
           <a:p>
-            <a:pPr indent="0" marL="0">
+            <a:pPr marL="0" indent="0">
               <a:buNone/>
             </a:pPr>
             <a:r>
@@ -17046,7 +16661,7 @@
           <a:bodyPr wrap="square" lIns="0" tIns="0" rIns="0" bIns="0" rtlCol="0" anchor="t"/>
           <a:lstStyle/>
           <a:p>
-            <a:pPr indent="0" marL="0">
+            <a:pPr marL="0" indent="0">
               <a:buNone/>
             </a:pPr>
             <a:r>
@@ -17085,7 +16700,7 @@
           <a:bodyPr wrap="square" lIns="0" tIns="0" rIns="0" bIns="0" rtlCol="0" anchor="t"/>
           <a:lstStyle/>
           <a:p>
-            <a:pPr indent="0" marL="0">
+            <a:pPr marL="0" indent="0">
               <a:buNone/>
             </a:pPr>
             <a:r>
@@ -17105,14 +16720,14 @@
       </p:sp>
       <p:pic>
         <p:nvPicPr>
-          <p:cNvPr id="12" name="Image 2" descr="preencoded.png">    </p:cNvPr>
+          <p:cNvPr id="12" name="Image 2" descr="preencoded.png"/>
           <p:cNvPicPr>
             <a:picLocks noChangeAspect="1"/>
           </p:cNvPicPr>
           <p:nvPr/>
         </p:nvPicPr>
         <p:blipFill>
-          <a:blip r:embed="rId3"/>
+          <a:blip r:embed="rId5"/>
           <a:stretch>
             <a:fillRect/>
           </a:stretch>
@@ -17177,7 +16792,7 @@
           <a:bodyPr wrap="square" lIns="0" tIns="0" rIns="0" bIns="0" rtlCol="0" anchor="ctr"/>
           <a:lstStyle/>
           <a:p>
-            <a:pPr indent="0" marL="0">
+            <a:pPr marL="0" indent="0">
               <a:buNone/>
             </a:pPr>
             <a:r>
@@ -17197,14 +16812,14 @@
       </p:sp>
       <p:pic>
         <p:nvPicPr>
-          <p:cNvPr id="15" name="Image 3" descr="preencoded.png">    </p:cNvPr>
+          <p:cNvPr id="15" name="Image 3" descr="preencoded.png"/>
           <p:cNvPicPr>
             <a:picLocks noChangeAspect="1"/>
           </p:cNvPicPr>
           <p:nvPr/>
         </p:nvPicPr>
         <p:blipFill>
-          <a:blip r:embed="rId4"/>
+          <a:blip r:embed="rId6"/>
           <a:stretch>
             <a:fillRect/>
           </a:stretch>
@@ -17269,7 +16884,7 @@
           <a:bodyPr wrap="square" lIns="0" tIns="0" rIns="0" bIns="0" rtlCol="0" anchor="ctr"/>
           <a:lstStyle/>
           <a:p>
-            <a:pPr indent="0" marL="0">
+            <a:pPr marL="0" indent="0">
               <a:buNone/>
             </a:pPr>
             <a:r>
@@ -17289,14 +16904,14 @@
       </p:sp>
       <p:pic>
         <p:nvPicPr>
-          <p:cNvPr id="18" name="Image 4" descr="preencoded.png">    </p:cNvPr>
+          <p:cNvPr id="18" name="Image 4" descr="preencoded.png"/>
           <p:cNvPicPr>
             <a:picLocks noChangeAspect="1"/>
           </p:cNvPicPr>
           <p:nvPr/>
         </p:nvPicPr>
         <p:blipFill>
-          <a:blip r:embed="rId5"/>
+          <a:blip r:embed="rId7"/>
           <a:stretch>
             <a:fillRect/>
           </a:stretch>
@@ -17332,7 +16947,7 @@
           <a:bodyPr wrap="square" lIns="0" tIns="0" rIns="0" bIns="0" rtlCol="0" anchor="t"/>
           <a:lstStyle/>
           <a:p>
-            <a:pPr algn="r" indent="0" marL="0">
+            <a:pPr marL="0" indent="0" algn="r">
               <a:buNone/>
             </a:pPr>
             <a:r>
@@ -17371,7 +16986,7 @@
           <a:bodyPr wrap="square" lIns="0" tIns="0" rIns="0" bIns="0" rtlCol="0" anchor="t"/>
           <a:lstStyle/>
           <a:p>
-            <a:pPr indent="0" marL="0">
+            <a:pPr marL="0" indent="0">
               <a:buNone/>
             </a:pPr>
             <a:r>
@@ -17405,6 +17020,7 @@
         <a:solidFill>
           <a:srgbClr val="0F172A"/>
         </a:solidFill>
+        <a:effectLst/>
       </p:bgPr>
     </p:bg>
     <p:spTree>
@@ -17442,11 +17058,11 @@
           <a:bodyPr wrap="square" lIns="0" tIns="0" rIns="0" bIns="0" rtlCol="0" anchor="t"/>
           <a:lstStyle/>
           <a:p>
-            <a:pPr indent="0" marL="0">
-              <a:buNone/>
-            </a:pPr>
-            <a:r>
-              <a:rPr lang="en-US" sz="1300" b="1" spc="300" kern="0" dirty="0">
+            <a:pPr marL="0" indent="0">
+              <a:buNone/>
+            </a:pPr>
+            <a:r>
+              <a:rPr lang="en-US" sz="1300" b="1" kern="0" spc="300" dirty="0">
                 <a:solidFill>
                   <a:srgbClr val="10B981"/>
                 </a:solidFill>
@@ -17481,7 +17097,7 @@
           <a:bodyPr wrap="square" lIns="0" tIns="0" rIns="0" bIns="0" rtlCol="0" anchor="t"/>
           <a:lstStyle/>
           <a:p>
-            <a:pPr indent="0" marL="0">
+            <a:pPr marL="0" indent="0">
               <a:buNone/>
             </a:pPr>
             <a:r>
@@ -17553,14 +17169,14 @@
       </p:sp>
       <p:pic>
         <p:nvPicPr>
-          <p:cNvPr id="6" name="Image 0" descr="preencoded.png">    </p:cNvPr>
+          <p:cNvPr id="6" name="Image 0" descr="preencoded.png"/>
           <p:cNvPicPr>
             <a:picLocks noChangeAspect="1"/>
           </p:cNvPicPr>
           <p:nvPr/>
         </p:nvPicPr>
         <p:blipFill>
-          <a:blip r:embed="rId1"/>
+          <a:blip r:embed="rId3"/>
           <a:stretch>
             <a:fillRect/>
           </a:stretch>
@@ -17596,7 +17212,7 @@
           <a:bodyPr wrap="square" lIns="0" tIns="0" rIns="0" bIns="0" rtlCol="0" anchor="t"/>
           <a:lstStyle/>
           <a:p>
-            <a:pPr indent="0" marL="0">
+            <a:pPr marL="0" indent="0">
               <a:buNone/>
             </a:pPr>
             <a:r>
@@ -17635,7 +17251,7 @@
           <a:bodyPr wrap="square" lIns="0" tIns="0" rIns="0" bIns="0" rtlCol="0" anchor="t"/>
           <a:lstStyle/>
           <a:p>
-            <a:pPr indent="0" marL="0">
+            <a:pPr marL="0" indent="0">
               <a:buNone/>
             </a:pPr>
             <a:r>
@@ -17707,14 +17323,14 @@
       </p:sp>
       <p:pic>
         <p:nvPicPr>
-          <p:cNvPr id="11" name="Image 1" descr="preencoded.png">    </p:cNvPr>
+          <p:cNvPr id="11" name="Image 1" descr="preencoded.png"/>
           <p:cNvPicPr>
             <a:picLocks noChangeAspect="1"/>
           </p:cNvPicPr>
           <p:nvPr/>
         </p:nvPicPr>
         <p:blipFill>
-          <a:blip r:embed="rId2"/>
+          <a:blip r:embed="rId4"/>
           <a:stretch>
             <a:fillRect/>
           </a:stretch>
@@ -17750,7 +17366,7 @@
           <a:bodyPr wrap="square" lIns="0" tIns="0" rIns="0" bIns="0" rtlCol="0" anchor="t"/>
           <a:lstStyle/>
           <a:p>
-            <a:pPr indent="0" marL="0">
+            <a:pPr marL="0" indent="0">
               <a:buNone/>
             </a:pPr>
             <a:r>
@@ -17789,7 +17405,7 @@
           <a:bodyPr wrap="square" lIns="0" tIns="0" rIns="0" bIns="0" rtlCol="0" anchor="t"/>
           <a:lstStyle/>
           <a:p>
-            <a:pPr indent="0" marL="0">
+            <a:pPr marL="0" indent="0">
               <a:buNone/>
             </a:pPr>
             <a:r>
@@ -17861,14 +17477,14 @@
       </p:sp>
       <p:pic>
         <p:nvPicPr>
-          <p:cNvPr id="16" name="Image 2" descr="preencoded.png">    </p:cNvPr>
+          <p:cNvPr id="16" name="Image 2" descr="preencoded.png"/>
           <p:cNvPicPr>
             <a:picLocks noChangeAspect="1"/>
           </p:cNvPicPr>
           <p:nvPr/>
         </p:nvPicPr>
         <p:blipFill>
-          <a:blip r:embed="rId3"/>
+          <a:blip r:embed="rId5"/>
           <a:stretch>
             <a:fillRect/>
           </a:stretch>
@@ -17904,7 +17520,7 @@
           <a:bodyPr wrap="square" lIns="0" tIns="0" rIns="0" bIns="0" rtlCol="0" anchor="t"/>
           <a:lstStyle/>
           <a:p>
-            <a:pPr indent="0" marL="0">
+            <a:pPr marL="0" indent="0">
               <a:buNone/>
             </a:pPr>
             <a:r>
@@ -17943,7 +17559,7 @@
           <a:bodyPr wrap="square" lIns="0" tIns="0" rIns="0" bIns="0" rtlCol="0" anchor="t"/>
           <a:lstStyle/>
           <a:p>
-            <a:pPr indent="0" marL="0">
+            <a:pPr marL="0" indent="0">
               <a:buNone/>
             </a:pPr>
             <a:r>
@@ -18015,14 +17631,14 @@
       </p:sp>
       <p:pic>
         <p:nvPicPr>
-          <p:cNvPr id="21" name="Image 3" descr="preencoded.png">    </p:cNvPr>
+          <p:cNvPr id="21" name="Image 3" descr="preencoded.png"/>
           <p:cNvPicPr>
             <a:picLocks noChangeAspect="1"/>
           </p:cNvPicPr>
           <p:nvPr/>
         </p:nvPicPr>
         <p:blipFill>
-          <a:blip r:embed="rId4"/>
+          <a:blip r:embed="rId6"/>
           <a:stretch>
             <a:fillRect/>
           </a:stretch>
@@ -18058,7 +17674,7 @@
           <a:bodyPr wrap="square" lIns="0" tIns="0" rIns="0" bIns="0" rtlCol="0" anchor="t"/>
           <a:lstStyle/>
           <a:p>
-            <a:pPr indent="0" marL="0">
+            <a:pPr marL="0" indent="0">
               <a:buNone/>
             </a:pPr>
             <a:r>
@@ -18097,7 +17713,7 @@
           <a:bodyPr wrap="square" lIns="0" tIns="0" rIns="0" bIns="0" rtlCol="0" anchor="t"/>
           <a:lstStyle/>
           <a:p>
-            <a:pPr indent="0" marL="0">
+            <a:pPr marL="0" indent="0">
               <a:buNone/>
             </a:pPr>
             <a:r>
@@ -18169,14 +17785,14 @@
       </p:sp>
       <p:pic>
         <p:nvPicPr>
-          <p:cNvPr id="26" name="Image 4" descr="preencoded.png">    </p:cNvPr>
+          <p:cNvPr id="26" name="Image 4" descr="preencoded.png"/>
           <p:cNvPicPr>
             <a:picLocks noChangeAspect="1"/>
           </p:cNvPicPr>
           <p:nvPr/>
         </p:nvPicPr>
         <p:blipFill>
-          <a:blip r:embed="rId5"/>
+          <a:blip r:embed="rId7"/>
           <a:stretch>
             <a:fillRect/>
           </a:stretch>
@@ -18212,7 +17828,7 @@
           <a:bodyPr wrap="square" lIns="0" tIns="0" rIns="0" bIns="0" rtlCol="0" anchor="t"/>
           <a:lstStyle/>
           <a:p>
-            <a:pPr indent="0" marL="0">
+            <a:pPr marL="0" indent="0">
               <a:buNone/>
             </a:pPr>
             <a:r>
@@ -18251,7 +17867,7 @@
           <a:bodyPr wrap="square" lIns="0" tIns="0" rIns="0" bIns="0" rtlCol="0" anchor="t"/>
           <a:lstStyle/>
           <a:p>
-            <a:pPr indent="0" marL="0">
+            <a:pPr marL="0" indent="0">
               <a:buNone/>
             </a:pPr>
             <a:r>
@@ -18323,14 +17939,14 @@
       </p:sp>
       <p:pic>
         <p:nvPicPr>
-          <p:cNvPr id="31" name="Image 5" descr="preencoded.png">    </p:cNvPr>
+          <p:cNvPr id="31" name="Image 5" descr="preencoded.png"/>
           <p:cNvPicPr>
             <a:picLocks noChangeAspect="1"/>
           </p:cNvPicPr>
           <p:nvPr/>
         </p:nvPicPr>
         <p:blipFill>
-          <a:blip r:embed="rId6"/>
+          <a:blip r:embed="rId8"/>
           <a:stretch>
             <a:fillRect/>
           </a:stretch>
@@ -18366,7 +17982,7 @@
           <a:bodyPr wrap="square" lIns="0" tIns="0" rIns="0" bIns="0" rtlCol="0" anchor="t"/>
           <a:lstStyle/>
           <a:p>
-            <a:pPr indent="0" marL="0">
+            <a:pPr marL="0" indent="0">
               <a:buNone/>
             </a:pPr>
             <a:r>
@@ -18405,7 +18021,7 @@
           <a:bodyPr wrap="square" lIns="0" tIns="0" rIns="0" bIns="0" rtlCol="0" anchor="t"/>
           <a:lstStyle/>
           <a:p>
-            <a:pPr indent="0" marL="0">
+            <a:pPr marL="0" indent="0">
               <a:buNone/>
             </a:pPr>
             <a:r>
@@ -18425,14 +18041,14 @@
       </p:sp>
       <p:pic>
         <p:nvPicPr>
-          <p:cNvPr id="34" name="Image 6" descr="preencoded.png">    </p:cNvPr>
+          <p:cNvPr id="34" name="Image 6" descr="preencoded.png"/>
           <p:cNvPicPr>
             <a:picLocks noChangeAspect="1"/>
           </p:cNvPicPr>
           <p:nvPr/>
         </p:nvPicPr>
         <p:blipFill>
-          <a:blip r:embed="rId7"/>
+          <a:blip r:embed="rId9"/>
           <a:stretch>
             <a:fillRect/>
           </a:stretch>
@@ -18468,7 +18084,7 @@
           <a:bodyPr wrap="square" lIns="0" tIns="0" rIns="0" bIns="0" rtlCol="0" anchor="t"/>
           <a:lstStyle/>
           <a:p>
-            <a:pPr algn="r" indent="0" marL="0">
+            <a:pPr marL="0" indent="0" algn="r">
               <a:buNone/>
             </a:pPr>
             <a:r>
@@ -18502,6 +18118,7 @@
         <a:solidFill>
           <a:srgbClr val="0F172A"/>
         </a:solidFill>
+        <a:effectLst/>
       </p:bgPr>
     </p:bg>
     <p:spTree>
@@ -18539,11 +18156,11 @@
           <a:bodyPr wrap="square" lIns="0" tIns="0" rIns="0" bIns="0" rtlCol="0" anchor="t"/>
           <a:lstStyle/>
           <a:p>
-            <a:pPr indent="0" marL="0">
-              <a:buNone/>
-            </a:pPr>
-            <a:r>
-              <a:rPr lang="en-US" sz="1300" b="1" spc="300" kern="0" dirty="0">
+            <a:pPr marL="0" indent="0">
+              <a:buNone/>
+            </a:pPr>
+            <a:r>
+              <a:rPr lang="en-US" sz="1300" b="1" kern="0" spc="300" dirty="0">
                 <a:solidFill>
                   <a:srgbClr val="10B981"/>
                 </a:solidFill>
@@ -18578,7 +18195,7 @@
           <a:bodyPr wrap="square" lIns="0" tIns="0" rIns="0" bIns="0" rtlCol="0" anchor="t"/>
           <a:lstStyle/>
           <a:p>
-            <a:pPr indent="0" marL="0">
+            <a:pPr marL="0" indent="0">
               <a:buNone/>
             </a:pPr>
             <a:r>
@@ -18644,7 +18261,7 @@
           <a:bodyPr wrap="square" lIns="0" tIns="0" rIns="0" bIns="0" rtlCol="0" anchor="t"/>
           <a:lstStyle/>
           <a:p>
-            <a:pPr indent="0" marL="0">
+            <a:pPr marL="0" indent="0">
               <a:buNone/>
             </a:pPr>
             <a:r>
@@ -18683,7 +18300,7 @@
           <a:bodyPr wrap="square" lIns="0" tIns="0" rIns="0" bIns="0" rtlCol="0" anchor="t"/>
           <a:lstStyle/>
           <a:p>
-            <a:pPr indent="0" marL="0">
+            <a:pPr marL="0" indent="0">
               <a:buNone/>
             </a:pPr>
             <a:r>
@@ -18858,7 +18475,7 @@
           <a:bodyPr wrap="square" lIns="0" tIns="0" rIns="0" bIns="0" rtlCol="0" anchor="t"/>
           <a:lstStyle/>
           <a:p>
-            <a:pPr indent="0" marL="0">
+            <a:pPr marL="0" indent="0">
               <a:buNone/>
             </a:pPr>
             <a:r>
@@ -18897,7 +18514,7 @@
           <a:bodyPr wrap="square" lIns="0" tIns="0" rIns="0" bIns="0" rtlCol="0" anchor="t"/>
           <a:lstStyle/>
           <a:p>
-            <a:pPr indent="0" marL="0">
+            <a:pPr marL="0" indent="0">
               <a:buNone/>
             </a:pPr>
             <a:r>
@@ -19072,7 +18689,7 @@
           <a:bodyPr wrap="square" lIns="0" tIns="0" rIns="0" bIns="0" rtlCol="0" anchor="t"/>
           <a:lstStyle/>
           <a:p>
-            <a:pPr indent="0" marL="0">
+            <a:pPr marL="0" indent="0">
               <a:buNone/>
             </a:pPr>
             <a:r>
@@ -19111,7 +18728,7 @@
           <a:bodyPr wrap="square" lIns="0" tIns="0" rIns="0" bIns="0" rtlCol="0" anchor="t"/>
           <a:lstStyle/>
           <a:p>
-            <a:pPr indent="0" marL="0">
+            <a:pPr marL="0" indent="0">
               <a:buNone/>
             </a:pPr>
             <a:r>
@@ -19235,7 +18852,7 @@
           <a:bodyPr wrap="square" lIns="0" tIns="0" rIns="0" bIns="0" rtlCol="0" anchor="t"/>
           <a:lstStyle/>
           <a:p>
-            <a:pPr indent="0" marL="0">
+            <a:pPr marL="0" indent="0">
               <a:buNone/>
             </a:pPr>
             <a:r>
@@ -19255,14 +18872,14 @@
       </p:sp>
       <p:pic>
         <p:nvPicPr>
-          <p:cNvPr id="19" name="Image 0" descr="preencoded.png">    </p:cNvPr>
+          <p:cNvPr id="19" name="Image 0" descr="preencoded.png"/>
           <p:cNvPicPr>
             <a:picLocks noChangeAspect="1"/>
           </p:cNvPicPr>
           <p:nvPr/>
         </p:nvPicPr>
         <p:blipFill>
-          <a:blip r:embed="rId1"/>
+          <a:blip r:embed="rId3"/>
           <a:stretch>
             <a:fillRect/>
           </a:stretch>
@@ -19298,7 +18915,7 @@
           <a:bodyPr wrap="square" lIns="0" tIns="0" rIns="0" bIns="0" rtlCol="0" anchor="t"/>
           <a:lstStyle/>
           <a:p>
-            <a:pPr algn="r" indent="0" marL="0">
+            <a:pPr marL="0" indent="0" algn="r">
               <a:buNone/>
             </a:pPr>
             <a:r>
@@ -19332,6 +18949,7 @@
         <a:solidFill>
           <a:srgbClr val="0F172A"/>
         </a:solidFill>
+        <a:effectLst/>
       </p:bgPr>
     </p:bg>
     <p:spTree>
@@ -19369,11 +18987,11 @@
           <a:bodyPr wrap="square" lIns="0" tIns="0" rIns="0" bIns="0" rtlCol="0" anchor="t"/>
           <a:lstStyle/>
           <a:p>
-            <a:pPr indent="0" marL="0">
-              <a:buNone/>
-            </a:pPr>
-            <a:r>
-              <a:rPr lang="en-US" sz="1300" b="1" spc="300" kern="0" dirty="0">
+            <a:pPr marL="0" indent="0">
+              <a:buNone/>
+            </a:pPr>
+            <a:r>
+              <a:rPr lang="en-US" sz="1300" b="1" kern="0" spc="300" dirty="0">
                 <a:solidFill>
                   <a:srgbClr val="10B981"/>
                 </a:solidFill>
@@ -19408,7 +19026,7 @@
           <a:bodyPr wrap="square" lIns="0" tIns="0" rIns="0" bIns="0" rtlCol="0" anchor="t"/>
           <a:lstStyle/>
           <a:p>
-            <a:pPr indent="0" marL="0">
+            <a:pPr marL="0" indent="0">
               <a:buNone/>
             </a:pPr>
             <a:r>
@@ -19474,7 +19092,7 @@
           <a:bodyPr wrap="square" lIns="0" tIns="0" rIns="0" bIns="0" rtlCol="0" anchor="t"/>
           <a:lstStyle/>
           <a:p>
-            <a:pPr algn="ctr" indent="0" marL="0">
+            <a:pPr marL="0" indent="0" algn="ctr">
               <a:buNone/>
             </a:pPr>
             <a:r>
@@ -19513,7 +19131,7 @@
           <a:bodyPr wrap="square" lIns="0" tIns="0" rIns="0" bIns="0" rtlCol="0" anchor="t"/>
           <a:lstStyle/>
           <a:p>
-            <a:pPr algn="ctr" indent="0" marL="0">
+            <a:pPr marL="0" indent="0" algn="ctr">
               <a:buNone/>
             </a:pPr>
             <a:r>
@@ -19579,7 +19197,7 @@
           <a:bodyPr wrap="square" lIns="0" tIns="0" rIns="0" bIns="0" rtlCol="0" anchor="t"/>
           <a:lstStyle/>
           <a:p>
-            <a:pPr algn="ctr" indent="0" marL="0">
+            <a:pPr marL="0" indent="0" algn="ctr">
               <a:buNone/>
             </a:pPr>
             <a:r>
@@ -19618,7 +19236,7 @@
           <a:bodyPr wrap="square" lIns="0" tIns="0" rIns="0" bIns="0" rtlCol="0" anchor="t"/>
           <a:lstStyle/>
           <a:p>
-            <a:pPr algn="ctr" indent="0" marL="0">
+            <a:pPr marL="0" indent="0" algn="ctr">
               <a:buNone/>
             </a:pPr>
             <a:r>
@@ -19684,7 +19302,7 @@
           <a:bodyPr wrap="square" lIns="0" tIns="0" rIns="0" bIns="0" rtlCol="0" anchor="t"/>
           <a:lstStyle/>
           <a:p>
-            <a:pPr algn="ctr" indent="0" marL="0">
+            <a:pPr marL="0" indent="0" algn="ctr">
               <a:buNone/>
             </a:pPr>
             <a:r>
@@ -19723,7 +19341,7 @@
           <a:bodyPr wrap="square" lIns="0" tIns="0" rIns="0" bIns="0" rtlCol="0" anchor="t"/>
           <a:lstStyle/>
           <a:p>
-            <a:pPr algn="ctr" indent="0" marL="0">
+            <a:pPr marL="0" indent="0" algn="ctr">
               <a:buNone/>
             </a:pPr>
             <a:r>
@@ -19789,7 +19407,7 @@
           <a:bodyPr wrap="square" lIns="0" tIns="0" rIns="0" bIns="0" rtlCol="0" anchor="t"/>
           <a:lstStyle/>
           <a:p>
-            <a:pPr algn="ctr" indent="0" marL="0">
+            <a:pPr marL="0" indent="0" algn="ctr">
               <a:buNone/>
             </a:pPr>
             <a:r>
@@ -19828,7 +19446,7 @@
           <a:bodyPr wrap="square" lIns="0" tIns="0" rIns="0" bIns="0" rtlCol="0" anchor="t"/>
           <a:lstStyle/>
           <a:p>
-            <a:pPr algn="ctr" indent="0" marL="0">
+            <a:pPr marL="0" indent="0" algn="ctr">
               <a:buNone/>
             </a:pPr>
             <a:r>
@@ -19892,7 +19510,7 @@
           <a:bodyPr wrap="square" lIns="0" tIns="0" rIns="0" bIns="0" rtlCol="0" anchor="t"/>
           <a:lstStyle/>
           <a:p>
-            <a:pPr indent="0" marL="0">
+            <a:pPr marL="0" indent="0">
               <a:buNone/>
             </a:pPr>
             <a:r>
@@ -19931,7 +19549,7 @@
           <a:bodyPr wrap="square" lIns="0" tIns="0" rIns="0" bIns="0" rtlCol="0" anchor="t"/>
           <a:lstStyle/>
           <a:p>
-            <a:pPr indent="0" marL="0">
+            <a:pPr marL="0" indent="0">
               <a:buNone/>
             </a:pPr>
             <a:r>
@@ -19995,7 +19613,7 @@
           <a:bodyPr wrap="square" lIns="0" tIns="0" rIns="0" bIns="0" rtlCol="0" anchor="t"/>
           <a:lstStyle/>
           <a:p>
-            <a:pPr indent="0" marL="0">
+            <a:pPr marL="0" indent="0">
               <a:buNone/>
             </a:pPr>
             <a:r>
@@ -20034,7 +19652,7 @@
           <a:bodyPr wrap="square" lIns="0" tIns="0" rIns="0" bIns="0" rtlCol="0" anchor="t"/>
           <a:lstStyle/>
           <a:p>
-            <a:pPr indent="0" marL="0">
+            <a:pPr marL="0" indent="0">
               <a:buNone/>
             </a:pPr>
             <a:r>
@@ -20098,7 +19716,7 @@
           <a:bodyPr wrap="square" lIns="0" tIns="0" rIns="0" bIns="0" rtlCol="0" anchor="t"/>
           <a:lstStyle/>
           <a:p>
-            <a:pPr indent="0" marL="0">
+            <a:pPr marL="0" indent="0">
               <a:buNone/>
             </a:pPr>
             <a:r>
@@ -20137,7 +19755,7 @@
           <a:bodyPr wrap="square" lIns="0" tIns="0" rIns="0" bIns="0" rtlCol="0" anchor="t"/>
           <a:lstStyle/>
           <a:p>
-            <a:pPr indent="0" marL="0">
+            <a:pPr marL="0" indent="0">
               <a:buNone/>
             </a:pPr>
             <a:r>
@@ -20157,14 +19775,14 @@
       </p:sp>
       <p:pic>
         <p:nvPicPr>
-          <p:cNvPr id="25" name="Image 0" descr="preencoded.png">    </p:cNvPr>
+          <p:cNvPr id="25" name="Image 0" descr="preencoded.png"/>
           <p:cNvPicPr>
             <a:picLocks noChangeAspect="1"/>
           </p:cNvPicPr>
           <p:nvPr/>
         </p:nvPicPr>
         <p:blipFill>
-          <a:blip r:embed="rId1"/>
+          <a:blip r:embed="rId3"/>
           <a:stretch>
             <a:fillRect/>
           </a:stretch>
@@ -20200,7 +19818,7 @@
           <a:bodyPr wrap="square" lIns="0" tIns="0" rIns="0" bIns="0" rtlCol="0" anchor="t"/>
           <a:lstStyle/>
           <a:p>
-            <a:pPr algn="r" indent="0" marL="0">
+            <a:pPr marL="0" indent="0" algn="r">
               <a:buNone/>
             </a:pPr>
             <a:r>
@@ -20234,6 +19852,7 @@
         <a:solidFill>
           <a:srgbClr val="0F172A"/>
         </a:solidFill>
+        <a:effectLst/>
       </p:bgPr>
     </p:bg>
     <p:spTree>
@@ -20271,11 +19890,11 @@
           <a:bodyPr wrap="square" lIns="0" tIns="0" rIns="0" bIns="0" rtlCol="0" anchor="t"/>
           <a:lstStyle/>
           <a:p>
-            <a:pPr indent="0" marL="0">
-              <a:buNone/>
-            </a:pPr>
-            <a:r>
-              <a:rPr lang="en-US" sz="1300" b="1" spc="300" kern="0" dirty="0">
+            <a:pPr marL="0" indent="0">
+              <a:buNone/>
+            </a:pPr>
+            <a:r>
+              <a:rPr lang="en-US" sz="1300" b="1" kern="0" spc="300" dirty="0">
                 <a:solidFill>
                   <a:srgbClr val="10B981"/>
                 </a:solidFill>
@@ -20310,7 +19929,7 @@
           <a:bodyPr wrap="square" lIns="0" tIns="0" rIns="0" bIns="0" rtlCol="0" anchor="t"/>
           <a:lstStyle/>
           <a:p>
-            <a:pPr indent="0" marL="0">
+            <a:pPr marL="0" indent="0">
               <a:buNone/>
             </a:pPr>
             <a:r>
@@ -20376,11 +19995,11 @@
           <a:bodyPr wrap="square" lIns="0" tIns="0" rIns="0" bIns="0" rtlCol="0" anchor="t"/>
           <a:lstStyle/>
           <a:p>
-            <a:pPr indent="0" marL="0">
-              <a:buNone/>
-            </a:pPr>
-            <a:r>
-              <a:rPr lang="en-US" sz="1200" b="1" spc="200" kern="0" dirty="0">
+            <a:pPr marL="0" indent="0">
+              <a:buNone/>
+            </a:pPr>
+            <a:r>
+              <a:rPr lang="en-US" sz="1200" b="1" kern="0" spc="200" dirty="0">
                 <a:solidFill>
                   <a:srgbClr val="A3B3C9"/>
                 </a:solidFill>
@@ -20415,7 +20034,7 @@
           <a:bodyPr wrap="square" lIns="0" tIns="0" rIns="0" bIns="0" rtlCol="0" anchor="t"/>
           <a:lstStyle/>
           <a:p>
-            <a:pPr indent="0" marL="0">
+            <a:pPr marL="0" indent="0">
               <a:buNone/>
             </a:pPr>
             <a:r>
@@ -20454,7 +20073,7 @@
           <a:bodyPr wrap="square" lIns="0" tIns="0" rIns="0" bIns="0" rtlCol="0" anchor="ctr"/>
           <a:lstStyle/>
           <a:p>
-            <a:pPr indent="0" marL="0">
+            <a:pPr marL="0" indent="0">
               <a:buNone/>
             </a:pPr>
             <a:r>
@@ -20520,11 +20139,11 @@
           <a:bodyPr wrap="square" lIns="0" tIns="0" rIns="0" bIns="0" rtlCol="0" anchor="t"/>
           <a:lstStyle/>
           <a:p>
-            <a:pPr indent="0" marL="0">
-              <a:buNone/>
-            </a:pPr>
-            <a:r>
-              <a:rPr lang="en-US" sz="1200" b="1" spc="200" kern="0" dirty="0">
+            <a:pPr marL="0" indent="0">
+              <a:buNone/>
+            </a:pPr>
+            <a:r>
+              <a:rPr lang="en-US" sz="1200" b="1" kern="0" spc="200" dirty="0">
                 <a:solidFill>
                   <a:srgbClr val="A3B3C9"/>
                 </a:solidFill>
@@ -20559,7 +20178,7 @@
           <a:bodyPr wrap="square" lIns="0" tIns="0" rIns="0" bIns="0" rtlCol="0" anchor="t"/>
           <a:lstStyle/>
           <a:p>
-            <a:pPr indent="0" marL="0">
+            <a:pPr marL="0" indent="0">
               <a:buNone/>
             </a:pPr>
             <a:r>
@@ -20598,7 +20217,7 @@
           <a:bodyPr wrap="square" lIns="0" tIns="0" rIns="0" bIns="0" rtlCol="0" anchor="ctr"/>
           <a:lstStyle/>
           <a:p>
-            <a:pPr indent="0" marL="0">
+            <a:pPr marL="0" indent="0">
               <a:buNone/>
             </a:pPr>
             <a:r>
@@ -20664,11 +20283,11 @@
           <a:bodyPr wrap="square" lIns="0" tIns="0" rIns="0" bIns="0" rtlCol="0" anchor="t"/>
           <a:lstStyle/>
           <a:p>
-            <a:pPr indent="0" marL="0">
-              <a:buNone/>
-            </a:pPr>
-            <a:r>
-              <a:rPr lang="en-US" sz="1200" b="1" spc="200" kern="0" dirty="0">
+            <a:pPr marL="0" indent="0">
+              <a:buNone/>
+            </a:pPr>
+            <a:r>
+              <a:rPr lang="en-US" sz="1200" b="1" kern="0" spc="200" dirty="0">
                 <a:solidFill>
                   <a:srgbClr val="A3B3C9"/>
                 </a:solidFill>
@@ -20703,7 +20322,7 @@
           <a:bodyPr wrap="square" lIns="0" tIns="0" rIns="0" bIns="0" rtlCol="0" anchor="t"/>
           <a:lstStyle/>
           <a:p>
-            <a:pPr indent="0" marL="0">
+            <a:pPr marL="0" indent="0">
               <a:buNone/>
             </a:pPr>
             <a:r>
@@ -20742,7 +20361,7 @@
           <a:bodyPr wrap="square" lIns="0" tIns="0" rIns="0" bIns="0" rtlCol="0" anchor="ctr"/>
           <a:lstStyle/>
           <a:p>
-            <a:pPr indent="0" marL="0">
+            <a:pPr marL="0" indent="0">
               <a:buNone/>
             </a:pPr>
             <a:r>
@@ -20789,7 +20408,7 @@
       </p:sp>
       <p:graphicFrame>
         <p:nvGraphicFramePr>
-          <p:cNvPr id="17" name="Chart 0" descr=""/>
+          <p:cNvPr id="17" name="Chart 0"/>
           <p:cNvGraphicFramePr/>
           <p:nvPr/>
         </p:nvGraphicFramePr>
@@ -20797,9 +20416,9 @@
           <a:off x="5852160" y="1828800"/>
           <a:ext cx="5669280" cy="3840480"/>
         </p:xfrm>
-        <a:graphic xmlns:a="http://schemas.openxmlformats.org/drawingml/2006/main">
+        <a:graphic>
           <a:graphicData uri="http://schemas.openxmlformats.org/drawingml/2006/chart">
-            <c:chart xmlns:c="http://schemas.openxmlformats.org/drawingml/2006/chart" r:id="rId1"/>
+            <c:chart xmlns:c="http://schemas.openxmlformats.org/drawingml/2006/chart" xmlns:r="http://schemas.openxmlformats.org/officeDocument/2006/relationships" r:id="rId3"/>
           </a:graphicData>
         </a:graphic>
       </p:graphicFrame>
@@ -20824,7 +20443,7 @@
           <a:bodyPr wrap="square" lIns="0" tIns="0" rIns="0" bIns="0" rtlCol="0" anchor="t"/>
           <a:lstStyle/>
           <a:p>
-            <a:pPr indent="0" marL="0">
+            <a:pPr marL="0" indent="0">
               <a:buNone/>
             </a:pPr>
             <a:r>
@@ -20844,14 +20463,14 @@
       </p:sp>
       <p:pic>
         <p:nvPicPr>
-          <p:cNvPr id="19" name="Image 0" descr="preencoded.png">    </p:cNvPr>
+          <p:cNvPr id="19" name="Image 0" descr="preencoded.png"/>
           <p:cNvPicPr>
             <a:picLocks noChangeAspect="1"/>
           </p:cNvPicPr>
           <p:nvPr/>
         </p:nvPicPr>
         <p:blipFill>
-          <a:blip r:embed="rId2"/>
+          <a:blip r:embed="rId4"/>
           <a:stretch>
             <a:fillRect/>
           </a:stretch>
@@ -20887,7 +20506,7 @@
           <a:bodyPr wrap="square" lIns="0" tIns="0" rIns="0" bIns="0" rtlCol="0" anchor="t"/>
           <a:lstStyle/>
           <a:p>
-            <a:pPr algn="r" indent="0" marL="0">
+            <a:pPr marL="0" indent="0" algn="r">
               <a:buNone/>
             </a:pPr>
             <a:r>
@@ -20926,7 +20545,7 @@
           <a:bodyPr wrap="square" lIns="0" tIns="0" rIns="0" bIns="0" rtlCol="0" anchor="t"/>
           <a:lstStyle/>
           <a:p>
-            <a:pPr indent="0" marL="0">
+            <a:pPr marL="0" indent="0">
               <a:buNone/>
             </a:pPr>
             <a:r>
@@ -20960,6 +20579,7 @@
         <a:solidFill>
           <a:srgbClr val="0F172A"/>
         </a:solidFill>
+        <a:effectLst/>
       </p:bgPr>
     </p:bg>
     <p:spTree>
@@ -20997,11 +20617,11 @@
           <a:bodyPr wrap="square" lIns="0" tIns="0" rIns="0" bIns="0" rtlCol="0" anchor="t"/>
           <a:lstStyle/>
           <a:p>
-            <a:pPr indent="0" marL="0">
-              <a:buNone/>
-            </a:pPr>
-            <a:r>
-              <a:rPr lang="en-US" sz="1300" b="1" spc="300" kern="0" dirty="0">
+            <a:pPr marL="0" indent="0">
+              <a:buNone/>
+            </a:pPr>
+            <a:r>
+              <a:rPr lang="en-US" sz="1300" b="1" kern="0" spc="300" dirty="0">
                 <a:solidFill>
                   <a:srgbClr val="10B981"/>
                 </a:solidFill>
@@ -21036,7 +20656,7 @@
           <a:bodyPr wrap="square" lIns="0" tIns="0" rIns="0" bIns="0" rtlCol="0" anchor="t"/>
           <a:lstStyle/>
           <a:p>
-            <a:pPr indent="0" marL="0">
+            <a:pPr marL="0" indent="0">
               <a:buNone/>
             </a:pPr>
             <a:r>
@@ -21108,14 +20728,14 @@
       </p:sp>
       <p:pic>
         <p:nvPicPr>
-          <p:cNvPr id="6" name="Image 0" descr="preencoded.png">    </p:cNvPr>
+          <p:cNvPr id="6" name="Image 0" descr="preencoded.png"/>
           <p:cNvPicPr>
             <a:picLocks noChangeAspect="1"/>
           </p:cNvPicPr>
           <p:nvPr/>
         </p:nvPicPr>
         <p:blipFill>
-          <a:blip r:embed="rId1"/>
+          <a:blip r:embed="rId3"/>
           <a:stretch>
             <a:fillRect/>
           </a:stretch>
@@ -21151,7 +20771,7 @@
           <a:bodyPr wrap="square" lIns="0" tIns="0" rIns="0" bIns="0" rtlCol="0" anchor="t"/>
           <a:lstStyle/>
           <a:p>
-            <a:pPr indent="0" marL="0">
+            <a:pPr marL="0" indent="0">
               <a:buNone/>
             </a:pPr>
             <a:r>
@@ -21190,7 +20810,7 @@
           <a:bodyPr wrap="square" lIns="0" tIns="0" rIns="0" bIns="0" rtlCol="0" anchor="t"/>
           <a:lstStyle/>
           <a:p>
-            <a:pPr indent="0" marL="0">
+            <a:pPr marL="0" indent="0">
               <a:buNone/>
             </a:pPr>
             <a:r>
@@ -21229,7 +20849,7 @@
           <a:bodyPr wrap="square" lIns="0" tIns="0" rIns="0" bIns="0" rtlCol="0" anchor="t"/>
           <a:lstStyle/>
           <a:p>
-            <a:pPr indent="0" marL="0">
+            <a:pPr marL="0" indent="0">
               <a:buNone/>
             </a:pPr>
             <a:r>
@@ -21301,14 +20921,14 @@
       </p:sp>
       <p:pic>
         <p:nvPicPr>
-          <p:cNvPr id="12" name="Image 1" descr="preencoded.png">    </p:cNvPr>
+          <p:cNvPr id="12" name="Image 1" descr="preencoded.png"/>
           <p:cNvPicPr>
             <a:picLocks noChangeAspect="1"/>
           </p:cNvPicPr>
           <p:nvPr/>
         </p:nvPicPr>
         <p:blipFill>
-          <a:blip r:embed="rId2"/>
+          <a:blip r:embed="rId4"/>
           <a:stretch>
             <a:fillRect/>
           </a:stretch>
@@ -21344,7 +20964,7 @@
           <a:bodyPr wrap="square" lIns="0" tIns="0" rIns="0" bIns="0" rtlCol="0" anchor="t"/>
           <a:lstStyle/>
           <a:p>
-            <a:pPr indent="0" marL="0">
+            <a:pPr marL="0" indent="0">
               <a:buNone/>
             </a:pPr>
             <a:r>
@@ -21383,7 +21003,7 @@
           <a:bodyPr wrap="square" lIns="0" tIns="0" rIns="0" bIns="0" rtlCol="0" anchor="t"/>
           <a:lstStyle/>
           <a:p>
-            <a:pPr indent="0" marL="0">
+            <a:pPr marL="0" indent="0">
               <a:buNone/>
             </a:pPr>
             <a:r>
@@ -21422,7 +21042,7 @@
           <a:bodyPr wrap="square" lIns="0" tIns="0" rIns="0" bIns="0" rtlCol="0" anchor="t"/>
           <a:lstStyle/>
           <a:p>
-            <a:pPr indent="0" marL="0">
+            <a:pPr marL="0" indent="0">
               <a:buNone/>
             </a:pPr>
             <a:r>
@@ -21488,7 +21108,7 @@
           <a:bodyPr wrap="square" lIns="0" tIns="0" rIns="0" bIns="0" rtlCol="0" anchor="ctr"/>
           <a:lstStyle/>
           <a:p>
-            <a:pPr indent="0" marL="0">
+            <a:pPr marL="0" indent="0">
               <a:buNone/>
             </a:pPr>
             <a:r>
@@ -21508,14 +21128,14 @@
       </p:sp>
       <p:pic>
         <p:nvPicPr>
-          <p:cNvPr id="18" name="Image 2" descr="preencoded.png">    </p:cNvPr>
+          <p:cNvPr id="18" name="Image 2" descr="preencoded.png"/>
           <p:cNvPicPr>
             <a:picLocks noChangeAspect="1"/>
           </p:cNvPicPr>
           <p:nvPr/>
         </p:nvPicPr>
         <p:blipFill>
-          <a:blip r:embed="rId3"/>
+          <a:blip r:embed="rId5"/>
           <a:stretch>
             <a:fillRect/>
           </a:stretch>
@@ -21551,7 +21171,7 @@
           <a:bodyPr wrap="square" lIns="0" tIns="0" rIns="0" bIns="0" rtlCol="0" anchor="t"/>
           <a:lstStyle/>
           <a:p>
-            <a:pPr algn="r" indent="0" marL="0">
+            <a:pPr marL="0" indent="0" algn="r">
               <a:buNone/>
             </a:pPr>
             <a:r>
@@ -21585,6 +21205,7 @@
         <a:solidFill>
           <a:srgbClr val="0F172A"/>
         </a:solidFill>
+        <a:effectLst/>
       </p:bgPr>
     </p:bg>
     <p:spTree>
@@ -21622,11 +21243,11 @@
           <a:bodyPr wrap="square" lIns="0" tIns="0" rIns="0" bIns="0" rtlCol="0" anchor="t"/>
           <a:lstStyle/>
           <a:p>
-            <a:pPr indent="0" marL="0">
-              <a:buNone/>
-            </a:pPr>
-            <a:r>
-              <a:rPr lang="en-US" sz="1300" b="1" spc="300" kern="0" dirty="0">
+            <a:pPr marL="0" indent="0">
+              <a:buNone/>
+            </a:pPr>
+            <a:r>
+              <a:rPr lang="en-US" sz="1300" b="1" kern="0" spc="300" dirty="0">
                 <a:solidFill>
                   <a:srgbClr val="10B981"/>
                 </a:solidFill>
@@ -21661,7 +21282,7 @@
           <a:bodyPr wrap="square" lIns="0" tIns="0" rIns="0" bIns="0" rtlCol="0" anchor="t"/>
           <a:lstStyle/>
           <a:p>
-            <a:pPr indent="0" marL="0">
+            <a:pPr marL="0" indent="0">
               <a:buNone/>
             </a:pPr>
             <a:r>
@@ -21727,7 +21348,7 @@
           <a:bodyPr wrap="square" lIns="0" tIns="0" rIns="0" bIns="0" rtlCol="0" anchor="t"/>
           <a:lstStyle/>
           <a:p>
-            <a:pPr indent="0" marL="0">
+            <a:pPr marL="0" indent="0">
               <a:buNone/>
             </a:pPr>
             <a:r>
@@ -21878,7 +21499,7 @@
           <a:bodyPr wrap="square" lIns="0" tIns="0" rIns="0" bIns="0" rtlCol="0" anchor="t"/>
           <a:lstStyle/>
           <a:p>
-            <a:pPr indent="0" marL="0">
+            <a:pPr marL="0" indent="0">
               <a:buNone/>
             </a:pPr>
             <a:r>
@@ -22029,7 +21650,7 @@
           <a:bodyPr wrap="square" lIns="0" tIns="0" rIns="0" bIns="0" rtlCol="0" anchor="t"/>
           <a:lstStyle/>
           <a:p>
-            <a:pPr indent="0" marL="0">
+            <a:pPr marL="0" indent="0">
               <a:buNone/>
             </a:pPr>
             <a:r>
@@ -22134,14 +21755,14 @@
       </p:sp>
       <p:pic>
         <p:nvPicPr>
-          <p:cNvPr id="13" name="Image 0" descr="preencoded.png">    </p:cNvPr>
+          <p:cNvPr id="13" name="Image 0" descr="preencoded.png"/>
           <p:cNvPicPr>
             <a:picLocks noChangeAspect="1"/>
           </p:cNvPicPr>
           <p:nvPr/>
         </p:nvPicPr>
         <p:blipFill>
-          <a:blip r:embed="rId1"/>
+          <a:blip r:embed="rId3"/>
           <a:stretch>
             <a:fillRect/>
           </a:stretch>
@@ -22177,7 +21798,7 @@
           <a:bodyPr wrap="square" lIns="0" tIns="0" rIns="0" bIns="0" rtlCol="0" anchor="t"/>
           <a:lstStyle/>
           <a:p>
-            <a:pPr algn="r" indent="0" marL="0">
+            <a:pPr marL="0" indent="0" algn="r">
               <a:buNone/>
             </a:pPr>
             <a:r>
@@ -22211,6 +21832,7 @@
         <a:solidFill>
           <a:srgbClr val="0F172A"/>
         </a:solidFill>
+        <a:effectLst/>
       </p:bgPr>
     </p:bg>
     <p:spTree>
@@ -22248,11 +21870,11 @@
           <a:bodyPr wrap="square" lIns="0" tIns="0" rIns="0" bIns="0" rtlCol="0" anchor="t"/>
           <a:lstStyle/>
           <a:p>
-            <a:pPr indent="0" marL="0">
-              <a:buNone/>
-            </a:pPr>
-            <a:r>
-              <a:rPr lang="en-US" sz="1300" b="1" spc="300" kern="0" dirty="0">
+            <a:pPr marL="0" indent="0">
+              <a:buNone/>
+            </a:pPr>
+            <a:r>
+              <a:rPr lang="en-US" sz="1300" b="1" kern="0" spc="300" dirty="0">
                 <a:solidFill>
                   <a:srgbClr val="10B981"/>
                 </a:solidFill>
@@ -22287,7 +21909,7 @@
           <a:bodyPr wrap="square" lIns="0" tIns="0" rIns="0" bIns="0" rtlCol="0" anchor="t"/>
           <a:lstStyle/>
           <a:p>
-            <a:pPr indent="0" marL="0">
+            <a:pPr marL="0" indent="0">
               <a:buNone/>
             </a:pPr>
             <a:r>
@@ -22359,14 +21981,14 @@
       </p:sp>
       <p:pic>
         <p:nvPicPr>
-          <p:cNvPr id="6" name="Image 0" descr="preencoded.png">    </p:cNvPr>
+          <p:cNvPr id="6" name="Image 0" descr="preencoded.png"/>
           <p:cNvPicPr>
             <a:picLocks noChangeAspect="1"/>
           </p:cNvPicPr>
           <p:nvPr/>
         </p:nvPicPr>
         <p:blipFill>
-          <a:blip r:embed="rId1"/>
+          <a:blip r:embed="rId3"/>
           <a:stretch>
             <a:fillRect/>
           </a:stretch>
@@ -22402,7 +22024,7 @@
           <a:bodyPr wrap="square" lIns="0" tIns="0" rIns="0" bIns="0" rtlCol="0" anchor="t"/>
           <a:lstStyle/>
           <a:p>
-            <a:pPr indent="0" marL="0">
+            <a:pPr marL="0" indent="0">
               <a:buNone/>
             </a:pPr>
             <a:r>
@@ -22441,7 +22063,7 @@
           <a:bodyPr wrap="square" lIns="0" tIns="0" rIns="0" bIns="0" rtlCol="0" anchor="t"/>
           <a:lstStyle/>
           <a:p>
-            <a:pPr indent="0" marL="0">
+            <a:pPr marL="0" indent="0">
               <a:buNone/>
             </a:pPr>
             <a:r>
@@ -22513,14 +22135,14 @@
       </p:sp>
       <p:pic>
         <p:nvPicPr>
-          <p:cNvPr id="11" name="Image 1" descr="preencoded.png">    </p:cNvPr>
+          <p:cNvPr id="11" name="Image 1" descr="preencoded.png"/>
           <p:cNvPicPr>
             <a:picLocks noChangeAspect="1"/>
           </p:cNvPicPr>
           <p:nvPr/>
         </p:nvPicPr>
         <p:blipFill>
-          <a:blip r:embed="rId2"/>
+          <a:blip r:embed="rId4"/>
           <a:stretch>
             <a:fillRect/>
           </a:stretch>
@@ -22556,7 +22178,7 @@
           <a:bodyPr wrap="square" lIns="0" tIns="0" rIns="0" bIns="0" rtlCol="0" anchor="t"/>
           <a:lstStyle/>
           <a:p>
-            <a:pPr indent="0" marL="0">
+            <a:pPr marL="0" indent="0">
               <a:buNone/>
             </a:pPr>
             <a:r>
@@ -22595,7 +22217,7 @@
           <a:bodyPr wrap="square" lIns="0" tIns="0" rIns="0" bIns="0" rtlCol="0" anchor="t"/>
           <a:lstStyle/>
           <a:p>
-            <a:pPr indent="0" marL="0">
+            <a:pPr marL="0" indent="0">
               <a:buNone/>
             </a:pPr>
             <a:r>
@@ -22667,14 +22289,14 @@
       </p:sp>
       <p:pic>
         <p:nvPicPr>
-          <p:cNvPr id="16" name="Image 2" descr="preencoded.png">    </p:cNvPr>
+          <p:cNvPr id="16" name="Image 2" descr="preencoded.png"/>
           <p:cNvPicPr>
             <a:picLocks noChangeAspect="1"/>
           </p:cNvPicPr>
           <p:nvPr/>
         </p:nvPicPr>
         <p:blipFill>
-          <a:blip r:embed="rId3"/>
+          <a:blip r:embed="rId5"/>
           <a:stretch>
             <a:fillRect/>
           </a:stretch>
@@ -22710,7 +22332,7 @@
           <a:bodyPr wrap="square" lIns="0" tIns="0" rIns="0" bIns="0" rtlCol="0" anchor="t"/>
           <a:lstStyle/>
           <a:p>
-            <a:pPr indent="0" marL="0">
+            <a:pPr marL="0" indent="0">
               <a:buNone/>
             </a:pPr>
             <a:r>
@@ -22749,7 +22371,7 @@
           <a:bodyPr wrap="square" lIns="0" tIns="0" rIns="0" bIns="0" rtlCol="0" anchor="t"/>
           <a:lstStyle/>
           <a:p>
-            <a:pPr indent="0" marL="0">
+            <a:pPr marL="0" indent="0">
               <a:buNone/>
             </a:pPr>
             <a:r>
@@ -22769,7 +22391,7 @@
       </p:sp>
       <p:graphicFrame>
         <p:nvGraphicFramePr>
-          <p:cNvPr id="19" name="Chart 0" descr=""/>
+          <p:cNvPr id="19" name="Chart 0"/>
           <p:cNvGraphicFramePr/>
           <p:nvPr/>
         </p:nvGraphicFramePr>
@@ -22777,15 +22399,15 @@
           <a:off x="685800" y="2606040"/>
           <a:ext cx="3200400" cy="1828800"/>
         </p:xfrm>
-        <a:graphic xmlns:a="http://schemas.openxmlformats.org/drawingml/2006/main">
+        <a:graphic>
           <a:graphicData uri="http://schemas.openxmlformats.org/drawingml/2006/chart">
-            <c:chart xmlns:c="http://schemas.openxmlformats.org/drawingml/2006/chart" r:id="rId4"/>
+            <c:chart xmlns:c="http://schemas.openxmlformats.org/drawingml/2006/chart" xmlns:r="http://schemas.openxmlformats.org/officeDocument/2006/relationships" r:id="rId6"/>
           </a:graphicData>
         </a:graphic>
       </p:graphicFrame>
       <p:graphicFrame>
         <p:nvGraphicFramePr>
-          <p:cNvPr id="20" name="Chart 1" descr=""/>
+          <p:cNvPr id="20" name="Chart 1"/>
           <p:cNvGraphicFramePr/>
           <p:nvPr/>
         </p:nvGraphicFramePr>
@@ -22793,15 +22415,15 @@
           <a:off x="4434840" y="2606040"/>
           <a:ext cx="3200400" cy="1828800"/>
         </p:xfrm>
-        <a:graphic xmlns:a="http://schemas.openxmlformats.org/drawingml/2006/main">
+        <a:graphic>
           <a:graphicData uri="http://schemas.openxmlformats.org/drawingml/2006/chart">
-            <c:chart xmlns:c="http://schemas.openxmlformats.org/drawingml/2006/chart" r:id="rId5"/>
+            <c:chart xmlns:c="http://schemas.openxmlformats.org/drawingml/2006/chart" xmlns:r="http://schemas.openxmlformats.org/officeDocument/2006/relationships" r:id="rId7"/>
           </a:graphicData>
         </a:graphic>
       </p:graphicFrame>
       <p:graphicFrame>
         <p:nvGraphicFramePr>
-          <p:cNvPr id="21" name="Chart 2" descr=""/>
+          <p:cNvPr id="21" name="Chart 2"/>
           <p:cNvGraphicFramePr/>
           <p:nvPr/>
         </p:nvGraphicFramePr>
@@ -22809,9 +22431,9 @@
           <a:off x="8915400" y="2606040"/>
           <a:ext cx="1737360" cy="1737360"/>
         </p:xfrm>
-        <a:graphic xmlns:a="http://schemas.openxmlformats.org/drawingml/2006/main">
+        <a:graphic>
           <a:graphicData uri="http://schemas.openxmlformats.org/drawingml/2006/chart">
-            <c:chart xmlns:c="http://schemas.openxmlformats.org/drawingml/2006/chart" r:id="rId6"/>
+            <c:chart xmlns:c="http://schemas.openxmlformats.org/drawingml/2006/chart" xmlns:r="http://schemas.openxmlformats.org/officeDocument/2006/relationships" r:id="rId8"/>
           </a:graphicData>
         </a:graphic>
       </p:graphicFrame>
@@ -22836,7 +22458,7 @@
           <a:bodyPr wrap="square" lIns="0" tIns="0" rIns="0" bIns="0" rtlCol="0" anchor="t"/>
           <a:lstStyle/>
           <a:p>
-            <a:pPr algn="ctr" indent="0" marL="0">
+            <a:pPr marL="0" indent="0" algn="ctr">
               <a:buNone/>
             </a:pPr>
             <a:r>
@@ -22875,7 +22497,7 @@
           <a:bodyPr wrap="square" lIns="0" tIns="0" rIns="0" bIns="0" rtlCol="0" anchor="t"/>
           <a:lstStyle/>
           <a:p>
-            <a:pPr algn="ctr" indent="0" marL="0">
+            <a:pPr marL="0" indent="0" algn="ctr">
               <a:buNone/>
             </a:pPr>
             <a:r>
@@ -22914,7 +22536,7 @@
           <a:bodyPr wrap="square" lIns="0" tIns="0" rIns="0" bIns="0" rtlCol="0" anchor="t"/>
           <a:lstStyle/>
           <a:p>
-            <a:pPr indent="0" marL="0">
+            <a:pPr marL="0" indent="0">
               <a:buNone/>
             </a:pPr>
             <a:r>
@@ -22934,14 +22556,14 @@
       </p:sp>
       <p:pic>
         <p:nvPicPr>
-          <p:cNvPr id="25" name="Image 3" descr="preencoded.png">    </p:cNvPr>
+          <p:cNvPr id="25" name="Image 3" descr="preencoded.png"/>
           <p:cNvPicPr>
             <a:picLocks noChangeAspect="1"/>
           </p:cNvPicPr>
           <p:nvPr/>
         </p:nvPicPr>
         <p:blipFill>
-          <a:blip r:embed="rId7"/>
+          <a:blip r:embed="rId9"/>
           <a:stretch>
             <a:fillRect/>
           </a:stretch>
@@ -22977,7 +22599,7 @@
           <a:bodyPr wrap="square" lIns="0" tIns="0" rIns="0" bIns="0" rtlCol="0" anchor="t"/>
           <a:lstStyle/>
           <a:p>
-            <a:pPr algn="r" indent="0" marL="0">
+            <a:pPr marL="0" indent="0" algn="r">
               <a:buNone/>
             </a:pPr>
             <a:r>
@@ -23016,7 +22638,7 @@
           <a:bodyPr wrap="square" lIns="0" tIns="0" rIns="0" bIns="0" rtlCol="0" anchor="t"/>
           <a:lstStyle/>
           <a:p>
-            <a:pPr indent="0" marL="0">
+            <a:pPr marL="0" indent="0">
               <a:buNone/>
             </a:pPr>
             <a:r>
@@ -23050,6 +22672,7 @@
         <a:solidFill>
           <a:srgbClr val="0F172A"/>
         </a:solidFill>
+        <a:effectLst/>
       </p:bgPr>
     </p:bg>
     <p:spTree>
@@ -23068,14 +22691,14 @@
       </p:grpSpPr>
       <p:pic>
         <p:nvPicPr>
-          <p:cNvPr id="2" name="Image 0" descr="preencoded.png">    </p:cNvPr>
+          <p:cNvPr id="2" name="Image 0" descr="preencoded.png"/>
           <p:cNvPicPr>
             <a:picLocks noChangeAspect="1"/>
           </p:cNvPicPr>
           <p:nvPr/>
         </p:nvPicPr>
         <p:blipFill>
-          <a:blip r:embed="rId1"/>
+          <a:blip r:embed="rId3"/>
           <a:stretch>
             <a:fillRect/>
           </a:stretch>
@@ -23111,7 +22734,7 @@
           <a:bodyPr wrap="square" lIns="0" tIns="0" rIns="0" bIns="0" rtlCol="0" anchor="t"/>
           <a:lstStyle/>
           <a:p>
-            <a:pPr indent="0" marL="0">
+            <a:pPr marL="0" indent="0">
               <a:buNone/>
             </a:pPr>
             <a:r>
@@ -23156,14 +22779,14 @@
       </p:sp>
       <p:pic>
         <p:nvPicPr>
-          <p:cNvPr id="5" name="Image 1" descr="preencoded.png">    </p:cNvPr>
+          <p:cNvPr id="5" name="Image 1" descr="preencoded.png"/>
           <p:cNvPicPr>
             <a:picLocks noChangeAspect="1"/>
           </p:cNvPicPr>
           <p:nvPr/>
         </p:nvPicPr>
         <p:blipFill>
-          <a:blip r:embed="rId2"/>
+          <a:blip r:embed="rId4"/>
           <a:stretch>
             <a:fillRect/>
           </a:stretch>
@@ -23199,7 +22822,7 @@
           <a:bodyPr wrap="square" lIns="0" tIns="0" rIns="0" bIns="0" rtlCol="0" anchor="t"/>
           <a:lstStyle/>
           <a:p>
-            <a:pPr indent="0" marL="0">
+            <a:pPr marL="0" indent="0">
               <a:spcAft>
                 <a:spcPts val="400"/>
               </a:spcAft>
@@ -23219,7 +22842,7 @@
             <a:endParaRPr lang="en-US" sz="1700" dirty="0"/>
           </a:p>
           <a:p>
-            <a:pPr indent="0" marL="0">
+            <a:pPr marL="0" indent="0">
               <a:buNone/>
             </a:pPr>
             <a:r>
@@ -23266,14 +22889,14 @@
       </p:sp>
       <p:pic>
         <p:nvPicPr>
-          <p:cNvPr id="8" name="Image 2" descr="preencoded.png">    </p:cNvPr>
+          <p:cNvPr id="8" name="Image 2" descr="preencoded.png"/>
           <p:cNvPicPr>
             <a:picLocks noChangeAspect="1"/>
           </p:cNvPicPr>
           <p:nvPr/>
         </p:nvPicPr>
         <p:blipFill>
-          <a:blip r:embed="rId3"/>
+          <a:blip r:embed="rId5"/>
           <a:stretch>
             <a:fillRect/>
           </a:stretch>
@@ -23334,7 +22957,7 @@
           <a:bodyPr wrap="square" lIns="0" tIns="0" rIns="0" bIns="0" rtlCol="0" anchor="ctr"/>
           <a:lstStyle/>
           <a:p>
-            <a:pPr algn="ctr" indent="0" marL="0">
+            <a:pPr marL="0" indent="0" algn="ctr">
               <a:buNone/>
             </a:pPr>
             <a:r>
@@ -23379,14 +23002,14 @@
       </p:sp>
       <p:pic>
         <p:nvPicPr>
-          <p:cNvPr id="12" name="Image 3" descr="preencoded.png">    </p:cNvPr>
+          <p:cNvPr id="12" name="Image 3" descr="preencoded.png"/>
           <p:cNvPicPr>
             <a:picLocks noChangeAspect="1"/>
           </p:cNvPicPr>
           <p:nvPr/>
         </p:nvPicPr>
         <p:blipFill>
-          <a:blip r:embed="rId4"/>
+          <a:blip r:embed="rId6"/>
           <a:stretch>
             <a:fillRect/>
           </a:stretch>
@@ -23422,7 +23045,7 @@
           <a:bodyPr wrap="square" lIns="0" tIns="0" rIns="0" bIns="0" rtlCol="0" anchor="t"/>
           <a:lstStyle/>
           <a:p>
-            <a:pPr indent="0" marL="0">
+            <a:pPr marL="0" indent="0">
               <a:spcAft>
                 <a:spcPts val="400"/>
               </a:spcAft>
@@ -23442,7 +23065,7 @@
             <a:endParaRPr lang="en-US" sz="1700" dirty="0"/>
           </a:p>
           <a:p>
-            <a:pPr indent="0" marL="0">
+            <a:pPr marL="0" indent="0">
               <a:buNone/>
             </a:pPr>
             <a:r>
@@ -23489,14 +23112,14 @@
       </p:sp>
       <p:pic>
         <p:nvPicPr>
-          <p:cNvPr id="15" name="Image 4" descr="preencoded.png">    </p:cNvPr>
+          <p:cNvPr id="15" name="Image 4" descr="preencoded.png"/>
           <p:cNvPicPr>
             <a:picLocks noChangeAspect="1"/>
           </p:cNvPicPr>
           <p:nvPr/>
         </p:nvPicPr>
         <p:blipFill>
-          <a:blip r:embed="rId5"/>
+          <a:blip r:embed="rId7"/>
           <a:stretch>
             <a:fillRect/>
           </a:stretch>
@@ -23557,7 +23180,7 @@
           <a:bodyPr wrap="square" lIns="0" tIns="0" rIns="0" bIns="0" rtlCol="0" anchor="ctr"/>
           <a:lstStyle/>
           <a:p>
-            <a:pPr algn="ctr" indent="0" marL="0">
+            <a:pPr marL="0" indent="0" algn="ctr">
               <a:buNone/>
             </a:pPr>
             <a:r>
@@ -23602,14 +23225,14 @@
       </p:sp>
       <p:pic>
         <p:nvPicPr>
-          <p:cNvPr id="19" name="Image 5" descr="preencoded.png">    </p:cNvPr>
+          <p:cNvPr id="19" name="Image 5" descr="preencoded.png"/>
           <p:cNvPicPr>
             <a:picLocks noChangeAspect="1"/>
           </p:cNvPicPr>
           <p:nvPr/>
         </p:nvPicPr>
         <p:blipFill>
-          <a:blip r:embed="rId6"/>
+          <a:blip r:embed="rId8"/>
           <a:stretch>
             <a:fillRect/>
           </a:stretch>
@@ -23645,7 +23268,7 @@
           <a:bodyPr wrap="square" lIns="0" tIns="0" rIns="0" bIns="0" rtlCol="0" anchor="t"/>
           <a:lstStyle/>
           <a:p>
-            <a:pPr indent="0" marL="0">
+            <a:pPr marL="0" indent="0">
               <a:spcAft>
                 <a:spcPts val="400"/>
               </a:spcAft>
@@ -23665,7 +23288,7 @@
             <a:endParaRPr lang="en-US" sz="1700" dirty="0"/>
           </a:p>
           <a:p>
-            <a:pPr indent="0" marL="0">
+            <a:pPr marL="0" indent="0">
               <a:buNone/>
             </a:pPr>
             <a:r>
@@ -23712,14 +23335,14 @@
       </p:sp>
       <p:pic>
         <p:nvPicPr>
-          <p:cNvPr id="22" name="Image 6" descr="preencoded.png">    </p:cNvPr>
+          <p:cNvPr id="22" name="Image 6" descr="preencoded.png"/>
           <p:cNvPicPr>
             <a:picLocks noChangeAspect="1"/>
           </p:cNvPicPr>
           <p:nvPr/>
         </p:nvPicPr>
         <p:blipFill>
-          <a:blip r:embed="rId7"/>
+          <a:blip r:embed="rId9"/>
           <a:stretch>
             <a:fillRect/>
           </a:stretch>
@@ -23780,7 +23403,7 @@
           <a:bodyPr wrap="square" lIns="0" tIns="0" rIns="0" bIns="0" rtlCol="0" anchor="ctr"/>
           <a:lstStyle/>
           <a:p>
-            <a:pPr algn="ctr" indent="0" marL="0">
+            <a:pPr marL="0" indent="0" algn="ctr">
               <a:buNone/>
             </a:pPr>
             <a:r>
@@ -23800,14 +23423,14 @@
       </p:sp>
       <p:pic>
         <p:nvPicPr>
-          <p:cNvPr id="25" name="Image 7" descr="preencoded.png">    </p:cNvPr>
+          <p:cNvPr id="25" name="Image 7" descr="preencoded.png"/>
           <p:cNvPicPr>
             <a:picLocks noChangeAspect="1"/>
           </p:cNvPicPr>
           <p:nvPr/>
         </p:nvPicPr>
         <p:blipFill>
-          <a:blip r:embed="rId8"/>
+          <a:blip r:embed="rId3"/>
           <a:stretch>
             <a:fillRect/>
           </a:stretch>
@@ -23843,7 +23466,7 @@
           <a:bodyPr wrap="square" lIns="0" tIns="0" rIns="0" bIns="0" rtlCol="0" anchor="t"/>
           <a:lstStyle/>
           <a:p>
-            <a:pPr algn="r" indent="0" marL="0">
+            <a:pPr marL="0" indent="0" algn="r">
               <a:buNone/>
             </a:pPr>
             <a:r>
@@ -23877,6 +23500,7 @@
         <a:solidFill>
           <a:srgbClr val="0F172A"/>
         </a:solidFill>
+        <a:effectLst/>
       </p:bgPr>
     </p:bg>
     <p:spTree>
@@ -23914,11 +23538,11 @@
           <a:bodyPr wrap="square" lIns="0" tIns="0" rIns="0" bIns="0" rtlCol="0" anchor="t"/>
           <a:lstStyle/>
           <a:p>
-            <a:pPr indent="0" marL="0">
-              <a:buNone/>
-            </a:pPr>
-            <a:r>
-              <a:rPr lang="en-US" sz="1300" b="1" spc="300" kern="0" dirty="0">
+            <a:pPr marL="0" indent="0">
+              <a:buNone/>
+            </a:pPr>
+            <a:r>
+              <a:rPr lang="en-US" sz="1300" b="1" kern="0" spc="300" dirty="0">
                 <a:solidFill>
                   <a:srgbClr val="10B981"/>
                 </a:solidFill>
@@ -23953,7 +23577,7 @@
           <a:bodyPr wrap="square" lIns="0" tIns="0" rIns="0" bIns="0" rtlCol="0" anchor="t"/>
           <a:lstStyle/>
           <a:p>
-            <a:pPr indent="0" marL="0">
+            <a:pPr marL="0" indent="0">
               <a:buNone/>
             </a:pPr>
             <a:r>
@@ -24025,14 +23649,14 @@
       </p:sp>
       <p:pic>
         <p:nvPicPr>
-          <p:cNvPr id="6" name="Image 0" descr="preencoded.png">    </p:cNvPr>
+          <p:cNvPr id="6" name="Image 0" descr="preencoded.png"/>
           <p:cNvPicPr>
             <a:picLocks noChangeAspect="1"/>
           </p:cNvPicPr>
           <p:nvPr/>
         </p:nvPicPr>
         <p:blipFill>
-          <a:blip r:embed="rId1"/>
+          <a:blip r:embed="rId3"/>
           <a:stretch>
             <a:fillRect/>
           </a:stretch>
@@ -24068,11 +23692,11 @@
           <a:bodyPr wrap="square" lIns="0" tIns="0" rIns="0" bIns="0" rtlCol="0" anchor="t"/>
           <a:lstStyle/>
           <a:p>
-            <a:pPr indent="0" marL="0">
-              <a:buNone/>
-            </a:pPr>
-            <a:r>
-              <a:rPr lang="en-US" sz="1250" b="1" spc="200" kern="0" dirty="0">
+            <a:pPr marL="0" indent="0">
+              <a:buNone/>
+            </a:pPr>
+            <a:r>
+              <a:rPr lang="en-US" sz="1250" b="1" kern="0" spc="200" dirty="0">
                 <a:solidFill>
                   <a:srgbClr val="FBBF24"/>
                 </a:solidFill>
@@ -24107,7 +23731,7 @@
           <a:bodyPr wrap="square" lIns="0" tIns="0" rIns="0" bIns="0" rtlCol="0" anchor="t"/>
           <a:lstStyle/>
           <a:p>
-            <a:pPr indent="0" marL="0">
+            <a:pPr marL="0" indent="0">
               <a:buNone/>
             </a:pPr>
             <a:r>
@@ -24146,7 +23770,7 @@
           <a:bodyPr wrap="square" lIns="0" tIns="0" rIns="0" bIns="0" rtlCol="0" anchor="t"/>
           <a:lstStyle/>
           <a:p>
-            <a:pPr indent="0" marL="0">
+            <a:pPr marL="0" indent="0">
               <a:buNone/>
             </a:pPr>
             <a:r>
@@ -24218,14 +23842,14 @@
       </p:sp>
       <p:pic>
         <p:nvPicPr>
-          <p:cNvPr id="12" name="Image 1" descr="preencoded.png">    </p:cNvPr>
+          <p:cNvPr id="12" name="Image 1" descr="preencoded.png"/>
           <p:cNvPicPr>
             <a:picLocks noChangeAspect="1"/>
           </p:cNvPicPr>
           <p:nvPr/>
         </p:nvPicPr>
         <p:blipFill>
-          <a:blip r:embed="rId2"/>
+          <a:blip r:embed="rId4"/>
           <a:stretch>
             <a:fillRect/>
           </a:stretch>
@@ -24261,7 +23885,7 @@
           <a:bodyPr wrap="square" lIns="0" tIns="0" rIns="0" bIns="0" rtlCol="0" anchor="t"/>
           <a:lstStyle/>
           <a:p>
-            <a:pPr indent="0" marL="0">
+            <a:pPr marL="0" indent="0">
               <a:buNone/>
             </a:pPr>
             <a:r>
@@ -24300,7 +23924,7 @@
           <a:bodyPr wrap="square" lIns="0" tIns="0" rIns="0" bIns="0" rtlCol="0" anchor="t"/>
           <a:lstStyle/>
           <a:p>
-            <a:pPr indent="0" marL="0">
+            <a:pPr marL="0" indent="0">
               <a:buNone/>
             </a:pPr>
             <a:r>
@@ -24396,14 +24020,14 @@
       </p:sp>
       <p:pic>
         <p:nvPicPr>
-          <p:cNvPr id="18" name="Image 2" descr="preencoded.png">    </p:cNvPr>
+          <p:cNvPr id="18" name="Image 2" descr="preencoded.png"/>
           <p:cNvPicPr>
             <a:picLocks noChangeAspect="1"/>
           </p:cNvPicPr>
           <p:nvPr/>
         </p:nvPicPr>
         <p:blipFill>
-          <a:blip r:embed="rId3"/>
+          <a:blip r:embed="rId5"/>
           <a:stretch>
             <a:fillRect/>
           </a:stretch>
@@ -24439,7 +24063,7 @@
           <a:bodyPr wrap="square" lIns="0" tIns="0" rIns="0" bIns="0" rtlCol="0" anchor="t"/>
           <a:lstStyle/>
           <a:p>
-            <a:pPr indent="0" marL="0">
+            <a:pPr marL="0" indent="0">
               <a:buNone/>
             </a:pPr>
             <a:r>
@@ -24478,7 +24102,7 @@
           <a:bodyPr wrap="square" lIns="0" tIns="0" rIns="0" bIns="0" rtlCol="0" anchor="t"/>
           <a:lstStyle/>
           <a:p>
-            <a:pPr indent="0" marL="0">
+            <a:pPr marL="0" indent="0">
               <a:buNone/>
             </a:pPr>
             <a:r>
@@ -24568,7 +24192,7 @@
           <a:bodyPr wrap="square" lIns="0" tIns="0" rIns="0" bIns="0" rtlCol="0" anchor="t"/>
           <a:lstStyle/>
           <a:p>
-            <a:pPr indent="0" marL="0">
+            <a:pPr marL="0" indent="0">
               <a:buNone/>
             </a:pPr>
             <a:r>
@@ -24607,7 +24231,7 @@
           <a:bodyPr wrap="square" lIns="0" tIns="0" rIns="0" bIns="0" rtlCol="0" anchor="t"/>
           <a:lstStyle/>
           <a:p>
-            <a:pPr indent="0" marL="0">
+            <a:pPr marL="0" indent="0">
               <a:buNone/>
             </a:pPr>
             <a:r>
@@ -24670,7 +24294,7 @@
           <a:bodyPr wrap="square" lIns="0" tIns="0" rIns="0" bIns="0" rtlCol="0" anchor="ctr"/>
           <a:lstStyle/>
           <a:p>
-            <a:pPr indent="0" marL="0">
+            <a:pPr marL="0" indent="0">
               <a:buNone/>
             </a:pPr>
             <a:r>
@@ -24736,7 +24360,7 @@
           <a:bodyPr wrap="square" lIns="0" tIns="0" rIns="0" bIns="0" rtlCol="0" anchor="ctr"/>
           <a:lstStyle/>
           <a:p>
-            <a:pPr algn="ctr" indent="0" marL="0">
+            <a:pPr marL="0" indent="0" algn="ctr">
               <a:buNone/>
             </a:pPr>
             <a:r>
@@ -24802,7 +24426,7 @@
           <a:bodyPr wrap="square" lIns="0" tIns="0" rIns="0" bIns="0" rtlCol="0" anchor="ctr"/>
           <a:lstStyle/>
           <a:p>
-            <a:pPr algn="ctr" indent="0" marL="0">
+            <a:pPr marL="0" indent="0" algn="ctr">
               <a:buNone/>
             </a:pPr>
             <a:r>
@@ -24868,7 +24492,7 @@
           <a:bodyPr wrap="square" lIns="0" tIns="0" rIns="0" bIns="0" rtlCol="0" anchor="ctr"/>
           <a:lstStyle/>
           <a:p>
-            <a:pPr algn="ctr" indent="0" marL="0">
+            <a:pPr marL="0" indent="0" algn="ctr">
               <a:buNone/>
             </a:pPr>
             <a:r>
@@ -24888,14 +24512,14 @@
       </p:sp>
       <p:pic>
         <p:nvPicPr>
-          <p:cNvPr id="33" name="Image 3" descr="preencoded.png">    </p:cNvPr>
+          <p:cNvPr id="33" name="Image 3" descr="preencoded.png"/>
           <p:cNvPicPr>
             <a:picLocks noChangeAspect="1"/>
           </p:cNvPicPr>
           <p:nvPr/>
         </p:nvPicPr>
         <p:blipFill>
-          <a:blip r:embed="rId4"/>
+          <a:blip r:embed="rId6"/>
           <a:stretch>
             <a:fillRect/>
           </a:stretch>
@@ -24931,7 +24555,7 @@
           <a:bodyPr wrap="square" lIns="0" tIns="0" rIns="0" bIns="0" rtlCol="0" anchor="t"/>
           <a:lstStyle/>
           <a:p>
-            <a:pPr algn="r" indent="0" marL="0">
+            <a:pPr marL="0" indent="0" algn="r">
               <a:buNone/>
             </a:pPr>
             <a:r>
@@ -24965,6 +24589,7 @@
         <a:solidFill>
           <a:srgbClr val="0F172A"/>
         </a:solidFill>
+        <a:effectLst/>
       </p:bgPr>
     </p:bg>
     <p:spTree>
@@ -25002,11 +24627,11 @@
           <a:bodyPr wrap="square" lIns="0" tIns="0" rIns="0" bIns="0" rtlCol="0" anchor="t"/>
           <a:lstStyle/>
           <a:p>
-            <a:pPr indent="0" marL="0">
-              <a:buNone/>
-            </a:pPr>
-            <a:r>
-              <a:rPr lang="en-US" sz="1300" b="1" spc="300" kern="0" dirty="0">
+            <a:pPr marL="0" indent="0">
+              <a:buNone/>
+            </a:pPr>
+            <a:r>
+              <a:rPr lang="en-US" sz="1300" b="1" kern="0" spc="300" dirty="0">
                 <a:solidFill>
                   <a:srgbClr val="10B981"/>
                 </a:solidFill>
@@ -25041,7 +24666,7 @@
           <a:bodyPr wrap="square" lIns="0" tIns="0" rIns="0" bIns="0" rtlCol="0" anchor="t"/>
           <a:lstStyle/>
           <a:p>
-            <a:pPr indent="0" marL="0">
+            <a:pPr marL="0" indent="0">
               <a:buNone/>
             </a:pPr>
             <a:r>
@@ -25067,12 +24692,12 @@
         </p:nvSpPr>
         <p:spPr>
           <a:xfrm>
-            <a:off x="548640" y="1783080"/>
-            <a:ext cx="7315200" cy="4160520"/>
+            <a:off x="475488" y="1527048"/>
+            <a:ext cx="8375904" cy="4775454"/>
           </a:xfrm>
           <a:prstGeom prst="roundRect">
             <a:avLst>
-              <a:gd name="adj" fmla="val 2637"/>
+              <a:gd name="adj" fmla="val 2298"/>
             </a:avLst>
           </a:prstGeom>
           <a:solidFill>
@@ -25086,49 +24711,33 @@
           </a:ln>
         </p:spPr>
       </p:sp>
-      <p:sp>
-        <p:nvSpPr>
-          <p:cNvPr id="5" name="Shape 3"/>
-          <p:cNvSpPr/>
-          <p:nvPr/>
-        </p:nvSpPr>
-        <p:spPr>
-          <a:xfrm>
-            <a:off x="3520440" y="2926080"/>
-            <a:ext cx="1371600" cy="1371600"/>
-          </a:xfrm>
-          <a:prstGeom prst="ellipse">
-            <a:avLst/>
-          </a:prstGeom>
-          <a:solidFill>
-            <a:srgbClr val="1E2B45"/>
-          </a:solidFill>
-          <a:ln w="19050">
-            <a:solidFill>
-              <a:srgbClr val="FBBF24"/>
-            </a:solidFill>
-            <a:prstDash val="solid"/>
-          </a:ln>
-        </p:spPr>
-      </p:sp>
       <p:pic>
         <p:nvPicPr>
-          <p:cNvPr id="6" name="Image 0" descr="preencoded.png">    </p:cNvPr>
+          <p:cNvPr id="5" name="Demo video">
+            <a:hlinkClick r:id="" action="ppaction://media"/>
+          </p:cNvPr>
           <p:cNvPicPr>
             <a:picLocks noChangeAspect="1"/>
           </p:cNvPicPr>
-          <p:nvPr/>
+          <p:nvPr>
+            <a:videoFile r:link="rId2"/>
+            <p:extLst>
+              <p:ext uri="{DAA4B4D4-6D71-4841-9C94-3DE7FCFB9230}">
+                <p14:media xmlns:p14="http://schemas.microsoft.com/office/powerpoint/2010/main" r:embed="rId1"/>
+              </p:ext>
+            </p:extLst>
+          </p:nvPr>
         </p:nvPicPr>
         <p:blipFill>
-          <a:blip r:embed="rId1"/>
+          <a:blip r:embed="rId5"/>
           <a:stretch>
             <a:fillRect/>
           </a:stretch>
         </p:blipFill>
         <p:spPr>
           <a:xfrm>
-            <a:off x="3849624" y="3255264"/>
-            <a:ext cx="713232" cy="713232"/>
+            <a:off x="548640" y="1600200"/>
+            <a:ext cx="8229600" cy="4629150"/>
           </a:xfrm>
           <a:prstGeom prst="rect">
             <a:avLst/>
@@ -25137,14 +24746,53 @@
       </p:pic>
       <p:sp>
         <p:nvSpPr>
+          <p:cNvPr id="6" name="Text 3"/>
+          <p:cNvSpPr txBox="1"/>
+          <p:nvPr/>
+        </p:nvSpPr>
+        <p:spPr>
+          <a:xfrm>
+            <a:off x="9098280" y="1645920"/>
+            <a:ext cx="2542032" cy="365760"/>
+          </a:xfrm>
+          <a:prstGeom prst="rect">
+            <a:avLst/>
+          </a:prstGeom>
+          <a:noFill/>
+          <a:ln/>
+        </p:spPr>
+        <p:txBody>
+          <a:bodyPr wrap="square" lIns="0" tIns="0" rIns="0" bIns="0" rtlCol="0" anchor="t"/>
+          <a:lstStyle/>
+          <a:p>
+            <a:pPr marL="0" indent="0">
+              <a:buNone/>
+            </a:pPr>
+            <a:r>
+              <a:rPr lang="en-US" sz="1600" b="1" dirty="0">
+                <a:solidFill>
+                  <a:srgbClr val="10B981"/>
+                </a:solidFill>
+                <a:latin typeface="Calibri" pitchFamily="34" charset="0"/>
+                <a:ea typeface="Calibri" pitchFamily="34" charset="-122"/>
+                <a:cs typeface="Calibri" pitchFamily="34" charset="-120"/>
+              </a:rPr>
+              <a:t>Watch for</a:t>
+            </a:r>
+            <a:endParaRPr lang="en-US" sz="1600" dirty="0"/>
+          </a:p>
+        </p:txBody>
+      </p:sp>
+      <p:sp>
+        <p:nvSpPr>
           <p:cNvPr id="7" name="Text 4"/>
           <p:cNvSpPr txBox="1"/>
           <p:nvPr/>
         </p:nvSpPr>
         <p:spPr>
           <a:xfrm>
-            <a:off x="548640" y="4526280"/>
-            <a:ext cx="7315200" cy="411480"/>
+            <a:off x="9098280" y="2103120"/>
+            <a:ext cx="2542032" cy="2880360"/>
           </a:xfrm>
           <a:prstGeom prst="rect">
             <a:avLst/>
@@ -25156,11 +24804,15 @@
           <a:bodyPr wrap="square" lIns="0" tIns="0" rIns="0" bIns="0" rtlCol="0" anchor="t"/>
           <a:lstStyle/>
           <a:p>
-            <a:pPr algn="ctr" indent="0" marL="0">
-              <a:buNone/>
-            </a:pPr>
-            <a:r>
-              <a:rPr lang="en-US" sz="1600" b="1" dirty="0">
+            <a:pPr marL="342900" indent="-342900">
+              <a:spcAft>
+                <a:spcPts val="600"/>
+              </a:spcAft>
+              <a:buSzPct val="100000"/>
+              <a:buChar char="•"/>
+            </a:pPr>
+            <a:r>
+              <a:rPr lang="en-US" sz="1250" dirty="0">
                 <a:solidFill>
                   <a:srgbClr val="F8FAFC"/>
                 </a:solidFill>
@@ -25168,9 +24820,93 @@
                 <a:ea typeface="Calibri" pitchFamily="34" charset="-122"/>
                 <a:cs typeface="Calibri" pitchFamily="34" charset="-120"/>
               </a:rPr>
-              <a:t>On a real phone, against our real system (the full video: 81 seconds)</a:t>
-            </a:r>
-            <a:endParaRPr lang="en-US" sz="1600" dirty="0"/>
+              <a:t>Sipho picks Food and drops a pin where he trades</a:t>
+            </a:r>
+            <a:endParaRPr lang="en-US" sz="1250" dirty="0"/>
+          </a:p>
+          <a:p>
+            <a:pPr marL="342900" indent="-342900">
+              <a:spcAft>
+                <a:spcPts val="600"/>
+              </a:spcAft>
+              <a:buSzPct val="100000"/>
+              <a:buChar char="•"/>
+            </a:pPr>
+            <a:r>
+              <a:rPr lang="en-US" sz="1250" dirty="0">
+                <a:solidFill>
+                  <a:srgbClr val="F8FAFC"/>
+                </a:solidFill>
+                <a:latin typeface="Calibri" pitchFamily="34" charset="0"/>
+                <a:ea typeface="Calibri" pitchFamily="34" charset="-122"/>
+                <a:cs typeface="Calibri" pitchFamily="34" charset="-120"/>
+              </a:rPr>
+              <a:t>Suppliers who deliver to him</a:t>
+            </a:r>
+            <a:endParaRPr lang="en-US" sz="1250" dirty="0"/>
+          </a:p>
+          <a:p>
+            <a:pPr marL="342900" indent="-342900">
+              <a:spcAft>
+                <a:spcPts val="600"/>
+              </a:spcAft>
+              <a:buSzPct val="100000"/>
+              <a:buChar char="•"/>
+            </a:pPr>
+            <a:r>
+              <a:rPr lang="en-US" sz="1250" dirty="0">
+                <a:solidFill>
+                  <a:srgbClr val="F8FAFC"/>
+                </a:solidFill>
+                <a:latin typeface="Calibri" pitchFamily="34" charset="0"/>
+                <a:ea typeface="Calibri" pitchFamily="34" charset="-122"/>
+                <a:cs typeface="Calibri" pitchFamily="34" charset="-120"/>
+              </a:rPr>
+              <a:t>Bread from a bakery that delivers, paid, confirmed by the provider</a:t>
+            </a:r>
+            <a:endParaRPr lang="en-US" sz="1250" dirty="0"/>
+          </a:p>
+          <a:p>
+            <a:pPr marL="342900" indent="-342900">
+              <a:spcAft>
+                <a:spcPts val="600"/>
+              </a:spcAft>
+              <a:buSzPct val="100000"/>
+              <a:buChar char="•"/>
+            </a:pPr>
+            <a:r>
+              <a:rPr lang="en-US" sz="1250" dirty="0">
+                <a:solidFill>
+                  <a:srgbClr val="F8FAFC"/>
+                </a:solidFill>
+                <a:latin typeface="Calibri" pitchFamily="34" charset="0"/>
+                <a:ea typeface="Calibri" pitchFamily="34" charset="-122"/>
+                <a:cs typeface="Calibri" pitchFamily="34" charset="-120"/>
+              </a:rPr>
+              <a:t>Every kota he sells, in his order book</a:t>
+            </a:r>
+            <a:endParaRPr lang="en-US" sz="1250" dirty="0"/>
+          </a:p>
+          <a:p>
+            <a:pPr marL="342900" indent="-342900">
+              <a:spcAft>
+                <a:spcPts val="600"/>
+              </a:spcAft>
+              <a:buSzPct val="100000"/>
+              <a:buChar char="•"/>
+            </a:pPr>
+            <a:r>
+              <a:rPr lang="en-US" sz="1250" dirty="0">
+                <a:solidFill>
+                  <a:srgbClr val="F8FAFC"/>
+                </a:solidFill>
+                <a:latin typeface="Calibri" pitchFamily="34" charset="0"/>
+                <a:ea typeface="Calibri" pitchFamily="34" charset="-122"/>
+                <a:cs typeface="Calibri" pitchFamily="34" charset="-120"/>
+              </a:rPr>
+              <a:t>Thabo's job: stage photos, signed off by the client</a:t>
+            </a:r>
+            <a:endParaRPr lang="en-US" sz="1250" dirty="0"/>
           </a:p>
         </p:txBody>
       </p:sp>
@@ -25182,8 +24918,8 @@
         </p:nvSpPr>
         <p:spPr>
           <a:xfrm>
-            <a:off x="548640" y="4983480"/>
-            <a:ext cx="7315200" cy="365760"/>
+            <a:off x="9098280" y="5074920"/>
+            <a:ext cx="2542032" cy="274320"/>
           </a:xfrm>
           <a:prstGeom prst="rect">
             <a:avLst/>
@@ -25195,18 +24931,57 @@
           <a:bodyPr wrap="square" lIns="0" tIns="0" rIns="0" bIns="0" rtlCol="0" anchor="t"/>
           <a:lstStyle/>
           <a:p>
-            <a:pPr algn="ctr" indent="0" marL="0">
-              <a:buNone/>
-            </a:pPr>
-            <a:r>
-              <a:rPr lang="en-US" sz="1400" b="1" u="sng" dirty="0">
+            <a:pPr marL="0" indent="0">
+              <a:buNone/>
+            </a:pPr>
+            <a:r>
+              <a:rPr lang="en-US" sz="1150" b="1" dirty="0">
+                <a:solidFill>
+                  <a:srgbClr val="A3B3C9"/>
+                </a:solidFill>
+                <a:latin typeface="Calibri" pitchFamily="34" charset="0"/>
+                <a:ea typeface="Calibri" pitchFamily="34" charset="-122"/>
+                <a:cs typeface="Calibri" pitchFamily="34" charset="-120"/>
+              </a:rPr>
+              <a:t>Full video, 81 seconds:</a:t>
+            </a:r>
+            <a:endParaRPr lang="en-US" sz="1150" dirty="0"/>
+          </a:p>
+        </p:txBody>
+      </p:sp>
+      <p:sp>
+        <p:nvSpPr>
+          <p:cNvPr id="9" name="Text 6"/>
+          <p:cNvSpPr txBox="1"/>
+          <p:nvPr/>
+        </p:nvSpPr>
+        <p:spPr>
+          <a:xfrm>
+            <a:off x="9098280" y="5349240"/>
+            <a:ext cx="2542032" cy="777240"/>
+          </a:xfrm>
+          <a:prstGeom prst="rect">
+            <a:avLst/>
+          </a:prstGeom>
+          <a:noFill/>
+          <a:ln/>
+        </p:spPr>
+        <p:txBody>
+          <a:bodyPr wrap="square" lIns="0" tIns="0" rIns="0" bIns="0" rtlCol="0" anchor="t"/>
+          <a:lstStyle/>
+          <a:p>
+            <a:pPr marL="0" indent="0">
+              <a:buNone/>
+            </a:pPr>
+            <a:r>
+              <a:rPr lang="en-US" sz="950" u="sng" dirty="0">
                 <a:solidFill>
                   <a:srgbClr val="34D399"/>
                 </a:solidFill>
                 <a:latin typeface="Calibri" pitchFamily="34" charset="0"/>
                 <a:ea typeface="Calibri" pitchFamily="34" charset="-122"/>
                 <a:cs typeface="Calibri" pitchFamily="34" charset="-120"/>
-                <a:hlinkClick r:id="rId2" invalidUrl="" action="" tgtFrame="" tooltip="Watch the demo" history="1" highlightClick="0" endSnd="0">
+                <a:hlinkClick r:id="rId6" tooltip="Watch the full demo">
                   <a:extLst>
                     <a:ext uri="{A12FA001-AC4F-418D-AE19-62706E023703}">
                       <ahyp:hlinkClr xmlns:ahyp="http://schemas.microsoft.com/office/drawing/2018/hyperlinkcolor" val="tx"/>
@@ -25216,186 +24991,20 @@
               </a:rPr>
               <a:t>https://drive.google.com/file/d/1yYQfVBEG-dnn-hxgRRtD5xDVw8vZV8Es/view?usp=drive_link</a:t>
             </a:r>
-            <a:endParaRPr lang="en-US" sz="1400" dirty="0"/>
-          </a:p>
-        </p:txBody>
-      </p:sp>
-      <p:sp>
-        <p:nvSpPr>
-          <p:cNvPr id="9" name="Text 6"/>
-          <p:cNvSpPr txBox="1"/>
-          <p:nvPr/>
-        </p:nvSpPr>
-        <p:spPr>
-          <a:xfrm>
-            <a:off x="8229600" y="1828800"/>
-            <a:ext cx="3383280" cy="411480"/>
-          </a:xfrm>
-          <a:prstGeom prst="rect">
-            <a:avLst/>
-          </a:prstGeom>
-          <a:noFill/>
-          <a:ln/>
-        </p:spPr>
-        <p:txBody>
-          <a:bodyPr wrap="square" lIns="0" tIns="0" rIns="0" bIns="0" rtlCol="0" anchor="t"/>
-          <a:lstStyle/>
-          <a:p>
-            <a:pPr indent="0" marL="0">
-              <a:buNone/>
-            </a:pPr>
-            <a:r>
-              <a:rPr lang="en-US" sz="1800" b="1" dirty="0">
-                <a:solidFill>
-                  <a:srgbClr val="10B981"/>
-                </a:solidFill>
-                <a:latin typeface="Calibri" pitchFamily="34" charset="0"/>
-                <a:ea typeface="Calibri" pitchFamily="34" charset="-122"/>
-                <a:cs typeface="Calibri" pitchFamily="34" charset="-120"/>
-              </a:rPr>
-              <a:t>Watch for</a:t>
-            </a:r>
-            <a:endParaRPr lang="en-US" sz="1800" dirty="0"/>
-          </a:p>
-        </p:txBody>
-      </p:sp>
-      <p:sp>
-        <p:nvSpPr>
-          <p:cNvPr id="10" name="Text 7"/>
-          <p:cNvSpPr txBox="1"/>
-          <p:nvPr/>
-        </p:nvSpPr>
-        <p:spPr>
-          <a:xfrm>
-            <a:off x="8229600" y="2331720"/>
-            <a:ext cx="3383280" cy="3566160"/>
-          </a:xfrm>
-          <a:prstGeom prst="rect">
-            <a:avLst/>
-          </a:prstGeom>
-          <a:noFill/>
-          <a:ln/>
-        </p:spPr>
-        <p:txBody>
-          <a:bodyPr wrap="square" lIns="0" tIns="0" rIns="0" bIns="0" rtlCol="0" anchor="t"/>
-          <a:lstStyle/>
-          <a:p>
-            <a:pPr marL="342900" indent="-342900">
-              <a:spcAft>
-                <a:spcPts val="1100"/>
-              </a:spcAft>
-              <a:buSzPct val="100000"/>
-              <a:buChar char="•"/>
-            </a:pPr>
-            <a:r>
-              <a:rPr lang="en-US" sz="1550" dirty="0">
-                <a:solidFill>
-                  <a:srgbClr val="F8FAFC"/>
-                </a:solidFill>
-                <a:latin typeface="Calibri" pitchFamily="34" charset="0"/>
-                <a:ea typeface="Calibri" pitchFamily="34" charset="-122"/>
-                <a:cs typeface="Calibri" pitchFamily="34" charset="-120"/>
-              </a:rPr>
-              <a:t>Sipho picks Food and drops a pin where he trades</a:t>
-            </a:r>
-            <a:endParaRPr lang="en-US" sz="1550" dirty="0"/>
-          </a:p>
-          <a:p>
-            <a:pPr marL="342900" indent="-342900">
-              <a:spcAft>
-                <a:spcPts val="1100"/>
-              </a:spcAft>
-              <a:buSzPct val="100000"/>
-              <a:buChar char="•"/>
-            </a:pPr>
-            <a:r>
-              <a:rPr lang="en-US" sz="1550" dirty="0">
-                <a:solidFill>
-                  <a:srgbClr val="F8FAFC"/>
-                </a:solidFill>
-                <a:latin typeface="Calibri" pitchFamily="34" charset="0"/>
-                <a:ea typeface="Calibri" pitchFamily="34" charset="-122"/>
-                <a:cs typeface="Calibri" pitchFamily="34" charset="-120"/>
-              </a:rPr>
-              <a:t>Suppliers who deliver to him</a:t>
-            </a:r>
-            <a:endParaRPr lang="en-US" sz="1550" dirty="0"/>
-          </a:p>
-          <a:p>
-            <a:pPr marL="342900" indent="-342900">
-              <a:spcAft>
-                <a:spcPts val="1100"/>
-              </a:spcAft>
-              <a:buSzPct val="100000"/>
-              <a:buChar char="•"/>
-            </a:pPr>
-            <a:r>
-              <a:rPr lang="en-US" sz="1550" dirty="0">
-                <a:solidFill>
-                  <a:srgbClr val="F8FAFC"/>
-                </a:solidFill>
-                <a:latin typeface="Calibri" pitchFamily="34" charset="0"/>
-                <a:ea typeface="Calibri" pitchFamily="34" charset="-122"/>
-                <a:cs typeface="Calibri" pitchFamily="34" charset="-120"/>
-              </a:rPr>
-              <a:t>Bread from a bakery that delivers, paid, confirmed by the provider</a:t>
-            </a:r>
-            <a:endParaRPr lang="en-US" sz="1550" dirty="0"/>
-          </a:p>
-          <a:p>
-            <a:pPr marL="342900" indent="-342900">
-              <a:spcAft>
-                <a:spcPts val="1100"/>
-              </a:spcAft>
-              <a:buSzPct val="100000"/>
-              <a:buChar char="•"/>
-            </a:pPr>
-            <a:r>
-              <a:rPr lang="en-US" sz="1550" dirty="0">
-                <a:solidFill>
-                  <a:srgbClr val="F8FAFC"/>
-                </a:solidFill>
-                <a:latin typeface="Calibri" pitchFamily="34" charset="0"/>
-                <a:ea typeface="Calibri" pitchFamily="34" charset="-122"/>
-                <a:cs typeface="Calibri" pitchFamily="34" charset="-120"/>
-              </a:rPr>
-              <a:t>Every kota he sells, in his order book</a:t>
-            </a:r>
-            <a:endParaRPr lang="en-US" sz="1550" dirty="0"/>
-          </a:p>
-          <a:p>
-            <a:pPr marL="342900" indent="-342900">
-              <a:spcAft>
-                <a:spcPts val="1100"/>
-              </a:spcAft>
-              <a:buSzPct val="100000"/>
-              <a:buChar char="•"/>
-            </a:pPr>
-            <a:r>
-              <a:rPr lang="en-US" sz="1550" dirty="0">
-                <a:solidFill>
-                  <a:srgbClr val="F8FAFC"/>
-                </a:solidFill>
-                <a:latin typeface="Calibri" pitchFamily="34" charset="0"/>
-                <a:ea typeface="Calibri" pitchFamily="34" charset="-122"/>
-                <a:cs typeface="Calibri" pitchFamily="34" charset="-120"/>
-              </a:rPr>
-              <a:t>Thabo's job: stage photos, signed off by the client</a:t>
-            </a:r>
-            <a:endParaRPr lang="en-US" sz="1550" dirty="0"/>
+            <a:endParaRPr lang="en-US" sz="950" dirty="0"/>
           </a:p>
         </p:txBody>
       </p:sp>
       <p:pic>
         <p:nvPicPr>
-          <p:cNvPr id="11" name="Image 1" descr="preencoded.png">    </p:cNvPr>
+          <p:cNvPr id="10" name="Image 0" descr="preencoded.png"/>
           <p:cNvPicPr>
             <a:picLocks noChangeAspect="1"/>
           </p:cNvPicPr>
           <p:nvPr/>
         </p:nvPicPr>
         <p:blipFill>
-          <a:blip r:embed="rId3"/>
+          <a:blip r:embed="rId7"/>
           <a:stretch>
             <a:fillRect/>
           </a:stretch>
@@ -25412,7 +25021,7 @@
       </p:pic>
       <p:sp>
         <p:nvSpPr>
-          <p:cNvPr id="12" name="Text 8"/>
+          <p:cNvPr id="11" name="Text 7"/>
           <p:cNvSpPr txBox="1"/>
           <p:nvPr/>
         </p:nvSpPr>
@@ -25431,7 +25040,7 @@
           <a:bodyPr wrap="square" lIns="0" tIns="0" rIns="0" bIns="0" rtlCol="0" anchor="t"/>
           <a:lstStyle/>
           <a:p>
-            <a:pPr algn="r" indent="0" marL="0">
+            <a:pPr marL="0" indent="0" algn="r">
               <a:buNone/>
             </a:pPr>
             <a:r>
@@ -25454,6 +25063,74 @@
   <p:clrMapOvr>
     <a:masterClrMapping/>
   </p:clrMapOvr>
+  <p:timing>
+    <p:tnLst>
+      <p:par>
+        <p:cTn id="1" dur="indefinite" restart="never" nodeType="tmRoot">
+          <p:childTnLst>
+            <p:seq concurrent="1" nextAc="seek">
+              <p:cTn id="2" dur="indefinite" nodeType="mainSeq">
+                <p:childTnLst>
+                  <p:par>
+                    <p:cTn id="3" fill="hold">
+                      <p:stCondLst>
+                        <p:cond delay="indefinite"/>
+                        <p:cond evt="onBegin" delay="0">
+                          <p:tn val="2"/>
+                        </p:cond>
+                      </p:stCondLst>
+                      <p:childTnLst>
+                        <p:par>
+                          <p:cTn id="4" fill="hold">
+                            <p:stCondLst>
+                              <p:cond delay="0"/>
+                            </p:stCondLst>
+                            <p:childTnLst>
+                              <p:par>
+                                <p:cTn id="5" presetID="1" presetClass="mediacall" presetSubtype="0" fill="hold" nodeType="withEffect">
+                                  <p:stCondLst>
+                                    <p:cond delay="0"/>
+                                  </p:stCondLst>
+                                  <p:childTnLst>
+                                    <p:cmd type="call" cmd="playFrom(0.0)">
+                                      <p:cBhvr>
+                                        <p:cTn id="6" dur="1" fill="hold"/>
+                                        <p:tgtEl>
+                                          <p:spTgt spid="5"/>
+                                        </p:tgtEl>
+                                      </p:cBhvr>
+                                    </p:cmd>
+                                  </p:childTnLst>
+                                </p:cTn>
+                              </p:par>
+                            </p:childTnLst>
+                          </p:cTn>
+                        </p:par>
+                      </p:childTnLst>
+                    </p:cTn>
+                  </p:par>
+                </p:childTnLst>
+              </p:cTn>
+              <p:prevCondLst>
+                <p:cond evt="onPrev" delay="0">
+                  <p:tgtEl>
+                    <p:sldTgt/>
+                  </p:tgtEl>
+                </p:cond>
+              </p:prevCondLst>
+              <p:nextCondLst>
+                <p:cond evt="onNext" delay="0">
+                  <p:tgtEl>
+                    <p:sldTgt/>
+                  </p:tgtEl>
+                </p:cond>
+              </p:nextCondLst>
+            </p:seq>
+          </p:childTnLst>
+        </p:cTn>
+      </p:par>
+    </p:tnLst>
+  </p:timing>
 </p:sld>
 </file>
 
@@ -25465,6 +25142,7 @@
         <a:solidFill>
           <a:srgbClr val="0F172A"/>
         </a:solidFill>
+        <a:effectLst/>
       </p:bgPr>
     </p:bg>
     <p:spTree>
@@ -25502,11 +25180,11 @@
           <a:bodyPr wrap="square" lIns="0" tIns="0" rIns="0" bIns="0" rtlCol="0" anchor="t"/>
           <a:lstStyle/>
           <a:p>
-            <a:pPr indent="0" marL="0">
-              <a:buNone/>
-            </a:pPr>
-            <a:r>
-              <a:rPr lang="en-US" sz="1300" b="1" spc="300" kern="0" dirty="0">
+            <a:pPr marL="0" indent="0">
+              <a:buNone/>
+            </a:pPr>
+            <a:r>
+              <a:rPr lang="en-US" sz="1300" b="1" kern="0" spc="300" dirty="0">
                 <a:solidFill>
                   <a:srgbClr val="10B981"/>
                 </a:solidFill>
@@ -25541,7 +25219,7 @@
           <a:bodyPr wrap="square" lIns="0" tIns="0" rIns="0" bIns="0" rtlCol="0" anchor="t"/>
           <a:lstStyle/>
           <a:p>
-            <a:pPr indent="0" marL="0">
+            <a:pPr marL="0" indent="0">
               <a:buNone/>
             </a:pPr>
             <a:r>
@@ -25607,7 +25285,7 @@
           <a:bodyPr wrap="square" lIns="0" tIns="0" rIns="0" bIns="0" rtlCol="0" anchor="t"/>
           <a:lstStyle/>
           <a:p>
-            <a:pPr indent="0" marL="0">
+            <a:pPr marL="0" indent="0">
               <a:buNone/>
             </a:pPr>
             <a:r>
@@ -25646,7 +25324,7 @@
           <a:bodyPr wrap="square" lIns="0" tIns="0" rIns="0" bIns="0" rtlCol="0" anchor="t"/>
           <a:lstStyle/>
           <a:p>
-            <a:pPr algn="r" indent="0" marL="0">
+            <a:pPr marL="0" indent="0" algn="r">
               <a:buNone/>
             </a:pPr>
             <a:r>
@@ -25685,7 +25363,7 @@
           <a:bodyPr wrap="square" lIns="0" tIns="0" rIns="0" bIns="0" rtlCol="0" anchor="t"/>
           <a:lstStyle/>
           <a:p>
-            <a:pPr indent="0" marL="0">
+            <a:pPr marL="0" indent="0">
               <a:buNone/>
             </a:pPr>
             <a:r>
@@ -25751,7 +25429,7 @@
           <a:bodyPr wrap="square" lIns="0" tIns="0" rIns="0" bIns="0" rtlCol="0" anchor="t"/>
           <a:lstStyle/>
           <a:p>
-            <a:pPr indent="0" marL="0">
+            <a:pPr marL="0" indent="0">
               <a:buNone/>
             </a:pPr>
             <a:r>
@@ -25790,7 +25468,7 @@
           <a:bodyPr wrap="square" lIns="0" tIns="0" rIns="0" bIns="0" rtlCol="0" anchor="t"/>
           <a:lstStyle/>
           <a:p>
-            <a:pPr algn="r" indent="0" marL="0">
+            <a:pPr marL="0" indent="0" algn="r">
               <a:buNone/>
             </a:pPr>
             <a:r>
@@ -25829,7 +25507,7 @@
           <a:bodyPr wrap="square" lIns="0" tIns="0" rIns="0" bIns="0" rtlCol="0" anchor="t"/>
           <a:lstStyle/>
           <a:p>
-            <a:pPr indent="0" marL="0">
+            <a:pPr marL="0" indent="0">
               <a:buNone/>
             </a:pPr>
             <a:r>
@@ -25895,7 +25573,7 @@
           <a:bodyPr wrap="square" lIns="0" tIns="0" rIns="0" bIns="0" rtlCol="0" anchor="t"/>
           <a:lstStyle/>
           <a:p>
-            <a:pPr indent="0" marL="0">
+            <a:pPr marL="0" indent="0">
               <a:buNone/>
             </a:pPr>
             <a:r>
@@ -25934,7 +25612,7 @@
           <a:bodyPr wrap="square" lIns="0" tIns="0" rIns="0" bIns="0" rtlCol="0" anchor="t"/>
           <a:lstStyle/>
           <a:p>
-            <a:pPr algn="r" indent="0" marL="0">
+            <a:pPr marL="0" indent="0" algn="r">
               <a:buNone/>
             </a:pPr>
             <a:r>
@@ -25973,7 +25651,7 @@
           <a:bodyPr wrap="square" lIns="0" tIns="0" rIns="0" bIns="0" rtlCol="0" anchor="t"/>
           <a:lstStyle/>
           <a:p>
-            <a:pPr indent="0" marL="0">
+            <a:pPr marL="0" indent="0">
               <a:buNone/>
             </a:pPr>
             <a:r>
@@ -26039,7 +25717,7 @@
           <a:bodyPr wrap="square" lIns="0" tIns="0" rIns="0" bIns="0" rtlCol="0" anchor="t"/>
           <a:lstStyle/>
           <a:p>
-            <a:pPr indent="0" marL="0">
+            <a:pPr marL="0" indent="0">
               <a:buNone/>
             </a:pPr>
             <a:r>
@@ -26078,7 +25756,7 @@
           <a:bodyPr wrap="square" lIns="0" tIns="0" rIns="0" bIns="0" rtlCol="0" anchor="t"/>
           <a:lstStyle/>
           <a:p>
-            <a:pPr algn="r" indent="0" marL="0">
+            <a:pPr marL="0" indent="0" algn="r">
               <a:buNone/>
             </a:pPr>
             <a:r>
@@ -26117,7 +25795,7 @@
           <a:bodyPr wrap="square" lIns="0" tIns="0" rIns="0" bIns="0" rtlCol="0" anchor="t"/>
           <a:lstStyle/>
           <a:p>
-            <a:pPr indent="0" marL="0">
+            <a:pPr marL="0" indent="0">
               <a:buNone/>
             </a:pPr>
             <a:r>
@@ -26164,7 +25842,7 @@
       </p:sp>
       <p:graphicFrame>
         <p:nvGraphicFramePr>
-          <p:cNvPr id="21" name="Chart 0" descr=""/>
+          <p:cNvPr id="21" name="Chart 0"/>
           <p:cNvGraphicFramePr/>
           <p:nvPr/>
         </p:nvGraphicFramePr>
@@ -26172,9 +25850,9 @@
           <a:off x="5623560" y="1874520"/>
           <a:ext cx="5852160" cy="2743200"/>
         </p:xfrm>
-        <a:graphic xmlns:a="http://schemas.openxmlformats.org/drawingml/2006/main">
+        <a:graphic>
           <a:graphicData uri="http://schemas.openxmlformats.org/drawingml/2006/chart">
-            <c:chart xmlns:c="http://schemas.openxmlformats.org/drawingml/2006/chart" r:id="rId1"/>
+            <c:chart xmlns:c="http://schemas.openxmlformats.org/drawingml/2006/chart" xmlns:r="http://schemas.openxmlformats.org/officeDocument/2006/relationships" r:id="rId3"/>
           </a:graphicData>
         </a:graphic>
       </p:graphicFrame>
@@ -26199,7 +25877,7 @@
           <a:bodyPr wrap="square" lIns="0" tIns="0" rIns="0" bIns="0" rtlCol="0" anchor="t"/>
           <a:lstStyle/>
           <a:p>
-            <a:pPr algn="ctr" indent="0" marL="0">
+            <a:pPr marL="0" indent="0" algn="ctr">
               <a:buNone/>
             </a:pPr>
             <a:r>
@@ -26238,7 +25916,7 @@
           <a:bodyPr wrap="square" lIns="0" tIns="0" rIns="0" bIns="0" rtlCol="0" anchor="t"/>
           <a:lstStyle/>
           <a:p>
-            <a:pPr algn="ctr" indent="0" marL="0">
+            <a:pPr marL="0" indent="0" algn="ctr">
               <a:buNone/>
             </a:pPr>
             <a:r>
@@ -26310,14 +25988,14 @@
       </p:sp>
       <p:pic>
         <p:nvPicPr>
-          <p:cNvPr id="26" name="Image 0" descr="preencoded.png">    </p:cNvPr>
+          <p:cNvPr id="26" name="Image 0" descr="preencoded.png"/>
           <p:cNvPicPr>
             <a:picLocks noChangeAspect="1"/>
           </p:cNvPicPr>
           <p:nvPr/>
         </p:nvPicPr>
         <p:blipFill>
-          <a:blip r:embed="rId2"/>
+          <a:blip r:embed="rId4"/>
           <a:stretch>
             <a:fillRect/>
           </a:stretch>
@@ -26353,7 +26031,7 @@
           <a:bodyPr wrap="square" lIns="0" tIns="0" rIns="0" bIns="0" rtlCol="0" anchor="ctr"/>
           <a:lstStyle/>
           <a:p>
-            <a:pPr indent="0" marL="0">
+            <a:pPr marL="0" indent="0">
               <a:buNone/>
             </a:pPr>
             <a:r>
@@ -26373,14 +26051,14 @@
       </p:sp>
       <p:pic>
         <p:nvPicPr>
-          <p:cNvPr id="28" name="Image 1" descr="preencoded.png">    </p:cNvPr>
+          <p:cNvPr id="28" name="Image 1" descr="preencoded.png"/>
           <p:cNvPicPr>
             <a:picLocks noChangeAspect="1"/>
           </p:cNvPicPr>
           <p:nvPr/>
         </p:nvPicPr>
         <p:blipFill>
-          <a:blip r:embed="rId3"/>
+          <a:blip r:embed="rId5"/>
           <a:stretch>
             <a:fillRect/>
           </a:stretch>
@@ -26416,7 +26094,7 @@
           <a:bodyPr wrap="square" lIns="0" tIns="0" rIns="0" bIns="0" rtlCol="0" anchor="t"/>
           <a:lstStyle/>
           <a:p>
-            <a:pPr algn="r" indent="0" marL="0">
+            <a:pPr marL="0" indent="0" algn="r">
               <a:buNone/>
             </a:pPr>
             <a:r>
@@ -26455,7 +26133,7 @@
           <a:bodyPr wrap="square" lIns="0" tIns="0" rIns="0" bIns="0" rtlCol="0" anchor="t"/>
           <a:lstStyle/>
           <a:p>
-            <a:pPr indent="0" marL="0">
+            <a:pPr marL="0" indent="0">
               <a:buNone/>
             </a:pPr>
             <a:r>
@@ -26489,6 +26167,7 @@
         <a:solidFill>
           <a:srgbClr val="0F172A"/>
         </a:solidFill>
+        <a:effectLst/>
       </p:bgPr>
     </p:bg>
     <p:spTree>
@@ -26526,11 +26205,11 @@
           <a:bodyPr wrap="square" lIns="0" tIns="0" rIns="0" bIns="0" rtlCol="0" anchor="t"/>
           <a:lstStyle/>
           <a:p>
-            <a:pPr indent="0" marL="0">
-              <a:buNone/>
-            </a:pPr>
-            <a:r>
-              <a:rPr lang="en-US" sz="1300" b="1" spc="300" kern="0" dirty="0">
+            <a:pPr marL="0" indent="0">
+              <a:buNone/>
+            </a:pPr>
+            <a:r>
+              <a:rPr lang="en-US" sz="1300" b="1" kern="0" spc="300" dirty="0">
                 <a:solidFill>
                   <a:srgbClr val="10B981"/>
                 </a:solidFill>
@@ -26565,7 +26244,7 @@
           <a:bodyPr wrap="square" lIns="0" tIns="0" rIns="0" bIns="0" rtlCol="0" anchor="t"/>
           <a:lstStyle/>
           <a:p>
-            <a:pPr indent="0" marL="0">
+            <a:pPr marL="0" indent="0">
               <a:buNone/>
             </a:pPr>
             <a:r>
@@ -26604,7 +26283,7 @@
           <a:bodyPr wrap="square" lIns="0" tIns="0" rIns="0" bIns="0" rtlCol="0" anchor="t"/>
           <a:lstStyle/>
           <a:p>
-            <a:pPr indent="0" marL="0">
+            <a:pPr marL="0" indent="0">
               <a:buNone/>
             </a:pPr>
             <a:r>
@@ -26649,14 +26328,14 @@
       </p:sp>
       <p:pic>
         <p:nvPicPr>
-          <p:cNvPr id="6" name="Image 0" descr="preencoded.png">    </p:cNvPr>
+          <p:cNvPr id="6" name="Image 0" descr="preencoded.png"/>
           <p:cNvPicPr>
             <a:picLocks noChangeAspect="1"/>
           </p:cNvPicPr>
           <p:nvPr/>
         </p:nvPicPr>
         <p:blipFill>
-          <a:blip r:embed="rId1"/>
+          <a:blip r:embed="rId3"/>
           <a:stretch>
             <a:fillRect/>
           </a:stretch>
@@ -26692,7 +26371,7 @@
           <a:bodyPr wrap="square" lIns="0" tIns="0" rIns="0" bIns="0" rtlCol="0" anchor="t"/>
           <a:lstStyle/>
           <a:p>
-            <a:pPr indent="0" marL="0">
+            <a:pPr marL="0" indent="0">
               <a:buNone/>
             </a:pPr>
             <a:r>
@@ -26731,7 +26410,7 @@
           <a:bodyPr wrap="square" lIns="0" tIns="0" rIns="0" bIns="0" rtlCol="0" anchor="t"/>
           <a:lstStyle/>
           <a:p>
-            <a:pPr indent="0" marL="0">
+            <a:pPr marL="0" indent="0">
               <a:buNone/>
             </a:pPr>
             <a:r>
@@ -26776,14 +26455,14 @@
       </p:sp>
       <p:pic>
         <p:nvPicPr>
-          <p:cNvPr id="10" name="Image 1" descr="preencoded.png">    </p:cNvPr>
+          <p:cNvPr id="10" name="Image 1" descr="preencoded.png"/>
           <p:cNvPicPr>
             <a:picLocks noChangeAspect="1"/>
           </p:cNvPicPr>
           <p:nvPr/>
         </p:nvPicPr>
         <p:blipFill>
-          <a:blip r:embed="rId2"/>
+          <a:blip r:embed="rId3"/>
           <a:stretch>
             <a:fillRect/>
           </a:stretch>
@@ -26819,7 +26498,7 @@
           <a:bodyPr wrap="square" lIns="0" tIns="0" rIns="0" bIns="0" rtlCol="0" anchor="t"/>
           <a:lstStyle/>
           <a:p>
-            <a:pPr indent="0" marL="0">
+            <a:pPr marL="0" indent="0">
               <a:buNone/>
             </a:pPr>
             <a:r>
@@ -26858,7 +26537,7 @@
           <a:bodyPr wrap="square" lIns="0" tIns="0" rIns="0" bIns="0" rtlCol="0" anchor="t"/>
           <a:lstStyle/>
           <a:p>
-            <a:pPr indent="0" marL="0">
+            <a:pPr marL="0" indent="0">
               <a:buNone/>
             </a:pPr>
             <a:r>
@@ -26903,7 +26582,7 @@
       </p:sp>
       <p:pic>
         <p:nvPicPr>
-          <p:cNvPr id="14" name="Image 2" descr="preencoded.png">    </p:cNvPr>
+          <p:cNvPr id="14" name="Image 2" descr="preencoded.png"/>
           <p:cNvPicPr>
             <a:picLocks noChangeAspect="1"/>
           </p:cNvPicPr>
@@ -26946,7 +26625,7 @@
           <a:bodyPr wrap="square" lIns="0" tIns="0" rIns="0" bIns="0" rtlCol="0" anchor="t"/>
           <a:lstStyle/>
           <a:p>
-            <a:pPr indent="0" marL="0">
+            <a:pPr marL="0" indent="0">
               <a:buNone/>
             </a:pPr>
             <a:r>
@@ -26985,7 +26664,7 @@
           <a:bodyPr wrap="square" lIns="0" tIns="0" rIns="0" bIns="0" rtlCol="0" anchor="t"/>
           <a:lstStyle/>
           <a:p>
-            <a:pPr indent="0" marL="0">
+            <a:pPr marL="0" indent="0">
               <a:buNone/>
             </a:pPr>
             <a:r>
@@ -27030,14 +26709,14 @@
       </p:sp>
       <p:pic>
         <p:nvPicPr>
-          <p:cNvPr id="18" name="Image 3" descr="preencoded.png">    </p:cNvPr>
+          <p:cNvPr id="18" name="Image 3" descr="preencoded.png"/>
           <p:cNvPicPr>
             <a:picLocks noChangeAspect="1"/>
           </p:cNvPicPr>
           <p:nvPr/>
         </p:nvPicPr>
         <p:blipFill>
-          <a:blip r:embed="rId4"/>
+          <a:blip r:embed="rId3"/>
           <a:stretch>
             <a:fillRect/>
           </a:stretch>
@@ -27073,7 +26752,7 @@
           <a:bodyPr wrap="square" lIns="0" tIns="0" rIns="0" bIns="0" rtlCol="0" anchor="t"/>
           <a:lstStyle/>
           <a:p>
-            <a:pPr indent="0" marL="0">
+            <a:pPr marL="0" indent="0">
               <a:buNone/>
             </a:pPr>
             <a:r>
@@ -27112,7 +26791,7 @@
           <a:bodyPr wrap="square" lIns="0" tIns="0" rIns="0" bIns="0" rtlCol="0" anchor="t"/>
           <a:lstStyle/>
           <a:p>
-            <a:pPr indent="0" marL="0">
+            <a:pPr marL="0" indent="0">
               <a:buNone/>
             </a:pPr>
             <a:r>
@@ -27159,7 +26838,7 @@
       </p:sp>
       <p:graphicFrame>
         <p:nvGraphicFramePr>
-          <p:cNvPr id="22" name="Chart 0" descr=""/>
+          <p:cNvPr id="22" name="Chart 0"/>
           <p:cNvGraphicFramePr/>
           <p:nvPr/>
         </p:nvGraphicFramePr>
@@ -27167,22 +26846,22 @@
           <a:off x="6400800" y="1188720"/>
           <a:ext cx="5120640" cy="4709160"/>
         </p:xfrm>
-        <a:graphic xmlns:a="http://schemas.openxmlformats.org/drawingml/2006/main">
+        <a:graphic>
           <a:graphicData uri="http://schemas.openxmlformats.org/drawingml/2006/chart">
-            <c:chart xmlns:c="http://schemas.openxmlformats.org/drawingml/2006/chart" r:id="rId5"/>
+            <c:chart xmlns:c="http://schemas.openxmlformats.org/drawingml/2006/chart" xmlns:r="http://schemas.openxmlformats.org/officeDocument/2006/relationships" r:id="rId4"/>
           </a:graphicData>
         </a:graphic>
       </p:graphicFrame>
       <p:pic>
         <p:nvPicPr>
-          <p:cNvPr id="23" name="Image 4" descr="preencoded.png">    </p:cNvPr>
+          <p:cNvPr id="23" name="Image 4" descr="preencoded.png"/>
           <p:cNvPicPr>
             <a:picLocks noChangeAspect="1"/>
           </p:cNvPicPr>
           <p:nvPr/>
         </p:nvPicPr>
         <p:blipFill>
-          <a:blip r:embed="rId6"/>
+          <a:blip r:embed="rId5"/>
           <a:stretch>
             <a:fillRect/>
           </a:stretch>
@@ -27218,7 +26897,7 @@
           <a:bodyPr wrap="square" lIns="0" tIns="0" rIns="0" bIns="0" rtlCol="0" anchor="t"/>
           <a:lstStyle/>
           <a:p>
-            <a:pPr algn="r" indent="0" marL="0">
+            <a:pPr marL="0" indent="0" algn="r">
               <a:buNone/>
             </a:pPr>
             <a:r>
@@ -27252,6 +26931,7 @@
         <a:solidFill>
           <a:srgbClr val="0F172A"/>
         </a:solidFill>
+        <a:effectLst/>
       </p:bgPr>
     </p:bg>
     <p:spTree>
@@ -27289,11 +26969,11 @@
           <a:bodyPr wrap="square" lIns="0" tIns="0" rIns="0" bIns="0" rtlCol="0" anchor="t"/>
           <a:lstStyle/>
           <a:p>
-            <a:pPr indent="0" marL="0">
-              <a:buNone/>
-            </a:pPr>
-            <a:r>
-              <a:rPr lang="en-US" sz="1300" b="1" spc="300" kern="0" dirty="0">
+            <a:pPr marL="0" indent="0">
+              <a:buNone/>
+            </a:pPr>
+            <a:r>
+              <a:rPr lang="en-US" sz="1300" b="1" kern="0" spc="300" dirty="0">
                 <a:solidFill>
                   <a:srgbClr val="10B981"/>
                 </a:solidFill>
@@ -27328,7 +27008,7 @@
           <a:bodyPr wrap="square" lIns="0" tIns="0" rIns="0" bIns="0" rtlCol="0" anchor="t"/>
           <a:lstStyle/>
           <a:p>
-            <a:pPr indent="0" marL="0">
+            <a:pPr marL="0" indent="0">
               <a:buNone/>
             </a:pPr>
             <a:r>
@@ -27369,11 +27049,41 @@
             <a:tbl>
               <a:tblPr/>
               <a:tblGrid>
-                <a:gridCol w="3657600"/>
-                <a:gridCol w="1737360"/>
-                <a:gridCol w="1737360"/>
-                <a:gridCol w="1920240"/>
-                <a:gridCol w="2011680"/>
+                <a:gridCol w="3657600">
+                  <a:extLst>
+                    <a:ext uri="{9D8B030D-6E8A-4147-A177-3AD203B41FA5}">
+                      <a16:colId xmlns:a16="http://schemas.microsoft.com/office/drawing/2014/main" val="20000"/>
+                    </a:ext>
+                  </a:extLst>
+                </a:gridCol>
+                <a:gridCol w="1737360">
+                  <a:extLst>
+                    <a:ext uri="{9D8B030D-6E8A-4147-A177-3AD203B41FA5}">
+                      <a16:colId xmlns:a16="http://schemas.microsoft.com/office/drawing/2014/main" val="20001"/>
+                    </a:ext>
+                  </a:extLst>
+                </a:gridCol>
+                <a:gridCol w="1737360">
+                  <a:extLst>
+                    <a:ext uri="{9D8B030D-6E8A-4147-A177-3AD203B41FA5}">
+                      <a16:colId xmlns:a16="http://schemas.microsoft.com/office/drawing/2014/main" val="20002"/>
+                    </a:ext>
+                  </a:extLst>
+                </a:gridCol>
+                <a:gridCol w="1920240">
+                  <a:extLst>
+                    <a:ext uri="{9D8B030D-6E8A-4147-A177-3AD203B41FA5}">
+                      <a16:colId xmlns:a16="http://schemas.microsoft.com/office/drawing/2014/main" val="20003"/>
+                    </a:ext>
+                  </a:extLst>
+                </a:gridCol>
+                <a:gridCol w="2011680">
+                  <a:extLst>
+                    <a:ext uri="{9D8B030D-6E8A-4147-A177-3AD203B41FA5}">
+                      <a16:colId xmlns:a16="http://schemas.microsoft.com/office/drawing/2014/main" val="20004"/>
+                    </a:ext>
+                  </a:extLst>
+                </a:gridCol>
               </a:tblGrid>
               <a:tr h="621792">
                 <a:tc>
@@ -27381,7 +27091,7 @@
                     <a:bodyPr/>
                     <a:lstStyle/>
                     <a:p>
-                      <a:pPr algn="l" indent="0" marL="0">
+                      <a:pPr marL="0" indent="0" algn="l">
                         <a:buNone/>
                       </a:pPr>
                       <a:endParaRPr lang="en-US" sz="1350" dirty="0">
@@ -27391,7 +27101,7 @@
                       </a:endParaRPr>
                     </a:p>
                   </a:txBody>
-                  <a:tcPr marL="91440" marR="91440" marT="45720" marB="45720" anchor="ctr">
+                  <a:tcPr anchor="ctr">
                     <a:lnL w="12700" cap="flat" cmpd="sng" algn="ctr">
                       <a:solidFill>
                         <a:srgbClr val="1E2B45"/>
@@ -27438,7 +27148,7 @@
                     <a:bodyPr/>
                     <a:lstStyle/>
                     <a:p>
-                      <a:pPr algn="ctr" indent="0" marL="0">
+                      <a:pPr marL="0" indent="0" algn="ctr">
                         <a:buNone/>
                       </a:pPr>
                       <a:r>
@@ -27459,7 +27169,7 @@
                       </a:endParaRPr>
                     </a:p>
                   </a:txBody>
-                  <a:tcPr marL="91440" marR="91440" marT="45720" marB="45720" anchor="ctr">
+                  <a:tcPr anchor="ctr">
                     <a:lnL w="12700" cap="flat" cmpd="sng" algn="ctr">
                       <a:solidFill>
                         <a:srgbClr val="1E2B45"/>
@@ -27506,7 +27216,7 @@
                     <a:bodyPr/>
                     <a:lstStyle/>
                     <a:p>
-                      <a:pPr algn="ctr" indent="0" marL="0">
+                      <a:pPr marL="0" indent="0" algn="ctr">
                         <a:buNone/>
                       </a:pPr>
                       <a:r>
@@ -27527,7 +27237,7 @@
                       </a:endParaRPr>
                     </a:p>
                   </a:txBody>
-                  <a:tcPr marL="91440" marR="91440" marT="45720" marB="45720" anchor="ctr">
+                  <a:tcPr anchor="ctr">
                     <a:lnL w="12700" cap="flat" cmpd="sng" algn="ctr">
                       <a:solidFill>
                         <a:srgbClr val="1E2B45"/>
@@ -27574,7 +27284,7 @@
                     <a:bodyPr/>
                     <a:lstStyle/>
                     <a:p>
-                      <a:pPr algn="ctr" indent="0" marL="0">
+                      <a:pPr marL="0" indent="0" algn="ctr">
                         <a:buNone/>
                       </a:pPr>
                       <a:r>
@@ -27595,7 +27305,7 @@
                       </a:endParaRPr>
                     </a:p>
                   </a:txBody>
-                  <a:tcPr marL="91440" marR="91440" marT="45720" marB="45720" anchor="ctr">
+                  <a:tcPr anchor="ctr">
                     <a:lnL w="12700" cap="flat" cmpd="sng" algn="ctr">
                       <a:solidFill>
                         <a:srgbClr val="1E2B45"/>
@@ -27642,7 +27352,7 @@
                     <a:bodyPr/>
                     <a:lstStyle/>
                     <a:p>
-                      <a:pPr algn="ctr" indent="0" marL="0">
+                      <a:pPr marL="0" indent="0" algn="ctr">
                         <a:buNone/>
                       </a:pPr>
                       <a:r>
@@ -27663,7 +27373,7 @@
                       </a:endParaRPr>
                     </a:p>
                   </a:txBody>
-                  <a:tcPr marL="91440" marR="91440" marT="45720" marB="45720" anchor="ctr">
+                  <a:tcPr anchor="ctr">
                     <a:lnL w="12700" cap="flat" cmpd="sng" algn="ctr">
                       <a:solidFill>
                         <a:srgbClr val="1E2B45"/>
@@ -27705,6 +27415,11 @@
                     </a:solidFill>
                   </a:tcPr>
                 </a:tc>
+                <a:extLst>
+                  <a:ext uri="{0D108BD9-81ED-4DB2-BD59-A6C34878D82A}">
+                    <a16:rowId xmlns:a16="http://schemas.microsoft.com/office/drawing/2014/main" val="10000"/>
+                  </a:ext>
+                </a:extLst>
               </a:tr>
               <a:tr h="621792">
                 <a:tc>
@@ -27712,7 +27427,7 @@
                     <a:bodyPr/>
                     <a:lstStyle/>
                     <a:p>
-                      <a:pPr algn="l" indent="0" marL="0">
+                      <a:pPr marL="0" indent="0" algn="l">
                         <a:buNone/>
                       </a:pPr>
                       <a:r>
@@ -27733,7 +27448,7 @@
                       </a:endParaRPr>
                     </a:p>
                   </a:txBody>
-                  <a:tcPr marL="91440" marR="91440" marT="45720" marB="45720" anchor="ctr">
+                  <a:tcPr anchor="ctr">
                     <a:lnL w="12700" cap="flat" cmpd="sng" algn="ctr">
                       <a:solidFill>
                         <a:srgbClr val="1E2B45"/>
@@ -27780,7 +27495,7 @@
                     <a:bodyPr/>
                     <a:lstStyle/>
                     <a:p>
-                      <a:pPr algn="ctr" indent="0" marL="0">
+                      <a:pPr marL="0" indent="0" algn="ctr">
                         <a:buNone/>
                       </a:pPr>
                       <a:r>
@@ -27801,7 +27516,7 @@
                       </a:endParaRPr>
                     </a:p>
                   </a:txBody>
-                  <a:tcPr marL="91440" marR="91440" marT="45720" marB="45720" anchor="ctr">
+                  <a:tcPr anchor="ctr">
                     <a:lnL w="12700" cap="flat" cmpd="sng" algn="ctr">
                       <a:solidFill>
                         <a:srgbClr val="1E2B45"/>
@@ -27848,7 +27563,7 @@
                     <a:bodyPr/>
                     <a:lstStyle/>
                     <a:p>
-                      <a:pPr algn="ctr" indent="0" marL="0">
+                      <a:pPr marL="0" indent="0" algn="ctr">
                         <a:buNone/>
                       </a:pPr>
                       <a:r>
@@ -27869,7 +27584,7 @@
                       </a:endParaRPr>
                     </a:p>
                   </a:txBody>
-                  <a:tcPr marL="91440" marR="91440" marT="45720" marB="45720" anchor="ctr">
+                  <a:tcPr anchor="ctr">
                     <a:lnL w="12700" cap="flat" cmpd="sng" algn="ctr">
                       <a:solidFill>
                         <a:srgbClr val="1E2B45"/>
@@ -27916,7 +27631,7 @@
                     <a:bodyPr/>
                     <a:lstStyle/>
                     <a:p>
-                      <a:pPr algn="ctr" indent="0" marL="0">
+                      <a:pPr marL="0" indent="0" algn="ctr">
                         <a:buNone/>
                       </a:pPr>
                       <a:r>
@@ -27937,7 +27652,7 @@
                       </a:endParaRPr>
                     </a:p>
                   </a:txBody>
-                  <a:tcPr marL="91440" marR="91440" marT="45720" marB="45720" anchor="ctr">
+                  <a:tcPr anchor="ctr">
                     <a:lnL w="12700" cap="flat" cmpd="sng" algn="ctr">
                       <a:solidFill>
                         <a:srgbClr val="1E2B45"/>
@@ -27984,7 +27699,7 @@
                     <a:bodyPr/>
                     <a:lstStyle/>
                     <a:p>
-                      <a:pPr algn="ctr" indent="0" marL="0">
+                      <a:pPr marL="0" indent="0" algn="ctr">
                         <a:buNone/>
                       </a:pPr>
                       <a:r>
@@ -28005,7 +27720,7 @@
                       </a:endParaRPr>
                     </a:p>
                   </a:txBody>
-                  <a:tcPr marL="91440" marR="91440" marT="45720" marB="45720" anchor="ctr">
+                  <a:tcPr anchor="ctr">
                     <a:lnL w="12700" cap="flat" cmpd="sng" algn="ctr">
                       <a:solidFill>
                         <a:srgbClr val="1E2B45"/>
@@ -28047,6 +27762,11 @@
                     </a:solidFill>
                   </a:tcPr>
                 </a:tc>
+                <a:extLst>
+                  <a:ext uri="{0D108BD9-81ED-4DB2-BD59-A6C34878D82A}">
+                    <a16:rowId xmlns:a16="http://schemas.microsoft.com/office/drawing/2014/main" val="10001"/>
+                  </a:ext>
+                </a:extLst>
               </a:tr>
               <a:tr h="621792">
                 <a:tc>
@@ -28054,7 +27774,7 @@
                     <a:bodyPr/>
                     <a:lstStyle/>
                     <a:p>
-                      <a:pPr algn="l" indent="0" marL="0">
+                      <a:pPr marL="0" indent="0" algn="l">
                         <a:buNone/>
                       </a:pPr>
                       <a:r>
@@ -28075,7 +27795,7 @@
                       </a:endParaRPr>
                     </a:p>
                   </a:txBody>
-                  <a:tcPr marL="91440" marR="91440" marT="45720" marB="45720" anchor="ctr">
+                  <a:tcPr anchor="ctr">
                     <a:lnL w="12700" cap="flat" cmpd="sng" algn="ctr">
                       <a:solidFill>
                         <a:srgbClr val="1E2B45"/>
@@ -28122,7 +27842,7 @@
                     <a:bodyPr/>
                     <a:lstStyle/>
                     <a:p>
-                      <a:pPr algn="ctr" indent="0" marL="0">
+                      <a:pPr marL="0" indent="0" algn="ctr">
                         <a:buNone/>
                       </a:pPr>
                       <a:r>
@@ -28143,7 +27863,7 @@
                       </a:endParaRPr>
                     </a:p>
                   </a:txBody>
-                  <a:tcPr marL="91440" marR="91440" marT="45720" marB="45720" anchor="ctr">
+                  <a:tcPr anchor="ctr">
                     <a:lnL w="12700" cap="flat" cmpd="sng" algn="ctr">
                       <a:solidFill>
                         <a:srgbClr val="1E2B45"/>
@@ -28190,7 +27910,7 @@
                     <a:bodyPr/>
                     <a:lstStyle/>
                     <a:p>
-                      <a:pPr algn="ctr" indent="0" marL="0">
+                      <a:pPr marL="0" indent="0" algn="ctr">
                         <a:buNone/>
                       </a:pPr>
                       <a:r>
@@ -28211,7 +27931,7 @@
                       </a:endParaRPr>
                     </a:p>
                   </a:txBody>
-                  <a:tcPr marL="91440" marR="91440" marT="45720" marB="45720" anchor="ctr">
+                  <a:tcPr anchor="ctr">
                     <a:lnL w="12700" cap="flat" cmpd="sng" algn="ctr">
                       <a:solidFill>
                         <a:srgbClr val="1E2B45"/>
@@ -28258,7 +27978,7 @@
                     <a:bodyPr/>
                     <a:lstStyle/>
                     <a:p>
-                      <a:pPr algn="ctr" indent="0" marL="0">
+                      <a:pPr marL="0" indent="0" algn="ctr">
                         <a:buNone/>
                       </a:pPr>
                       <a:r>
@@ -28279,7 +27999,7 @@
                       </a:endParaRPr>
                     </a:p>
                   </a:txBody>
-                  <a:tcPr marL="91440" marR="91440" marT="45720" marB="45720" anchor="ctr">
+                  <a:tcPr anchor="ctr">
                     <a:lnL w="12700" cap="flat" cmpd="sng" algn="ctr">
                       <a:solidFill>
                         <a:srgbClr val="1E2B45"/>
@@ -28326,7 +28046,7 @@
                     <a:bodyPr/>
                     <a:lstStyle/>
                     <a:p>
-                      <a:pPr algn="ctr" indent="0" marL="0">
+                      <a:pPr marL="0" indent="0" algn="ctr">
                         <a:buNone/>
                       </a:pPr>
                       <a:r>
@@ -28347,7 +28067,7 @@
                       </a:endParaRPr>
                     </a:p>
                   </a:txBody>
-                  <a:tcPr marL="91440" marR="91440" marT="45720" marB="45720" anchor="ctr">
+                  <a:tcPr anchor="ctr">
                     <a:lnL w="12700" cap="flat" cmpd="sng" algn="ctr">
                       <a:solidFill>
                         <a:srgbClr val="1E2B45"/>
@@ -28389,6 +28109,11 @@
                     </a:solidFill>
                   </a:tcPr>
                 </a:tc>
+                <a:extLst>
+                  <a:ext uri="{0D108BD9-81ED-4DB2-BD59-A6C34878D82A}">
+                    <a16:rowId xmlns:a16="http://schemas.microsoft.com/office/drawing/2014/main" val="10002"/>
+                  </a:ext>
+                </a:extLst>
               </a:tr>
               <a:tr h="621792">
                 <a:tc>
@@ -28396,7 +28121,7 @@
                     <a:bodyPr/>
                     <a:lstStyle/>
                     <a:p>
-                      <a:pPr algn="l" indent="0" marL="0">
+                      <a:pPr marL="0" indent="0" algn="l">
                         <a:buNone/>
                       </a:pPr>
                       <a:r>
@@ -28417,7 +28142,7 @@
                       </a:endParaRPr>
                     </a:p>
                   </a:txBody>
-                  <a:tcPr marL="91440" marR="91440" marT="45720" marB="45720" anchor="ctr">
+                  <a:tcPr anchor="ctr">
                     <a:lnL w="12700" cap="flat" cmpd="sng" algn="ctr">
                       <a:solidFill>
                         <a:srgbClr val="1E2B45"/>
@@ -28464,7 +28189,7 @@
                     <a:bodyPr/>
                     <a:lstStyle/>
                     <a:p>
-                      <a:pPr algn="ctr" indent="0" marL="0">
+                      <a:pPr marL="0" indent="0" algn="ctr">
                         <a:buNone/>
                       </a:pPr>
                       <a:r>
@@ -28485,7 +28210,7 @@
                       </a:endParaRPr>
                     </a:p>
                   </a:txBody>
-                  <a:tcPr marL="91440" marR="91440" marT="45720" marB="45720" anchor="ctr">
+                  <a:tcPr anchor="ctr">
                     <a:lnL w="12700" cap="flat" cmpd="sng" algn="ctr">
                       <a:solidFill>
                         <a:srgbClr val="1E2B45"/>
@@ -28532,7 +28257,7 @@
                     <a:bodyPr/>
                     <a:lstStyle/>
                     <a:p>
-                      <a:pPr algn="ctr" indent="0" marL="0">
+                      <a:pPr marL="0" indent="0" algn="ctr">
                         <a:buNone/>
                       </a:pPr>
                       <a:r>
@@ -28553,7 +28278,7 @@
                       </a:endParaRPr>
                     </a:p>
                   </a:txBody>
-                  <a:tcPr marL="91440" marR="91440" marT="45720" marB="45720" anchor="ctr">
+                  <a:tcPr anchor="ctr">
                     <a:lnL w="12700" cap="flat" cmpd="sng" algn="ctr">
                       <a:solidFill>
                         <a:srgbClr val="1E2B45"/>
@@ -28600,7 +28325,7 @@
                     <a:bodyPr/>
                     <a:lstStyle/>
                     <a:p>
-                      <a:pPr algn="ctr" indent="0" marL="0">
+                      <a:pPr marL="0" indent="0" algn="ctr">
                         <a:buNone/>
                       </a:pPr>
                       <a:r>
@@ -28621,7 +28346,7 @@
                       </a:endParaRPr>
                     </a:p>
                   </a:txBody>
-                  <a:tcPr marL="91440" marR="91440" marT="45720" marB="45720" anchor="ctr">
+                  <a:tcPr anchor="ctr">
                     <a:lnL w="12700" cap="flat" cmpd="sng" algn="ctr">
                       <a:solidFill>
                         <a:srgbClr val="1E2B45"/>
@@ -28668,7 +28393,7 @@
                     <a:bodyPr/>
                     <a:lstStyle/>
                     <a:p>
-                      <a:pPr algn="ctr" indent="0" marL="0">
+                      <a:pPr marL="0" indent="0" algn="ctr">
                         <a:buNone/>
                       </a:pPr>
                       <a:r>
@@ -28689,7 +28414,7 @@
                       </a:endParaRPr>
                     </a:p>
                   </a:txBody>
-                  <a:tcPr marL="91440" marR="91440" marT="45720" marB="45720" anchor="ctr">
+                  <a:tcPr anchor="ctr">
                     <a:lnL w="12700" cap="flat" cmpd="sng" algn="ctr">
                       <a:solidFill>
                         <a:srgbClr val="1E2B45"/>
@@ -28731,6 +28456,11 @@
                     </a:solidFill>
                   </a:tcPr>
                 </a:tc>
+                <a:extLst>
+                  <a:ext uri="{0D108BD9-81ED-4DB2-BD59-A6C34878D82A}">
+                    <a16:rowId xmlns:a16="http://schemas.microsoft.com/office/drawing/2014/main" val="10003"/>
+                  </a:ext>
+                </a:extLst>
               </a:tr>
               <a:tr h="621792">
                 <a:tc>
@@ -28738,7 +28468,7 @@
                     <a:bodyPr/>
                     <a:lstStyle/>
                     <a:p>
-                      <a:pPr algn="l" indent="0" marL="0">
+                      <a:pPr marL="0" indent="0" algn="l">
                         <a:buNone/>
                       </a:pPr>
                       <a:r>
@@ -28759,7 +28489,7 @@
                       </a:endParaRPr>
                     </a:p>
                   </a:txBody>
-                  <a:tcPr marL="91440" marR="91440" marT="45720" marB="45720" anchor="ctr">
+                  <a:tcPr anchor="ctr">
                     <a:lnL w="12700" cap="flat" cmpd="sng" algn="ctr">
                       <a:solidFill>
                         <a:srgbClr val="1E2B45"/>
@@ -28806,7 +28536,7 @@
                     <a:bodyPr/>
                     <a:lstStyle/>
                     <a:p>
-                      <a:pPr algn="ctr" indent="0" marL="0">
+                      <a:pPr marL="0" indent="0" algn="ctr">
                         <a:buNone/>
                       </a:pPr>
                       <a:r>
@@ -28827,7 +28557,7 @@
                       </a:endParaRPr>
                     </a:p>
                   </a:txBody>
-                  <a:tcPr marL="91440" marR="91440" marT="45720" marB="45720" anchor="ctr">
+                  <a:tcPr anchor="ctr">
                     <a:lnL w="12700" cap="flat" cmpd="sng" algn="ctr">
                       <a:solidFill>
                         <a:srgbClr val="1E2B45"/>
@@ -28874,7 +28604,7 @@
                     <a:bodyPr/>
                     <a:lstStyle/>
                     <a:p>
-                      <a:pPr algn="ctr" indent="0" marL="0">
+                      <a:pPr marL="0" indent="0" algn="ctr">
                         <a:buNone/>
                       </a:pPr>
                       <a:r>
@@ -28895,7 +28625,7 @@
                       </a:endParaRPr>
                     </a:p>
                   </a:txBody>
-                  <a:tcPr marL="91440" marR="91440" marT="45720" marB="45720" anchor="ctr">
+                  <a:tcPr anchor="ctr">
                     <a:lnL w="12700" cap="flat" cmpd="sng" algn="ctr">
                       <a:solidFill>
                         <a:srgbClr val="1E2B45"/>
@@ -28942,7 +28672,7 @@
                     <a:bodyPr/>
                     <a:lstStyle/>
                     <a:p>
-                      <a:pPr algn="ctr" indent="0" marL="0">
+                      <a:pPr marL="0" indent="0" algn="ctr">
                         <a:buNone/>
                       </a:pPr>
                       <a:r>
@@ -28963,7 +28693,7 @@
                       </a:endParaRPr>
                     </a:p>
                   </a:txBody>
-                  <a:tcPr marL="91440" marR="91440" marT="45720" marB="45720" anchor="ctr">
+                  <a:tcPr anchor="ctr">
                     <a:lnL w="12700" cap="flat" cmpd="sng" algn="ctr">
                       <a:solidFill>
                         <a:srgbClr val="1E2B45"/>
@@ -29010,7 +28740,7 @@
                     <a:bodyPr/>
                     <a:lstStyle/>
                     <a:p>
-                      <a:pPr algn="ctr" indent="0" marL="0">
+                      <a:pPr marL="0" indent="0" algn="ctr">
                         <a:buNone/>
                       </a:pPr>
                       <a:r>
@@ -29031,7 +28761,7 @@
                       </a:endParaRPr>
                     </a:p>
                   </a:txBody>
-                  <a:tcPr marL="91440" marR="91440" marT="45720" marB="45720" anchor="ctr">
+                  <a:tcPr anchor="ctr">
                     <a:lnL w="12700" cap="flat" cmpd="sng" algn="ctr">
                       <a:solidFill>
                         <a:srgbClr val="1E2B45"/>
@@ -29073,6 +28803,11 @@
                     </a:solidFill>
                   </a:tcPr>
                 </a:tc>
+                <a:extLst>
+                  <a:ext uri="{0D108BD9-81ED-4DB2-BD59-A6C34878D82A}">
+                    <a16:rowId xmlns:a16="http://schemas.microsoft.com/office/drawing/2014/main" val="10004"/>
+                  </a:ext>
+                </a:extLst>
               </a:tr>
               <a:tr h="621792">
                 <a:tc>
@@ -29080,7 +28815,7 @@
                     <a:bodyPr/>
                     <a:lstStyle/>
                     <a:p>
-                      <a:pPr algn="l" indent="0" marL="0">
+                      <a:pPr marL="0" indent="0" algn="l">
                         <a:buNone/>
                       </a:pPr>
                       <a:r>
@@ -29101,7 +28836,7 @@
                       </a:endParaRPr>
                     </a:p>
                   </a:txBody>
-                  <a:tcPr marL="91440" marR="91440" marT="45720" marB="45720" anchor="ctr">
+                  <a:tcPr anchor="ctr">
                     <a:lnL w="12700" cap="flat" cmpd="sng" algn="ctr">
                       <a:solidFill>
                         <a:srgbClr val="1E2B45"/>
@@ -29148,7 +28883,7 @@
                     <a:bodyPr/>
                     <a:lstStyle/>
                     <a:p>
-                      <a:pPr algn="ctr" indent="0" marL="0">
+                      <a:pPr marL="0" indent="0" algn="ctr">
                         <a:buNone/>
                       </a:pPr>
                       <a:r>
@@ -29169,7 +28904,7 @@
                       </a:endParaRPr>
                     </a:p>
                   </a:txBody>
-                  <a:tcPr marL="91440" marR="91440" marT="45720" marB="45720" anchor="ctr">
+                  <a:tcPr anchor="ctr">
                     <a:lnL w="12700" cap="flat" cmpd="sng" algn="ctr">
                       <a:solidFill>
                         <a:srgbClr val="1E2B45"/>
@@ -29216,7 +28951,7 @@
                     <a:bodyPr/>
                     <a:lstStyle/>
                     <a:p>
-                      <a:pPr algn="ctr" indent="0" marL="0">
+                      <a:pPr marL="0" indent="0" algn="ctr">
                         <a:buNone/>
                       </a:pPr>
                       <a:r>
@@ -29237,7 +28972,7 @@
                       </a:endParaRPr>
                     </a:p>
                   </a:txBody>
-                  <a:tcPr marL="91440" marR="91440" marT="45720" marB="45720" anchor="ctr">
+                  <a:tcPr anchor="ctr">
                     <a:lnL w="12700" cap="flat" cmpd="sng" algn="ctr">
                       <a:solidFill>
                         <a:srgbClr val="1E2B45"/>
@@ -29284,7 +29019,7 @@
                     <a:bodyPr/>
                     <a:lstStyle/>
                     <a:p>
-                      <a:pPr algn="ctr" indent="0" marL="0">
+                      <a:pPr marL="0" indent="0" algn="ctr">
                         <a:buNone/>
                       </a:pPr>
                       <a:r>
@@ -29305,7 +29040,7 @@
                       </a:endParaRPr>
                     </a:p>
                   </a:txBody>
-                  <a:tcPr marL="91440" marR="91440" marT="45720" marB="45720" anchor="ctr">
+                  <a:tcPr anchor="ctr">
                     <a:lnL w="12700" cap="flat" cmpd="sng" algn="ctr">
                       <a:solidFill>
                         <a:srgbClr val="1E2B45"/>
@@ -29352,7 +29087,7 @@
                     <a:bodyPr/>
                     <a:lstStyle/>
                     <a:p>
-                      <a:pPr algn="ctr" indent="0" marL="0">
+                      <a:pPr marL="0" indent="0" algn="ctr">
                         <a:buNone/>
                       </a:pPr>
                       <a:r>
@@ -29373,7 +29108,7 @@
                       </a:endParaRPr>
                     </a:p>
                   </a:txBody>
-                  <a:tcPr marL="91440" marR="91440" marT="45720" marB="45720" anchor="ctr">
+                  <a:tcPr anchor="ctr">
                     <a:lnL w="12700" cap="flat" cmpd="sng" algn="ctr">
                       <a:solidFill>
                         <a:srgbClr val="1E2B45"/>
@@ -29415,6 +29150,11 @@
                     </a:solidFill>
                   </a:tcPr>
                 </a:tc>
+                <a:extLst>
+                  <a:ext uri="{0D108BD9-81ED-4DB2-BD59-A6C34878D82A}">
+                    <a16:rowId xmlns:a16="http://schemas.microsoft.com/office/drawing/2014/main" val="10005"/>
+                  </a:ext>
+                </a:extLst>
               </a:tr>
             </a:tbl>
           </a:graphicData>
@@ -29441,7 +29181,7 @@
           <a:bodyPr wrap="square" lIns="0" tIns="0" rIns="0" bIns="0" rtlCol="0" anchor="t"/>
           <a:lstStyle/>
           <a:p>
-            <a:pPr indent="0" marL="0">
+            <a:pPr marL="0" indent="0">
               <a:buNone/>
             </a:pPr>
             <a:r>
@@ -29461,14 +29201,14 @@
       </p:sp>
       <p:pic>
         <p:nvPicPr>
-          <p:cNvPr id="6" name="Image 0" descr="preencoded.png">    </p:cNvPr>
+          <p:cNvPr id="6" name="Image 0" descr="preencoded.png"/>
           <p:cNvPicPr>
             <a:picLocks noChangeAspect="1"/>
           </p:cNvPicPr>
           <p:nvPr/>
         </p:nvPicPr>
         <p:blipFill>
-          <a:blip r:embed="rId1"/>
+          <a:blip r:embed="rId3"/>
           <a:stretch>
             <a:fillRect/>
           </a:stretch>
@@ -29504,7 +29244,7 @@
           <a:bodyPr wrap="square" lIns="0" tIns="0" rIns="0" bIns="0" rtlCol="0" anchor="t"/>
           <a:lstStyle/>
           <a:p>
-            <a:pPr algn="r" indent="0" marL="0">
+            <a:pPr marL="0" indent="0" algn="r">
               <a:buNone/>
             </a:pPr>
             <a:r>
@@ -29823,4 +29563,319 @@
     </a:ext>
   </a:extLst>
 </a:theme>
+</file>
+
+<file path=ppt/theme/theme2.xml><?xml version="1.0" encoding="utf-8"?>
+<a:theme xmlns:a="http://schemas.openxmlformats.org/drawingml/2006/main" name="Office Theme">
+  <a:themeElements>
+    <a:clrScheme name="Office">
+      <a:dk1>
+        <a:sysClr val="windowText" lastClr="000000"/>
+      </a:dk1>
+      <a:lt1>
+        <a:sysClr val="window" lastClr="FFFFFF"/>
+      </a:lt1>
+      <a:dk2>
+        <a:srgbClr val="0E2841"/>
+      </a:dk2>
+      <a:lt2>
+        <a:srgbClr val="E8E8E8"/>
+      </a:lt2>
+      <a:accent1>
+        <a:srgbClr val="156082"/>
+      </a:accent1>
+      <a:accent2>
+        <a:srgbClr val="E97132"/>
+      </a:accent2>
+      <a:accent3>
+        <a:srgbClr val="196B24"/>
+      </a:accent3>
+      <a:accent4>
+        <a:srgbClr val="0F9ED5"/>
+      </a:accent4>
+      <a:accent5>
+        <a:srgbClr val="A02B93"/>
+      </a:accent5>
+      <a:accent6>
+        <a:srgbClr val="4EA72E"/>
+      </a:accent6>
+      <a:hlink>
+        <a:srgbClr val="467886"/>
+      </a:hlink>
+      <a:folHlink>
+        <a:srgbClr val="96607D"/>
+      </a:folHlink>
+    </a:clrScheme>
+    <a:fontScheme name="Office">
+      <a:majorFont>
+        <a:latin typeface="Aptos Display" panose="02110004020202020204"/>
+        <a:ea typeface=""/>
+        <a:cs typeface=""/>
+        <a:font script="Jpan" typeface="游ゴシック Light"/>
+        <a:font script="Hang" typeface="맑은 고딕"/>
+        <a:font script="Hans" typeface="等线 Light"/>
+        <a:font script="Hant" typeface="新細明體"/>
+        <a:font script="Arab" typeface="Times New Roman"/>
+        <a:font script="Hebr" typeface="Times New Roman"/>
+        <a:font script="Thai" typeface="Angsana New"/>
+        <a:font script="Ethi" typeface="Nyala"/>
+        <a:font script="Beng" typeface="Vrinda"/>
+        <a:font script="Gujr" typeface="Shruti"/>
+        <a:font script="Khmr" typeface="MoolBoran"/>
+        <a:font script="Knda" typeface="Tunga"/>
+        <a:font script="Guru" typeface="Raavi"/>
+        <a:font script="Cans" typeface="Euphemia"/>
+        <a:font script="Cher" typeface="Plantagenet Cherokee"/>
+        <a:font script="Yiii" typeface="Microsoft Yi Baiti"/>
+        <a:font script="Tibt" typeface="Microsoft Himalaya"/>
+        <a:font script="Thaa" typeface="MV Boli"/>
+        <a:font script="Deva" typeface="Mangal"/>
+        <a:font script="Telu" typeface="Gautami"/>
+        <a:font script="Taml" typeface="Latha"/>
+        <a:font script="Syrc" typeface="Estrangelo Edessa"/>
+        <a:font script="Orya" typeface="Kalinga"/>
+        <a:font script="Mlym" typeface="Kartika"/>
+        <a:font script="Laoo" typeface="DokChampa"/>
+        <a:font script="Sinh" typeface="Iskoola Pota"/>
+        <a:font script="Mong" typeface="Mongolian Baiti"/>
+        <a:font script="Viet" typeface="Times New Roman"/>
+        <a:font script="Uigh" typeface="Microsoft Uighur"/>
+        <a:font script="Geor" typeface="Sylfaen"/>
+        <a:font script="Armn" typeface="Arial"/>
+        <a:font script="Bugi" typeface="Leelawadee UI"/>
+        <a:font script="Bopo" typeface="Microsoft JhengHei"/>
+        <a:font script="Java" typeface="Javanese Text"/>
+        <a:font script="Lisu" typeface="Segoe UI"/>
+        <a:font script="Mymr" typeface="Myanmar Text"/>
+        <a:font script="Nkoo" typeface="Ebrima"/>
+        <a:font script="Olck" typeface="Nirmala UI"/>
+        <a:font script="Osma" typeface="Ebrima"/>
+        <a:font script="Phag" typeface="Phagspa"/>
+        <a:font script="Syrn" typeface="Estrangelo Edessa"/>
+        <a:font script="Syrj" typeface="Estrangelo Edessa"/>
+        <a:font script="Syre" typeface="Estrangelo Edessa"/>
+        <a:font script="Sora" typeface="Nirmala UI"/>
+        <a:font script="Tale" typeface="Microsoft Tai Le"/>
+        <a:font script="Talu" typeface="Microsoft New Tai Lue"/>
+        <a:font script="Tfng" typeface="Ebrima"/>
+      </a:majorFont>
+      <a:minorFont>
+        <a:latin typeface="Aptos" panose="02110004020202020204"/>
+        <a:ea typeface=""/>
+        <a:cs typeface=""/>
+        <a:font script="Jpan" typeface="游ゴシック"/>
+        <a:font script="Hang" typeface="맑은 고딕"/>
+        <a:font script="Hans" typeface="等线"/>
+        <a:font script="Hant" typeface="新細明體"/>
+        <a:font script="Arab" typeface="Arial"/>
+        <a:font script="Hebr" typeface="Arial"/>
+        <a:font script="Thai" typeface="Cordia New"/>
+        <a:font script="Ethi" typeface="Nyala"/>
+        <a:font script="Beng" typeface="Vrinda"/>
+        <a:font script="Gujr" typeface="Shruti"/>
+        <a:font script="Khmr" typeface="DaunPenh"/>
+        <a:font script="Knda" typeface="Tunga"/>
+        <a:font script="Guru" typeface="Raavi"/>
+        <a:font script="Cans" typeface="Euphemia"/>
+        <a:font script="Cher" typeface="Plantagenet Cherokee"/>
+        <a:font script="Yiii" typeface="Microsoft Yi Baiti"/>
+        <a:font script="Tibt" typeface="Microsoft Himalaya"/>
+        <a:font script="Thaa" typeface="MV Boli"/>
+        <a:font script="Deva" typeface="Mangal"/>
+        <a:font script="Telu" typeface="Gautami"/>
+        <a:font script="Taml" typeface="Latha"/>
+        <a:font script="Syrc" typeface="Estrangelo Edessa"/>
+        <a:font script="Orya" typeface="Kalinga"/>
+        <a:font script="Mlym" typeface="Kartika"/>
+        <a:font script="Laoo" typeface="DokChampa"/>
+        <a:font script="Sinh" typeface="Iskoola Pota"/>
+        <a:font script="Mong" typeface="Mongolian Baiti"/>
+        <a:font script="Viet" typeface="Arial"/>
+        <a:font script="Uigh" typeface="Microsoft Uighur"/>
+        <a:font script="Geor" typeface="Sylfaen"/>
+        <a:font script="Armn" typeface="Arial"/>
+        <a:font script="Bugi" typeface="Leelawadee UI"/>
+        <a:font script="Bopo" typeface="Microsoft JhengHei"/>
+        <a:font script="Java" typeface="Javanese Text"/>
+        <a:font script="Lisu" typeface="Segoe UI"/>
+        <a:font script="Mymr" typeface="Myanmar Text"/>
+        <a:font script="Nkoo" typeface="Ebrima"/>
+        <a:font script="Olck" typeface="Nirmala UI"/>
+        <a:font script="Osma" typeface="Ebrima"/>
+        <a:font script="Phag" typeface="Phagspa"/>
+        <a:font script="Syrn" typeface="Estrangelo Edessa"/>
+        <a:font script="Syrj" typeface="Estrangelo Edessa"/>
+        <a:font script="Syre" typeface="Estrangelo Edessa"/>
+        <a:font script="Sora" typeface="Nirmala UI"/>
+        <a:font script="Tale" typeface="Microsoft Tai Le"/>
+        <a:font script="Talu" typeface="Microsoft New Tai Lue"/>
+        <a:font script="Tfng" typeface="Ebrima"/>
+      </a:minorFont>
+    </a:fontScheme>
+    <a:fmtScheme name="Office">
+      <a:fillStyleLst>
+        <a:solidFill>
+          <a:schemeClr val="phClr"/>
+        </a:solidFill>
+        <a:gradFill rotWithShape="1">
+          <a:gsLst>
+            <a:gs pos="0">
+              <a:schemeClr val="phClr">
+                <a:lumMod val="110000"/>
+                <a:satMod val="105000"/>
+                <a:tint val="67000"/>
+              </a:schemeClr>
+            </a:gs>
+            <a:gs pos="50000">
+              <a:schemeClr val="phClr">
+                <a:lumMod val="105000"/>
+                <a:satMod val="103000"/>
+                <a:tint val="73000"/>
+              </a:schemeClr>
+            </a:gs>
+            <a:gs pos="100000">
+              <a:schemeClr val="phClr">
+                <a:lumMod val="105000"/>
+                <a:satMod val="109000"/>
+                <a:tint val="81000"/>
+              </a:schemeClr>
+            </a:gs>
+          </a:gsLst>
+          <a:lin ang="5400000" scaled="0"/>
+        </a:gradFill>
+        <a:gradFill rotWithShape="1">
+          <a:gsLst>
+            <a:gs pos="0">
+              <a:schemeClr val="phClr">
+                <a:satMod val="103000"/>
+                <a:lumMod val="102000"/>
+                <a:tint val="94000"/>
+              </a:schemeClr>
+            </a:gs>
+            <a:gs pos="50000">
+              <a:schemeClr val="phClr">
+                <a:satMod val="110000"/>
+                <a:lumMod val="100000"/>
+                <a:shade val="100000"/>
+              </a:schemeClr>
+            </a:gs>
+            <a:gs pos="100000">
+              <a:schemeClr val="phClr">
+                <a:lumMod val="99000"/>
+                <a:satMod val="120000"/>
+                <a:shade val="78000"/>
+              </a:schemeClr>
+            </a:gs>
+          </a:gsLst>
+          <a:lin ang="5400000" scaled="0"/>
+        </a:gradFill>
+      </a:fillStyleLst>
+      <a:lnStyleLst>
+        <a:ln w="12700" cap="flat" cmpd="sng" algn="ctr">
+          <a:solidFill>
+            <a:schemeClr val="phClr"/>
+          </a:solidFill>
+          <a:prstDash val="solid"/>
+          <a:miter lim="800000"/>
+        </a:ln>
+        <a:ln w="19050" cap="flat" cmpd="sng" algn="ctr">
+          <a:solidFill>
+            <a:schemeClr val="phClr"/>
+          </a:solidFill>
+          <a:prstDash val="solid"/>
+          <a:miter lim="800000"/>
+        </a:ln>
+        <a:ln w="25400" cap="flat" cmpd="sng" algn="ctr">
+          <a:solidFill>
+            <a:schemeClr val="phClr"/>
+          </a:solidFill>
+          <a:prstDash val="solid"/>
+          <a:miter lim="800000"/>
+        </a:ln>
+      </a:lnStyleLst>
+      <a:effectStyleLst>
+        <a:effectStyle>
+          <a:effectLst/>
+        </a:effectStyle>
+        <a:effectStyle>
+          <a:effectLst/>
+        </a:effectStyle>
+        <a:effectStyle>
+          <a:effectLst>
+            <a:outerShdw blurRad="57150" dist="19050" dir="5400000" algn="ctr" rotWithShape="0">
+              <a:srgbClr val="000000">
+                <a:alpha val="63000"/>
+              </a:srgbClr>
+            </a:outerShdw>
+          </a:effectLst>
+        </a:effectStyle>
+      </a:effectStyleLst>
+      <a:bgFillStyleLst>
+        <a:solidFill>
+          <a:schemeClr val="phClr"/>
+        </a:solidFill>
+        <a:solidFill>
+          <a:schemeClr val="phClr">
+            <a:tint val="95000"/>
+            <a:satMod val="170000"/>
+          </a:schemeClr>
+        </a:solidFill>
+        <a:gradFill rotWithShape="1">
+          <a:gsLst>
+            <a:gs pos="0">
+              <a:schemeClr val="phClr">
+                <a:tint val="93000"/>
+                <a:satMod val="150000"/>
+                <a:shade val="98000"/>
+                <a:lumMod val="102000"/>
+              </a:schemeClr>
+            </a:gs>
+            <a:gs pos="50000">
+              <a:schemeClr val="phClr">
+                <a:tint val="98000"/>
+                <a:satMod val="130000"/>
+                <a:shade val="90000"/>
+                <a:lumMod val="103000"/>
+              </a:schemeClr>
+            </a:gs>
+            <a:gs pos="100000">
+              <a:schemeClr val="phClr">
+                <a:shade val="63000"/>
+                <a:satMod val="120000"/>
+              </a:schemeClr>
+            </a:gs>
+          </a:gsLst>
+          <a:lin ang="5400000" scaled="0"/>
+        </a:gradFill>
+      </a:bgFillStyleLst>
+    </a:fmtScheme>
+  </a:themeElements>
+  <a:objectDefaults>
+    <a:lnDef>
+      <a:spPr/>
+      <a:bodyPr/>
+      <a:lstStyle/>
+      <a:style>
+        <a:lnRef idx="2">
+          <a:schemeClr val="accent1"/>
+        </a:lnRef>
+        <a:fillRef idx="0">
+          <a:schemeClr val="accent1"/>
+        </a:fillRef>
+        <a:effectRef idx="1">
+          <a:schemeClr val="accent1"/>
+        </a:effectRef>
+        <a:fontRef idx="minor">
+          <a:schemeClr val="tx1"/>
+        </a:fontRef>
+      </a:style>
+    </a:lnDef>
+  </a:objectDefaults>
+  <a:extraClrSchemeLst/>
+  <a:extLst>
+    <a:ext uri="{05A4C25C-085E-4340-85A3-A5531E510DB2}">
+      <thm15:themeFamily xmlns:thm15="http://schemas.microsoft.com/office/thememl/2012/main" name="Office Theme" id="{2E142A2C-CD16-42D6-873A-C26D2A0506FA}" vid="{1BDDFF52-6CD6-40A5-AB3C-68EB2F1E4D0A}"/>
+    </a:ext>
+  </a:extLst>
+</a:theme>
 </file>
--- a/docs/submission/05_final_submission/Akayza_Pitch_TeamPR.pptx
+++ b/docs/submission/05_final_submission/Akayza_Pitch_TeamPR.pptx
@@ -1684,8 +1684,9 @@
           <a:p>
             <a:r>
               <a:rPr lang="en-US" dirty="0"/>
-              <a:t>SAY (20 s): 'R900 billion moves through South Africa's township economy every year: shops, builders, food sellers, salons. And nobody can see it. Fewer than 9% of these businesses can get a bank loan. 80% are unregistered. When government put R500 million on the table for spaza shops, only R179.6 million reached them, because 354 applications couldn't be verified. With no record, even help can't reach them.'
-IF ASKED where R900 bn comes from: Standard Bank's Township Informal Economy Report, October 2025, research by Foshizi, 250+ businesses in five provinces. Say 'about R900 billion', never 800.
+              <a:t>SAY (20 s): 'R900 billion moves through South Africa's township economy every year. That's about 12% of our GDP and one in five jobs: shops, builders, food sellers, salons. And it's hidden in plain sight. Fewer than 9% of these businesses can get a bank loan. 80% are unregistered. When government put R500 million on the table for spaza shops, only R179.6 million reached them, because 354 applications couldn't be verified. With no record, even help can't reach them.'
+IF ASKED where R900 bn comes from: Standard Bank's Township Informal Economy Report, October 2025, research by Foshizi, 250+ businesses in five provinces. Say 'about R900 billion', never 800. 12.3% of GDP and ~19.5% of employment: same report.
+MORE EVIDENCE if pushed: DSBD (May 2026): ~82,000 spaza shops registered, 44,696 verified, ~15,000 licensed. NIQ (Mar 2026): traditional trade ~R170.1 bn in sales, growing faster than the big chains.
 The fund figures are specifically about spaza shops, so we name them there. WhatsApp is how they talk; it isn't the problem. The problem is that nothing turns everyday trading into a record.</a:t>
             </a:r>
             <a:endParaRPr lang="en-US" dirty="0"/>
@@ -2834,7 +2835,7 @@
                 <a:ea typeface="Calibri" pitchFamily="34" charset="-122"/>
                 <a:cs typeface="Calibri" pitchFamily="34" charset="-120"/>
               </a:rPr>
-              <a:t>Making South Africa's informal and small businesses visible, and ready for what's next.</a:t>
+              <a:t>Making South Africa's informal and small businesses visible, and ready for tomorrow.</a:t>
             </a:r>
             <a:endParaRPr lang="en-US" sz="1800" dirty="0"/>
           </a:p>
@@ -3557,16 +3558,64 @@
         <p:spPr>
           <a:xfrm>
             <a:off x="7863840" y="0"/>
-            <a:ext cx="4327855" cy="6858000"/>
+            <a:ext cx="4327855" cy="2267712"/>
           </a:xfrm>
           <a:prstGeom prst="rect">
             <a:avLst/>
           </a:prstGeom>
         </p:spPr>
       </p:pic>
-      <p:sp>
-        <p:nvSpPr>
-          <p:cNvPr id="3" name="Text 0"/>
+      <p:pic>
+        <p:nvPicPr>
+          <p:cNvPr id="3" name="Image 1" descr="preencoded.png">    </p:cNvPr>
+          <p:cNvPicPr>
+            <a:picLocks noChangeAspect="1"/>
+          </p:cNvPicPr>
+          <p:nvPr/>
+        </p:nvPicPr>
+        <p:blipFill>
+          <a:blip r:embed="rId2"/>
+          <a:stretch>
+            <a:fillRect/>
+          </a:stretch>
+        </p:blipFill>
+        <p:spPr>
+          <a:xfrm>
+            <a:off x="7863840" y="2304288"/>
+            <a:ext cx="4327855" cy="2267712"/>
+          </a:xfrm>
+          <a:prstGeom prst="rect">
+            <a:avLst/>
+          </a:prstGeom>
+        </p:spPr>
+      </p:pic>
+      <p:pic>
+        <p:nvPicPr>
+          <p:cNvPr id="4" name="Image 2" descr="preencoded.png">    </p:cNvPr>
+          <p:cNvPicPr>
+            <a:picLocks noChangeAspect="1"/>
+          </p:cNvPicPr>
+          <p:nvPr/>
+        </p:nvPicPr>
+        <p:blipFill>
+          <a:blip r:embed="rId3"/>
+          <a:stretch>
+            <a:fillRect/>
+          </a:stretch>
+        </p:blipFill>
+        <p:spPr>
+          <a:xfrm>
+            <a:off x="7863840" y="4608576"/>
+            <a:ext cx="4327855" cy="2267712"/>
+          </a:xfrm>
+          <a:prstGeom prst="rect">
+            <a:avLst/>
+          </a:prstGeom>
+        </p:spPr>
+      </p:pic>
+      <p:sp>
+        <p:nvSpPr>
+          <p:cNvPr id="5" name="Text 0"/>
           <p:cNvSpPr txBox="1"/>
           <p:nvPr/>
         </p:nvSpPr>
@@ -3605,14 +3654,14 @@
       </p:sp>
       <p:sp>
         <p:nvSpPr>
-          <p:cNvPr id="4" name="Text 1"/>
+          <p:cNvPr id="6" name="Text 1"/>
           <p:cNvSpPr txBox="1"/>
           <p:nvPr/>
         </p:nvSpPr>
         <p:spPr>
           <a:xfrm>
             <a:off x="548640" y="731520"/>
-            <a:ext cx="6949440" cy="1188720"/>
+            <a:ext cx="6949440" cy="1143000"/>
           </a:xfrm>
           <a:prstGeom prst="rect">
             <a:avLst/>
@@ -3636,7 +3685,7 @@
                 <a:ea typeface="Georgia" pitchFamily="34" charset="-122"/>
                 <a:cs typeface="Georgia" pitchFamily="34" charset="-120"/>
               </a:rPr>
-              <a:t>R900 billion a year, and nobody can see it</a:t>
+              <a:t>R900 billion a year, hidden in plain sight</a:t>
             </a:r>
             <a:endParaRPr lang="en-US" sz="3200" dirty="0"/>
           </a:p>
@@ -3644,18 +3693,57 @@
       </p:sp>
       <p:sp>
         <p:nvSpPr>
-          <p:cNvPr id="5" name="Shape 2"/>
+          <p:cNvPr id="7" name="Text 2"/>
+          <p:cNvSpPr txBox="1"/>
+          <p:nvPr/>
+        </p:nvSpPr>
+        <p:spPr>
+          <a:xfrm>
+            <a:off x="548640" y="1874520"/>
+            <a:ext cx="6949440" cy="365760"/>
+          </a:xfrm>
+          <a:prstGeom prst="rect">
+            <a:avLst/>
+          </a:prstGeom>
+          <a:noFill/>
+          <a:ln/>
+        </p:spPr>
+        <p:txBody>
+          <a:bodyPr wrap="square" lIns="0" tIns="0" rIns="0" bIns="0" rtlCol="0" anchor="t"/>
+          <a:lstStyle/>
+          <a:p>
+            <a:pPr indent="0" marL="0">
+              <a:buNone/>
+            </a:pPr>
+            <a:r>
+              <a:rPr lang="en-US" sz="1800" dirty="0">
+                <a:solidFill>
+                  <a:srgbClr val="FBBF24"/>
+                </a:solidFill>
+                <a:latin typeface="Calibri" pitchFamily="34" charset="0"/>
+                <a:ea typeface="Calibri" pitchFamily="34" charset="-122"/>
+                <a:cs typeface="Calibri" pitchFamily="34" charset="-120"/>
+              </a:rPr>
+              <a:t>About 12% of South Africa's GDP, and 1 in 5 jobs.</a:t>
+            </a:r>
+            <a:endParaRPr lang="en-US" sz="1800" dirty="0"/>
+          </a:p>
+        </p:txBody>
+      </p:sp>
+      <p:sp>
+        <p:nvSpPr>
+          <p:cNvPr id="8" name="Shape 3"/>
           <p:cNvSpPr/>
           <p:nvPr/>
         </p:nvSpPr>
         <p:spPr>
           <a:xfrm>
-            <a:off x="548640" y="2103120"/>
-            <a:ext cx="2194560" cy="1600200"/>
+            <a:off x="548640" y="2423160"/>
+            <a:ext cx="2194560" cy="1417320"/>
           </a:xfrm>
           <a:prstGeom prst="roundRect">
             <a:avLst>
-              <a:gd name="adj" fmla="val 6857"/>
+              <a:gd name="adj" fmla="val 7742"/>
             </a:avLst>
           </a:prstGeom>
           <a:solidFill>
@@ -3671,13 +3759,13 @@
       </p:sp>
       <p:sp>
         <p:nvSpPr>
-          <p:cNvPr id="6" name="Text 3"/>
-          <p:cNvSpPr txBox="1"/>
-          <p:nvPr/>
-        </p:nvSpPr>
-        <p:spPr>
-          <a:xfrm>
-            <a:off x="777240" y="2240280"/>
+          <p:cNvPr id="9" name="Text 4"/>
+          <p:cNvSpPr txBox="1"/>
+          <p:nvPr/>
+        </p:nvSpPr>
+        <p:spPr>
+          <a:xfrm>
+            <a:off x="777240" y="2514600"/>
             <a:ext cx="1828800" cy="731520"/>
           </a:xfrm>
           <a:prstGeom prst="rect">
@@ -3710,13 +3798,13 @@
       </p:sp>
       <p:sp>
         <p:nvSpPr>
-          <p:cNvPr id="7" name="Text 4"/>
-          <p:cNvSpPr txBox="1"/>
-          <p:nvPr/>
-        </p:nvSpPr>
-        <p:spPr>
-          <a:xfrm>
-            <a:off x="777240" y="3017520"/>
+          <p:cNvPr id="10" name="Text 5"/>
+          <p:cNvSpPr txBox="1"/>
+          <p:nvPr/>
+        </p:nvSpPr>
+        <p:spPr>
+          <a:xfrm>
+            <a:off x="777240" y="3246120"/>
             <a:ext cx="1828800" cy="594360"/>
           </a:xfrm>
           <a:prstGeom prst="rect">
@@ -3749,18 +3837,18 @@
       </p:sp>
       <p:sp>
         <p:nvSpPr>
-          <p:cNvPr id="8" name="Shape 5"/>
+          <p:cNvPr id="11" name="Shape 6"/>
           <p:cNvSpPr/>
           <p:nvPr/>
         </p:nvSpPr>
         <p:spPr>
           <a:xfrm>
-            <a:off x="2926080" y="2103120"/>
-            <a:ext cx="2194560" cy="1600200"/>
+            <a:off x="2926080" y="2423160"/>
+            <a:ext cx="2194560" cy="1417320"/>
           </a:xfrm>
           <a:prstGeom prst="roundRect">
             <a:avLst>
-              <a:gd name="adj" fmla="val 6857"/>
+              <a:gd name="adj" fmla="val 7742"/>
             </a:avLst>
           </a:prstGeom>
           <a:solidFill>
@@ -3776,13 +3864,13 @@
       </p:sp>
       <p:sp>
         <p:nvSpPr>
-          <p:cNvPr id="9" name="Text 6"/>
-          <p:cNvSpPr txBox="1"/>
-          <p:nvPr/>
-        </p:nvSpPr>
-        <p:spPr>
-          <a:xfrm>
-            <a:off x="3154680" y="2240280"/>
+          <p:cNvPr id="12" name="Text 7"/>
+          <p:cNvSpPr txBox="1"/>
+          <p:nvPr/>
+        </p:nvSpPr>
+        <p:spPr>
+          <a:xfrm>
+            <a:off x="3154680" y="2514600"/>
             <a:ext cx="1828800" cy="731520"/>
           </a:xfrm>
           <a:prstGeom prst="rect">
@@ -3815,13 +3903,13 @@
       </p:sp>
       <p:sp>
         <p:nvSpPr>
-          <p:cNvPr id="10" name="Text 7"/>
-          <p:cNvSpPr txBox="1"/>
-          <p:nvPr/>
-        </p:nvSpPr>
-        <p:spPr>
-          <a:xfrm>
-            <a:off x="3154680" y="3017520"/>
+          <p:cNvPr id="13" name="Text 8"/>
+          <p:cNvSpPr txBox="1"/>
+          <p:nvPr/>
+        </p:nvSpPr>
+        <p:spPr>
+          <a:xfrm>
+            <a:off x="3154680" y="3246120"/>
             <a:ext cx="1828800" cy="594360"/>
           </a:xfrm>
           <a:prstGeom prst="rect">
@@ -3854,18 +3942,18 @@
       </p:sp>
       <p:sp>
         <p:nvSpPr>
-          <p:cNvPr id="11" name="Shape 8"/>
+          <p:cNvPr id="14" name="Shape 9"/>
           <p:cNvSpPr/>
           <p:nvPr/>
         </p:nvSpPr>
         <p:spPr>
           <a:xfrm>
-            <a:off x="5303520" y="2103120"/>
-            <a:ext cx="2194560" cy="1600200"/>
+            <a:off x="5303520" y="2423160"/>
+            <a:ext cx="2194560" cy="1417320"/>
           </a:xfrm>
           <a:prstGeom prst="roundRect">
             <a:avLst>
-              <a:gd name="adj" fmla="val 6857"/>
+              <a:gd name="adj" fmla="val 7742"/>
             </a:avLst>
           </a:prstGeom>
           <a:solidFill>
@@ -3881,13 +3969,13 @@
       </p:sp>
       <p:sp>
         <p:nvSpPr>
-          <p:cNvPr id="12" name="Text 9"/>
-          <p:cNvSpPr txBox="1"/>
-          <p:nvPr/>
-        </p:nvSpPr>
-        <p:spPr>
-          <a:xfrm>
-            <a:off x="5532120" y="2240280"/>
+          <p:cNvPr id="15" name="Text 10"/>
+          <p:cNvSpPr txBox="1"/>
+          <p:nvPr/>
+        </p:nvSpPr>
+        <p:spPr>
+          <a:xfrm>
+            <a:off x="5532120" y="2514600"/>
             <a:ext cx="1828800" cy="731520"/>
           </a:xfrm>
           <a:prstGeom prst="rect">
@@ -3920,13 +4008,13 @@
       </p:sp>
       <p:sp>
         <p:nvSpPr>
-          <p:cNvPr id="13" name="Text 10"/>
-          <p:cNvSpPr txBox="1"/>
-          <p:nvPr/>
-        </p:nvSpPr>
-        <p:spPr>
-          <a:xfrm>
-            <a:off x="5532120" y="3017520"/>
+          <p:cNvPr id="16" name="Text 11"/>
+          <p:cNvSpPr txBox="1"/>
+          <p:nvPr/>
+        </p:nvSpPr>
+        <p:spPr>
+          <a:xfrm>
+            <a:off x="5532120" y="3246120"/>
             <a:ext cx="1828800" cy="594360"/>
           </a:xfrm>
           <a:prstGeom prst="rect">
@@ -3959,18 +4047,18 @@
       </p:sp>
       <p:sp>
         <p:nvSpPr>
-          <p:cNvPr id="14" name="Shape 11"/>
+          <p:cNvPr id="17" name="Shape 12"/>
           <p:cNvSpPr/>
           <p:nvPr/>
         </p:nvSpPr>
         <p:spPr>
           <a:xfrm>
-            <a:off x="548640" y="3931920"/>
-            <a:ext cx="6949440" cy="2194560"/>
+            <a:off x="548640" y="4023360"/>
+            <a:ext cx="6949440" cy="2148840"/>
           </a:xfrm>
           <a:prstGeom prst="roundRect">
             <a:avLst>
-              <a:gd name="adj" fmla="val 5000"/>
+              <a:gd name="adj" fmla="val 5106"/>
             </a:avLst>
           </a:prstGeom>
           <a:solidFill>
@@ -3986,30 +4074,30 @@
       </p:sp>
       <p:graphicFrame>
         <p:nvGraphicFramePr>
-          <p:cNvPr id="15" name="Chart 0" descr=""/>
+          <p:cNvPr id="18" name="Chart 0" descr=""/>
           <p:cNvGraphicFramePr/>
           <p:nvPr/>
         </p:nvGraphicFramePr>
         <p:xfrm>
-          <a:off x="685800" y="4023360"/>
+          <a:off x="685800" y="4096512"/>
           <a:ext cx="4206240" cy="2011680"/>
         </p:xfrm>
         <a:graphic xmlns:a="http://schemas.openxmlformats.org/drawingml/2006/main">
           <a:graphicData uri="http://schemas.openxmlformats.org/drawingml/2006/chart">
-            <c:chart xmlns:c="http://schemas.openxmlformats.org/drawingml/2006/chart" r:id="rId2"/>
+            <c:chart xmlns:c="http://schemas.openxmlformats.org/drawingml/2006/chart" r:id="rId4"/>
           </a:graphicData>
         </a:graphic>
       </p:graphicFrame>
       <p:sp>
         <p:nvSpPr>
-          <p:cNvPr id="16" name="Text 12"/>
-          <p:cNvSpPr txBox="1"/>
-          <p:nvPr/>
-        </p:nvSpPr>
-        <p:spPr>
-          <a:xfrm>
-            <a:off x="4983480" y="4251960"/>
-            <a:ext cx="2331720" cy="1737360"/>
+          <p:cNvPr id="19" name="Text 13"/>
+          <p:cNvSpPr txBox="1"/>
+          <p:nvPr/>
+        </p:nvSpPr>
+        <p:spPr>
+          <a:xfrm>
+            <a:off x="4983480" y="4206240"/>
+            <a:ext cx="2331720" cy="1828800"/>
           </a:xfrm>
           <a:prstGeom prst="rect">
             <a:avLst/>
@@ -4041,14 +4129,14 @@
       </p:sp>
       <p:pic>
         <p:nvPicPr>
-          <p:cNvPr id="17" name="Image 1" descr="preencoded.png">    </p:cNvPr>
+          <p:cNvPr id="20" name="Image 3" descr="preencoded.png">    </p:cNvPr>
           <p:cNvPicPr>
             <a:picLocks noChangeAspect="1"/>
           </p:cNvPicPr>
           <p:nvPr/>
         </p:nvPicPr>
         <p:blipFill>
-          <a:blip r:embed="rId3"/>
+          <a:blip r:embed="rId5"/>
           <a:stretch>
             <a:fillRect/>
           </a:stretch>
@@ -4065,7 +4153,7 @@
       </p:pic>
       <p:sp>
         <p:nvSpPr>
-          <p:cNvPr id="18" name="Text 13"/>
+          <p:cNvPr id="21" name="Text 14"/>
           <p:cNvSpPr txBox="1"/>
           <p:nvPr/>
         </p:nvSpPr>
@@ -4104,7 +4192,7 @@
       </p:sp>
       <p:sp>
         <p:nvSpPr>
-          <p:cNvPr id="19" name="Text 14"/>
+          <p:cNvPr id="22" name="Text 15"/>
           <p:cNvSpPr txBox="1"/>
           <p:nvPr/>
         </p:nvSpPr>
@@ -4135,7 +4223,7 @@
                 <a:ea typeface="Calibri" pitchFamily="34" charset="-122"/>
                 <a:cs typeface="Calibri" pitchFamily="34" charset="-120"/>
               </a:rPr>
-              <a:t>Standard Bank Township Informal Economy Report, Oct 2025; DSBD, Spaza Shop Support Fund update, May 2026.</a:t>
+              <a:t>Standard Bank, Oct 2025; DSBD, May 2026. Photos: Business Explainer; SABC News.</a:t>
             </a:r>
             <a:endParaRPr lang="en-US" sz="950" dirty="0"/>
           </a:p>

--- a/docs/submission/05_final_submission/Akayza_Pitch_TeamPR.pptx
+++ b/docs/submission/05_final_submission/Akayza_Pitch_TeamPR.pptx
@@ -1775,8 +1775,9 @@
           <a:p>
             <a:r>
               <a:rPr lang="en-US" dirty="0"/>
-              <a:t>SAY (25 s): 'That's where Akayza comes in. One free app that runs the business the way it already works, and turns every sale, order and payment into a record the owner holds. Today, less stress. This week, they buy better from their own suppliers and pay safely. Tomorrow, a trading history they own: the first step to credit and funding. Businesses never pay. Suppliers pay us, because we bring them more orders.'
-Honest wording if pushed: payments made in the app are confirmed by the payment provider; the rest is the owner's own record. Never call tool records 'proof'.</a:t>
+              <a:t>SAY (25 s): 'That's where Akayza comes in. One free app that makes the business visible, and ready for tomorrow. It works the way they already operate, cash or digital. Every digital stock order becomes a record the owner holds, and over time a strong trading history. Today, the business tools take the stress away. This week, they buy better from their own suppliers and pay safely. Tomorrow, that history is their first step to finance. Businesses never pay. Suppliers are our customers: they pay a monthly fee because we bring them more orders, paid up front. And next, banks and lenders, as partners, only with the owner's consent.'
+HONEST LIMIT (say it before a judge does): 'We only call digital payments proof, because the payment provider confirms the money moved. Cash and what an owner writes in the tools is their own record. We never add them together.'
+We don't lend or offer credit ourselves; banks and lenders are future partners.</a:t>
             </a:r>
             <a:endParaRPr lang="en-US" dirty="0"/>
           </a:p>
@@ -1864,8 +1865,8 @@
           <a:p>
             <a:r>
               <a:rPr lang="en-US" dirty="0"/>
-              <a:t>SAY (20 s), tell it as a story: 'Meet Thandi. Monday she restocks from her usual supplier in two minutes. Wednesday a customer pays back his credit. Friday she pays her supplier in the app: no cash on the road, the payment is confirmed and the invoice arrives. And at month end, for the first time, she can see her business, and it's hers.'
-Thandi and Sipho are illustrations, not real customers. If asked: 'they're the owners we built for; the pilot puts real names to them.'</a:t>
+              <a:t>SAY (20 s), tell it as a story: 'Meet Thandi. Her customers pay her in cash, and there's no proof that money moved. But with her suppliers there can be, so that's where we start. Monday she restocks from her usual supplier in two minutes. Wednesday a customer pays back his credit, and she records it in her credit book. Friday she pays her supplier in the app: no cash on the road, the payment is confirmed and the invoice arrives. And at month end she sees her business: who owes her, what she orders most, and the suppliers that fit how she buys.' Then: 'Any informal business has the same week, like Sipho the builder.'
+We recommend suppliers, never products: the month-end view is her own numbers. Thandi and Sipho are illustrations, not real customers.</a:t>
             </a:r>
             <a:endParaRPr lang="en-US" dirty="0"/>
           </a:p>
@@ -4309,7 +4310,7 @@
         <p:spPr>
           <a:xfrm>
             <a:off x="548640" y="731520"/>
-            <a:ext cx="11094415" cy="868680"/>
+            <a:ext cx="11064240" cy="1005840"/>
           </a:xfrm>
           <a:prstGeom prst="rect">
             <a:avLst/>
@@ -4325,7 +4326,7 @@
               <a:buNone/>
             </a:pPr>
             <a:r>
-              <a:rPr lang="en-US" sz="3200" b="1" dirty="0">
+              <a:rPr lang="en-US" sz="3000" b="1" dirty="0">
                 <a:solidFill>
                   <a:srgbClr val="F8FAFC"/>
                 </a:solidFill>
@@ -4333,9 +4334,9 @@
                 <a:ea typeface="Georgia" pitchFamily="34" charset="-122"/>
                 <a:cs typeface="Georgia" pitchFamily="34" charset="-120"/>
               </a:rPr>
-              <a:t>One free app that makes the business visible</a:t>
-            </a:r>
-            <a:endParaRPr lang="en-US" sz="3200" dirty="0"/>
+              <a:t>One free app that makes the business visible, and ready for tomorrow</a:t>
+            </a:r>
+            <a:endParaRPr lang="en-US" sz="3000" dirty="0"/>
           </a:p>
         </p:txBody>
       </p:sp>
@@ -4347,8 +4348,8 @@
         </p:nvSpPr>
         <p:spPr>
           <a:xfrm>
-            <a:off x="548640" y="1600200"/>
-            <a:ext cx="11064240" cy="685800"/>
+            <a:off x="548640" y="1783080"/>
+            <a:ext cx="11064240" cy="731520"/>
           </a:xfrm>
           <a:prstGeom prst="rect">
             <a:avLst/>
@@ -4364,7 +4365,7 @@
               <a:buNone/>
             </a:pPr>
             <a:r>
-              <a:rPr lang="en-US" sz="1700" dirty="0">
+              <a:rPr lang="en-US" sz="1550" dirty="0">
                 <a:solidFill>
                   <a:srgbClr val="A3B3C9"/>
                 </a:solidFill>
@@ -4372,9 +4373,9 @@
                 <a:ea typeface="Calibri" pitchFamily="34" charset="-122"/>
                 <a:cs typeface="Calibri" pitchFamily="34" charset="-120"/>
               </a:rPr>
-              <a:t>It works the way they already do (cash, credit on trust, the same suppliers), and turns every sale, order and payment into a record the owner holds.</a:t>
-            </a:r>
-            <a:endParaRPr lang="en-US" sz="1700" dirty="0"/>
+              <a:t>It works the way they already operate, with cash and digital payments. Every digital stock order becomes a record the owner holds, and over time a strong trading history, alongside the business tools they use every day.</a:t>
+            </a:r>
+            <a:endParaRPr lang="en-US" sz="1550" dirty="0"/>
           </a:p>
         </p:txBody>
       </p:sp>
@@ -4386,12 +4387,12 @@
         </p:nvSpPr>
         <p:spPr>
           <a:xfrm>
-            <a:off x="548640" y="2468880"/>
-            <a:ext cx="3474720" cy="2788920"/>
+            <a:off x="548640" y="2606040"/>
+            <a:ext cx="3474720" cy="2103120"/>
           </a:xfrm>
           <a:prstGeom prst="roundRect">
             <a:avLst>
-              <a:gd name="adj" fmla="val 3934"/>
+              <a:gd name="adj" fmla="val 5217"/>
             </a:avLst>
           </a:prstGeom>
           <a:solidFill>
@@ -4413,7 +4414,7 @@
         </p:nvSpPr>
         <p:spPr>
           <a:xfrm>
-            <a:off x="868680" y="2697480"/>
+            <a:off x="822960" y="2761488"/>
             <a:ext cx="2286000" cy="320040"/>
           </a:xfrm>
           <a:prstGeom prst="rect">
@@ -4430,7 +4431,7 @@
               <a:buNone/>
             </a:pPr>
             <a:r>
-              <a:rPr lang="en-US" sz="1300" b="1" spc="300" kern="0" dirty="0">
+              <a:rPr lang="en-US" sz="1250" b="1" spc="300" kern="0" dirty="0">
                 <a:solidFill>
                   <a:srgbClr val="10B981"/>
                 </a:solidFill>
@@ -4440,7 +4441,7 @@
               </a:rPr>
               <a:t>TODAY</a:t>
             </a:r>
-            <a:endParaRPr lang="en-US" sz="1300" dirty="0"/>
+            <a:endParaRPr lang="en-US" sz="1250" dirty="0"/>
           </a:p>
         </p:txBody>
       </p:sp>
@@ -4452,8 +4453,8 @@
         </p:nvSpPr>
         <p:spPr>
           <a:xfrm>
-            <a:off x="3063240" y="2651760"/>
-            <a:ext cx="658368" cy="658368"/>
+            <a:off x="3291840" y="2715768"/>
+            <a:ext cx="475488" cy="475488"/>
           </a:xfrm>
           <a:prstGeom prst="ellipse">
             <a:avLst/>
@@ -4485,8 +4486,8 @@
         </p:blipFill>
         <p:spPr>
           <a:xfrm>
-            <a:off x="3221248" y="2809768"/>
-            <a:ext cx="342351" cy="342351"/>
+            <a:off x="3405957" y="2829885"/>
+            <a:ext cx="247254" cy="247254"/>
           </a:xfrm>
           <a:prstGeom prst="rect">
             <a:avLst/>
@@ -4501,8 +4502,8 @@
         </p:nvSpPr>
         <p:spPr>
           <a:xfrm>
-            <a:off x="868680" y="3383280"/>
-            <a:ext cx="3017520" cy="457200"/>
+            <a:off x="822960" y="3200400"/>
+            <a:ext cx="3017520" cy="411480"/>
           </a:xfrm>
           <a:prstGeom prst="rect">
             <a:avLst/>
@@ -4518,7 +4519,7 @@
               <a:buNone/>
             </a:pPr>
             <a:r>
-              <a:rPr lang="en-US" sz="1900" b="1" dirty="0">
+              <a:rPr lang="en-US" sz="1800" b="1" dirty="0">
                 <a:solidFill>
                   <a:srgbClr val="F8FAFC"/>
                 </a:solidFill>
@@ -4528,7 +4529,7 @@
               </a:rPr>
               <a:t>Less stress</a:t>
             </a:r>
-            <a:endParaRPr lang="en-US" sz="1900" dirty="0"/>
+            <a:endParaRPr lang="en-US" sz="1800" dirty="0"/>
           </a:p>
         </p:txBody>
       </p:sp>
@@ -4540,8 +4541,8 @@
         </p:nvSpPr>
         <p:spPr>
           <a:xfrm>
-            <a:off x="868680" y="3931920"/>
-            <a:ext cx="2880360" cy="1234440"/>
+            <a:off x="822960" y="3657600"/>
+            <a:ext cx="2971800" cy="1005840"/>
           </a:xfrm>
           <a:prstGeom prst="rect">
             <a:avLst/>
@@ -4557,7 +4558,7 @@
               <a:buNone/>
             </a:pPr>
             <a:r>
-              <a:rPr lang="en-US" sz="1400" dirty="0">
+              <a:rPr lang="en-US" sz="1300" dirty="0">
                 <a:solidFill>
                   <a:srgbClr val="A3B3C9"/>
                 </a:solidFill>
@@ -4565,9 +4566,9 @@
                 <a:ea typeface="Calibri" pitchFamily="34" charset="-122"/>
                 <a:cs typeface="Calibri" pitchFamily="34" charset="-120"/>
               </a:rPr>
-              <a:t>A credit book, an order book and jobs in stages: who owes you, what sold, what's due.</a:t>
-            </a:r>
-            <a:endParaRPr lang="en-US" sz="1400" dirty="0"/>
+              <a:t>Business tools in one place: a credit book, an order book, jobs in stages and My record.</a:t>
+            </a:r>
+            <a:endParaRPr lang="en-US" sz="1300" dirty="0"/>
           </a:p>
         </p:txBody>
       </p:sp>
@@ -4579,12 +4580,12 @@
         </p:nvSpPr>
         <p:spPr>
           <a:xfrm>
-            <a:off x="4297680" y="2468880"/>
-            <a:ext cx="3474720" cy="2788920"/>
+            <a:off x="4297680" y="2606040"/>
+            <a:ext cx="3474720" cy="2103120"/>
           </a:xfrm>
           <a:prstGeom prst="roundRect">
             <a:avLst>
-              <a:gd name="adj" fmla="val 3934"/>
+              <a:gd name="adj" fmla="val 5217"/>
             </a:avLst>
           </a:prstGeom>
           <a:solidFill>
@@ -4606,7 +4607,7 @@
         </p:nvSpPr>
         <p:spPr>
           <a:xfrm>
-            <a:off x="4617720" y="2697480"/>
+            <a:off x="4572000" y="2761488"/>
             <a:ext cx="2286000" cy="320040"/>
           </a:xfrm>
           <a:prstGeom prst="rect">
@@ -4623,7 +4624,7 @@
               <a:buNone/>
             </a:pPr>
             <a:r>
-              <a:rPr lang="en-US" sz="1300" b="1" spc="300" kern="0" dirty="0">
+              <a:rPr lang="en-US" sz="1250" b="1" spc="300" kern="0" dirty="0">
                 <a:solidFill>
                   <a:srgbClr val="FBBF24"/>
                 </a:solidFill>
@@ -4633,7 +4634,7 @@
               </a:rPr>
               <a:t>THIS WEEK</a:t>
             </a:r>
-            <a:endParaRPr lang="en-US" sz="1300" dirty="0"/>
+            <a:endParaRPr lang="en-US" sz="1250" dirty="0"/>
           </a:p>
         </p:txBody>
       </p:sp>
@@ -4645,8 +4646,8 @@
         </p:nvSpPr>
         <p:spPr>
           <a:xfrm>
-            <a:off x="6812280" y="2651760"/>
-            <a:ext cx="658368" cy="658368"/>
+            <a:off x="7040880" y="2715768"/>
+            <a:ext cx="475488" cy="475488"/>
           </a:xfrm>
           <a:prstGeom prst="ellipse">
             <a:avLst/>
@@ -4678,8 +4679,8 @@
         </p:blipFill>
         <p:spPr>
           <a:xfrm>
-            <a:off x="6970288" y="2809768"/>
-            <a:ext cx="342351" cy="342351"/>
+            <a:off x="7154997" y="2829885"/>
+            <a:ext cx="247254" cy="247254"/>
           </a:xfrm>
           <a:prstGeom prst="rect">
             <a:avLst/>
@@ -4694,8 +4695,8 @@
         </p:nvSpPr>
         <p:spPr>
           <a:xfrm>
-            <a:off x="4617720" y="3383280"/>
-            <a:ext cx="3017520" cy="457200"/>
+            <a:off x="4572000" y="3200400"/>
+            <a:ext cx="3017520" cy="411480"/>
           </a:xfrm>
           <a:prstGeom prst="rect">
             <a:avLst/>
@@ -4711,7 +4712,7 @@
               <a:buNone/>
             </a:pPr>
             <a:r>
-              <a:rPr lang="en-US" sz="1900" b="1" dirty="0">
+              <a:rPr lang="en-US" sz="1800" b="1" dirty="0">
                 <a:solidFill>
                   <a:srgbClr val="F8FAFC"/>
                 </a:solidFill>
@@ -4721,7 +4722,7 @@
               </a:rPr>
               <a:t>Buy better, pay safely</a:t>
             </a:r>
-            <a:endParaRPr lang="en-US" sz="1900" dirty="0"/>
+            <a:endParaRPr lang="en-US" sz="1800" dirty="0"/>
           </a:p>
         </p:txBody>
       </p:sp>
@@ -4733,8 +4734,8 @@
         </p:nvSpPr>
         <p:spPr>
           <a:xfrm>
-            <a:off x="4617720" y="3931920"/>
-            <a:ext cx="2880360" cy="1234440"/>
+            <a:off x="4572000" y="3657600"/>
+            <a:ext cx="2971800" cy="1005840"/>
           </a:xfrm>
           <a:prstGeom prst="rect">
             <a:avLst/>
@@ -4750,7 +4751,7 @@
               <a:buNone/>
             </a:pPr>
             <a:r>
-              <a:rPr lang="en-US" sz="1400" dirty="0">
+              <a:rPr lang="en-US" sz="1300" dirty="0">
                 <a:solidFill>
                   <a:srgbClr val="A3B3C9"/>
                 </a:solidFill>
@@ -4760,7 +4761,7 @@
               </a:rPr>
               <a:t>Order from your own suppliers, matched to what you really buy. Pay digitally or cash, get a proper invoice.</a:t>
             </a:r>
-            <a:endParaRPr lang="en-US" sz="1400" dirty="0"/>
+            <a:endParaRPr lang="en-US" sz="1300" dirty="0"/>
           </a:p>
         </p:txBody>
       </p:sp>
@@ -4772,12 +4773,12 @@
         </p:nvSpPr>
         <p:spPr>
           <a:xfrm>
-            <a:off x="8046720" y="2468880"/>
-            <a:ext cx="3474720" cy="2788920"/>
+            <a:off x="8046720" y="2606040"/>
+            <a:ext cx="3474720" cy="2103120"/>
           </a:xfrm>
           <a:prstGeom prst="roundRect">
             <a:avLst>
-              <a:gd name="adj" fmla="val 3934"/>
+              <a:gd name="adj" fmla="val 5217"/>
             </a:avLst>
           </a:prstGeom>
           <a:solidFill>
@@ -4799,7 +4800,7 @@
         </p:nvSpPr>
         <p:spPr>
           <a:xfrm>
-            <a:off x="8366760" y="2697480"/>
+            <a:off x="8321040" y="2761488"/>
             <a:ext cx="2286000" cy="320040"/>
           </a:xfrm>
           <a:prstGeom prst="rect">
@@ -4816,7 +4817,7 @@
               <a:buNone/>
             </a:pPr>
             <a:r>
-              <a:rPr lang="en-US" sz="1300" b="1" spc="300" kern="0" dirty="0">
+              <a:rPr lang="en-US" sz="1250" b="1" spc="300" kern="0" dirty="0">
                 <a:solidFill>
                   <a:srgbClr val="34D399"/>
                 </a:solidFill>
@@ -4826,7 +4827,7 @@
               </a:rPr>
               <a:t>TOMORROW</a:t>
             </a:r>
-            <a:endParaRPr lang="en-US" sz="1300" dirty="0"/>
+            <a:endParaRPr lang="en-US" sz="1250" dirty="0"/>
           </a:p>
         </p:txBody>
       </p:sp>
@@ -4838,8 +4839,8 @@
         </p:nvSpPr>
         <p:spPr>
           <a:xfrm>
-            <a:off x="10561320" y="2651760"/>
-            <a:ext cx="658368" cy="658368"/>
+            <a:off x="10789920" y="2715768"/>
+            <a:ext cx="475488" cy="475488"/>
           </a:xfrm>
           <a:prstGeom prst="ellipse">
             <a:avLst/>
@@ -4871,8 +4872,8 @@
         </p:blipFill>
         <p:spPr>
           <a:xfrm>
-            <a:off x="10719328" y="2809768"/>
-            <a:ext cx="342351" cy="342351"/>
+            <a:off x="10904037" y="2829885"/>
+            <a:ext cx="247254" cy="247254"/>
           </a:xfrm>
           <a:prstGeom prst="rect">
             <a:avLst/>
@@ -4887,8 +4888,8 @@
         </p:nvSpPr>
         <p:spPr>
           <a:xfrm>
-            <a:off x="8366760" y="3383280"/>
-            <a:ext cx="3017520" cy="457200"/>
+            <a:off x="8321040" y="3200400"/>
+            <a:ext cx="3017520" cy="411480"/>
           </a:xfrm>
           <a:prstGeom prst="rect">
             <a:avLst/>
@@ -4904,7 +4905,7 @@
               <a:buNone/>
             </a:pPr>
             <a:r>
-              <a:rPr lang="en-US" sz="1900" b="1" dirty="0">
+              <a:rPr lang="en-US" sz="1800" b="1" dirty="0">
                 <a:solidFill>
                   <a:srgbClr val="F8FAFC"/>
                 </a:solidFill>
@@ -4914,7 +4915,7 @@
               </a:rPr>
               <a:t>Ready to grow</a:t>
             </a:r>
-            <a:endParaRPr lang="en-US" sz="1900" dirty="0"/>
+            <a:endParaRPr lang="en-US" sz="1800" dirty="0"/>
           </a:p>
         </p:txBody>
       </p:sp>
@@ -4926,8 +4927,8 @@
         </p:nvSpPr>
         <p:spPr>
           <a:xfrm>
-            <a:off x="8366760" y="3931920"/>
-            <a:ext cx="2880360" cy="1234440"/>
+            <a:off x="8321040" y="3657600"/>
+            <a:ext cx="2971800" cy="1005840"/>
           </a:xfrm>
           <a:prstGeom prst="rect">
             <a:avLst/>
@@ -4943,7 +4944,7 @@
               <a:buNone/>
             </a:pPr>
             <a:r>
-              <a:rPr lang="en-US" sz="1400" dirty="0">
+              <a:rPr lang="en-US" sz="1300" dirty="0">
                 <a:solidFill>
                   <a:srgbClr val="A3B3C9"/>
                 </a:solidFill>
@@ -4951,9 +4952,9 @@
                 <a:ea typeface="Calibri" pitchFamily="34" charset="-122"/>
                 <a:cs typeface="Calibri" pitchFamily="34" charset="-120"/>
               </a:rPr>
-              <a:t>A sealed trading history you own and choose to share: the first step to credit, funds and registration.</a:t>
-            </a:r>
-            <a:endParaRPr lang="en-US" sz="1400" dirty="0"/>
+              <a:t>A sealed trading history you own and choose to share: the first step to finance and registration.</a:t>
+            </a:r>
+            <a:endParaRPr lang="en-US" sz="1300" dirty="0"/>
           </a:p>
         </p:txBody>
       </p:sp>
@@ -4965,12 +4966,12 @@
         </p:nvSpPr>
         <p:spPr>
           <a:xfrm>
-            <a:off x="548640" y="5440680"/>
-            <a:ext cx="11064240" cy="731520"/>
+            <a:off x="548640" y="4846320"/>
+            <a:ext cx="2743200" cy="1371600"/>
           </a:xfrm>
           <a:prstGeom prst="roundRect">
             <a:avLst>
-              <a:gd name="adj" fmla="val 15000"/>
+              <a:gd name="adj" fmla="val 8000"/>
             </a:avLst>
           </a:prstGeom>
           <a:solidFill>
@@ -4992,144 +4993,246 @@
         </p:nvSpPr>
         <p:spPr>
           <a:xfrm>
-            <a:off x="777240" y="5577840"/>
-            <a:ext cx="3566160" cy="457200"/>
-          </a:xfrm>
-          <a:prstGeom prst="rect">
-            <a:avLst/>
-          </a:prstGeom>
-          <a:noFill/>
-          <a:ln/>
-        </p:spPr>
-        <p:txBody>
-          <a:bodyPr wrap="square" lIns="0" tIns="0" rIns="0" bIns="0" rtlCol="0" anchor="ctr"/>
+            <a:off x="749808" y="4937760"/>
+            <a:ext cx="2377440" cy="256032"/>
+          </a:xfrm>
+          <a:prstGeom prst="rect">
+            <a:avLst/>
+          </a:prstGeom>
+          <a:noFill/>
+          <a:ln/>
+        </p:spPr>
+        <p:txBody>
+          <a:bodyPr wrap="square" lIns="0" tIns="0" rIns="0" bIns="0" rtlCol="0" anchor="t"/>
           <a:lstStyle/>
           <a:p>
             <a:pPr indent="0" marL="0">
               <a:buNone/>
             </a:pPr>
             <a:r>
-              <a:rPr lang="en-US" sz="1350" b="1" dirty="0">
-                <a:solidFill>
-                  <a:srgbClr val="10B981"/>
+              <a:rPr lang="en-US" sz="1050" b="1" spc="200" kern="0" dirty="0">
+                <a:solidFill>
+                  <a:srgbClr val="A3B3C9"/>
                 </a:solidFill>
                 <a:latin typeface="Calibri" pitchFamily="34" charset="0"/>
                 <a:ea typeface="Calibri" pitchFamily="34" charset="-122"/>
                 <a:cs typeface="Calibri" pitchFamily="34" charset="-120"/>
               </a:rPr>
-              <a:t>Businesses  </a:t>
-            </a:r>
+              <a:t>USERS</a:t>
+            </a:r>
+            <a:endParaRPr lang="en-US" sz="1050" dirty="0"/>
+          </a:p>
+        </p:txBody>
+      </p:sp>
+      <p:sp>
+        <p:nvSpPr>
+          <p:cNvPr id="25" name="Text 20"/>
+          <p:cNvSpPr txBox="1"/>
+          <p:nvPr/>
+        </p:nvSpPr>
+        <p:spPr>
+          <a:xfrm>
+            <a:off x="749808" y="5175504"/>
+            <a:ext cx="2377440" cy="320040"/>
+          </a:xfrm>
+          <a:prstGeom prst="rect">
+            <a:avLst/>
+          </a:prstGeom>
+          <a:noFill/>
+          <a:ln/>
+        </p:spPr>
+        <p:txBody>
+          <a:bodyPr wrap="square" lIns="0" tIns="0" rIns="0" bIns="0" rtlCol="0" anchor="t"/>
+          <a:lstStyle/>
+          <a:p>
             <a:pPr indent="0" marL="0">
               <a:buNone/>
             </a:pPr>
             <a:r>
-              <a:rPr lang="en-US" sz="1350" dirty="0">
-                <a:solidFill>
-                  <a:srgbClr val="F8FAFC"/>
+              <a:rPr lang="en-US" sz="1500" b="1" dirty="0">
+                <a:solidFill>
+                  <a:srgbClr val="10B981"/>
                 </a:solidFill>
                 <a:latin typeface="Calibri" pitchFamily="34" charset="0"/>
                 <a:ea typeface="Calibri" pitchFamily="34" charset="-122"/>
                 <a:cs typeface="Calibri" pitchFamily="34" charset="-120"/>
               </a:rPr>
-              <a:t>use it free, always</a:t>
-            </a:r>
-            <a:endParaRPr lang="en-US" sz="1350" dirty="0"/>
-          </a:p>
-        </p:txBody>
-      </p:sp>
-      <p:sp>
-        <p:nvSpPr>
-          <p:cNvPr id="25" name="Text 20"/>
-          <p:cNvSpPr txBox="1"/>
-          <p:nvPr/>
-        </p:nvSpPr>
-        <p:spPr>
-          <a:xfrm>
-            <a:off x="4480560" y="5577840"/>
-            <a:ext cx="3566160" cy="457200"/>
-          </a:xfrm>
-          <a:prstGeom prst="rect">
-            <a:avLst/>
-          </a:prstGeom>
-          <a:noFill/>
-          <a:ln/>
-        </p:spPr>
-        <p:txBody>
-          <a:bodyPr wrap="square" lIns="0" tIns="0" rIns="0" bIns="0" rtlCol="0" anchor="ctr"/>
+              <a:t>Small businesses</a:t>
+            </a:r>
+            <a:endParaRPr lang="en-US" sz="1500" dirty="0"/>
+          </a:p>
+        </p:txBody>
+      </p:sp>
+      <p:sp>
+        <p:nvSpPr>
+          <p:cNvPr id="26" name="Text 21"/>
+          <p:cNvSpPr txBox="1"/>
+          <p:nvPr/>
+        </p:nvSpPr>
+        <p:spPr>
+          <a:xfrm>
+            <a:off x="749808" y="5522976"/>
+            <a:ext cx="2377440" cy="658368"/>
+          </a:xfrm>
+          <a:prstGeom prst="rect">
+            <a:avLst/>
+          </a:prstGeom>
+          <a:noFill/>
+          <a:ln/>
+        </p:spPr>
+        <p:txBody>
+          <a:bodyPr wrap="square" lIns="0" tIns="0" rIns="0" bIns="0" rtlCol="0" anchor="t"/>
           <a:lstStyle/>
           <a:p>
             <a:pPr indent="0" marL="0">
               <a:buNone/>
             </a:pPr>
             <a:r>
-              <a:rPr lang="en-US" sz="1350" b="1" dirty="0">
-                <a:solidFill>
-                  <a:srgbClr val="FBBF24"/>
+              <a:rPr lang="en-US" sz="1200" dirty="0">
+                <a:solidFill>
+                  <a:srgbClr val="F8FAFC"/>
                 </a:solidFill>
                 <a:latin typeface="Calibri" pitchFamily="34" charset="0"/>
                 <a:ea typeface="Calibri" pitchFamily="34" charset="-122"/>
                 <a:cs typeface="Calibri" pitchFamily="34" charset="-120"/>
               </a:rPr>
-              <a:t>Suppliers  </a:t>
-            </a:r>
+              <a:t>Use it free, always.</a:t>
+            </a:r>
+            <a:endParaRPr lang="en-US" sz="1200" dirty="0"/>
+          </a:p>
+        </p:txBody>
+      </p:sp>
+      <p:sp>
+        <p:nvSpPr>
+          <p:cNvPr id="27" name="Shape 22"/>
+          <p:cNvSpPr/>
+          <p:nvPr/>
+        </p:nvSpPr>
+        <p:spPr>
+          <a:xfrm>
+            <a:off x="3429000" y="4846320"/>
+            <a:ext cx="4572000" cy="1371600"/>
+          </a:xfrm>
+          <a:prstGeom prst="roundRect">
+            <a:avLst>
+              <a:gd name="adj" fmla="val 8000"/>
+            </a:avLst>
+          </a:prstGeom>
+          <a:solidFill>
+            <a:srgbClr val="1E2B45"/>
+          </a:solidFill>
+          <a:ln w="12700">
+            <a:solidFill>
+              <a:srgbClr val="1E2B45"/>
+            </a:solidFill>
+            <a:prstDash val="solid"/>
+          </a:ln>
+        </p:spPr>
+      </p:sp>
+      <p:sp>
+        <p:nvSpPr>
+          <p:cNvPr id="28" name="Text 23"/>
+          <p:cNvSpPr txBox="1"/>
+          <p:nvPr/>
+        </p:nvSpPr>
+        <p:spPr>
+          <a:xfrm>
+            <a:off x="3630168" y="4937760"/>
+            <a:ext cx="4206240" cy="256032"/>
+          </a:xfrm>
+          <a:prstGeom prst="rect">
+            <a:avLst/>
+          </a:prstGeom>
+          <a:noFill/>
+          <a:ln/>
+        </p:spPr>
+        <p:txBody>
+          <a:bodyPr wrap="square" lIns="0" tIns="0" rIns="0" bIns="0" rtlCol="0" anchor="t"/>
+          <a:lstStyle/>
+          <a:p>
             <a:pPr indent="0" marL="0">
               <a:buNone/>
             </a:pPr>
             <a:r>
-              <a:rPr lang="en-US" sz="1350" dirty="0">
-                <a:solidFill>
-                  <a:srgbClr val="F8FAFC"/>
+              <a:rPr lang="en-US" sz="1050" b="1" spc="200" kern="0" dirty="0">
+                <a:solidFill>
+                  <a:srgbClr val="A3B3C9"/>
                 </a:solidFill>
                 <a:latin typeface="Calibri" pitchFamily="34" charset="0"/>
                 <a:ea typeface="Calibri" pitchFamily="34" charset="-122"/>
                 <a:cs typeface="Calibri" pitchFamily="34" charset="-120"/>
               </a:rPr>
-              <a:t>pay us: more orders, no cash lost on the road</a:t>
-            </a:r>
-            <a:endParaRPr lang="en-US" sz="1350" dirty="0"/>
-          </a:p>
-        </p:txBody>
-      </p:sp>
-      <p:sp>
-        <p:nvSpPr>
-          <p:cNvPr id="26" name="Text 21"/>
-          <p:cNvSpPr txBox="1"/>
-          <p:nvPr/>
-        </p:nvSpPr>
-        <p:spPr>
-          <a:xfrm>
-            <a:off x="8183880" y="5577840"/>
-            <a:ext cx="3566160" cy="457200"/>
-          </a:xfrm>
-          <a:prstGeom prst="rect">
-            <a:avLst/>
-          </a:prstGeom>
-          <a:noFill/>
-          <a:ln/>
-        </p:spPr>
-        <p:txBody>
-          <a:bodyPr wrap="square" lIns="0" tIns="0" rIns="0" bIns="0" rtlCol="0" anchor="ctr"/>
+              <a:t>CUSTOMERS</a:t>
+            </a:r>
+            <a:endParaRPr lang="en-US" sz="1050" dirty="0"/>
+          </a:p>
+        </p:txBody>
+      </p:sp>
+      <p:sp>
+        <p:nvSpPr>
+          <p:cNvPr id="29" name="Text 24"/>
+          <p:cNvSpPr txBox="1"/>
+          <p:nvPr/>
+        </p:nvSpPr>
+        <p:spPr>
+          <a:xfrm>
+            <a:off x="3630168" y="5175504"/>
+            <a:ext cx="4206240" cy="320040"/>
+          </a:xfrm>
+          <a:prstGeom prst="rect">
+            <a:avLst/>
+          </a:prstGeom>
+          <a:noFill/>
+          <a:ln/>
+        </p:spPr>
+        <p:txBody>
+          <a:bodyPr wrap="square" lIns="0" tIns="0" rIns="0" bIns="0" rtlCol="0" anchor="t"/>
           <a:lstStyle/>
           <a:p>
             <a:pPr indent="0" marL="0">
               <a:buNone/>
             </a:pPr>
             <a:r>
-              <a:rPr lang="en-US" sz="1350" b="1" dirty="0">
-                <a:solidFill>
-                  <a:srgbClr val="34D399"/>
+              <a:rPr lang="en-US" sz="1500" b="1" dirty="0">
+                <a:solidFill>
+                  <a:srgbClr val="FBBF24"/>
                 </a:solidFill>
                 <a:latin typeface="Calibri" pitchFamily="34" charset="0"/>
                 <a:ea typeface="Calibri" pitchFamily="34" charset="-122"/>
                 <a:cs typeface="Calibri" pitchFamily="34" charset="-120"/>
               </a:rPr>
-              <a:t>Banks and funds  </a:t>
-            </a:r>
+              <a:t>Suppliers</a:t>
+            </a:r>
+            <a:endParaRPr lang="en-US" sz="1500" dirty="0"/>
+          </a:p>
+        </p:txBody>
+      </p:sp>
+      <p:sp>
+        <p:nvSpPr>
+          <p:cNvPr id="30" name="Text 25"/>
+          <p:cNvSpPr txBox="1"/>
+          <p:nvPr/>
+        </p:nvSpPr>
+        <p:spPr>
+          <a:xfrm>
+            <a:off x="3630168" y="5522976"/>
+            <a:ext cx="4206240" cy="658368"/>
+          </a:xfrm>
+          <a:prstGeom prst="rect">
+            <a:avLst/>
+          </a:prstGeom>
+          <a:noFill/>
+          <a:ln/>
+        </p:spPr>
+        <p:txBody>
+          <a:bodyPr wrap="square" lIns="0" tIns="0" rIns="0" bIns="0" rtlCol="0" anchor="t"/>
+          <a:lstStyle/>
+          <a:p>
             <a:pPr indent="0" marL="0">
               <a:buNone/>
             </a:pPr>
             <a:r>
-              <a:rPr lang="en-US" sz="1350" dirty="0">
+              <a:rPr lang="en-US" sz="1200" dirty="0">
                 <a:solidFill>
                   <a:srgbClr val="F8FAFC"/>
                 </a:solidFill>
@@ -5137,15 +5240,159 @@
                 <a:ea typeface="Calibri" pitchFamily="34" charset="-122"/>
                 <a:cs typeface="Calibri" pitchFamily="34" charset="-120"/>
               </a:rPr>
-              <a:t>next, only with the owner's consent</a:t>
-            </a:r>
-            <a:endParaRPr lang="en-US" sz="1350" dirty="0"/>
+              <a:t>Pay a monthly fee for more orders from the businesses they already serve, paid up front, with no cash lost on the road.</a:t>
+            </a:r>
+            <a:endParaRPr lang="en-US" sz="1200" dirty="0"/>
+          </a:p>
+        </p:txBody>
+      </p:sp>
+      <p:sp>
+        <p:nvSpPr>
+          <p:cNvPr id="31" name="Shape 26"/>
+          <p:cNvSpPr/>
+          <p:nvPr/>
+        </p:nvSpPr>
+        <p:spPr>
+          <a:xfrm>
+            <a:off x="8138160" y="4846320"/>
+            <a:ext cx="3474720" cy="1371600"/>
+          </a:xfrm>
+          <a:prstGeom prst="roundRect">
+            <a:avLst>
+              <a:gd name="adj" fmla="val 8000"/>
+            </a:avLst>
+          </a:prstGeom>
+          <a:solidFill>
+            <a:srgbClr val="1E2B45"/>
+          </a:solidFill>
+          <a:ln w="12700">
+            <a:solidFill>
+              <a:srgbClr val="1E2B45"/>
+            </a:solidFill>
+            <a:prstDash val="solid"/>
+          </a:ln>
+        </p:spPr>
+      </p:sp>
+      <p:sp>
+        <p:nvSpPr>
+          <p:cNvPr id="32" name="Text 27"/>
+          <p:cNvSpPr txBox="1"/>
+          <p:nvPr/>
+        </p:nvSpPr>
+        <p:spPr>
+          <a:xfrm>
+            <a:off x="8339328" y="4937760"/>
+            <a:ext cx="3108960" cy="256032"/>
+          </a:xfrm>
+          <a:prstGeom prst="rect">
+            <a:avLst/>
+          </a:prstGeom>
+          <a:noFill/>
+          <a:ln/>
+        </p:spPr>
+        <p:txBody>
+          <a:bodyPr wrap="square" lIns="0" tIns="0" rIns="0" bIns="0" rtlCol="0" anchor="t"/>
+          <a:lstStyle/>
+          <a:p>
+            <a:pPr indent="0" marL="0">
+              <a:buNone/>
+            </a:pPr>
+            <a:r>
+              <a:rPr lang="en-US" sz="1050" b="1" spc="200" kern="0" dirty="0">
+                <a:solidFill>
+                  <a:srgbClr val="A3B3C9"/>
+                </a:solidFill>
+                <a:latin typeface="Calibri" pitchFamily="34" charset="0"/>
+                <a:ea typeface="Calibri" pitchFamily="34" charset="-122"/>
+                <a:cs typeface="Calibri" pitchFamily="34" charset="-120"/>
+              </a:rPr>
+              <a:t>TOMORROW</a:t>
+            </a:r>
+            <a:endParaRPr lang="en-US" sz="1050" dirty="0"/>
+          </a:p>
+        </p:txBody>
+      </p:sp>
+      <p:sp>
+        <p:nvSpPr>
+          <p:cNvPr id="33" name="Text 28"/>
+          <p:cNvSpPr txBox="1"/>
+          <p:nvPr/>
+        </p:nvSpPr>
+        <p:spPr>
+          <a:xfrm>
+            <a:off x="8339328" y="5175504"/>
+            <a:ext cx="3108960" cy="320040"/>
+          </a:xfrm>
+          <a:prstGeom prst="rect">
+            <a:avLst/>
+          </a:prstGeom>
+          <a:noFill/>
+          <a:ln/>
+        </p:spPr>
+        <p:txBody>
+          <a:bodyPr wrap="square" lIns="0" tIns="0" rIns="0" bIns="0" rtlCol="0" anchor="t"/>
+          <a:lstStyle/>
+          <a:p>
+            <a:pPr indent="0" marL="0">
+              <a:buNone/>
+            </a:pPr>
+            <a:r>
+              <a:rPr lang="en-US" sz="1500" b="1" dirty="0">
+                <a:solidFill>
+                  <a:srgbClr val="34D399"/>
+                </a:solidFill>
+                <a:latin typeface="Calibri" pitchFamily="34" charset="0"/>
+                <a:ea typeface="Calibri" pitchFamily="34" charset="-122"/>
+                <a:cs typeface="Calibri" pitchFamily="34" charset="-120"/>
+              </a:rPr>
+              <a:t>Banks and lenders</a:t>
+            </a:r>
+            <a:endParaRPr lang="en-US" sz="1500" dirty="0"/>
+          </a:p>
+        </p:txBody>
+      </p:sp>
+      <p:sp>
+        <p:nvSpPr>
+          <p:cNvPr id="34" name="Text 29"/>
+          <p:cNvSpPr txBox="1"/>
+          <p:nvPr/>
+        </p:nvSpPr>
+        <p:spPr>
+          <a:xfrm>
+            <a:off x="8339328" y="5522976"/>
+            <a:ext cx="3108960" cy="658368"/>
+          </a:xfrm>
+          <a:prstGeom prst="rect">
+            <a:avLst/>
+          </a:prstGeom>
+          <a:noFill/>
+          <a:ln/>
+        </p:spPr>
+        <p:txBody>
+          <a:bodyPr wrap="square" lIns="0" tIns="0" rIns="0" bIns="0" rtlCol="0" anchor="t"/>
+          <a:lstStyle/>
+          <a:p>
+            <a:pPr indent="0" marL="0">
+              <a:buNone/>
+            </a:pPr>
+            <a:r>
+              <a:rPr lang="en-US" sz="1200" dirty="0">
+                <a:solidFill>
+                  <a:srgbClr val="F8FAFC"/>
+                </a:solidFill>
+                <a:latin typeface="Calibri" pitchFamily="34" charset="0"/>
+                <a:ea typeface="Calibri" pitchFamily="34" charset="-122"/>
+                <a:cs typeface="Calibri" pitchFamily="34" charset="-120"/>
+              </a:rPr>
+              <a:t>Partnerships: a verified trading history they can trust, shared only with the owner's consent.</a:t>
+            </a:r>
+            <a:endParaRPr lang="en-US" sz="1200" dirty="0"/>
           </a:p>
         </p:txBody>
       </p:sp>
       <p:pic>
         <p:nvPicPr>
-          <p:cNvPr id="27" name="Image 3" descr="preencoded.png">    </p:cNvPr>
+          <p:cNvPr id="35" name="Image 3" descr="preencoded.png">    </p:cNvPr>
           <p:cNvPicPr>
             <a:picLocks noChangeAspect="1"/>
           </p:cNvPicPr>
@@ -5169,7 +5416,7 @@
       </p:pic>
       <p:sp>
         <p:nvSpPr>
-          <p:cNvPr id="28" name="Text 22"/>
+          <p:cNvPr id="36" name="Text 30"/>
           <p:cNvSpPr txBox="1"/>
           <p:nvPr/>
         </p:nvSpPr>
@@ -5203,6 +5450,45 @@
               <a:t>3</a:t>
             </a:r>
             <a:endParaRPr lang="en-US" sz="1000" dirty="0"/>
+          </a:p>
+        </p:txBody>
+      </p:sp>
+      <p:sp>
+        <p:nvSpPr>
+          <p:cNvPr id="37" name="Text 31"/>
+          <p:cNvSpPr txBox="1"/>
+          <p:nvPr/>
+        </p:nvSpPr>
+        <p:spPr>
+          <a:xfrm>
+            <a:off x="548640" y="6336792"/>
+            <a:ext cx="10241280" cy="365760"/>
+          </a:xfrm>
+          <a:prstGeom prst="rect">
+            <a:avLst/>
+          </a:prstGeom>
+          <a:noFill/>
+          <a:ln/>
+        </p:spPr>
+        <p:txBody>
+          <a:bodyPr wrap="square" lIns="0" tIns="0" rIns="0" bIns="0" rtlCol="0" anchor="t"/>
+          <a:lstStyle/>
+          <a:p>
+            <a:pPr indent="0" marL="0">
+              <a:buNone/>
+            </a:pPr>
+            <a:r>
+              <a:rPr lang="en-US" sz="950" dirty="0">
+                <a:solidFill>
+                  <a:srgbClr val="64748B"/>
+                </a:solidFill>
+                <a:latin typeface="Calibri" pitchFamily="34" charset="0"/>
+                <a:ea typeface="Calibri" pitchFamily="34" charset="-122"/>
+                <a:cs typeface="Calibri" pitchFamily="34" charset="-120"/>
+              </a:rPr>
+              <a:t>Honest limit: only digital payments count as proof, because the payment provider confirms the money moved. Cash and the business tools are the owner's own record.</a:t>
+            </a:r>
+            <a:endParaRPr lang="en-US" sz="950" dirty="0"/>
           </a:p>
         </p:txBody>
       </p:sp>
@@ -5325,7 +5611,7 @@
         <p:spPr>
           <a:xfrm>
             <a:off x="548640" y="1508760"/>
-            <a:ext cx="11064240" cy="457200"/>
+            <a:ext cx="11064240" cy="640080"/>
           </a:xfrm>
           <a:prstGeom prst="rect">
             <a:avLst/>
@@ -5341,7 +5627,7 @@
               <a:buNone/>
             </a:pPr>
             <a:r>
-              <a:rPr lang="en-US" sz="1700" i="1" dirty="0">
+              <a:rPr lang="en-US" sz="1600" i="1" dirty="0">
                 <a:solidFill>
                   <a:srgbClr val="A3B3C9"/>
                 </a:solidFill>
@@ -5349,9 +5635,9 @@
                 <a:ea typeface="Calibri" pitchFamily="34" charset="-122"/>
                 <a:cs typeface="Calibri" pitchFamily="34" charset="-120"/>
               </a:rPr>
-              <a:t>Thandi runs a small shop. She's busy, she trusts her customers, and she's never had a record of any of it.</a:t>
-            </a:r>
-            <a:endParaRPr lang="en-US" sz="1700" dirty="0"/>
+              <a:t>Thandi runs a small shop. Her customers pay her in cash, with no proof it moved. Where money can be proven is with her suppliers, so that's where Akayza starts.</a:t>
+            </a:r>
+            <a:endParaRPr lang="en-US" sz="1600" dirty="0"/>
           </a:p>
         </p:txBody>
       </p:sp>
@@ -5363,8 +5649,8 @@
         </p:nvSpPr>
         <p:spPr>
           <a:xfrm>
-            <a:off x="548640" y="2240280"/>
-            <a:ext cx="2606040" cy="3566160"/>
+            <a:off x="548640" y="2331720"/>
+            <a:ext cx="2606040" cy="3474720"/>
           </a:xfrm>
           <a:prstGeom prst="roundRect">
             <a:avLst>
@@ -5390,8 +5676,8 @@
         </p:nvSpPr>
         <p:spPr>
           <a:xfrm>
-            <a:off x="822960" y="2514600"/>
-            <a:ext cx="731520" cy="731520"/>
+            <a:off x="822960" y="2578608"/>
+            <a:ext cx="713232" cy="713232"/>
           </a:xfrm>
           <a:prstGeom prst="ellipse">
             <a:avLst/>
@@ -5423,8 +5709,8 @@
         </p:blipFill>
         <p:spPr>
           <a:xfrm>
-            <a:off x="998525" y="2690165"/>
-            <a:ext cx="380390" cy="380390"/>
+            <a:off x="994136" y="2749784"/>
+            <a:ext cx="370881" cy="370881"/>
           </a:xfrm>
           <a:prstGeom prst="rect">
             <a:avLst/>
@@ -5439,7 +5725,7 @@
         </p:nvSpPr>
         <p:spPr>
           <a:xfrm>
-            <a:off x="822960" y="3429000"/>
+            <a:off x="822960" y="3474720"/>
             <a:ext cx="2194560" cy="320040"/>
           </a:xfrm>
           <a:prstGeom prst="rect">
@@ -5478,8 +5764,8 @@
         </p:nvSpPr>
         <p:spPr>
           <a:xfrm>
-            <a:off x="822960" y="3794760"/>
-            <a:ext cx="2148840" cy="731520"/>
+            <a:off x="822960" y="3822192"/>
+            <a:ext cx="2148840" cy="685800"/>
           </a:xfrm>
           <a:prstGeom prst="rect">
             <a:avLst/>
@@ -5495,7 +5781,7 @@
               <a:buNone/>
             </a:pPr>
             <a:r>
-              <a:rPr lang="en-US" sz="1800" b="1" dirty="0">
+              <a:rPr lang="en-US" sz="1700" b="1" dirty="0">
                 <a:solidFill>
                   <a:srgbClr val="F8FAFC"/>
                 </a:solidFill>
@@ -5505,7 +5791,7 @@
               </a:rPr>
               <a:t>Restocks in 2 minutes</a:t>
             </a:r>
-            <a:endParaRPr lang="en-US" sz="1800" dirty="0"/>
+            <a:endParaRPr lang="en-US" sz="1700" dirty="0"/>
           </a:p>
         </p:txBody>
       </p:sp>
@@ -5517,7 +5803,7 @@
         </p:nvSpPr>
         <p:spPr>
           <a:xfrm>
-            <a:off x="822960" y="4572000"/>
+            <a:off x="822960" y="4553712"/>
             <a:ext cx="2148840" cy="1188720"/>
           </a:xfrm>
           <a:prstGeom prst="rect">
@@ -5556,7 +5842,7 @@
         </p:nvSpPr>
         <p:spPr>
           <a:xfrm>
-            <a:off x="3182112" y="4023360"/>
+            <a:off x="3182112" y="4069080"/>
             <a:ext cx="164592" cy="0"/>
           </a:xfrm>
           <a:prstGeom prst="line">
@@ -5580,8 +5866,8 @@
         </p:nvSpPr>
         <p:spPr>
           <a:xfrm>
-            <a:off x="3364992" y="2240280"/>
-            <a:ext cx="2606040" cy="3566160"/>
+            <a:off x="3364992" y="2331720"/>
+            <a:ext cx="2606040" cy="3474720"/>
           </a:xfrm>
           <a:prstGeom prst="roundRect">
             <a:avLst>
@@ -5607,8 +5893,8 @@
         </p:nvSpPr>
         <p:spPr>
           <a:xfrm>
-            <a:off x="3639312" y="2514600"/>
-            <a:ext cx="731520" cy="731520"/>
+            <a:off x="3639312" y="2578608"/>
+            <a:ext cx="713232" cy="713232"/>
           </a:xfrm>
           <a:prstGeom prst="ellipse">
             <a:avLst/>
@@ -5640,8 +5926,8 @@
         </p:blipFill>
         <p:spPr>
           <a:xfrm>
-            <a:off x="3814877" y="2690165"/>
-            <a:ext cx="380390" cy="380390"/>
+            <a:off x="3810488" y="2749784"/>
+            <a:ext cx="370881" cy="370881"/>
           </a:xfrm>
           <a:prstGeom prst="rect">
             <a:avLst/>
@@ -5656,7 +5942,7 @@
         </p:nvSpPr>
         <p:spPr>
           <a:xfrm>
-            <a:off x="3639312" y="3429000"/>
+            <a:off x="3639312" y="3474720"/>
             <a:ext cx="2194560" cy="320040"/>
           </a:xfrm>
           <a:prstGeom prst="rect">
@@ -5695,8 +5981,8 @@
         </p:nvSpPr>
         <p:spPr>
           <a:xfrm>
-            <a:off x="3639312" y="3794760"/>
-            <a:ext cx="2148840" cy="731520"/>
+            <a:off x="3639312" y="3822192"/>
+            <a:ext cx="2148840" cy="685800"/>
           </a:xfrm>
           <a:prstGeom prst="rect">
             <a:avLst/>
@@ -5712,7 +5998,7 @@
               <a:buNone/>
             </a:pPr>
             <a:r>
-              <a:rPr lang="en-US" sz="1800" b="1" dirty="0">
+              <a:rPr lang="en-US" sz="1700" b="1" dirty="0">
                 <a:solidFill>
                   <a:srgbClr val="F8FAFC"/>
                 </a:solidFill>
@@ -5720,9 +6006,9 @@
                 <a:ea typeface="Calibri" pitchFamily="34" charset="-122"/>
                 <a:cs typeface="Calibri" pitchFamily="34" charset="-120"/>
               </a:rPr>
-              <a:t>Gets paid back</a:t>
-            </a:r>
-            <a:endParaRPr lang="en-US" sz="1800" dirty="0"/>
+              <a:t>Records a repayment</a:t>
+            </a:r>
+            <a:endParaRPr lang="en-US" sz="1700" dirty="0"/>
           </a:p>
         </p:txBody>
       </p:sp>
@@ -5734,7 +6020,7 @@
         </p:nvSpPr>
         <p:spPr>
           <a:xfrm>
-            <a:off x="3639312" y="4572000"/>
+            <a:off x="3639312" y="4553712"/>
             <a:ext cx="2148840" cy="1188720"/>
           </a:xfrm>
           <a:prstGeom prst="rect">
@@ -5759,7 +6045,7 @@
                 <a:ea typeface="Calibri" pitchFamily="34" charset="-122"/>
                 <a:cs typeface="Calibri" pitchFamily="34" charset="-120"/>
               </a:rPr>
-              <a:t>A customer settles his credit. It's off her book on the spot.</a:t>
+              <a:t>A customer settles his credit. She records it in her credit book, one of her business tools.</a:t>
             </a:r>
             <a:endParaRPr lang="en-US" sz="1350" dirty="0"/>
           </a:p>
@@ -5773,7 +6059,7 @@
         </p:nvSpPr>
         <p:spPr>
           <a:xfrm>
-            <a:off x="5998464" y="4023360"/>
+            <a:off x="5998464" y="4069080"/>
             <a:ext cx="164592" cy="0"/>
           </a:xfrm>
           <a:prstGeom prst="line">
@@ -5797,8 +6083,8 @@
         </p:nvSpPr>
         <p:spPr>
           <a:xfrm>
-            <a:off x="6181344" y="2240280"/>
-            <a:ext cx="2606040" cy="3566160"/>
+            <a:off x="6181344" y="2331720"/>
+            <a:ext cx="2606040" cy="3474720"/>
           </a:xfrm>
           <a:prstGeom prst="roundRect">
             <a:avLst>
@@ -5824,8 +6110,8 @@
         </p:nvSpPr>
         <p:spPr>
           <a:xfrm>
-            <a:off x="6455664" y="2514600"/>
-            <a:ext cx="731520" cy="731520"/>
+            <a:off x="6455664" y="2578608"/>
+            <a:ext cx="713232" cy="713232"/>
           </a:xfrm>
           <a:prstGeom prst="ellipse">
             <a:avLst/>
@@ -5857,8 +6143,8 @@
         </p:blipFill>
         <p:spPr>
           <a:xfrm>
-            <a:off x="6631229" y="2690165"/>
-            <a:ext cx="380390" cy="380390"/>
+            <a:off x="6626840" y="2749784"/>
+            <a:ext cx="370881" cy="370881"/>
           </a:xfrm>
           <a:prstGeom prst="rect">
             <a:avLst/>
@@ -5873,7 +6159,7 @@
         </p:nvSpPr>
         <p:spPr>
           <a:xfrm>
-            <a:off x="6455664" y="3429000"/>
+            <a:off x="6455664" y="3474720"/>
             <a:ext cx="2194560" cy="320040"/>
           </a:xfrm>
           <a:prstGeom prst="rect">
@@ -5912,8 +6198,8 @@
         </p:nvSpPr>
         <p:spPr>
           <a:xfrm>
-            <a:off x="6455664" y="3794760"/>
-            <a:ext cx="2148840" cy="731520"/>
+            <a:off x="6455664" y="3822192"/>
+            <a:ext cx="2148840" cy="685800"/>
           </a:xfrm>
           <a:prstGeom prst="rect">
             <a:avLst/>
@@ -5929,7 +6215,7 @@
               <a:buNone/>
             </a:pPr>
             <a:r>
-              <a:rPr lang="en-US" sz="1800" b="1" dirty="0">
+              <a:rPr lang="en-US" sz="1700" b="1" dirty="0">
                 <a:solidFill>
                   <a:srgbClr val="F8FAFC"/>
                 </a:solidFill>
@@ -5939,7 +6225,7 @@
               </a:rPr>
               <a:t>Pays without cash risk</a:t>
             </a:r>
-            <a:endParaRPr lang="en-US" sz="1800" dirty="0"/>
+            <a:endParaRPr lang="en-US" sz="1700" dirty="0"/>
           </a:p>
         </p:txBody>
       </p:sp>
@@ -5951,7 +6237,7 @@
         </p:nvSpPr>
         <p:spPr>
           <a:xfrm>
-            <a:off x="6455664" y="4572000"/>
+            <a:off x="6455664" y="4553712"/>
             <a:ext cx="2148840" cy="1188720"/>
           </a:xfrm>
           <a:prstGeom prst="rect">
@@ -5990,7 +6276,7 @@
         </p:nvSpPr>
         <p:spPr>
           <a:xfrm>
-            <a:off x="8814816" y="4023360"/>
+            <a:off x="8814816" y="4069080"/>
             <a:ext cx="164592" cy="0"/>
           </a:xfrm>
           <a:prstGeom prst="line">
@@ -6014,8 +6300,8 @@
         </p:nvSpPr>
         <p:spPr>
           <a:xfrm>
-            <a:off x="8997696" y="2240280"/>
-            <a:ext cx="2606040" cy="3566160"/>
+            <a:off x="8997696" y="2331720"/>
+            <a:ext cx="2606040" cy="3474720"/>
           </a:xfrm>
           <a:prstGeom prst="roundRect">
             <a:avLst>
@@ -6041,8 +6327,8 @@
         </p:nvSpPr>
         <p:spPr>
           <a:xfrm>
-            <a:off x="9272016" y="2514600"/>
-            <a:ext cx="731520" cy="731520"/>
+            <a:off x="9272016" y="2578608"/>
+            <a:ext cx="713232" cy="713232"/>
           </a:xfrm>
           <a:prstGeom prst="ellipse">
             <a:avLst/>
@@ -6074,8 +6360,8 @@
         </p:blipFill>
         <p:spPr>
           <a:xfrm>
-            <a:off x="9447581" y="2690165"/>
-            <a:ext cx="380390" cy="380390"/>
+            <a:off x="9443192" y="2749784"/>
+            <a:ext cx="370881" cy="370881"/>
           </a:xfrm>
           <a:prstGeom prst="rect">
             <a:avLst/>
@@ -6090,7 +6376,7 @@
         </p:nvSpPr>
         <p:spPr>
           <a:xfrm>
-            <a:off x="9272016" y="3429000"/>
+            <a:off x="9272016" y="3474720"/>
             <a:ext cx="2194560" cy="320040"/>
           </a:xfrm>
           <a:prstGeom prst="rect">
@@ -6129,8 +6415,8 @@
         </p:nvSpPr>
         <p:spPr>
           <a:xfrm>
-            <a:off x="9272016" y="3794760"/>
-            <a:ext cx="2148840" cy="731520"/>
+            <a:off x="9272016" y="3822192"/>
+            <a:ext cx="2148840" cy="685800"/>
           </a:xfrm>
           <a:prstGeom prst="rect">
             <a:avLst/>
@@ -6146,7 +6432,7 @@
               <a:buNone/>
             </a:pPr>
             <a:r>
-              <a:rPr lang="en-US" sz="1800" b="1" dirty="0">
+              <a:rPr lang="en-US" sz="1700" b="1" dirty="0">
                 <a:solidFill>
                   <a:srgbClr val="F8FAFC"/>
                 </a:solidFill>
@@ -6156,7 +6442,7 @@
               </a:rPr>
               <a:t>Sees her business</a:t>
             </a:r>
-            <a:endParaRPr lang="en-US" sz="1800" dirty="0"/>
+            <a:endParaRPr lang="en-US" sz="1700" dirty="0"/>
           </a:p>
         </p:txBody>
       </p:sp>
@@ -6168,7 +6454,7 @@
         </p:nvSpPr>
         <p:spPr>
           <a:xfrm>
-            <a:off x="9272016" y="4572000"/>
+            <a:off x="9272016" y="4553712"/>
             <a:ext cx="2148840" cy="1188720"/>
           </a:xfrm>
           <a:prstGeom prst="rect">
@@ -6193,7 +6479,7 @@
                 <a:ea typeface="Calibri" pitchFamily="34" charset="-122"/>
                 <a:cs typeface="Calibri" pitchFamily="34" charset="-120"/>
               </a:rPr>
-              <a:t>What she sold, what she's owed, what she bought. She seals it, and it's hers.</a:t>
+              <a:t>Who owes her, what she orders most and how often, and the suppliers that fit how she buys.</a:t>
             </a:r>
             <a:endParaRPr lang="en-US" sz="1350" dirty="0"/>
           </a:p>
@@ -6232,7 +6518,7 @@
                 <a:ea typeface="Calibri" pitchFamily="34" charset="-122"/>
                 <a:cs typeface="Calibri" pitchFamily="34" charset="-120"/>
               </a:rPr>
-              <a:t>Sipho the builder has the same week: stock for the site, jobs in stages, the client signs off each stage from a link.</a:t>
+              <a:t>Same week for Sipho the builder: materials for the site from his suppliers, jobs tracked in stages.</a:t>
             </a:r>
             <a:endParaRPr lang="en-US" sz="1400" dirty="0"/>
           </a:p>

--- a/docs/submission/05_final_submission/Akayza_Pitch_TeamPR.pptx
+++ b/docs/submission/05_final_submission/Akayza_Pitch_TeamPR.pptx
@@ -1954,7 +1954,7 @@
           <a:p>
             <a:r>
               <a:rPr lang="en-US" dirty="0"/>
-              <a:t>SAY (25 s): 'The township economy is R900 billion a year; spaza shops alone move R180 billion. And 56% already prefer EFT: that's why South Africa first. Suppliers pay us, businesses never do: R299 or R1,499 a month, and about 1% only on digital orders, never on cash. We don't chase businesses one by one: we sign a supplier, and it brings the businesses it already delivers to. End of year one, about R56,000 a month; year three, about R1.1 million.'
+              <a:t>SAY (25 s): 'Our users are small and informal businesses; they use it free. Our customers are suppliers. The township economy is R900 billion a year; spaza shops alone move R180 billion. And 56% already prefer EFT: that's why South Africa first. Suppliers pay us, businesses never do: R299 or R1,499 a month, and about 1% only on digital orders, never on cash. We don't chase businesses one by one: we sign a supplier, and it brings the businesses it already delivers to. And businesses invite the suppliers they already order from. End of year one, about R56,000 a month; year three, about R1.1 million.'
 WHY SA FIRST (if asked): we live it; big and dense (one supplier route serves hundreds of businesses); ready for digital; clear rules (POPIA, CIPC, VAT). Then the rest of Africa.
 HOW the revenue works: subscriptions = supplier mix × price; commission = active businesses × ~R4,000 digital orders a month × 1%. Year 1: 5 Starter + 10 Pro suppliers, 1,000 businesses. Estimates, and we say so.</a:t>
             </a:r>
@@ -2136,7 +2136,7 @@
             <a:r>
               <a:rPr lang="en-US" dirty="0"/>
               <a:t>SAY (20 s): 'Everyone serves a slice. A wholesaler's own app, like Shoprite Cash &amp; Carry's, sells its own range. Payment apps take card payments. We serve the whole business, with the suppliers it already uses, for any kind of business. It gets smarter with use, and it builds a record that holds up.'
-Our biggest competitor is the habit of WhatsApp and a notebook. Don't attack anyone; show the gap. We complement payment apps; we don't replace them. We're not a marketplace: we recommend suppliers, never products.</a:t>
+Our biggest competitor is the habit: calls, voice notes and WhatsApp messages to different suppliers, nothing in one place, nothing to track. Then a notebook. Don't attack anyone; show the gap. We complement payment apps; we don't replace them. We're not a marketplace: we recommend suppliers, never products.</a:t>
             </a:r>
             <a:endParaRPr lang="en-US" dirty="0"/>
           </a:p>
@@ -6691,7 +6691,7 @@
                 <a:ea typeface="Georgia" pitchFamily="34" charset="-122"/>
                 <a:cs typeface="Georgia" pitchFamily="34" charset="-120"/>
               </a:rPr>
-              <a:t>Suppliers pay. Businesses never do.</a:t>
+              <a:t>Suppliers pay. Businesses use it free.</a:t>
             </a:r>
             <a:endParaRPr lang="en-US" sz="3200" dirty="0"/>
           </a:p>
@@ -6966,8 +6966,8 @@
         </p:nvSpPr>
         <p:spPr>
           <a:xfrm>
-            <a:off x="777240" y="5047488"/>
-            <a:ext cx="4572000" cy="1005840"/>
+            <a:off x="777240" y="5001768"/>
+            <a:ext cx="4572000" cy="1078992"/>
           </a:xfrm>
           <a:prstGeom prst="rect">
             <a:avLst/>
@@ -6983,7 +6983,7 @@
               <a:buNone/>
             </a:pPr>
             <a:r>
-              <a:rPr lang="en-US" sz="1350" b="1" dirty="0">
+              <a:rPr lang="en-US" sz="1250" b="1" dirty="0">
                 <a:solidFill>
                   <a:srgbClr val="FBBF24"/>
                 </a:solidFill>
@@ -6997,7 +6997,7 @@
               <a:buNone/>
             </a:pPr>
             <a:r>
-              <a:rPr lang="en-US" sz="1350" dirty="0">
+              <a:rPr lang="en-US" sz="1250" dirty="0">
                 <a:solidFill>
                   <a:srgbClr val="F8FAFC"/>
                 </a:solidFill>
@@ -7005,9 +7005,9 @@
                 <a:ea typeface="Calibri" pitchFamily="34" charset="-122"/>
                 <a:cs typeface="Calibri" pitchFamily="34" charset="-120"/>
               </a:rPr>
-              <a:t>Sign a supplier, and it brings the businesses it already delivers to. 2 suppliers in the pilot, 15 in year 1, 200 by year 3.</a:t>
-            </a:r>
-            <a:endParaRPr lang="en-US" sz="1350" dirty="0"/>
+              <a:t>Two ways in. Sign a supplier, and it brings the businesses it delivers to. Businesses invite the suppliers they already order from. 2 suppliers in the pilot, 15 in year 1, 200 by year 3.</a:t>
+            </a:r>
+            <a:endParaRPr lang="en-US" sz="1250" dirty="0"/>
           </a:p>
         </p:txBody>
       </p:sp>
@@ -8897,7 +8897,7 @@
                 <a:gridCol w="1828800"/>
                 <a:gridCol w="1828800"/>
               </a:tblGrid>
-              <a:tr h="585216">
+              <a:tr h="548640">
                 <a:tc>
                   <a:txBody>
                     <a:bodyPr/>
@@ -8906,7 +8906,7 @@
                       <a:pPr algn="l" indent="0" marL="0">
                         <a:buNone/>
                       </a:pPr>
-                      <a:endParaRPr lang="en-US" sz="1350" dirty="0">
+                      <a:endParaRPr lang="en-US" sz="1250" dirty="0">
                         <a:latin typeface="Calibri" charset="0"/>
                         <a:ea typeface="Calibri" charset="0"/>
                         <a:cs typeface="Calibri" charset="0"/>
@@ -8964,7 +8964,7 @@
                         <a:buNone/>
                       </a:pPr>
                       <a:r>
-                        <a:rPr lang="en-US" sz="1350" b="1" dirty="0">
+                        <a:rPr lang="en-US" sz="1250" b="1" dirty="0">
                           <a:solidFill>
                             <a:srgbClr val="34D399"/>
                           </a:solidFill>
@@ -8974,7 +8974,7 @@
                         </a:rPr>
                         <a:t>Runs the business</a:t>
                       </a:r>
-                      <a:endParaRPr lang="en-US" sz="1350" dirty="0">
+                      <a:endParaRPr lang="en-US" sz="1250" dirty="0">
                         <a:latin typeface="Calibri" charset="0"/>
                         <a:ea typeface="Calibri" charset="0"/>
                         <a:cs typeface="Calibri" charset="0"/>
@@ -9032,7 +9032,7 @@
                         <a:buNone/>
                       </a:pPr>
                       <a:r>
-                        <a:rPr lang="en-US" sz="1350" b="1" dirty="0">
+                        <a:rPr lang="en-US" sz="1250" b="1" dirty="0">
                           <a:solidFill>
                             <a:srgbClr val="34D399"/>
                           </a:solidFill>
@@ -9042,7 +9042,7 @@
                         </a:rPr>
                         <a:t>Your own suppliers</a:t>
                       </a:r>
-                      <a:endParaRPr lang="en-US" sz="1350" dirty="0">
+                      <a:endParaRPr lang="en-US" sz="1250" dirty="0">
                         <a:latin typeface="Calibri" charset="0"/>
                         <a:ea typeface="Calibri" charset="0"/>
                         <a:cs typeface="Calibri" charset="0"/>
@@ -9100,7 +9100,7 @@
                         <a:buNone/>
                       </a:pPr>
                       <a:r>
-                        <a:rPr lang="en-US" sz="1350" b="1" dirty="0">
+                        <a:rPr lang="en-US" sz="1250" b="1" dirty="0">
                           <a:solidFill>
                             <a:srgbClr val="34D399"/>
                           </a:solidFill>
@@ -9110,7 +9110,7 @@
                         </a:rPr>
                         <a:t>Any kind of business</a:t>
                       </a:r>
-                      <a:endParaRPr lang="en-US" sz="1350" dirty="0">
+                      <a:endParaRPr lang="en-US" sz="1250" dirty="0">
                         <a:latin typeface="Calibri" charset="0"/>
                         <a:ea typeface="Calibri" charset="0"/>
                         <a:cs typeface="Calibri" charset="0"/>
@@ -9168,7 +9168,7 @@
                         <a:buNone/>
                       </a:pPr>
                       <a:r>
-                        <a:rPr lang="en-US" sz="1350" b="1" dirty="0">
+                        <a:rPr lang="en-US" sz="1250" b="1" dirty="0">
                           <a:solidFill>
                             <a:srgbClr val="34D399"/>
                           </a:solidFill>
@@ -9178,7 +9178,7 @@
                         </a:rPr>
                         <a:t>Verified payment</a:t>
                       </a:r>
-                      <a:endParaRPr lang="en-US" sz="1350" dirty="0">
+                      <a:endParaRPr lang="en-US" sz="1250" dirty="0">
                         <a:latin typeface="Calibri" charset="0"/>
                         <a:ea typeface="Calibri" charset="0"/>
                         <a:cs typeface="Calibri" charset="0"/>
@@ -9228,7 +9228,7 @@
                   </a:tcPr>
                 </a:tc>
               </a:tr>
-              <a:tr h="585216">
+              <a:tr h="548640">
                 <a:tc>
                   <a:txBody>
                     <a:bodyPr/>
@@ -9238,7 +9238,7 @@
                         <a:buNone/>
                       </a:pPr>
                       <a:r>
-                        <a:rPr lang="en-US" sz="1350" b="1" dirty="0">
+                        <a:rPr lang="en-US" sz="1250" b="1" dirty="0">
                           <a:solidFill>
                             <a:srgbClr val="F8FAFC"/>
                           </a:solidFill>
@@ -9246,9 +9246,9 @@
                           <a:ea typeface="Calibri" pitchFamily="34" charset="-122"/>
                           <a:cs typeface="Calibri" pitchFamily="34" charset="-120"/>
                         </a:rPr>
-                        <a:t>WhatsApp + notebook (today)</a:t>
+                        <a:t>WhatsApp, calls + a notebook (today)</a:t>
                       </a:r>
-                      <a:endParaRPr lang="en-US" sz="1350" dirty="0">
+                      <a:endParaRPr lang="en-US" sz="1250" dirty="0">
                         <a:latin typeface="Calibri" charset="0"/>
                         <a:ea typeface="Calibri" charset="0"/>
                         <a:cs typeface="Calibri" charset="0"/>
@@ -9306,7 +9306,7 @@
                         <a:buNone/>
                       </a:pPr>
                       <a:r>
-                        <a:rPr lang="en-US" sz="1350" dirty="0">
+                        <a:rPr lang="en-US" sz="1250" dirty="0">
                           <a:solidFill>
                             <a:srgbClr val="64748B"/>
                           </a:solidFill>
@@ -9316,7 +9316,7 @@
                         </a:rPr>
                         <a:t>no</a:t>
                       </a:r>
-                      <a:endParaRPr lang="en-US" sz="1350" dirty="0">
+                      <a:endParaRPr lang="en-US" sz="1250" dirty="0">
                         <a:latin typeface="Calibri" charset="0"/>
                         <a:ea typeface="Calibri" charset="0"/>
                         <a:cs typeface="Calibri" charset="0"/>
@@ -9374,7 +9374,7 @@
                         <a:buNone/>
                       </a:pPr>
                       <a:r>
-                        <a:rPr lang="en-US" sz="1350" dirty="0">
+                        <a:rPr lang="en-US" sz="1250" dirty="0">
                           <a:solidFill>
                             <a:srgbClr val="F8FAFC"/>
                           </a:solidFill>
@@ -9382,9 +9382,9 @@
                           <a:ea typeface="Calibri" pitchFamily="34" charset="-122"/>
                           <a:cs typeface="Calibri" pitchFamily="34" charset="-120"/>
                         </a:rPr>
-                        <a:t>by voice note</a:t>
+                        <a:t>scattered: calls, voice notes</a:t>
                       </a:r>
-                      <a:endParaRPr lang="en-US" sz="1350" dirty="0">
+                      <a:endParaRPr lang="en-US" sz="1250" dirty="0">
                         <a:latin typeface="Calibri" charset="0"/>
                         <a:ea typeface="Calibri" charset="0"/>
                         <a:cs typeface="Calibri" charset="0"/>
@@ -9442,7 +9442,7 @@
                         <a:buNone/>
                       </a:pPr>
                       <a:r>
-                        <a:rPr lang="en-US" sz="1350" dirty="0">
+                        <a:rPr lang="en-US" sz="1250" dirty="0">
                           <a:solidFill>
                             <a:srgbClr val="F8FAFC"/>
                           </a:solidFill>
@@ -9452,7 +9452,7 @@
                         </a:rPr>
                         <a:t>yes</a:t>
                       </a:r>
-                      <a:endParaRPr lang="en-US" sz="1350" dirty="0">
+                      <a:endParaRPr lang="en-US" sz="1250" dirty="0">
                         <a:latin typeface="Calibri" charset="0"/>
                         <a:ea typeface="Calibri" charset="0"/>
                         <a:cs typeface="Calibri" charset="0"/>
@@ -9510,7 +9510,7 @@
                         <a:buNone/>
                       </a:pPr>
                       <a:r>
-                        <a:rPr lang="en-US" sz="1350" dirty="0">
+                        <a:rPr lang="en-US" sz="1250" dirty="0">
                           <a:solidFill>
                             <a:srgbClr val="64748B"/>
                           </a:solidFill>
@@ -9520,7 +9520,7 @@
                         </a:rPr>
                         <a:t>no</a:t>
                       </a:r>
-                      <a:endParaRPr lang="en-US" sz="1350" dirty="0">
+                      <a:endParaRPr lang="en-US" sz="1250" dirty="0">
                         <a:latin typeface="Calibri" charset="0"/>
                         <a:ea typeface="Calibri" charset="0"/>
                         <a:cs typeface="Calibri" charset="0"/>
@@ -9570,7 +9570,7 @@
                   </a:tcPr>
                 </a:tc>
               </a:tr>
-              <a:tr h="585216">
+              <a:tr h="548640">
                 <a:tc>
                   <a:txBody>
                     <a:bodyPr/>
@@ -9580,7 +9580,7 @@
                         <a:buNone/>
                       </a:pPr>
                       <a:r>
-                        <a:rPr lang="en-US" sz="1350" b="1" dirty="0">
+                        <a:rPr lang="en-US" sz="1250" b="1" dirty="0">
                           <a:solidFill>
                             <a:srgbClr val="F8FAFC"/>
                           </a:solidFill>
@@ -9590,7 +9590,7 @@
                         </a:rPr>
                         <a:t>A wholesaler's own app (e.g. Shoprite Cash &amp; Carry)</a:t>
                       </a:r>
-                      <a:endParaRPr lang="en-US" sz="1350" dirty="0">
+                      <a:endParaRPr lang="en-US" sz="1250" dirty="0">
                         <a:latin typeface="Calibri" charset="0"/>
                         <a:ea typeface="Calibri" charset="0"/>
                         <a:cs typeface="Calibri" charset="0"/>
@@ -9648,7 +9648,7 @@
                         <a:buNone/>
                       </a:pPr>
                       <a:r>
-                        <a:rPr lang="en-US" sz="1350" dirty="0">
+                        <a:rPr lang="en-US" sz="1250" dirty="0">
                           <a:solidFill>
                             <a:srgbClr val="64748B"/>
                           </a:solidFill>
@@ -9658,7 +9658,7 @@
                         </a:rPr>
                         <a:t>no</a:t>
                       </a:r>
-                      <a:endParaRPr lang="en-US" sz="1350" dirty="0">
+                      <a:endParaRPr lang="en-US" sz="1250" dirty="0">
                         <a:latin typeface="Calibri" charset="0"/>
                         <a:ea typeface="Calibri" charset="0"/>
                         <a:cs typeface="Calibri" charset="0"/>
@@ -9716,7 +9716,7 @@
                         <a:buNone/>
                       </a:pPr>
                       <a:r>
-                        <a:rPr lang="en-US" sz="1350" dirty="0">
+                        <a:rPr lang="en-US" sz="1250" dirty="0">
                           <a:solidFill>
                             <a:srgbClr val="F8FAFC"/>
                           </a:solidFill>
@@ -9726,7 +9726,7 @@
                         </a:rPr>
                         <a:t>one wholesaler</a:t>
                       </a:r>
-                      <a:endParaRPr lang="en-US" sz="1350" dirty="0">
+                      <a:endParaRPr lang="en-US" sz="1250" dirty="0">
                         <a:latin typeface="Calibri" charset="0"/>
                         <a:ea typeface="Calibri" charset="0"/>
                         <a:cs typeface="Calibri" charset="0"/>
@@ -9784,7 +9784,7 @@
                         <a:buNone/>
                       </a:pPr>
                       <a:r>
-                        <a:rPr lang="en-US" sz="1350" dirty="0">
+                        <a:rPr lang="en-US" sz="1250" dirty="0">
                           <a:solidFill>
                             <a:srgbClr val="F8FAFC"/>
                           </a:solidFill>
@@ -9794,7 +9794,7 @@
                         </a:rPr>
                         <a:t>shops</a:t>
                       </a:r>
-                      <a:endParaRPr lang="en-US" sz="1350" dirty="0">
+                      <a:endParaRPr lang="en-US" sz="1250" dirty="0">
                         <a:latin typeface="Calibri" charset="0"/>
                         <a:ea typeface="Calibri" charset="0"/>
                         <a:cs typeface="Calibri" charset="0"/>
@@ -9852,7 +9852,7 @@
                         <a:buNone/>
                       </a:pPr>
                       <a:r>
-                        <a:rPr lang="en-US" sz="1350" dirty="0">
+                        <a:rPr lang="en-US" sz="1250" dirty="0">
                           <a:solidFill>
                             <a:srgbClr val="F8FAFC"/>
                           </a:solidFill>
@@ -9862,7 +9862,7 @@
                         </a:rPr>
                         <a:t>yes</a:t>
                       </a:r>
-                      <a:endParaRPr lang="en-US" sz="1350" dirty="0">
+                      <a:endParaRPr lang="en-US" sz="1250" dirty="0">
                         <a:latin typeface="Calibri" charset="0"/>
                         <a:ea typeface="Calibri" charset="0"/>
                         <a:cs typeface="Calibri" charset="0"/>
@@ -9912,7 +9912,7 @@
                   </a:tcPr>
                 </a:tc>
               </a:tr>
-              <a:tr h="585216">
+              <a:tr h="548640">
                 <a:tc>
                   <a:txBody>
                     <a:bodyPr/>
@@ -9922,7 +9922,7 @@
                         <a:buNone/>
                       </a:pPr>
                       <a:r>
-                        <a:rPr lang="en-US" sz="1350" b="1" dirty="0">
+                        <a:rPr lang="en-US" sz="1250" b="1" dirty="0">
                           <a:solidFill>
                             <a:srgbClr val="F8FAFC"/>
                           </a:solidFill>
@@ -9932,7 +9932,7 @@
                         </a:rPr>
                         <a:t>Payments / POS (iKhokha, Yoco)</a:t>
                       </a:r>
-                      <a:endParaRPr lang="en-US" sz="1350" dirty="0">
+                      <a:endParaRPr lang="en-US" sz="1250" dirty="0">
                         <a:latin typeface="Calibri" charset="0"/>
                         <a:ea typeface="Calibri" charset="0"/>
                         <a:cs typeface="Calibri" charset="0"/>
@@ -9990,7 +9990,7 @@
                         <a:buNone/>
                       </a:pPr>
                       <a:r>
-                        <a:rPr lang="en-US" sz="1350" dirty="0">
+                        <a:rPr lang="en-US" sz="1250" dirty="0">
                           <a:solidFill>
                             <a:srgbClr val="F8FAFC"/>
                           </a:solidFill>
@@ -10000,7 +10000,7 @@
                         </a:rPr>
                         <a:t>sales only</a:t>
                       </a:r>
-                      <a:endParaRPr lang="en-US" sz="1350" dirty="0">
+                      <a:endParaRPr lang="en-US" sz="1250" dirty="0">
                         <a:latin typeface="Calibri" charset="0"/>
                         <a:ea typeface="Calibri" charset="0"/>
                         <a:cs typeface="Calibri" charset="0"/>
@@ -10058,7 +10058,7 @@
                         <a:buNone/>
                       </a:pPr>
                       <a:r>
-                        <a:rPr lang="en-US" sz="1350" dirty="0">
+                        <a:rPr lang="en-US" sz="1250" dirty="0">
                           <a:solidFill>
                             <a:srgbClr val="64748B"/>
                           </a:solidFill>
@@ -10068,7 +10068,7 @@
                         </a:rPr>
                         <a:t>no</a:t>
                       </a:r>
-                      <a:endParaRPr lang="en-US" sz="1350" dirty="0">
+                      <a:endParaRPr lang="en-US" sz="1250" dirty="0">
                         <a:latin typeface="Calibri" charset="0"/>
                         <a:ea typeface="Calibri" charset="0"/>
                         <a:cs typeface="Calibri" charset="0"/>
@@ -10126,7 +10126,7 @@
                         <a:buNone/>
                       </a:pPr>
                       <a:r>
-                        <a:rPr lang="en-US" sz="1350" dirty="0">
+                        <a:rPr lang="en-US" sz="1250" dirty="0">
                           <a:solidFill>
                             <a:srgbClr val="F8FAFC"/>
                           </a:solidFill>
@@ -10136,7 +10136,7 @@
                         </a:rPr>
                         <a:t>yes</a:t>
                       </a:r>
-                      <a:endParaRPr lang="en-US" sz="1350" dirty="0">
+                      <a:endParaRPr lang="en-US" sz="1250" dirty="0">
                         <a:latin typeface="Calibri" charset="0"/>
                         <a:ea typeface="Calibri" charset="0"/>
                         <a:cs typeface="Calibri" charset="0"/>
@@ -10194,7 +10194,7 @@
                         <a:buNone/>
                       </a:pPr>
                       <a:r>
-                        <a:rPr lang="en-US" sz="1350" dirty="0">
+                        <a:rPr lang="en-US" sz="1250" dirty="0">
                           <a:solidFill>
                             <a:srgbClr val="F8FAFC"/>
                           </a:solidFill>
@@ -10204,7 +10204,7 @@
                         </a:rPr>
                         <a:t>cards</a:t>
                       </a:r>
-                      <a:endParaRPr lang="en-US" sz="1350" dirty="0">
+                      <a:endParaRPr lang="en-US" sz="1250" dirty="0">
                         <a:latin typeface="Calibri" charset="0"/>
                         <a:ea typeface="Calibri" charset="0"/>
                         <a:cs typeface="Calibri" charset="0"/>
@@ -10254,7 +10254,7 @@
                   </a:tcPr>
                 </a:tc>
               </a:tr>
-              <a:tr h="585216">
+              <a:tr h="548640">
                 <a:tc>
                   <a:txBody>
                     <a:bodyPr/>
@@ -10264,7 +10264,7 @@
                         <a:buNone/>
                       </a:pPr>
                       <a:r>
-                        <a:rPr lang="en-US" sz="1350" b="1" dirty="0">
+                        <a:rPr lang="en-US" sz="1250" b="1" dirty="0">
                           <a:solidFill>
                             <a:srgbClr val="F8FAFC"/>
                           </a:solidFill>
@@ -10274,7 +10274,7 @@
                         </a:rPr>
                         <a:t>Bulk buying (Spazapp)</a:t>
                       </a:r>
-                      <a:endParaRPr lang="en-US" sz="1350" dirty="0">
+                      <a:endParaRPr lang="en-US" sz="1250" dirty="0">
                         <a:latin typeface="Calibri" charset="0"/>
                         <a:ea typeface="Calibri" charset="0"/>
                         <a:cs typeface="Calibri" charset="0"/>
@@ -10332,7 +10332,7 @@
                         <a:buNone/>
                       </a:pPr>
                       <a:r>
-                        <a:rPr lang="en-US" sz="1350" dirty="0">
+                        <a:rPr lang="en-US" sz="1250" dirty="0">
                           <a:solidFill>
                             <a:srgbClr val="64748B"/>
                           </a:solidFill>
@@ -10342,7 +10342,7 @@
                         </a:rPr>
                         <a:t>no</a:t>
                       </a:r>
-                      <a:endParaRPr lang="en-US" sz="1350" dirty="0">
+                      <a:endParaRPr lang="en-US" sz="1250" dirty="0">
                         <a:latin typeface="Calibri" charset="0"/>
                         <a:ea typeface="Calibri" charset="0"/>
                         <a:cs typeface="Calibri" charset="0"/>
@@ -10400,7 +10400,7 @@
                         <a:buNone/>
                       </a:pPr>
                       <a:r>
-                        <a:rPr lang="en-US" sz="1350" dirty="0">
+                        <a:rPr lang="en-US" sz="1250" dirty="0">
                           <a:solidFill>
                             <a:srgbClr val="F8FAFC"/>
                           </a:solidFill>
@@ -10410,7 +10410,7 @@
                         </a:rPr>
                         <a:t>their range</a:t>
                       </a:r>
-                      <a:endParaRPr lang="en-US" sz="1350" dirty="0">
+                      <a:endParaRPr lang="en-US" sz="1250" dirty="0">
                         <a:latin typeface="Calibri" charset="0"/>
                         <a:ea typeface="Calibri" charset="0"/>
                         <a:cs typeface="Calibri" charset="0"/>
@@ -10468,7 +10468,7 @@
                         <a:buNone/>
                       </a:pPr>
                       <a:r>
-                        <a:rPr lang="en-US" sz="1350" dirty="0">
+                        <a:rPr lang="en-US" sz="1250" dirty="0">
                           <a:solidFill>
                             <a:srgbClr val="F8FAFC"/>
                           </a:solidFill>
@@ -10478,7 +10478,7 @@
                         </a:rPr>
                         <a:t>shops</a:t>
                       </a:r>
-                      <a:endParaRPr lang="en-US" sz="1350" dirty="0">
+                      <a:endParaRPr lang="en-US" sz="1250" dirty="0">
                         <a:latin typeface="Calibri" charset="0"/>
                         <a:ea typeface="Calibri" charset="0"/>
                         <a:cs typeface="Calibri" charset="0"/>
@@ -10536,7 +10536,7 @@
                         <a:buNone/>
                       </a:pPr>
                       <a:r>
-                        <a:rPr lang="en-US" sz="1350" dirty="0">
+                        <a:rPr lang="en-US" sz="1250" dirty="0">
                           <a:solidFill>
                             <a:srgbClr val="F8FAFC"/>
                           </a:solidFill>
@@ -10546,7 +10546,7 @@
                         </a:rPr>
                         <a:t>yes</a:t>
                       </a:r>
-                      <a:endParaRPr lang="en-US" sz="1350" dirty="0">
+                      <a:endParaRPr lang="en-US" sz="1250" dirty="0">
                         <a:latin typeface="Calibri" charset="0"/>
                         <a:ea typeface="Calibri" charset="0"/>
                         <a:cs typeface="Calibri" charset="0"/>
@@ -10596,7 +10596,7 @@
                   </a:tcPr>
                 </a:tc>
               </a:tr>
-              <a:tr h="585216">
+              <a:tr h="548640">
                 <a:tc>
                   <a:txBody>
                     <a:bodyPr/>
@@ -10606,7 +10606,7 @@
                         <a:buNone/>
                       </a:pPr>
                       <a:r>
-                        <a:rPr lang="en-US" sz="1350" b="1" dirty="0">
+                        <a:rPr lang="en-US" sz="1250" b="1" dirty="0">
                           <a:solidFill>
                             <a:srgbClr val="0F172A"/>
                           </a:solidFill>
@@ -10616,7 +10616,7 @@
                         </a:rPr>
                         <a:t>Akayza</a:t>
                       </a:r>
-                      <a:endParaRPr lang="en-US" sz="1350" dirty="0">
+                      <a:endParaRPr lang="en-US" sz="1250" dirty="0">
                         <a:latin typeface="Calibri" charset="0"/>
                         <a:ea typeface="Calibri" charset="0"/>
                         <a:cs typeface="Calibri" charset="0"/>
@@ -10674,7 +10674,7 @@
                         <a:buNone/>
                       </a:pPr>
                       <a:r>
-                        <a:rPr lang="en-US" sz="1350" b="1" dirty="0">
+                        <a:rPr lang="en-US" sz="1250" b="1" dirty="0">
                           <a:solidFill>
                             <a:srgbClr val="0F172A"/>
                           </a:solidFill>
@@ -10682,9 +10682,9 @@
                           <a:ea typeface="Calibri" pitchFamily="34" charset="-122"/>
                           <a:cs typeface="Calibri" pitchFamily="34" charset="-120"/>
                         </a:rPr>
-                        <a:t>yes</a:t>
+                        <a:t>business tools</a:t>
                       </a:r>
-                      <a:endParaRPr lang="en-US" sz="1350" dirty="0">
+                      <a:endParaRPr lang="en-US" sz="1250" dirty="0">
                         <a:latin typeface="Calibri" charset="0"/>
                         <a:ea typeface="Calibri" charset="0"/>
                         <a:cs typeface="Calibri" charset="0"/>
@@ -10742,7 +10742,7 @@
                         <a:buNone/>
                       </a:pPr>
                       <a:r>
-                        <a:rPr lang="en-US" sz="1350" b="1" dirty="0">
+                        <a:rPr lang="en-US" sz="1250" b="1" dirty="0">
                           <a:solidFill>
                             <a:srgbClr val="0F172A"/>
                           </a:solidFill>
@@ -10750,9 +10750,9 @@
                           <a:ea typeface="Calibri" pitchFamily="34" charset="-122"/>
                           <a:cs typeface="Calibri" pitchFamily="34" charset="-120"/>
                         </a:rPr>
-                        <a:t>any supplier</a:t>
+                        <a:t>all your suppliers, one place</a:t>
                       </a:r>
-                      <a:endParaRPr lang="en-US" sz="1350" dirty="0">
+                      <a:endParaRPr lang="en-US" sz="1250" dirty="0">
                         <a:latin typeface="Calibri" charset="0"/>
                         <a:ea typeface="Calibri" charset="0"/>
                         <a:cs typeface="Calibri" charset="0"/>
@@ -10810,7 +10810,7 @@
                         <a:buNone/>
                       </a:pPr>
                       <a:r>
-                        <a:rPr lang="en-US" sz="1350" b="1" dirty="0">
+                        <a:rPr lang="en-US" sz="1250" b="1" dirty="0">
                           <a:solidFill>
                             <a:srgbClr val="0F172A"/>
                           </a:solidFill>
@@ -10820,7 +10820,7 @@
                         </a:rPr>
                         <a:t>yes</a:t>
                       </a:r>
-                      <a:endParaRPr lang="en-US" sz="1350" dirty="0">
+                      <a:endParaRPr lang="en-US" sz="1250" dirty="0">
                         <a:latin typeface="Calibri" charset="0"/>
                         <a:ea typeface="Calibri" charset="0"/>
                         <a:cs typeface="Calibri" charset="0"/>
@@ -10878,7 +10878,7 @@
                         <a:buNone/>
                       </a:pPr>
                       <a:r>
-                        <a:rPr lang="en-US" sz="1350" b="1" dirty="0">
+                        <a:rPr lang="en-US" sz="1250" b="1" dirty="0">
                           <a:solidFill>
                             <a:srgbClr val="0F172A"/>
                           </a:solidFill>
@@ -10886,9 +10886,9 @@
                           <a:ea typeface="Calibri" pitchFamily="34" charset="-122"/>
                           <a:cs typeface="Calibri" pitchFamily="34" charset="-120"/>
                         </a:rPr>
-                        <a:t>yes</a:t>
+                        <a:t>digital, verified</a:t>
                       </a:r>
-                      <a:endParaRPr lang="en-US" sz="1350" dirty="0">
+                      <a:endParaRPr lang="en-US" sz="1250" dirty="0">
                         <a:latin typeface="Calibri" charset="0"/>
                         <a:ea typeface="Calibri" charset="0"/>
                         <a:cs typeface="Calibri" charset="0"/>
@@ -10950,12 +10950,12 @@
         </p:nvSpPr>
         <p:spPr>
           <a:xfrm>
-            <a:off x="548640" y="5394960"/>
-            <a:ext cx="5440680" cy="777240"/>
+            <a:off x="548640" y="5440680"/>
+            <a:ext cx="5440680" cy="822960"/>
           </a:xfrm>
           <a:prstGeom prst="roundRect">
             <a:avLst>
-              <a:gd name="adj" fmla="val 14118"/>
+              <a:gd name="adj" fmla="val 13333"/>
             </a:avLst>
           </a:prstGeom>
           <a:solidFill>
@@ -10977,8 +10977,8 @@
         </p:nvSpPr>
         <p:spPr>
           <a:xfrm>
-            <a:off x="777240" y="5440680"/>
-            <a:ext cx="5029200" cy="685800"/>
+            <a:off x="777240" y="5468112"/>
+            <a:ext cx="5029200" cy="768096"/>
           </a:xfrm>
           <a:prstGeom prst="rect">
             <a:avLst/>
@@ -10994,7 +10994,7 @@
               <a:buNone/>
             </a:pPr>
             <a:r>
-              <a:rPr lang="en-US" sz="1300" b="1" dirty="0">
+              <a:rPr lang="en-US" sz="1250" b="1" dirty="0">
                 <a:solidFill>
                   <a:srgbClr val="FBBF24"/>
                 </a:solidFill>
@@ -11008,7 +11008,7 @@
               <a:buNone/>
             </a:pPr>
             <a:r>
-              <a:rPr lang="en-US" sz="1300" dirty="0">
+              <a:rPr lang="en-US" sz="1250" dirty="0">
                 <a:solidFill>
                   <a:srgbClr val="F8FAFC"/>
                 </a:solidFill>
@@ -11016,9 +11016,9 @@
                 <a:ea typeface="Calibri" pitchFamily="34" charset="-122"/>
                 <a:cs typeface="Calibri" pitchFamily="34" charset="-120"/>
               </a:rPr>
-              <a:t>What a business does today shapes the suppliers it's matched with tomorrow.</a:t>
-            </a:r>
-            <a:endParaRPr lang="en-US" sz="1300" dirty="0"/>
+              <a:t>What a business orders and records today shapes the suppliers it's matched with tomorrow: closer, a better fit, stocking what it buys.</a:t>
+            </a:r>
+            <a:endParaRPr lang="en-US" sz="1250" dirty="0"/>
           </a:p>
         </p:txBody>
       </p:sp>
@@ -11030,12 +11030,12 @@
         </p:nvSpPr>
         <p:spPr>
           <a:xfrm>
-            <a:off x="6172200" y="5394960"/>
-            <a:ext cx="5440680" cy="777240"/>
+            <a:off x="6172200" y="5440680"/>
+            <a:ext cx="5440680" cy="822960"/>
           </a:xfrm>
           <a:prstGeom prst="roundRect">
             <a:avLst>
-              <a:gd name="adj" fmla="val 14118"/>
+              <a:gd name="adj" fmla="val 13333"/>
             </a:avLst>
           </a:prstGeom>
           <a:solidFill>
@@ -11057,8 +11057,8 @@
         </p:nvSpPr>
         <p:spPr>
           <a:xfrm>
-            <a:off x="6400800" y="5440680"/>
-            <a:ext cx="5029200" cy="685800"/>
+            <a:off x="6400800" y="5468112"/>
+            <a:ext cx="5029200" cy="768096"/>
           </a:xfrm>
           <a:prstGeom prst="rect">
             <a:avLst/>
@@ -11074,7 +11074,7 @@
               <a:buNone/>
             </a:pPr>
             <a:r>
-              <a:rPr lang="en-US" sz="1300" b="1" dirty="0">
+              <a:rPr lang="en-US" sz="1250" b="1" dirty="0">
                 <a:solidFill>
                   <a:srgbClr val="FBBF24"/>
                 </a:solidFill>
@@ -11088,7 +11088,7 @@
               <a:buNone/>
             </a:pPr>
             <a:r>
-              <a:rPr lang="en-US" sz="1300" dirty="0">
+              <a:rPr lang="en-US" sz="1250" dirty="0">
                 <a:solidFill>
                   <a:srgbClr val="F8FAFC"/>
                 </a:solidFill>
@@ -11096,9 +11096,9 @@
                 <a:ea typeface="Calibri" pitchFamily="34" charset="-122"/>
                 <a:cs typeface="Calibri" pitchFamily="34" charset="-120"/>
               </a:rPr>
-              <a:t>Provider-verified payments, and a sealed history nobody can quietly change.</a:t>
-            </a:r>
-            <a:endParaRPr lang="en-US" sz="1300" dirty="0"/>
+              <a:t>Digital payments verified by the provider, and a sealed history of stock orders that nobody can quietly change.</a:t>
+            </a:r>
+            <a:endParaRPr lang="en-US" sz="1250" dirty="0"/>
           </a:p>
         </p:txBody>
       </p:sp>

--- a/docs/submission/05_final_submission/Akayza_Pitch_TeamPR.pptx
+++ b/docs/submission/05_final_submission/Akayza_Pitch_TeamPR.pptx
@@ -2313,7 +2313,7 @@
           <a:p>
             <a:r>
               <a:rPr lang="en-US" dirty="0"/>
-              <a:t>SAY (only if asked, 15 s): 'Privacy is built in, not added on. We collect only what we need or can verify. Only the owner sees their data. We never touch card numbers or hold money. Nothing personal goes into logs. Nothing is shared without consent. And we're honest about proof: only a provider-verified payment counts as proof.'
+              <a:t>SAY (only if asked, 15 s): 'We comply with the law by design, POPIA for example, not as an afterthought. We collect only what we need or can verify. Only the owner sees their data. We never touch card numbers or hold money. Nothing personal goes into logs. Nothing is shared without consent. And we're honest about proof: only digital payments verified by the provider count as proof.'
 Q&amp;A: security is invisible to the owner (email, password, a code only on a new phone). Breach plan: revoke sessions, rotate keys, tell users and the Information Regulator (POPIA s22). Data export and account closure are built on the server; the buttons come to the app next.</a:t>
             </a:r>
             <a:endParaRPr lang="en-US" dirty="0"/>
@@ -2875,7 +2875,7 @@
                 <a:ea typeface="Calibri" pitchFamily="34" charset="-122"/>
                 <a:cs typeface="Calibri" pitchFamily="34" charset="-120"/>
               </a:rPr>
-              <a:t>Prepared by Team PR: Mandla and Risuna  ·  GKHack26  ·  27 September 2026</a:t>
+              <a:t>Prepared by Team PR  ·  GKHack26  ·  27 September 2026</a:t>
             </a:r>
             <a:endParaRPr lang="en-US" sz="1300" dirty="0"/>
           </a:p>
@@ -3402,7 +3402,7 @@
                 <a:ea typeface="Calibri" pitchFamily="34" charset="-122"/>
                 <a:cs typeface="Calibri" pitchFamily="34" charset="-120"/>
               </a:rPr>
-              <a:t>Making informal and small businesses visible.</a:t>
+              <a:t>Making informal and small businesses visible, and ready for tomorrow.</a:t>
             </a:r>
             <a:endParaRPr lang="en-US" sz="1500" dirty="0"/>
           </a:p>
@@ -3441,7 +3441,7 @@
                 <a:ea typeface="Calibri" pitchFamily="34" charset="-122"/>
                 <a:cs typeface="Calibri" pitchFamily="34" charset="-120"/>
               </a:rPr>
-              <a:t>Team PR  ·  Mandla (lead)  ·  Risuna</a:t>
+              <a:t>Team PR</a:t>
             </a:r>
             <a:endParaRPr lang="en-US" sz="1400" dirty="0"/>
           </a:p>
@@ -11423,7 +11423,7 @@
                 <a:ea typeface="Calibri" pitchFamily="34" charset="-122"/>
                 <a:cs typeface="Calibri" pitchFamily="34" charset="-120"/>
               </a:rPr>
-              <a:t>React Native + Expo (TypeScript). Android first; secure storage for sign-in.</a:t>
+              <a:t>Frontend: React Native + Expo (TypeScript). Android first; secure storage for sign-in.</a:t>
             </a:r>
             <a:endParaRPr lang="en-US" sz="1300" dirty="0"/>
           </a:p>
@@ -11577,7 +11577,7 @@
                 <a:ea typeface="Calibri" pitchFamily="34" charset="-122"/>
                 <a:cs typeface="Calibri" pitchFamily="34" charset="-120"/>
               </a:rPr>
-              <a:t>Python + Flask. Strict input checks, rate limits; the server prices every order.</a:t>
+              <a:t>Backend: Python + Flask. Strict input checks, rate limits; the server prices every order.</a:t>
             </a:r>
             <a:endParaRPr lang="en-US" sz="1300" dirty="0"/>
           </a:p>
@@ -11888,7 +11888,7 @@
               <a:buNone/>
             </a:pPr>
             <a:r>
-              <a:rPr lang="en-US" sz="1450" b="1" dirty="0">
+              <a:rPr lang="en-US" sz="1300" b="1" dirty="0">
                 <a:solidFill>
                   <a:srgbClr val="F8FAFC"/>
                 </a:solidFill>
@@ -11896,9 +11896,9 @@
                 <a:ea typeface="Calibri" pitchFamily="34" charset="-122"/>
                 <a:cs typeface="Calibri" pitchFamily="34" charset="-120"/>
               </a:rPr>
-              <a:t>PayFast</a:t>
-            </a:r>
-            <a:endParaRPr lang="en-US" sz="1450" dirty="0"/>
+              <a:t>Digital payments</a:t>
+            </a:r>
+            <a:endParaRPr lang="en-US" sz="1300" dirty="0"/>
           </a:p>
         </p:txBody>
       </p:sp>
@@ -11935,7 +11935,7 @@
                 <a:ea typeface="Calibri" pitchFamily="34" charset="-122"/>
                 <a:cs typeface="Calibri" pitchFamily="34" charset="-120"/>
               </a:rPr>
-              <a:t>payments, confirmed by 4 checks</a:t>
+              <a:t>PayFast, confirmed by 4 checks</a:t>
             </a:r>
             <a:endParaRPr lang="en-US" sz="1200" dirty="0"/>
           </a:p>
@@ -12042,7 +12042,7 @@
               <a:buNone/>
             </a:pPr>
             <a:r>
-              <a:rPr lang="en-US" sz="1450" b="1" dirty="0">
+              <a:rPr lang="en-US" sz="1300" b="1" dirty="0">
                 <a:solidFill>
                   <a:srgbClr val="F8FAFC"/>
                 </a:solidFill>
@@ -12050,9 +12050,9 @@
                 <a:ea typeface="Calibri" pitchFamily="34" charset="-122"/>
                 <a:cs typeface="Calibri" pitchFamily="34" charset="-120"/>
               </a:rPr>
-              <a:t>Cloudinary</a:t>
-            </a:r>
-            <a:endParaRPr lang="en-US" sz="1450" dirty="0"/>
+              <a:t>Media</a:t>
+            </a:r>
+            <a:endParaRPr lang="en-US" sz="1300" dirty="0"/>
           </a:p>
         </p:txBody>
       </p:sp>
@@ -12089,7 +12089,7 @@
                 <a:ea typeface="Calibri" pitchFamily="34" charset="-122"/>
                 <a:cs typeface="Calibri" pitchFamily="34" charset="-120"/>
               </a:rPr>
-              <a:t>signed photo uploads</a:t>
+              <a:t>Cloudinary: private photos stay private, public ones signed</a:t>
             </a:r>
             <a:endParaRPr lang="en-US" sz="1200" dirty="0"/>
           </a:p>
@@ -12196,7 +12196,7 @@
               <a:buNone/>
             </a:pPr>
             <a:r>
-              <a:rPr lang="en-US" sz="1450" b="1" dirty="0">
+              <a:rPr lang="en-US" sz="1300" b="1" dirty="0">
                 <a:solidFill>
                   <a:srgbClr val="F8FAFC"/>
                 </a:solidFill>
@@ -12206,7 +12206,7 @@
               </a:rPr>
               <a:t>Mapbox</a:t>
             </a:r>
-            <a:endParaRPr lang="en-US" sz="1450" dirty="0"/>
+            <a:endParaRPr lang="en-US" sz="1300" dirty="0"/>
           </a:p>
         </p:txBody>
       </p:sp>
@@ -12350,7 +12350,7 @@
               <a:buNone/>
             </a:pPr>
             <a:r>
-              <a:rPr lang="en-US" sz="1450" b="1" dirty="0">
+              <a:rPr lang="en-US" sz="1300" b="1" dirty="0">
                 <a:solidFill>
                   <a:srgbClr val="F8FAFC"/>
                 </a:solidFill>
@@ -12360,7 +12360,7 @@
               </a:rPr>
               <a:t>Supplier engine</a:t>
             </a:r>
-            <a:endParaRPr lang="en-US" sz="1450" dirty="0"/>
+            <a:endParaRPr lang="en-US" sz="1300" dirty="0"/>
           </a:p>
         </p:txBody>
       </p:sp>
@@ -12882,7 +12882,7 @@
                 <a:ea typeface="Georgia" pitchFamily="34" charset="-122"/>
                 <a:cs typeface="Georgia" pitchFamily="34" charset="-120"/>
               </a:rPr>
-              <a:t>POPIA by design: their data stays theirs</a:t>
+              <a:t>Complying with the law, by design</a:t>
             </a:r>
             <a:endParaRPr lang="en-US" sz="3200" dirty="0"/>
           </a:p>
@@ -12890,7 +12890,46 @@
       </p:sp>
       <p:sp>
         <p:nvSpPr>
-          <p:cNvPr id="4" name="Shape 2"/>
+          <p:cNvPr id="4" name="Text 2"/>
+          <p:cNvSpPr txBox="1"/>
+          <p:nvPr/>
+        </p:nvSpPr>
+        <p:spPr>
+          <a:xfrm>
+            <a:off x="548640" y="1298448"/>
+            <a:ext cx="11064240" cy="365760"/>
+          </a:xfrm>
+          <a:prstGeom prst="rect">
+            <a:avLst/>
+          </a:prstGeom>
+          <a:noFill/>
+          <a:ln/>
+        </p:spPr>
+        <p:txBody>
+          <a:bodyPr wrap="square" lIns="0" tIns="0" rIns="0" bIns="0" rtlCol="0" anchor="t"/>
+          <a:lstStyle/>
+          <a:p>
+            <a:pPr indent="0" marL="0">
+              <a:buNone/>
+            </a:pPr>
+            <a:r>
+              <a:rPr lang="en-US" sz="1500" dirty="0">
+                <a:solidFill>
+                  <a:srgbClr val="A3B3C9"/>
+                </a:solidFill>
+                <a:latin typeface="Calibri" pitchFamily="34" charset="0"/>
+                <a:ea typeface="Calibri" pitchFamily="34" charset="-122"/>
+                <a:cs typeface="Calibri" pitchFamily="34" charset="-120"/>
+              </a:rPr>
+              <a:t>For example POPIA, South Africa's privacy law, and PCI DSS for card payments. Their data stays theirs.</a:t>
+            </a:r>
+            <a:endParaRPr lang="en-US" sz="1500" dirty="0"/>
+          </a:p>
+        </p:txBody>
+      </p:sp>
+      <p:sp>
+        <p:nvSpPr>
+          <p:cNvPr id="5" name="Shape 3"/>
           <p:cNvSpPr/>
           <p:nvPr/>
         </p:nvSpPr>
@@ -12917,7 +12956,7 @@
       </p:sp>
       <p:sp>
         <p:nvSpPr>
-          <p:cNvPr id="5" name="Shape 3"/>
+          <p:cNvPr id="6" name="Shape 4"/>
           <p:cNvSpPr/>
           <p:nvPr/>
         </p:nvSpPr>
@@ -12942,7 +12981,7 @@
       </p:sp>
       <p:pic>
         <p:nvPicPr>
-          <p:cNvPr id="6" name="Image 0" descr="preencoded.png">    </p:cNvPr>
+          <p:cNvPr id="7" name="Image 0" descr="preencoded.png">    </p:cNvPr>
           <p:cNvPicPr>
             <a:picLocks noChangeAspect="1"/>
           </p:cNvPicPr>
@@ -12966,7 +13005,7 @@
       </p:pic>
       <p:sp>
         <p:nvSpPr>
-          <p:cNvPr id="7" name="Text 4"/>
+          <p:cNvPr id="8" name="Text 5"/>
           <p:cNvSpPr txBox="1"/>
           <p:nvPr/>
         </p:nvSpPr>
@@ -13005,7 +13044,7 @@
       </p:sp>
       <p:sp>
         <p:nvSpPr>
-          <p:cNvPr id="8" name="Text 5"/>
+          <p:cNvPr id="9" name="Text 6"/>
           <p:cNvSpPr txBox="1"/>
           <p:nvPr/>
         </p:nvSpPr>
@@ -13044,7 +13083,7 @@
       </p:sp>
       <p:sp>
         <p:nvSpPr>
-          <p:cNvPr id="9" name="Shape 6"/>
+          <p:cNvPr id="10" name="Shape 7"/>
           <p:cNvSpPr/>
           <p:nvPr/>
         </p:nvSpPr>
@@ -13071,7 +13110,7 @@
       </p:sp>
       <p:sp>
         <p:nvSpPr>
-          <p:cNvPr id="10" name="Shape 7"/>
+          <p:cNvPr id="11" name="Shape 8"/>
           <p:cNvSpPr/>
           <p:nvPr/>
         </p:nvSpPr>
@@ -13096,7 +13135,7 @@
       </p:sp>
       <p:pic>
         <p:nvPicPr>
-          <p:cNvPr id="11" name="Image 1" descr="preencoded.png">    </p:cNvPr>
+          <p:cNvPr id="12" name="Image 1" descr="preencoded.png">    </p:cNvPr>
           <p:cNvPicPr>
             <a:picLocks noChangeAspect="1"/>
           </p:cNvPicPr>
@@ -13120,7 +13159,7 @@
       </p:pic>
       <p:sp>
         <p:nvSpPr>
-          <p:cNvPr id="12" name="Text 8"/>
+          <p:cNvPr id="13" name="Text 9"/>
           <p:cNvSpPr txBox="1"/>
           <p:nvPr/>
         </p:nvSpPr>
@@ -13159,7 +13198,7 @@
       </p:sp>
       <p:sp>
         <p:nvSpPr>
-          <p:cNvPr id="13" name="Text 9"/>
+          <p:cNvPr id="14" name="Text 10"/>
           <p:cNvSpPr txBox="1"/>
           <p:nvPr/>
         </p:nvSpPr>
@@ -13198,7 +13237,7 @@
       </p:sp>
       <p:sp>
         <p:nvSpPr>
-          <p:cNvPr id="14" name="Shape 10"/>
+          <p:cNvPr id="15" name="Shape 11"/>
           <p:cNvSpPr/>
           <p:nvPr/>
         </p:nvSpPr>
@@ -13225,7 +13264,7 @@
       </p:sp>
       <p:sp>
         <p:nvSpPr>
-          <p:cNvPr id="15" name="Shape 11"/>
+          <p:cNvPr id="16" name="Shape 12"/>
           <p:cNvSpPr/>
           <p:nvPr/>
         </p:nvSpPr>
@@ -13250,7 +13289,7 @@
       </p:sp>
       <p:pic>
         <p:nvPicPr>
-          <p:cNvPr id="16" name="Image 2" descr="preencoded.png">    </p:cNvPr>
+          <p:cNvPr id="17" name="Image 2" descr="preencoded.png">    </p:cNvPr>
           <p:cNvPicPr>
             <a:picLocks noChangeAspect="1"/>
           </p:cNvPicPr>
@@ -13274,7 +13313,7 @@
       </p:pic>
       <p:sp>
         <p:nvSpPr>
-          <p:cNvPr id="17" name="Text 12"/>
+          <p:cNvPr id="18" name="Text 13"/>
           <p:cNvSpPr txBox="1"/>
           <p:nvPr/>
         </p:nvSpPr>
@@ -13313,7 +13352,7 @@
       </p:sp>
       <p:sp>
         <p:nvSpPr>
-          <p:cNvPr id="18" name="Text 13"/>
+          <p:cNvPr id="19" name="Text 14"/>
           <p:cNvSpPr txBox="1"/>
           <p:nvPr/>
         </p:nvSpPr>
@@ -13352,7 +13391,7 @@
       </p:sp>
       <p:sp>
         <p:nvSpPr>
-          <p:cNvPr id="19" name="Shape 14"/>
+          <p:cNvPr id="20" name="Shape 15"/>
           <p:cNvSpPr/>
           <p:nvPr/>
         </p:nvSpPr>
@@ -13379,7 +13418,7 @@
       </p:sp>
       <p:sp>
         <p:nvSpPr>
-          <p:cNvPr id="20" name="Shape 15"/>
+          <p:cNvPr id="21" name="Shape 16"/>
           <p:cNvSpPr/>
           <p:nvPr/>
         </p:nvSpPr>
@@ -13404,7 +13443,7 @@
       </p:sp>
       <p:pic>
         <p:nvPicPr>
-          <p:cNvPr id="21" name="Image 3" descr="preencoded.png">    </p:cNvPr>
+          <p:cNvPr id="22" name="Image 3" descr="preencoded.png">    </p:cNvPr>
           <p:cNvPicPr>
             <a:picLocks noChangeAspect="1"/>
           </p:cNvPicPr>
@@ -13428,7 +13467,7 @@
       </p:pic>
       <p:sp>
         <p:nvSpPr>
-          <p:cNvPr id="22" name="Text 16"/>
+          <p:cNvPr id="23" name="Text 17"/>
           <p:cNvSpPr txBox="1"/>
           <p:nvPr/>
         </p:nvSpPr>
@@ -13467,7 +13506,7 @@
       </p:sp>
       <p:sp>
         <p:nvSpPr>
-          <p:cNvPr id="23" name="Text 17"/>
+          <p:cNvPr id="24" name="Text 18"/>
           <p:cNvSpPr txBox="1"/>
           <p:nvPr/>
         </p:nvSpPr>
@@ -13506,7 +13545,7 @@
       </p:sp>
       <p:sp>
         <p:nvSpPr>
-          <p:cNvPr id="24" name="Shape 18"/>
+          <p:cNvPr id="25" name="Shape 19"/>
           <p:cNvSpPr/>
           <p:nvPr/>
         </p:nvSpPr>
@@ -13533,7 +13572,7 @@
       </p:sp>
       <p:sp>
         <p:nvSpPr>
-          <p:cNvPr id="25" name="Shape 19"/>
+          <p:cNvPr id="26" name="Shape 20"/>
           <p:cNvSpPr/>
           <p:nvPr/>
         </p:nvSpPr>
@@ -13558,7 +13597,7 @@
       </p:sp>
       <p:pic>
         <p:nvPicPr>
-          <p:cNvPr id="26" name="Image 4" descr="preencoded.png">    </p:cNvPr>
+          <p:cNvPr id="27" name="Image 4" descr="preencoded.png">    </p:cNvPr>
           <p:cNvPicPr>
             <a:picLocks noChangeAspect="1"/>
           </p:cNvPicPr>
@@ -13582,7 +13621,7 @@
       </p:pic>
       <p:sp>
         <p:nvSpPr>
-          <p:cNvPr id="27" name="Text 20"/>
+          <p:cNvPr id="28" name="Text 21"/>
           <p:cNvSpPr txBox="1"/>
           <p:nvPr/>
         </p:nvSpPr>
@@ -13621,7 +13660,7 @@
       </p:sp>
       <p:sp>
         <p:nvSpPr>
-          <p:cNvPr id="28" name="Text 21"/>
+          <p:cNvPr id="29" name="Text 22"/>
           <p:cNvSpPr txBox="1"/>
           <p:nvPr/>
         </p:nvSpPr>
@@ -13660,7 +13699,7 @@
       </p:sp>
       <p:sp>
         <p:nvSpPr>
-          <p:cNvPr id="29" name="Shape 22"/>
+          <p:cNvPr id="30" name="Shape 23"/>
           <p:cNvSpPr/>
           <p:nvPr/>
         </p:nvSpPr>
@@ -13687,7 +13726,7 @@
       </p:sp>
       <p:sp>
         <p:nvSpPr>
-          <p:cNvPr id="30" name="Shape 23"/>
+          <p:cNvPr id="31" name="Shape 24"/>
           <p:cNvSpPr/>
           <p:nvPr/>
         </p:nvSpPr>
@@ -13712,7 +13751,7 @@
       </p:sp>
       <p:pic>
         <p:nvPicPr>
-          <p:cNvPr id="31" name="Image 5" descr="preencoded.png">    </p:cNvPr>
+          <p:cNvPr id="32" name="Image 5" descr="preencoded.png">    </p:cNvPr>
           <p:cNvPicPr>
             <a:picLocks noChangeAspect="1"/>
           </p:cNvPicPr>
@@ -13736,7 +13775,7 @@
       </p:pic>
       <p:sp>
         <p:nvSpPr>
-          <p:cNvPr id="32" name="Text 24"/>
+          <p:cNvPr id="33" name="Text 25"/>
           <p:cNvSpPr txBox="1"/>
           <p:nvPr/>
         </p:nvSpPr>
@@ -13775,7 +13814,7 @@
       </p:sp>
       <p:sp>
         <p:nvSpPr>
-          <p:cNvPr id="33" name="Text 25"/>
+          <p:cNvPr id="34" name="Text 26"/>
           <p:cNvSpPr txBox="1"/>
           <p:nvPr/>
         </p:nvSpPr>
@@ -13814,7 +13853,7 @@
       </p:sp>
       <p:sp>
         <p:nvSpPr>
-          <p:cNvPr id="34" name="Shape 26"/>
+          <p:cNvPr id="35" name="Shape 27"/>
           <p:cNvSpPr/>
           <p:nvPr/>
         </p:nvSpPr>
@@ -13841,7 +13880,7 @@
       </p:sp>
       <p:sp>
         <p:nvSpPr>
-          <p:cNvPr id="35" name="Text 27"/>
+          <p:cNvPr id="36" name="Text 28"/>
           <p:cNvSpPr txBox="1"/>
           <p:nvPr/>
         </p:nvSpPr>
@@ -13886,7 +13925,7 @@
                 <a:ea typeface="Calibri" pitchFamily="34" charset="-122"/>
                 <a:cs typeface="Calibri" pitchFamily="34" charset="-120"/>
               </a:rPr>
-              <a:t>Only a payment verified by the provider is proof. Cash is at most 'confirmed by both'; tool records are the owner's own. Never added together.</a:t>
+              <a:t>Only digital payments verified by the payment provider count as proof. Everything else is the owner's own record, and is never added to it.</a:t>
             </a:r>
             <a:endParaRPr lang="en-US" sz="1300" dirty="0"/>
           </a:p>
@@ -13894,7 +13933,7 @@
       </p:sp>
       <p:pic>
         <p:nvPicPr>
-          <p:cNvPr id="36" name="Image 6" descr="preencoded.png">    </p:cNvPr>
+          <p:cNvPr id="37" name="Image 6" descr="preencoded.png">    </p:cNvPr>
           <p:cNvPicPr>
             <a:picLocks noChangeAspect="1"/>
           </p:cNvPicPr>
@@ -13918,7 +13957,7 @@
       </p:pic>
       <p:sp>
         <p:nvSpPr>
-          <p:cNvPr id="37" name="Text 28"/>
+          <p:cNvPr id="38" name="Text 29"/>
           <p:cNvSpPr txBox="1"/>
           <p:nvPr/>
         </p:nvSpPr>

--- a/docs/submission/05_final_submission/Akayza_Pitch_TeamPR.pptx
+++ b/docs/submission/05_final_submission/Akayza_Pitch_TeamPR.pptx
@@ -1775,7 +1775,7 @@
           <a:p>
             <a:r>
               <a:rPr lang="en-US" dirty="0"/>
-              <a:t>SAY (25 s): 'That's where Akayza comes in. One free app that makes the business visible, and ready for tomorrow. It works the way they already operate, cash or digital. Every digital stock order becomes a record the owner holds, and over time a strong trading history. Today, the business tools take the stress away. This week, they buy better from their own suppliers and pay safely. Tomorrow, that history is their first step to finance. Businesses never pay. Suppliers are our customers: they pay a monthly fee because we bring them more orders, paid up front. And next, banks and lenders, as partners, only with the owner's consent.'
+              <a:t>SAY (25 s): 'That's where Akayza comes in. One free app that makes the business visible, and ready for tomorrow. It works the way they already operate, cash or digital. Every digital stock order becomes a record the owner holds, and over time a strong trading history. Today, the business tools take the stress away. This week, they buy better from their own suppliers and pay safely. Tomorrow, that history is their first step to finance. Businesses never pay. Suppliers are our customers: they pay a monthly subscription or contract, plus a commission on every order, because we bring them more orders. And next, banks and lenders, as partners, only with the owner's consent.'
 HONEST LIMIT (say it before a judge does): 'We only call digital payments proof, because the payment provider confirms the money moved. Cash and what an owner writes in the tools is their own record. We never add them together.'
 We don't lend or offer credit ourselves; banks and lenders are future partners.</a:t>
             </a:r>
@@ -3441,7 +3441,7 @@
                 <a:ea typeface="Calibri" pitchFamily="34" charset="-122"/>
                 <a:cs typeface="Calibri" pitchFamily="34" charset="-120"/>
               </a:rPr>
-              <a:t>Team PR</a:t>
+              <a:t>Prepared by Team PR</a:t>
             </a:r>
             <a:endParaRPr lang="en-US" sz="1400" dirty="0"/>
           </a:p>
@@ -5240,7 +5240,7 @@
                 <a:ea typeface="Calibri" pitchFamily="34" charset="-122"/>
                 <a:cs typeface="Calibri" pitchFamily="34" charset="-120"/>
               </a:rPr>
-              <a:t>Pay a monthly fee for more orders from the businesses they already serve, paid up front, with no cash lost on the road.</a:t>
+              <a:t>Pay a monthly subscription or contract, plus a commission on every order: more orders from the businesses they already serve.</a:t>
             </a:r>
             <a:endParaRPr lang="en-US" sz="1200" dirty="0"/>
           </a:p>

--- a/docs/submission/05_final_submission/Akayza_Pitch_TeamPR.pptx
+++ b/docs/submission/05_final_submission/Akayza_Pitch_TeamPR.pptx
@@ -1595,7 +1595,7 @@
             <a:r>
               <a:rPr lang="en-US" dirty="0"/>
               <a:t>DEMO (50 s): play the video, or do it live. Let it speak; don't narrate every tap. Before going on: phone charged, backend + ngrok running.
-Replace '[paste link here]' with the real link, and link the play button too (Insert &gt; Link).
+The card and 'Watch the demo' open the video on Google Drive. In the room, open it in the browser before you start, so it's one click away.
 CLOSE (10 s), look at the panel, not the screen: 'R900 billion is moving, and nobody can see it. Akayza makes it visible, and suppliers pay for it. It's built, it works, and R300,000 puts it in real businesses. Are you buying?' Then stop talking.</a:t>
             </a:r>
             <a:endParaRPr lang="en-US" dirty="0"/>
@@ -3070,7 +3070,7 @@
         </p:nvSpPr>
         <p:spPr>
           <a:xfrm>
-            <a:off x="2926080" y="1828800"/>
+            <a:off x="2926080" y="1417320"/>
             <a:ext cx="1280160" cy="1280160"/>
           </a:xfrm>
           <a:prstGeom prst="ellipse">
@@ -3103,7 +3103,7 @@
         </p:blipFill>
         <p:spPr>
           <a:xfrm>
-            <a:off x="3233318" y="2136038"/>
+            <a:off x="3233318" y="1724558"/>
             <a:ext cx="665683" cy="665683"/>
           </a:xfrm>
           <a:prstGeom prst="rect">
@@ -3113,14 +3113,45 @@
       </p:pic>
       <p:sp>
         <p:nvSpPr>
-          <p:cNvPr id="6" name="Text 3"/>
-          <p:cNvSpPr txBox="1"/>
-          <p:nvPr/>
-        </p:nvSpPr>
-        <p:spPr>
-          <a:xfrm>
-            <a:off x="731520" y="3429000"/>
-            <a:ext cx="5669280" cy="411480"/>
+          <p:cNvPr id="6" name="Shape 3">
+            <a:hlinkClick r:id="rId2" tooltip="Watch the demo"/>
+          </p:cNvPr>
+          <p:cNvSpPr/>
+          <p:nvPr/>
+        </p:nvSpPr>
+        <p:spPr>
+          <a:xfrm>
+            <a:off x="548640" y="914400"/>
+            <a:ext cx="6035040" cy="4206240"/>
+          </a:xfrm>
+          <a:prstGeom prst="rect">
+            <a:avLst/>
+          </a:prstGeom>
+          <a:solidFill>
+            <a:srgbClr val="0F172A">
+              <a:alpha val="0"/>
+            </a:srgbClr>
+          </a:solidFill>
+          <a:ln w="12700">
+            <a:solidFill>
+              <a:srgbClr val="0F172A">
+                <a:alpha val="0"/>
+              </a:srgbClr>
+            </a:solidFill>
+            <a:prstDash val="solid"/>
+          </a:ln>
+        </p:spPr>
+      </p:sp>
+      <p:sp>
+        <p:nvSpPr>
+          <p:cNvPr id="7" name="Text 4"/>
+          <p:cNvSpPr txBox="1"/>
+          <p:nvPr/>
+        </p:nvSpPr>
+        <p:spPr>
+          <a:xfrm>
+            <a:off x="822960" y="2926080"/>
+            <a:ext cx="5486400" cy="685800"/>
           </a:xfrm>
           <a:prstGeom prst="rect">
             <a:avLst/>
@@ -3144,7 +3175,7 @@
                 <a:ea typeface="Calibri" pitchFamily="34" charset="-122"/>
                 <a:cs typeface="Calibri" pitchFamily="34" charset="-120"/>
               </a:rPr>
-              <a:t>90-second demo, on a real phone, against our real system</a:t>
+              <a:t>Meet Sipho and Thabo: 81 seconds, on a real phone, against our real system</a:t>
             </a:r>
             <a:endParaRPr lang="en-US" sz="1500" dirty="0"/>
           </a:p>
@@ -3152,14 +3183,14 @@
       </p:sp>
       <p:sp>
         <p:nvSpPr>
-          <p:cNvPr id="7" name="Text 4"/>
-          <p:cNvSpPr txBox="1"/>
-          <p:nvPr/>
-        </p:nvSpPr>
-        <p:spPr>
-          <a:xfrm>
-            <a:off x="731520" y="3931920"/>
-            <a:ext cx="5669280" cy="365760"/>
+          <p:cNvPr id="8" name="Text 5"/>
+          <p:cNvSpPr txBox="1"/>
+          <p:nvPr/>
+        </p:nvSpPr>
+        <p:spPr>
+          <a:xfrm>
+            <a:off x="822960" y="3657600"/>
+            <a:ext cx="5486400" cy="365760"/>
           </a:xfrm>
           <a:prstGeom prst="rect">
             <a:avLst/>
@@ -3175,30 +3206,37 @@
               <a:buNone/>
             </a:pPr>
             <a:r>
-              <a:rPr lang="en-US" sz="1400" dirty="0">
+              <a:rPr lang="en-US" sz="1600" b="1" u="sng" dirty="0">
                 <a:solidFill>
                   <a:srgbClr val="FBBF24"/>
                 </a:solidFill>
                 <a:latin typeface="Calibri" pitchFamily="34" charset="0"/>
                 <a:ea typeface="Calibri" pitchFamily="34" charset="-122"/>
                 <a:cs typeface="Calibri" pitchFamily="34" charset="-120"/>
-              </a:rPr>
-              <a:t>Video: [paste link here]</a:t>
-            </a:r>
-            <a:endParaRPr lang="en-US" sz="1400" dirty="0"/>
-          </a:p>
-        </p:txBody>
-      </p:sp>
-      <p:sp>
-        <p:nvSpPr>
-          <p:cNvPr id="8" name="Text 5"/>
-          <p:cNvSpPr txBox="1"/>
-          <p:nvPr/>
-        </p:nvSpPr>
-        <p:spPr>
-          <a:xfrm>
-            <a:off x="731520" y="4480560"/>
-            <a:ext cx="5669280" cy="457200"/>
+                <a:hlinkClick r:id="rId3" invalidUrl="" action="" tgtFrame="" tooltip="Watch the demo" history="1" highlightClick="0" endSnd="0">
+                  <a:extLst>
+                    <a:ext uri="{A12FA001-AC4F-418D-AE19-62706E023703}">
+                      <ahyp:hlinkClr xmlns:ahyp="http://schemas.microsoft.com/office/drawing/2018/hyperlinkcolor" val="tx"/>
+                    </a:ext>
+                  </a:extLst>
+                </a:hlinkClick>
+              </a:rPr>
+              <a:t>Watch the demo</a:t>
+            </a:r>
+            <a:endParaRPr lang="en-US" sz="1600" dirty="0"/>
+          </a:p>
+        </p:txBody>
+      </p:sp>
+      <p:sp>
+        <p:nvSpPr>
+          <p:cNvPr id="9" name="Text 6"/>
+          <p:cNvSpPr txBox="1"/>
+          <p:nvPr/>
+        </p:nvSpPr>
+        <p:spPr>
+          <a:xfrm>
+            <a:off x="822960" y="4160520"/>
+            <a:ext cx="5486400" cy="731520"/>
           </a:xfrm>
           <a:prstGeom prst="rect">
             <a:avLst/>
@@ -3222,22 +3260,68 @@
                 <a:ea typeface="Calibri" pitchFamily="34" charset="-122"/>
                 <a:cs typeface="Calibri" pitchFamily="34" charset="-120"/>
               </a:rPr>
-              <a:t>Home at a glance  ·  suppliers matched  ·  paid and confirmed  ·  a sealed record</a:t>
+              <a:t>A kota shop orders from suppliers who deliver, pays in the app, confirmed by the provider  ·  a builder's job in stages</a:t>
             </a:r>
             <a:endParaRPr lang="en-US" sz="1200" dirty="0"/>
+          </a:p>
+        </p:txBody>
+      </p:sp>
+      <p:sp>
+        <p:nvSpPr>
+          <p:cNvPr id="10" name="Text 7"/>
+          <p:cNvSpPr txBox="1"/>
+          <p:nvPr/>
+        </p:nvSpPr>
+        <p:spPr>
+          <a:xfrm>
+            <a:off x="548640" y="5257800"/>
+            <a:ext cx="6035040" cy="274320"/>
+          </a:xfrm>
+          <a:prstGeom prst="rect">
+            <a:avLst/>
+          </a:prstGeom>
+          <a:noFill/>
+          <a:ln/>
+        </p:spPr>
+        <p:txBody>
+          <a:bodyPr wrap="square" lIns="0" tIns="0" rIns="0" bIns="0" rtlCol="0" anchor="t"/>
+          <a:lstStyle/>
+          <a:p>
+            <a:pPr algn="ctr" indent="0" marL="0">
+              <a:buNone/>
+            </a:pPr>
+            <a:r>
+              <a:rPr lang="en-US" sz="900" u="sng" dirty="0">
+                <a:solidFill>
+                  <a:srgbClr val="64748B"/>
+                </a:solidFill>
+                <a:latin typeface="Calibri" pitchFamily="34" charset="0"/>
+                <a:ea typeface="Calibri" pitchFamily="34" charset="-122"/>
+                <a:cs typeface="Calibri" pitchFamily="34" charset="-120"/>
+                <a:hlinkClick r:id="rId4" invalidUrl="" action="" tgtFrame="" tooltip="" history="1" highlightClick="0" endSnd="0">
+                  <a:extLst>
+                    <a:ext uri="{A12FA001-AC4F-418D-AE19-62706E023703}">
+                      <ahyp:hlinkClr xmlns:ahyp="http://schemas.microsoft.com/office/drawing/2018/hyperlinkcolor" val="tx"/>
+                    </a:ext>
+                  </a:extLst>
+                </a:hlinkClick>
+              </a:rPr>
+              <a:t>https://drive.google.com/file/d/1yYQfVBEG-dnn-hxgRRtD5xDVw8vZV8Es/view</a:t>
+            </a:r>
+            <a:endParaRPr lang="en-US" sz="900" dirty="0"/>
           </a:p>
         </p:txBody>
       </p:sp>
       <p:pic>
         <p:nvPicPr>
-          <p:cNvPr id="9" name="Image 1" descr="preencoded.png">    </p:cNvPr>
+          <p:cNvPr id="11" name="Image 1" descr="preencoded.png">    </p:cNvPr>
           <p:cNvPicPr>
             <a:picLocks noChangeAspect="1"/>
           </p:cNvPicPr>
           <p:nvPr/>
         </p:nvPicPr>
         <p:blipFill>
-          <a:blip r:embed="rId2"/>
+          <a:blip r:embed="rId5"/>
           <a:stretch>
             <a:fillRect/>
           </a:stretch>
@@ -3254,7 +3338,7 @@
       </p:pic>
       <p:sp>
         <p:nvSpPr>
-          <p:cNvPr id="10" name="Text 6"/>
+          <p:cNvPr id="12" name="Text 8"/>
           <p:cNvSpPr txBox="1"/>
           <p:nvPr/>
         </p:nvSpPr>
@@ -3293,7 +3377,7 @@
       </p:sp>
       <p:sp>
         <p:nvSpPr>
-          <p:cNvPr id="11" name="Text 7"/>
+          <p:cNvPr id="13" name="Text 9"/>
           <p:cNvSpPr txBox="1"/>
           <p:nvPr/>
         </p:nvSpPr>
@@ -3332,7 +3416,7 @@
       </p:sp>
       <p:sp>
         <p:nvSpPr>
-          <p:cNvPr id="12" name="Text 8"/>
+          <p:cNvPr id="14" name="Text 10"/>
           <p:cNvSpPr txBox="1"/>
           <p:nvPr/>
         </p:nvSpPr>
@@ -3371,7 +3455,7 @@
       </p:sp>
       <p:sp>
         <p:nvSpPr>
-          <p:cNvPr id="13" name="Text 9"/>
+          <p:cNvPr id="15" name="Text 11"/>
           <p:cNvSpPr txBox="1"/>
           <p:nvPr/>
         </p:nvSpPr>
@@ -3410,7 +3494,7 @@
       </p:sp>
       <p:sp>
         <p:nvSpPr>
-          <p:cNvPr id="14" name="Text 10"/>
+          <p:cNvPr id="16" name="Text 12"/>
           <p:cNvSpPr txBox="1"/>
           <p:nvPr/>
         </p:nvSpPr>
@@ -3449,14 +3533,14 @@
       </p:sp>
       <p:pic>
         <p:nvPicPr>
-          <p:cNvPr id="15" name="Image 2" descr="preencoded.png">    </p:cNvPr>
+          <p:cNvPr id="17" name="Image 2" descr="preencoded.png">    </p:cNvPr>
           <p:cNvPicPr>
             <a:picLocks noChangeAspect="1"/>
           </p:cNvPicPr>
           <p:nvPr/>
         </p:nvPicPr>
         <p:blipFill>
-          <a:blip r:embed="rId3"/>
+          <a:blip r:embed="rId6"/>
           <a:stretch>
             <a:fillRect/>
           </a:stretch>
@@ -3473,7 +3557,7 @@
       </p:pic>
       <p:sp>
         <p:nvSpPr>
-          <p:cNvPr id="16" name="Text 11"/>
+          <p:cNvPr id="18" name="Text 13"/>
           <p:cNvSpPr txBox="1"/>
           <p:nvPr/>
         </p:nvSpPr>

--- a/docs/submission/05_final_submission/Akayza_Pitch_TeamPR.pptx
+++ b/docs/submission/05_final_submission/Akayza_Pitch_TeamPR.pptx
@@ -12598,7 +12598,7 @@
                 <a:ea typeface="Georgia" pitchFamily="34" charset="-122"/>
                 <a:cs typeface="Georgia" pitchFamily="34" charset="-120"/>
               </a:rPr>
-              <a:t>204</a:t>
+              <a:t>214</a:t>
             </a:r>
             <a:endParaRPr lang="en-US" sz="2600" dirty="0"/>
           </a:p>

--- a/docs/submission/05_final_submission/Akayza_Pitch_TeamPR.pptx
+++ b/docs/submission/05_final_submission/Akayza_Pitch_TeamPR.pptx
@@ -1594,8 +1594,9 @@
           <a:p>
             <a:r>
               <a:rPr lang="en-US" dirty="0"/>
-              <a:t>DEMO (50 s): play the video, or do it live. Let it speak; don't narrate every tap. Before going on: phone charged, backend + ngrok running.
-The card and 'Watch the demo' open the video on Google Drive. In the room, open it in the browser before you start, so it's one click away.
+              <a:t>DEMO (49 s): click the video to play it (it's inside the deck; no Wi-Fi needed). It's silent, so speak over it, one line per scene:
+'Any kasi business. Sipho runs a kota shop: he picks Food seller, and drops a pin where he trades. Akayza shows him suppliers who deliver to him. He orders bread from a bakery that delivers, and pays on PayFast's own page: confirmed by the payment provider. Every kota he sells goes in his order book, and his record marks the provider-confirmed payments. Now Thabo, a builder: every stage photographed in the app, and his client confirms it. That's his track record.'
+To make it start by itself: in PowerPoint, select the video &gt; Playback &gt; Start: Automatically.
 CLOSE (10 s), look at the panel, not the screen: 'R900 billion is moving, and nobody can see it. Akayza makes it visible, and suppliers pay for it. It's built, it works, and R300,000 puts it in real businesses. Are you buying?' Then stop talking.</a:t>
             </a:r>
             <a:endParaRPr lang="en-US" dirty="0"/>
@@ -3043,12 +3044,12 @@
         </p:nvSpPr>
         <p:spPr>
           <a:xfrm>
-            <a:off x="548640" y="914400"/>
-            <a:ext cx="6035040" cy="4206240"/>
+            <a:off x="475488" y="841248"/>
+            <a:ext cx="6364224" cy="3653028"/>
           </a:xfrm>
           <a:prstGeom prst="roundRect">
             <a:avLst>
-              <a:gd name="adj" fmla="val 2609"/>
+              <a:gd name="adj" fmla="val 3004"/>
             </a:avLst>
           </a:prstGeom>
           <a:solidFill>
@@ -3062,49 +3063,33 @@
           </a:ln>
         </p:spPr>
       </p:sp>
-      <p:sp>
-        <p:nvSpPr>
-          <p:cNvPr id="4" name="Shape 2"/>
-          <p:cNvSpPr/>
-          <p:nvPr/>
-        </p:nvSpPr>
-        <p:spPr>
-          <a:xfrm>
-            <a:off x="2926080" y="1417320"/>
-            <a:ext cx="1280160" cy="1280160"/>
-          </a:xfrm>
-          <a:prstGeom prst="ellipse">
-            <a:avLst/>
-          </a:prstGeom>
-          <a:solidFill>
-            <a:srgbClr val="1E2B45"/>
-          </a:solidFill>
-          <a:ln w="19050">
-            <a:solidFill>
-              <a:srgbClr val="FBBF24"/>
-            </a:solidFill>
-            <a:prstDash val="solid"/>
-          </a:ln>
-        </p:spPr>
-      </p:sp>
       <p:pic>
         <p:nvPicPr>
-          <p:cNvPr id="5" name="Image 0" descr="preencoded.png">    </p:cNvPr>
+          <p:cNvPr id="3" name="Demo video">
+            <a:hlinkClick r:id="" action="ppaction://media"/>
+          </p:cNvPr>
           <p:cNvPicPr>
             <a:picLocks noChangeAspect="1"/>
           </p:cNvPicPr>
-          <p:nvPr/>
+          <p:nvPr>
+            <a:videoFile r:link="rId1"/>
+            <p:extLst>
+              <p:ext uri="{DAA4B4D4-6D71-4841-9C94-3DE7FCFB9230}">
+                <p14:media xmlns:p14="http://schemas.microsoft.com/office/powerpoint/2010/main" r:embed="rId2"/>
+              </p:ext>
+            </p:extLst>
+          </p:nvPr>
         </p:nvPicPr>
         <p:blipFill>
-          <a:blip r:embed="rId1"/>
+          <a:blip r:embed="rId3"/>
           <a:stretch>
             <a:fillRect/>
           </a:stretch>
         </p:blipFill>
         <p:spPr>
           <a:xfrm>
-            <a:off x="3233318" y="1724558"/>
-            <a:ext cx="665683" cy="665683"/>
+            <a:off x="548640" y="914400"/>
+            <a:ext cx="6217920" cy="3497580"/>
           </a:xfrm>
           <a:prstGeom prst="rect">
             <a:avLst/>
@@ -3113,45 +3098,14 @@
       </p:pic>
       <p:sp>
         <p:nvSpPr>
-          <p:cNvPr id="6" name="Shape 3">
-            <a:hlinkClick r:id="rId2" tooltip="Watch the demo"/>
-          </p:cNvPr>
-          <p:cNvSpPr/>
-          <p:nvPr/>
-        </p:nvSpPr>
-        <p:spPr>
-          <a:xfrm>
-            <a:off x="548640" y="914400"/>
-            <a:ext cx="6035040" cy="4206240"/>
-          </a:xfrm>
-          <a:prstGeom prst="rect">
-            <a:avLst/>
-          </a:prstGeom>
-          <a:solidFill>
-            <a:srgbClr val="0F172A">
-              <a:alpha val="0"/>
-            </a:srgbClr>
-          </a:solidFill>
-          <a:ln w="12700">
-            <a:solidFill>
-              <a:srgbClr val="0F172A">
-                <a:alpha val="0"/>
-              </a:srgbClr>
-            </a:solidFill>
-            <a:prstDash val="solid"/>
-          </a:ln>
-        </p:spPr>
-      </p:sp>
-      <p:sp>
-        <p:nvSpPr>
-          <p:cNvPr id="7" name="Text 4"/>
-          <p:cNvSpPr txBox="1"/>
-          <p:nvPr/>
-        </p:nvSpPr>
-        <p:spPr>
-          <a:xfrm>
-            <a:off x="822960" y="2926080"/>
-            <a:ext cx="5486400" cy="685800"/>
+          <p:cNvPr id="5" name="Text 2"/>
+          <p:cNvSpPr txBox="1"/>
+          <p:nvPr/>
+        </p:nvSpPr>
+        <p:spPr>
+          <a:xfrm>
+            <a:off x="548640" y="4617720"/>
+            <a:ext cx="6217920" cy="365760"/>
           </a:xfrm>
           <a:prstGeom prst="rect">
             <a:avLst/>
@@ -3167,7 +3121,7 @@
               <a:buNone/>
             </a:pPr>
             <a:r>
-              <a:rPr lang="en-US" sz="1500" b="1" dirty="0">
+              <a:rPr lang="en-US" sz="1400" b="1" dirty="0">
                 <a:solidFill>
                   <a:srgbClr val="F8FAFC"/>
                 </a:solidFill>
@@ -3175,22 +3129,22 @@
                 <a:ea typeface="Calibri" pitchFamily="34" charset="-122"/>
                 <a:cs typeface="Calibri" pitchFamily="34" charset="-120"/>
               </a:rPr>
-              <a:t>Meet Sipho and Thabo: 81 seconds, on a real phone, against our real system</a:t>
-            </a:r>
-            <a:endParaRPr lang="en-US" sz="1500" dirty="0"/>
-          </a:p>
-        </p:txBody>
-      </p:sp>
-      <p:sp>
-        <p:nvSpPr>
-          <p:cNvPr id="8" name="Text 5"/>
-          <p:cNvSpPr txBox="1"/>
-          <p:nvPr/>
-        </p:nvSpPr>
-        <p:spPr>
-          <a:xfrm>
-            <a:off x="822960" y="3657600"/>
-            <a:ext cx="5486400" cy="365760"/>
+              <a:t>Meet Sipho and Thabo, on a real phone</a:t>
+            </a:r>
+            <a:endParaRPr lang="en-US" sz="1400" dirty="0"/>
+          </a:p>
+        </p:txBody>
+      </p:sp>
+      <p:sp>
+        <p:nvSpPr>
+          <p:cNvPr id="6" name="Text 3"/>
+          <p:cNvSpPr txBox="1"/>
+          <p:nvPr/>
+        </p:nvSpPr>
+        <p:spPr>
+          <a:xfrm>
+            <a:off x="548640" y="5029200"/>
+            <a:ext cx="6217920" cy="320040"/>
           </a:xfrm>
           <a:prstGeom prst="rect">
             <a:avLst/>
@@ -3206,14 +3160,14 @@
               <a:buNone/>
             </a:pPr>
             <a:r>
-              <a:rPr lang="en-US" sz="1600" b="1" u="sng" dirty="0">
+              <a:rPr lang="en-US" sz="1300" b="1" u="sng" dirty="0">
                 <a:solidFill>
                   <a:srgbClr val="FBBF24"/>
                 </a:solidFill>
                 <a:latin typeface="Calibri" pitchFamily="34" charset="0"/>
                 <a:ea typeface="Calibri" pitchFamily="34" charset="-122"/>
                 <a:cs typeface="Calibri" pitchFamily="34" charset="-120"/>
-                <a:hlinkClick r:id="rId3" invalidUrl="" action="" tgtFrame="" tooltip="Watch the demo" history="1" highlightClick="0" endSnd="0">
+                <a:hlinkClick r:id="rId4" invalidUrl="" action="" tgtFrame="" tooltip="Watch the full demo" history="1" highlightClick="0" endSnd="0">
                   <a:extLst>
                     <a:ext uri="{A12FA001-AC4F-418D-AE19-62706E023703}">
                       <ahyp:hlinkClr xmlns:ahyp="http://schemas.microsoft.com/office/drawing/2018/hyperlinkcolor" val="tx"/>
@@ -3221,22 +3175,22 @@
                   </a:extLst>
                 </a:hlinkClick>
               </a:rPr>
-              <a:t>Watch the demo</a:t>
-            </a:r>
-            <a:endParaRPr lang="en-US" sz="1600" dirty="0"/>
-          </a:p>
-        </p:txBody>
-      </p:sp>
-      <p:sp>
-        <p:nvSpPr>
-          <p:cNvPr id="9" name="Text 6"/>
-          <p:cNvSpPr txBox="1"/>
-          <p:nvPr/>
-        </p:nvSpPr>
-        <p:spPr>
-          <a:xfrm>
-            <a:off x="822960" y="4160520"/>
-            <a:ext cx="5486400" cy="731520"/>
+              <a:t>Full video with music (81 s): watch on Drive</a:t>
+            </a:r>
+            <a:endParaRPr lang="en-US" sz="1300" dirty="0"/>
+          </a:p>
+        </p:txBody>
+      </p:sp>
+      <p:sp>
+        <p:nvSpPr>
+          <p:cNvPr id="7" name="Text 4"/>
+          <p:cNvSpPr txBox="1"/>
+          <p:nvPr/>
+        </p:nvSpPr>
+        <p:spPr>
+          <a:xfrm>
+            <a:off x="548640" y="5394960"/>
+            <a:ext cx="6217920" cy="274320"/>
           </a:xfrm>
           <a:prstGeom prst="rect">
             <a:avLst/>
@@ -3252,53 +3206,14 @@
               <a:buNone/>
             </a:pPr>
             <a:r>
-              <a:rPr lang="en-US" sz="1200" dirty="0">
-                <a:solidFill>
-                  <a:srgbClr val="A3B3C9"/>
+              <a:rPr lang="en-US" sz="900" u="sng" dirty="0">
+                <a:solidFill>
+                  <a:srgbClr val="64748B"/>
                 </a:solidFill>
                 <a:latin typeface="Calibri" pitchFamily="34" charset="0"/>
                 <a:ea typeface="Calibri" pitchFamily="34" charset="-122"/>
                 <a:cs typeface="Calibri" pitchFamily="34" charset="-120"/>
-              </a:rPr>
-              <a:t>A kota shop orders from suppliers who deliver, pays in the app, confirmed by the provider  ·  a builder's job in stages</a:t>
-            </a:r>
-            <a:endParaRPr lang="en-US" sz="1200" dirty="0"/>
-          </a:p>
-        </p:txBody>
-      </p:sp>
-      <p:sp>
-        <p:nvSpPr>
-          <p:cNvPr id="10" name="Text 7"/>
-          <p:cNvSpPr txBox="1"/>
-          <p:nvPr/>
-        </p:nvSpPr>
-        <p:spPr>
-          <a:xfrm>
-            <a:off x="548640" y="5257800"/>
-            <a:ext cx="6035040" cy="274320"/>
-          </a:xfrm>
-          <a:prstGeom prst="rect">
-            <a:avLst/>
-          </a:prstGeom>
-          <a:noFill/>
-          <a:ln/>
-        </p:spPr>
-        <p:txBody>
-          <a:bodyPr wrap="square" lIns="0" tIns="0" rIns="0" bIns="0" rtlCol="0" anchor="t"/>
-          <a:lstStyle/>
-          <a:p>
-            <a:pPr algn="ctr" indent="0" marL="0">
-              <a:buNone/>
-            </a:pPr>
-            <a:r>
-              <a:rPr lang="en-US" sz="900" u="sng" dirty="0">
-                <a:solidFill>
-                  <a:srgbClr val="64748B"/>
-                </a:solidFill>
-                <a:latin typeface="Calibri" pitchFamily="34" charset="0"/>
-                <a:ea typeface="Calibri" pitchFamily="34" charset="-122"/>
-                <a:cs typeface="Calibri" pitchFamily="34" charset="-120"/>
-                <a:hlinkClick r:id="rId4" invalidUrl="" action="" tgtFrame="" tooltip="" history="1" highlightClick="0" endSnd="0">
+                <a:hlinkClick r:id="rId5" invalidUrl="" action="" tgtFrame="" tooltip="" history="1" highlightClick="0" endSnd="0">
                   <a:extLst>
                     <a:ext uri="{A12FA001-AC4F-418D-AE19-62706E023703}">
                       <ahyp:hlinkClr xmlns:ahyp="http://schemas.microsoft.com/office/drawing/2018/hyperlinkcolor" val="tx"/>
@@ -3314,226 +3229,7 @@
       </p:sp>
       <p:pic>
         <p:nvPicPr>
-          <p:cNvPr id="11" name="Image 1" descr="preencoded.png">    </p:cNvPr>
-          <p:cNvPicPr>
-            <a:picLocks noChangeAspect="1"/>
-          </p:cNvPicPr>
-          <p:nvPr/>
-        </p:nvPicPr>
-        <p:blipFill>
-          <a:blip r:embed="rId5"/>
-          <a:stretch>
-            <a:fillRect/>
-          </a:stretch>
-        </p:blipFill>
-        <p:spPr>
-          <a:xfrm>
-            <a:off x="7086600" y="914400"/>
-            <a:ext cx="1005840" cy="1005840"/>
-          </a:xfrm>
-          <a:prstGeom prst="rect">
-            <a:avLst/>
-          </a:prstGeom>
-        </p:spPr>
-      </p:pic>
-      <p:sp>
-        <p:nvSpPr>
-          <p:cNvPr id="12" name="Text 8"/>
-          <p:cNvSpPr txBox="1"/>
-          <p:nvPr/>
-        </p:nvSpPr>
-        <p:spPr>
-          <a:xfrm>
-            <a:off x="7040880" y="2103120"/>
-            <a:ext cx="4754880" cy="914400"/>
-          </a:xfrm>
-          <a:prstGeom prst="rect">
-            <a:avLst/>
-          </a:prstGeom>
-          <a:noFill/>
-          <a:ln/>
-        </p:spPr>
-        <p:txBody>
-          <a:bodyPr wrap="square" lIns="0" tIns="0" rIns="0" bIns="0" rtlCol="0" anchor="t"/>
-          <a:lstStyle/>
-          <a:p>
-            <a:pPr indent="0" marL="0">
-              <a:buNone/>
-            </a:pPr>
-            <a:r>
-              <a:rPr lang="en-US" sz="5000" b="1" dirty="0">
-                <a:solidFill>
-                  <a:srgbClr val="F8FAFC"/>
-                </a:solidFill>
-                <a:latin typeface="Georgia" pitchFamily="34" charset="0"/>
-                <a:ea typeface="Georgia" pitchFamily="34" charset="-122"/>
-                <a:cs typeface="Georgia" pitchFamily="34" charset="-120"/>
-              </a:rPr>
-              <a:t>Thank you</a:t>
-            </a:r>
-            <a:endParaRPr lang="en-US" sz="5000" dirty="0"/>
-          </a:p>
-        </p:txBody>
-      </p:sp>
-      <p:sp>
-        <p:nvSpPr>
-          <p:cNvPr id="13" name="Text 9"/>
-          <p:cNvSpPr txBox="1"/>
-          <p:nvPr/>
-        </p:nvSpPr>
-        <p:spPr>
-          <a:xfrm>
-            <a:off x="7086600" y="3063240"/>
-            <a:ext cx="4754880" cy="548640"/>
-          </a:xfrm>
-          <a:prstGeom prst="rect">
-            <a:avLst/>
-          </a:prstGeom>
-          <a:noFill/>
-          <a:ln/>
-        </p:spPr>
-        <p:txBody>
-          <a:bodyPr wrap="square" lIns="0" tIns="0" rIns="0" bIns="0" rtlCol="0" anchor="t"/>
-          <a:lstStyle/>
-          <a:p>
-            <a:pPr indent="0" marL="0">
-              <a:buNone/>
-            </a:pPr>
-            <a:r>
-              <a:rPr lang="en-US" sz="2400" i="1" dirty="0">
-                <a:solidFill>
-                  <a:srgbClr val="FBBF24"/>
-                </a:solidFill>
-                <a:latin typeface="Georgia" pitchFamily="34" charset="0"/>
-                <a:ea typeface="Georgia" pitchFamily="34" charset="-122"/>
-                <a:cs typeface="Georgia" pitchFamily="34" charset="-120"/>
-              </a:rPr>
-              <a:t>Keep it in the kasi.</a:t>
-            </a:r>
-            <a:endParaRPr lang="en-US" sz="2400" dirty="0"/>
-          </a:p>
-        </p:txBody>
-      </p:sp>
-      <p:sp>
-        <p:nvSpPr>
-          <p:cNvPr id="14" name="Text 10"/>
-          <p:cNvSpPr txBox="1"/>
-          <p:nvPr/>
-        </p:nvSpPr>
-        <p:spPr>
-          <a:xfrm>
-            <a:off x="7086600" y="3840480"/>
-            <a:ext cx="4754880" cy="411480"/>
-          </a:xfrm>
-          <a:prstGeom prst="rect">
-            <a:avLst/>
-          </a:prstGeom>
-          <a:noFill/>
-          <a:ln/>
-        </p:spPr>
-        <p:txBody>
-          <a:bodyPr wrap="square" lIns="0" tIns="0" rIns="0" bIns="0" rtlCol="0" anchor="t"/>
-          <a:lstStyle/>
-          <a:p>
-            <a:pPr indent="0" marL="0">
-              <a:buNone/>
-            </a:pPr>
-            <a:r>
-              <a:rPr lang="en-US" sz="1800" b="1" dirty="0">
-                <a:solidFill>
-                  <a:srgbClr val="34D399"/>
-                </a:solidFill>
-                <a:latin typeface="Calibri" pitchFamily="34" charset="0"/>
-                <a:ea typeface="Calibri" pitchFamily="34" charset="-122"/>
-                <a:cs typeface="Calibri" pitchFamily="34" charset="-120"/>
-              </a:rPr>
-              <a:t>R300,000  ·  6-month pilot</a:t>
-            </a:r>
-            <a:endParaRPr lang="en-US" sz="1800" dirty="0"/>
-          </a:p>
-        </p:txBody>
-      </p:sp>
-      <p:sp>
-        <p:nvSpPr>
-          <p:cNvPr id="15" name="Text 11"/>
-          <p:cNvSpPr txBox="1"/>
-          <p:nvPr/>
-        </p:nvSpPr>
-        <p:spPr>
-          <a:xfrm>
-            <a:off x="7086600" y="4297680"/>
-            <a:ext cx="4754880" cy="411480"/>
-          </a:xfrm>
-          <a:prstGeom prst="rect">
-            <a:avLst/>
-          </a:prstGeom>
-          <a:noFill/>
-          <a:ln/>
-        </p:spPr>
-        <p:txBody>
-          <a:bodyPr wrap="square" lIns="0" tIns="0" rIns="0" bIns="0" rtlCol="0" anchor="t"/>
-          <a:lstStyle/>
-          <a:p>
-            <a:pPr indent="0" marL="0">
-              <a:buNone/>
-            </a:pPr>
-            <a:r>
-              <a:rPr lang="en-US" sz="1500" dirty="0">
-                <a:solidFill>
-                  <a:srgbClr val="A3B3C9"/>
-                </a:solidFill>
-                <a:latin typeface="Calibri" pitchFamily="34" charset="0"/>
-                <a:ea typeface="Calibri" pitchFamily="34" charset="-122"/>
-                <a:cs typeface="Calibri" pitchFamily="34" charset="-120"/>
-              </a:rPr>
-              <a:t>Making informal and small businesses visible, and ready for tomorrow.</a:t>
-            </a:r>
-            <a:endParaRPr lang="en-US" sz="1500" dirty="0"/>
-          </a:p>
-        </p:txBody>
-      </p:sp>
-      <p:sp>
-        <p:nvSpPr>
-          <p:cNvPr id="16" name="Text 12"/>
-          <p:cNvSpPr txBox="1"/>
-          <p:nvPr/>
-        </p:nvSpPr>
-        <p:spPr>
-          <a:xfrm>
-            <a:off x="7086600" y="5394960"/>
-            <a:ext cx="4754880" cy="365760"/>
-          </a:xfrm>
-          <a:prstGeom prst="rect">
-            <a:avLst/>
-          </a:prstGeom>
-          <a:noFill/>
-          <a:ln/>
-        </p:spPr>
-        <p:txBody>
-          <a:bodyPr wrap="square" lIns="0" tIns="0" rIns="0" bIns="0" rtlCol="0" anchor="t"/>
-          <a:lstStyle/>
-          <a:p>
-            <a:pPr indent="0" marL="0">
-              <a:buNone/>
-            </a:pPr>
-            <a:r>
-              <a:rPr lang="en-US" sz="1400" dirty="0">
-                <a:solidFill>
-                  <a:srgbClr val="F8FAFC"/>
-                </a:solidFill>
-                <a:latin typeface="Calibri" pitchFamily="34" charset="0"/>
-                <a:ea typeface="Calibri" pitchFamily="34" charset="-122"/>
-                <a:cs typeface="Calibri" pitchFamily="34" charset="-120"/>
-              </a:rPr>
-              <a:t>Prepared by Team PR</a:t>
-            </a:r>
-            <a:endParaRPr lang="en-US" sz="1400" dirty="0"/>
-          </a:p>
-        </p:txBody>
-      </p:sp>
-      <p:pic>
-        <p:nvPicPr>
-          <p:cNvPr id="17" name="Image 2" descr="preencoded.png">    </p:cNvPr>
+          <p:cNvPr id="8" name="Image 0" descr="preencoded.png">    </p:cNvPr>
           <p:cNvPicPr>
             <a:picLocks noChangeAspect="1"/>
           </p:cNvPicPr>
@@ -3547,6 +3243,225 @@
         </p:blipFill>
         <p:spPr>
           <a:xfrm>
+            <a:off x="7086600" y="914400"/>
+            <a:ext cx="1005840" cy="1005840"/>
+          </a:xfrm>
+          <a:prstGeom prst="rect">
+            <a:avLst/>
+          </a:prstGeom>
+        </p:spPr>
+      </p:pic>
+      <p:sp>
+        <p:nvSpPr>
+          <p:cNvPr id="9" name="Text 5"/>
+          <p:cNvSpPr txBox="1"/>
+          <p:nvPr/>
+        </p:nvSpPr>
+        <p:spPr>
+          <a:xfrm>
+            <a:off x="7040880" y="2103120"/>
+            <a:ext cx="4754880" cy="914400"/>
+          </a:xfrm>
+          <a:prstGeom prst="rect">
+            <a:avLst/>
+          </a:prstGeom>
+          <a:noFill/>
+          <a:ln/>
+        </p:spPr>
+        <p:txBody>
+          <a:bodyPr wrap="square" lIns="0" tIns="0" rIns="0" bIns="0" rtlCol="0" anchor="t"/>
+          <a:lstStyle/>
+          <a:p>
+            <a:pPr indent="0" marL="0">
+              <a:buNone/>
+            </a:pPr>
+            <a:r>
+              <a:rPr lang="en-US" sz="5000" b="1" dirty="0">
+                <a:solidFill>
+                  <a:srgbClr val="F8FAFC"/>
+                </a:solidFill>
+                <a:latin typeface="Georgia" pitchFamily="34" charset="0"/>
+                <a:ea typeface="Georgia" pitchFamily="34" charset="-122"/>
+                <a:cs typeface="Georgia" pitchFamily="34" charset="-120"/>
+              </a:rPr>
+              <a:t>Thank you</a:t>
+            </a:r>
+            <a:endParaRPr lang="en-US" sz="5000" dirty="0"/>
+          </a:p>
+        </p:txBody>
+      </p:sp>
+      <p:sp>
+        <p:nvSpPr>
+          <p:cNvPr id="10" name="Text 6"/>
+          <p:cNvSpPr txBox="1"/>
+          <p:nvPr/>
+        </p:nvSpPr>
+        <p:spPr>
+          <a:xfrm>
+            <a:off x="7086600" y="3063240"/>
+            <a:ext cx="4754880" cy="548640"/>
+          </a:xfrm>
+          <a:prstGeom prst="rect">
+            <a:avLst/>
+          </a:prstGeom>
+          <a:noFill/>
+          <a:ln/>
+        </p:spPr>
+        <p:txBody>
+          <a:bodyPr wrap="square" lIns="0" tIns="0" rIns="0" bIns="0" rtlCol="0" anchor="t"/>
+          <a:lstStyle/>
+          <a:p>
+            <a:pPr indent="0" marL="0">
+              <a:buNone/>
+            </a:pPr>
+            <a:r>
+              <a:rPr lang="en-US" sz="2400" i="1" dirty="0">
+                <a:solidFill>
+                  <a:srgbClr val="FBBF24"/>
+                </a:solidFill>
+                <a:latin typeface="Georgia" pitchFamily="34" charset="0"/>
+                <a:ea typeface="Georgia" pitchFamily="34" charset="-122"/>
+                <a:cs typeface="Georgia" pitchFamily="34" charset="-120"/>
+              </a:rPr>
+              <a:t>Keep it in the kasi.</a:t>
+            </a:r>
+            <a:endParaRPr lang="en-US" sz="2400" dirty="0"/>
+          </a:p>
+        </p:txBody>
+      </p:sp>
+      <p:sp>
+        <p:nvSpPr>
+          <p:cNvPr id="11" name="Text 7"/>
+          <p:cNvSpPr txBox="1"/>
+          <p:nvPr/>
+        </p:nvSpPr>
+        <p:spPr>
+          <a:xfrm>
+            <a:off x="7086600" y="3840480"/>
+            <a:ext cx="4754880" cy="411480"/>
+          </a:xfrm>
+          <a:prstGeom prst="rect">
+            <a:avLst/>
+          </a:prstGeom>
+          <a:noFill/>
+          <a:ln/>
+        </p:spPr>
+        <p:txBody>
+          <a:bodyPr wrap="square" lIns="0" tIns="0" rIns="0" bIns="0" rtlCol="0" anchor="t"/>
+          <a:lstStyle/>
+          <a:p>
+            <a:pPr indent="0" marL="0">
+              <a:buNone/>
+            </a:pPr>
+            <a:r>
+              <a:rPr lang="en-US" sz="1800" b="1" dirty="0">
+                <a:solidFill>
+                  <a:srgbClr val="34D399"/>
+                </a:solidFill>
+                <a:latin typeface="Calibri" pitchFamily="34" charset="0"/>
+                <a:ea typeface="Calibri" pitchFamily="34" charset="-122"/>
+                <a:cs typeface="Calibri" pitchFamily="34" charset="-120"/>
+              </a:rPr>
+              <a:t>R300,000  ·  6-month pilot</a:t>
+            </a:r>
+            <a:endParaRPr lang="en-US" sz="1800" dirty="0"/>
+          </a:p>
+        </p:txBody>
+      </p:sp>
+      <p:sp>
+        <p:nvSpPr>
+          <p:cNvPr id="12" name="Text 8"/>
+          <p:cNvSpPr txBox="1"/>
+          <p:nvPr/>
+        </p:nvSpPr>
+        <p:spPr>
+          <a:xfrm>
+            <a:off x="7086600" y="4297680"/>
+            <a:ext cx="4754880" cy="411480"/>
+          </a:xfrm>
+          <a:prstGeom prst="rect">
+            <a:avLst/>
+          </a:prstGeom>
+          <a:noFill/>
+          <a:ln/>
+        </p:spPr>
+        <p:txBody>
+          <a:bodyPr wrap="square" lIns="0" tIns="0" rIns="0" bIns="0" rtlCol="0" anchor="t"/>
+          <a:lstStyle/>
+          <a:p>
+            <a:pPr indent="0" marL="0">
+              <a:buNone/>
+            </a:pPr>
+            <a:r>
+              <a:rPr lang="en-US" sz="1500" dirty="0">
+                <a:solidFill>
+                  <a:srgbClr val="A3B3C9"/>
+                </a:solidFill>
+                <a:latin typeface="Calibri" pitchFamily="34" charset="0"/>
+                <a:ea typeface="Calibri" pitchFamily="34" charset="-122"/>
+                <a:cs typeface="Calibri" pitchFamily="34" charset="-120"/>
+              </a:rPr>
+              <a:t>Making informal and small businesses visible, and ready for tomorrow.</a:t>
+            </a:r>
+            <a:endParaRPr lang="en-US" sz="1500" dirty="0"/>
+          </a:p>
+        </p:txBody>
+      </p:sp>
+      <p:sp>
+        <p:nvSpPr>
+          <p:cNvPr id="13" name="Text 9"/>
+          <p:cNvSpPr txBox="1"/>
+          <p:nvPr/>
+        </p:nvSpPr>
+        <p:spPr>
+          <a:xfrm>
+            <a:off x="7086600" y="5394960"/>
+            <a:ext cx="4754880" cy="365760"/>
+          </a:xfrm>
+          <a:prstGeom prst="rect">
+            <a:avLst/>
+          </a:prstGeom>
+          <a:noFill/>
+          <a:ln/>
+        </p:spPr>
+        <p:txBody>
+          <a:bodyPr wrap="square" lIns="0" tIns="0" rIns="0" bIns="0" rtlCol="0" anchor="t"/>
+          <a:lstStyle/>
+          <a:p>
+            <a:pPr indent="0" marL="0">
+              <a:buNone/>
+            </a:pPr>
+            <a:r>
+              <a:rPr lang="en-US" sz="1400" dirty="0">
+                <a:solidFill>
+                  <a:srgbClr val="F8FAFC"/>
+                </a:solidFill>
+                <a:latin typeface="Calibri" pitchFamily="34" charset="0"/>
+                <a:ea typeface="Calibri" pitchFamily="34" charset="-122"/>
+                <a:cs typeface="Calibri" pitchFamily="34" charset="-120"/>
+              </a:rPr>
+              <a:t>Prepared by Team PR</a:t>
+            </a:r>
+            <a:endParaRPr lang="en-US" sz="1400" dirty="0"/>
+          </a:p>
+        </p:txBody>
+      </p:sp>
+      <p:pic>
+        <p:nvPicPr>
+          <p:cNvPr id="14" name="Image 1" descr="preencoded.png">    </p:cNvPr>
+          <p:cNvPicPr>
+            <a:picLocks noChangeAspect="1"/>
+          </p:cNvPicPr>
+          <p:nvPr/>
+        </p:nvPicPr>
+        <p:blipFill>
+          <a:blip r:embed="rId7"/>
+          <a:stretch>
+            <a:fillRect/>
+          </a:stretch>
+        </p:blipFill>
+        <p:spPr>
+          <a:xfrm>
             <a:off x="11231575" y="6291072"/>
             <a:ext cx="384048" cy="384048"/>
           </a:xfrm>
@@ -3557,7 +3472,7 @@
       </p:pic>
       <p:sp>
         <p:nvSpPr>
-          <p:cNvPr id="18" name="Text 13"/>
+          <p:cNvPr id="15" name="Text 10"/>
           <p:cNvSpPr txBox="1"/>
           <p:nvPr/>
         </p:nvSpPr>
